--- a/materials/slides/session-5.pptx
+++ b/materials/slides/session-5.pptx
@@ -23,6 +23,7 @@
     <p:sldId id="271" r:id="rId22"/>
     <p:sldId id="272" r:id="rId23"/>
     <p:sldId id="273" r:id="rId24"/>
+    <p:sldId id="274" r:id="rId25"/>
   </p:sldIdLst>
   <p:sldSz cx="12191999" cy="6858000" type="screen4x3"/>
   <p:notesSz cx="6858000" cy="9144000"/>
@@ -3196,7 +3197,7 @@
               </a:defRPr>
             </a:pPr>
             <a:r>
-              <a:t>SOURCE 1 / 16</a:t>
+              <a:t>SOURCE 1 / 17</a:t>
             </a:r>
           </a:p>
         </p:txBody>
@@ -3673,14 +3674,14 @@
               </a:defRPr>
             </a:pPr>
             <a:r>
-              <a:t>SOURCE 9 / 16</a:t>
-            </a:r>
-          </a:p>
-        </p:txBody>
-      </p:sp>
-      <p:sp>
-        <p:nvSpPr>
-          <p:cNvPr id="4" name="title:line-79"/>
+              <a:t>SOURCE 9 / 17  ·  CONTINUED 2</a:t>
+            </a:r>
+          </a:p>
+        </p:txBody>
+      </p:sp>
+      <p:sp>
+        <p:nvSpPr>
+          <p:cNvPr id="4" name="title:line-76"/>
           <p:cNvSpPr txBox="1"/>
           <p:nvPr/>
         </p:nvSpPr>
@@ -3724,7 +3725,7 @@
                 </a:solidFill>
                 <a:latin typeface="Arial"/>
               </a:rPr>
-              <a:t>Show validation and its test</a:t>
+              <a:t>Show real startup and CSV results</a:t>
             </a:r>
           </a:p>
         </p:txBody>
@@ -3776,14 +3777,14 @@
       </p:sp>
       <p:sp>
         <p:nvSpPr>
-          <p:cNvPr id="6" name="content:line-81:0"/>
+          <p:cNvPr id="6" name="content:line-81:2"/>
           <p:cNvSpPr txBox="1"/>
           <p:nvPr/>
         </p:nvSpPr>
         <p:spPr>
           <a:xfrm>
             <a:off x="594360" y="1737360"/>
-            <a:ext cx="11003279" cy="780288"/>
+            <a:ext cx="11003279" cy="428244"/>
           </a:xfrm>
           <a:prstGeom prst="rect">
             <a:avLst/>
@@ -3812,232 +3813,16 @@
                 </a:solidFill>
                 <a:latin typeface="Arial"/>
               </a:defRPr>
-              <a:buChar char="•"/>
-            </a:pPr>
-            <a:r>
-              <a:rPr sz="2100" b="0" i="0">
-                <a:solidFill>
-                  <a:srgbClr val="20344A"/>
-                </a:solidFill>
-                <a:latin typeface="Arial"/>
-              </a:rPr>
-              <a:t>Demonstrate one invalid input rejected clearly; it must not </a:t>
-            </a:r>
-            <a:br/>
-            <a:r>
-              <a:rPr sz="2100" b="0" i="0">
-                <a:solidFill>
-                  <a:srgbClr val="20344A"/>
-                </a:solidFill>
-                <a:latin typeface="Arial"/>
-              </a:rPr>
-              <a:t>appear as a successful result.</a:t>
-            </a:r>
-          </a:p>
-        </p:txBody>
-      </p:sp>
-      <p:sp>
-        <p:nvSpPr>
-          <p:cNvPr id="7" name="content:line-82:0"/>
-          <p:cNvSpPr txBox="1"/>
-          <p:nvPr/>
-        </p:nvSpPr>
-        <p:spPr>
-          <a:xfrm>
-            <a:off x="594360" y="2581656"/>
-            <a:ext cx="11003279" cy="780288"/>
-          </a:xfrm>
-          <a:prstGeom prst="rect">
-            <a:avLst/>
-          </a:prstGeom>
-          <a:noFill/>
-        </p:spPr>
-        <p:txBody>
-          <a:bodyPr wrap="none" anchor="t" lIns="88900" rIns="88900" tIns="38100" bIns="38100">
-            <a:noAutofit/>
-          </a:bodyPr>
-          <a:lstStyle/>
-          <a:p>
-            <a:pPr marL="279400" indent="-215900">
-              <a:lnSpc>
-                <a:spcPts val="2772"/>
-              </a:lnSpc>
-              <a:spcBef>
-                <a:spcPts val="0"/>
-              </a:spcBef>
-              <a:spcAft>
-                <a:spcPts val="0"/>
-              </a:spcAft>
-              <a:defRPr sz="2100">
-                <a:solidFill>
-                  <a:srgbClr val="20344A"/>
-                </a:solidFill>
-                <a:latin typeface="Arial"/>
-              </a:defRPr>
-              <a:buChar char="•"/>
-            </a:pPr>
-            <a:r>
-              <a:rPr sz="2100" b="0" i="0">
-                <a:solidFill>
-                  <a:srgbClr val="20344A"/>
-                </a:solidFill>
-                <a:latin typeface="Arial"/>
-              </a:rPr>
-              <a:t>Explain the rule: expected types, allowed bounds, or </a:t>
-            </a:r>
-            <a:br/>
-            <a:r>
-              <a:rPr sz="2100" b="0" i="0">
-                <a:solidFill>
-                  <a:srgbClr val="20344A"/>
-                </a:solidFill>
-                <a:latin typeface="Arial"/>
-              </a:rPr>
-              <a:t>missing-value handling. Missing does not mean zero.</a:t>
-            </a:r>
-          </a:p>
-        </p:txBody>
-      </p:sp>
-      <p:sp>
-        <p:nvSpPr>
-          <p:cNvPr id="8" name="content:line-83:0"/>
-          <p:cNvSpPr txBox="1"/>
-          <p:nvPr/>
-        </p:nvSpPr>
-        <p:spPr>
-          <a:xfrm>
-            <a:off x="594360" y="3425952"/>
-            <a:ext cx="11003279" cy="780288"/>
-          </a:xfrm>
-          <a:prstGeom prst="rect">
-            <a:avLst/>
-          </a:prstGeom>
-          <a:noFill/>
-        </p:spPr>
-        <p:txBody>
-          <a:bodyPr wrap="none" anchor="t" lIns="88900" rIns="88900" tIns="38100" bIns="38100">
-            <a:noAutofit/>
-          </a:bodyPr>
-          <a:lstStyle/>
-          <a:p>
-            <a:pPr marL="279400" indent="-215900">
-              <a:lnSpc>
-                <a:spcPts val="2772"/>
-              </a:lnSpc>
-              <a:spcBef>
-                <a:spcPts val="0"/>
-              </a:spcBef>
-              <a:spcAft>
-                <a:spcPts val="0"/>
-              </a:spcAft>
-              <a:defRPr sz="2100">
-                <a:solidFill>
-                  <a:srgbClr val="20344A"/>
-                </a:solidFill>
-                <a:latin typeface="Arial"/>
-              </a:defRPr>
-              <a:buChar char="•"/>
-            </a:pPr>
-            <a:r>
-              <a:rPr sz="2100" b="0" i="0">
-                <a:solidFill>
-                  <a:srgbClr val="20344A"/>
-                </a:solidFill>
-                <a:latin typeface="Arial"/>
-              </a:rPr>
-              <a:t>In the supplied example, show the API error and open its </a:t>
-            </a:r>
-            <a:br/>
-            <a:r>
-              <a:rPr sz="2100" b="0" i="0">
-                <a:solidFill>
-                  <a:srgbClr val="20344A"/>
-                </a:solidFill>
-                <a:latin typeface="Arial"/>
-              </a:rPr>
-              <a:t>corresponding passing validation test.</a:t>
-            </a:r>
-          </a:p>
-        </p:txBody>
-      </p:sp>
-      <p:sp>
-        <p:nvSpPr>
-          <p:cNvPr id="9" name="content:line-84:0"/>
-          <p:cNvSpPr txBox="1"/>
-          <p:nvPr/>
-        </p:nvSpPr>
-        <p:spPr>
-          <a:xfrm>
-            <a:off x="594360" y="4270248"/>
-            <a:ext cx="11003279" cy="780288"/>
-          </a:xfrm>
-          <a:prstGeom prst="rect">
-            <a:avLst/>
-          </a:prstGeom>
-          <a:noFill/>
-        </p:spPr>
-        <p:txBody>
-          <a:bodyPr wrap="none" anchor="t" lIns="88900" rIns="88900" tIns="38100" bIns="38100">
-            <a:noAutofit/>
-          </a:bodyPr>
-          <a:lstStyle/>
-          <a:p>
-            <a:pPr marL="279400" indent="-215900">
-              <a:lnSpc>
-                <a:spcPts val="2772"/>
-              </a:lnSpc>
-              <a:spcBef>
-                <a:spcPts val="0"/>
-              </a:spcBef>
-              <a:spcAft>
-                <a:spcPts val="0"/>
-              </a:spcAft>
-              <a:defRPr sz="2100">
-                <a:solidFill>
-                  <a:srgbClr val="20344A"/>
-                </a:solidFill>
-                <a:latin typeface="Arial"/>
-              </a:defRPr>
-              <a:buChar char="•"/>
-            </a:pPr>
-            <a:r>
-              <a:rPr sz="2100" b="0" i="0">
-                <a:solidFill>
-                  <a:srgbClr val="20344A"/>
-                </a:solidFill>
-                <a:latin typeface="Arial"/>
-              </a:rPr>
-              <a:t>Instructor checks the observed rejection against the </a:t>
-            </a:r>
-            <a:r>
-              <a:rPr sz="2100" b="0" i="0">
-                <a:solidFill>
-                  <a:srgbClr val="007F82"/>
-                </a:solidFill>
-                <a:latin typeface="Arial"/>
-                <a:hlinkClick r:id="rId2"/>
-              </a:rPr>
-              <a:t>API </a:t>
-            </a:r>
-            <a:br/>
-            <a:r>
-              <a:rPr sz="2100" b="0" i="0">
-                <a:solidFill>
-                  <a:srgbClr val="007F82"/>
-                </a:solidFill>
-                <a:latin typeface="Arial"/>
-                <a:hlinkClick r:id="rId2"/>
-              </a:rPr>
-              <a:t>contract</a:t>
-            </a:r>
-            <a:r>
-              <a:rPr sz="2100" b="0" i="0">
-                <a:solidFill>
-                  <a:srgbClr val="20344A"/>
-                </a:solidFill>
-                <a:latin typeface="Arial"/>
-              </a:rPr>
-              <a:t> and the group's declared rule.</a:t>
+              <a:buChar char=" "/>
+            </a:pPr>
+            <a:r>
+              <a:rPr sz="2100" b="0" i="0">
+                <a:solidFill>
+                  <a:srgbClr val="20344A"/>
+                </a:solidFill>
+                <a:latin typeface="Arial"/>
+              </a:rPr>
+              <a:t>standalone servers using the same ports first.</a:t>
             </a:r>
           </a:p>
         </p:txBody>
@@ -4151,14 +3936,14 @@
               </a:defRPr>
             </a:pPr>
             <a:r>
-              <a:t>SOURCE 10 / 16</a:t>
-            </a:r>
-          </a:p>
-        </p:txBody>
-      </p:sp>
-      <p:sp>
-        <p:nvSpPr>
-          <p:cNvPr id="4" name="title:line-88"/>
+              <a:t>SOURCE 10 / 17</a:t>
+            </a:r>
+          </a:p>
+        </p:txBody>
+      </p:sp>
+      <p:sp>
+        <p:nvSpPr>
+          <p:cNvPr id="4" name="title:line-85"/>
           <p:cNvSpPr txBox="1"/>
           <p:nvPr/>
         </p:nvSpPr>
@@ -4202,7 +3987,7 @@
                 </a:solidFill>
                 <a:latin typeface="Arial"/>
               </a:rPr>
-              <a:t>Inspect local tests and hosted CI</a:t>
+              <a:t>Show validation and its test</a:t>
             </a:r>
           </a:p>
         </p:txBody>
@@ -4254,7 +4039,7 @@
       </p:sp>
       <p:sp>
         <p:nvSpPr>
-          <p:cNvPr id="6" name="content:line-90:0"/>
+          <p:cNvPr id="6" name="content:line-87:0"/>
           <p:cNvSpPr txBox="1"/>
           <p:nvPr/>
         </p:nvSpPr>
@@ -4299,16 +4084,7 @@
                 </a:solidFill>
                 <a:latin typeface="Arial"/>
               </a:rPr>
-              <a:t>In the active local environment, run </a:t>
-            </a:r>
-            <a:r>
-              <a:rPr sz="2100" b="0" i="0">
-                <a:solidFill>
-                  <a:srgbClr val="20344A"/>
-                </a:solidFill>
-                <a:latin typeface="Courier New"/>
-              </a:rPr>
-              <a:t>python -m pytest </a:t>
+              <a:t>Demonstrate one invalid input rejected clearly; it must not </a:t>
             </a:r>
             <a:br/>
             <a:r>
@@ -4316,32 +4092,23 @@
                 <a:solidFill>
                   <a:srgbClr val="20344A"/>
                 </a:solidFill>
-                <a:latin typeface="Courier New"/>
-              </a:rPr>
-              <a:t>backend/tests</a:t>
-            </a:r>
-            <a:r>
-              <a:rPr sz="2100" b="0" i="0">
-                <a:solidFill>
-                  <a:srgbClr val="20344A"/>
-                </a:solidFill>
-                <a:latin typeface="Arial"/>
-              </a:rPr>
-              <a:t>; show passing output.</a:t>
-            </a:r>
-          </a:p>
-        </p:txBody>
-      </p:sp>
-      <p:sp>
-        <p:nvSpPr>
-          <p:cNvPr id="7" name="content:line-91:0"/>
+                <a:latin typeface="Arial"/>
+              </a:rPr>
+              <a:t>appear as a successful result.</a:t>
+            </a:r>
+          </a:p>
+        </p:txBody>
+      </p:sp>
+      <p:sp>
+        <p:nvSpPr>
+          <p:cNvPr id="7" name="content:line-88:0"/>
           <p:cNvSpPr txBox="1"/>
           <p:nvPr/>
         </p:nvSpPr>
         <p:spPr>
           <a:xfrm>
             <a:off x="594360" y="2581656"/>
-            <a:ext cx="11003279" cy="1132332"/>
+            <a:ext cx="11003279" cy="780288"/>
           </a:xfrm>
           <a:prstGeom prst="rect">
             <a:avLst/>
@@ -4379,7 +4146,7 @@
                 </a:solidFill>
                 <a:latin typeface="Arial"/>
               </a:rPr>
-              <a:t>Open a successful GitHub Actions run for the demonstrated </a:t>
+              <a:t>Explain the rule: expected types, allowed bounds, or </a:t>
             </a:r>
             <a:br/>
             <a:r>
@@ -4389,7 +4156,59 @@
                 </a:solidFill>
                 <a:latin typeface="Arial"/>
               </a:rPr>
-              <a:t>commit. CI means automated checks on GitHub; a local pass </a:t>
+              <a:t>missing-value handling. Missing does not mean zero.</a:t>
+            </a:r>
+          </a:p>
+        </p:txBody>
+      </p:sp>
+      <p:sp>
+        <p:nvSpPr>
+          <p:cNvPr id="8" name="content:line-89:0"/>
+          <p:cNvSpPr txBox="1"/>
+          <p:nvPr/>
+        </p:nvSpPr>
+        <p:spPr>
+          <a:xfrm>
+            <a:off x="594360" y="3425952"/>
+            <a:ext cx="11003279" cy="780288"/>
+          </a:xfrm>
+          <a:prstGeom prst="rect">
+            <a:avLst/>
+          </a:prstGeom>
+          <a:noFill/>
+        </p:spPr>
+        <p:txBody>
+          <a:bodyPr wrap="none" anchor="t" lIns="88900" rIns="88900" tIns="38100" bIns="38100">
+            <a:noAutofit/>
+          </a:bodyPr>
+          <a:lstStyle/>
+          <a:p>
+            <a:pPr marL="279400" indent="-215900">
+              <a:lnSpc>
+                <a:spcPts val="2772"/>
+              </a:lnSpc>
+              <a:spcBef>
+                <a:spcPts val="0"/>
+              </a:spcBef>
+              <a:spcAft>
+                <a:spcPts val="0"/>
+              </a:spcAft>
+              <a:defRPr sz="2100">
+                <a:solidFill>
+                  <a:srgbClr val="20344A"/>
+                </a:solidFill>
+                <a:latin typeface="Arial"/>
+              </a:defRPr>
+              <a:buChar char="•"/>
+            </a:pPr>
+            <a:r>
+              <a:rPr sz="2100" b="0" i="0">
+                <a:solidFill>
+                  <a:srgbClr val="20344A"/>
+                </a:solidFill>
+                <a:latin typeface="Arial"/>
+              </a:rPr>
+              <a:t>In the supplied example, show the API error and open its </a:t>
             </a:r>
             <a:br/>
             <a:r>
@@ -4399,21 +4218,21 @@
                 </a:solidFill>
                 <a:latin typeface="Arial"/>
               </a:rPr>
-              <a:t>alone is insufficient.</a:t>
-            </a:r>
-          </a:p>
-        </p:txBody>
-      </p:sp>
-      <p:sp>
-        <p:nvSpPr>
-          <p:cNvPr id="8" name="content:line-92:0"/>
-          <p:cNvSpPr txBox="1"/>
-          <p:nvPr/>
-        </p:nvSpPr>
-        <p:spPr>
-          <a:xfrm>
-            <a:off x="594360" y="3777996"/>
-            <a:ext cx="11003279" cy="1132332"/>
+              <a:t>corresponding passing validation test.</a:t>
+            </a:r>
+          </a:p>
+        </p:txBody>
+      </p:sp>
+      <p:sp>
+        <p:nvSpPr>
+          <p:cNvPr id="9" name="content:line-90:0"/>
+          <p:cNvSpPr txBox="1"/>
+          <p:nvPr/>
+        </p:nvSpPr>
+        <p:spPr>
+          <a:xfrm>
+            <a:off x="594360" y="4270248"/>
+            <a:ext cx="11003279" cy="780288"/>
           </a:xfrm>
           <a:prstGeom prst="rect">
             <a:avLst/>
@@ -4451,137 +4270,37 @@
                 </a:solidFill>
                 <a:latin typeface="Arial"/>
               </a:rPr>
-              <a:t>Instructor opens tests at public processing, API, and </a:t>
+              <a:t>Instructor checks the observed rejection against the </a:t>
+            </a:r>
+            <a:r>
+              <a:rPr sz="2100" b="0" i="0">
+                <a:solidFill>
+                  <a:srgbClr val="007F82"/>
+                </a:solidFill>
+                <a:latin typeface="Arial"/>
+                <a:hlinkClick r:id="rId2"/>
+              </a:rPr>
+              <a:t>API </a:t>
             </a:r>
             <a:br/>
             <a:r>
               <a:rPr sz="2100" b="0" i="0">
                 <a:solidFill>
-                  <a:srgbClr val="20344A"/>
-                </a:solidFill>
-                <a:latin typeface="Arial"/>
-              </a:rPr>
-              <a:t>comparison boundaries: expected outputs, invalid inputs, and </a:t>
-            </a:r>
-            <a:br/>
-            <a:r>
-              <a:rPr sz="2100" b="0" i="0">
-                <a:solidFill>
-                  <a:srgbClr val="20344A"/>
-                </a:solidFill>
-                <a:latin typeface="Arial"/>
-              </a:rPr>
-              <a:t>agreement rules.</a:t>
-            </a:r>
-          </a:p>
-        </p:txBody>
-      </p:sp>
-      <p:sp>
-        <p:nvSpPr>
-          <p:cNvPr id="9" name="content:line-93:0"/>
-          <p:cNvSpPr txBox="1"/>
-          <p:nvPr/>
-        </p:nvSpPr>
-        <p:spPr>
-          <a:xfrm>
-            <a:off x="594360" y="4974336"/>
-            <a:ext cx="11003279" cy="1132332"/>
-          </a:xfrm>
-          <a:prstGeom prst="rect">
-            <a:avLst/>
-          </a:prstGeom>
-          <a:noFill/>
-        </p:spPr>
-        <p:txBody>
-          <a:bodyPr wrap="none" anchor="t" lIns="88900" rIns="88900" tIns="38100" bIns="38100">
-            <a:noAutofit/>
-          </a:bodyPr>
-          <a:lstStyle/>
-          <a:p>
-            <a:pPr marL="279400" indent="-215900">
-              <a:lnSpc>
-                <a:spcPts val="2772"/>
-              </a:lnSpc>
-              <a:spcBef>
-                <a:spcPts val="0"/>
-              </a:spcBef>
-              <a:spcAft>
-                <a:spcPts val="0"/>
-              </a:spcAft>
-              <a:defRPr sz="2100">
-                <a:solidFill>
-                  <a:srgbClr val="20344A"/>
-                </a:solidFill>
-                <a:latin typeface="Arial"/>
-              </a:defRPr>
-              <a:buChar char="•"/>
-            </a:pPr>
-            <a:r>
-              <a:rPr sz="2100" b="0" i="0">
-                <a:solidFill>
-                  <a:srgbClr val="20344A"/>
-                </a:solidFill>
-                <a:latin typeface="Arial"/>
-              </a:rPr>
-              <a:t>Tests check declared behavior, not scientific validity. A </a:t>
-            </a:r>
-            <a:br/>
-            <a:r>
-              <a:rPr sz="2100" b="0" i="0">
-                <a:solidFill>
-                  <a:srgbClr val="20344A"/>
-                </a:solidFill>
-                <a:latin typeface="Arial"/>
-              </a:rPr>
-              <a:t>workflow reporting success does not itself configure required </a:t>
-            </a:r>
-            <a:br/>
-            <a:r>
-              <a:rPr sz="2100" b="0" i="0">
-                <a:solidFill>
-                  <a:srgbClr val="20344A"/>
-                </a:solidFill>
-                <a:latin typeface="Arial"/>
-              </a:rPr>
-              <a:t>checks; see </a:t>
-            </a:r>
-            <a:r>
-              <a:rPr sz="2100" b="0" i="0">
-                <a:solidFill>
                   <a:srgbClr val="007F82"/>
                 </a:solidFill>
                 <a:latin typeface="Arial"/>
                 <a:hlinkClick r:id="rId2"/>
               </a:rPr>
-              <a:t>testing</a:t>
-            </a:r>
-            <a:r>
-              <a:rPr sz="2100" b="0" i="0">
-                <a:solidFill>
-                  <a:srgbClr val="20344A"/>
-                </a:solidFill>
-                <a:latin typeface="Arial"/>
-              </a:rPr>
-              <a:t> and </a:t>
-            </a:r>
-            <a:r>
-              <a:rPr sz="2100" b="0" i="0">
-                <a:solidFill>
-                  <a:srgbClr val="007F82"/>
-                </a:solidFill>
-                <a:latin typeface="Arial"/>
-                <a:hlinkClick r:id="rId3"/>
-              </a:rPr>
-              <a:t>CI</a:t>
-            </a:r>
-            <a:r>
-              <a:rPr sz="2100" b="0" i="0">
-                <a:solidFill>
-                  <a:srgbClr val="20344A"/>
-                </a:solidFill>
-                <a:latin typeface="Arial"/>
-              </a:rPr>
-              <a:t>.</a:t>
+              <a:t>contract</a:t>
+            </a:r>
+            <a:r>
+              <a:rPr sz="2100" b="0" i="0">
+                <a:solidFill>
+                  <a:srgbClr val="20344A"/>
+                </a:solidFill>
+                <a:latin typeface="Arial"/>
+              </a:rPr>
+              <a:t> and the group's declared rule.</a:t>
             </a:r>
           </a:p>
         </p:txBody>
@@ -4695,14 +4414,14 @@
               </a:defRPr>
             </a:pPr>
             <a:r>
-              <a:t>SOURCE 11 / 16</a:t>
-            </a:r>
-          </a:p>
-        </p:txBody>
-      </p:sp>
-      <p:sp>
-        <p:nvSpPr>
-          <p:cNvPr id="4" name="title:line-97"/>
+              <a:t>SOURCE 11 / 17</a:t>
+            </a:r>
+          </a:p>
+        </p:txBody>
+      </p:sp>
+      <p:sp>
+        <p:nvSpPr>
+          <p:cNvPr id="4" name="title:line-94"/>
           <p:cNvSpPr txBox="1"/>
           <p:nvPr/>
         </p:nvSpPr>
@@ -4746,7 +4465,7 @@
                 </a:solidFill>
                 <a:latin typeface="Arial"/>
               </a:rPr>
-              <a:t>Demonstrate the two practical Rs</a:t>
+              <a:t>Inspect local tests and hosted CI</a:t>
             </a:r>
           </a:p>
         </p:txBody>
@@ -4798,7 +4517,7 @@
       </p:sp>
       <p:sp>
         <p:nvSpPr>
-          <p:cNvPr id="6" name="content:line-99:0"/>
+          <p:cNvPr id="6" name="content:line-96:0"/>
           <p:cNvSpPr txBox="1"/>
           <p:nvPr/>
         </p:nvSpPr>
@@ -4843,7 +4562,16 @@
                 </a:solidFill>
                 <a:latin typeface="Arial"/>
               </a:rPr>
-              <a:t>Repeatability: agreement under the same conditions. Compare </a:t>
+              <a:t>In the active local environment, run </a:t>
+            </a:r>
+            <a:r>
+              <a:rPr sz="2100" b="0" i="0">
+                <a:solidFill>
+                  <a:srgbClr val="20344A"/>
+                </a:solidFill>
+                <a:latin typeface="Courier New"/>
+              </a:rPr>
+              <a:t>python -m pytest </a:t>
             </a:r>
             <a:br/>
             <a:r>
@@ -4851,23 +4579,32 @@
                 <a:solidFill>
                   <a:srgbClr val="20344A"/>
                 </a:solidFill>
-                <a:latin typeface="Arial"/>
-              </a:rPr>
-              <a:t>local run 1 with local run 2.</a:t>
-            </a:r>
-          </a:p>
-        </p:txBody>
-      </p:sp>
-      <p:sp>
-        <p:nvSpPr>
-          <p:cNvPr id="7" name="content:line-100:0"/>
+                <a:latin typeface="Courier New"/>
+              </a:rPr>
+              <a:t>backend/tests</a:t>
+            </a:r>
+            <a:r>
+              <a:rPr sz="2100" b="0" i="0">
+                <a:solidFill>
+                  <a:srgbClr val="20344A"/>
+                </a:solidFill>
+                <a:latin typeface="Arial"/>
+              </a:rPr>
+              <a:t>; show passing output.</a:t>
+            </a:r>
+          </a:p>
+        </p:txBody>
+      </p:sp>
+      <p:sp>
+        <p:nvSpPr>
+          <p:cNvPr id="7" name="content:line-97:0"/>
           <p:cNvSpPr txBox="1"/>
           <p:nvPr/>
         </p:nvSpPr>
         <p:spPr>
           <a:xfrm>
             <a:off x="594360" y="2581656"/>
-            <a:ext cx="11003279" cy="780288"/>
+            <a:ext cx="11003279" cy="1132332"/>
           </a:xfrm>
           <a:prstGeom prst="rect">
             <a:avLst/>
@@ -4905,7 +4642,7 @@
                 </a:solidFill>
                 <a:latin typeface="Arial"/>
               </a:rPr>
-              <a:t>Replicability: agreement under slightly different conditions. </a:t>
+              <a:t>Open a successful GitHub Actions run for the demonstrated </a:t>
             </a:r>
             <a:br/>
             <a:r>
@@ -4915,20 +4652,30 @@
                 </a:solidFill>
                 <a:latin typeface="Arial"/>
               </a:rPr>
-              <a:t>Compare local with real Docker execution of the same process.</a:t>
-            </a:r>
-          </a:p>
-        </p:txBody>
-      </p:sp>
-      <p:sp>
-        <p:nvSpPr>
-          <p:cNvPr id="8" name="content:line-101:0"/>
-          <p:cNvSpPr txBox="1"/>
-          <p:nvPr/>
-        </p:nvSpPr>
-        <p:spPr>
-          <a:xfrm>
-            <a:off x="594360" y="3425952"/>
+              <a:t>commit. CI means automated checks on GitHub; a local pass </a:t>
+            </a:r>
+            <a:br/>
+            <a:r>
+              <a:rPr sz="2100" b="0" i="0">
+                <a:solidFill>
+                  <a:srgbClr val="20344A"/>
+                </a:solidFill>
+                <a:latin typeface="Arial"/>
+              </a:rPr>
+              <a:t>alone is insufficient.</a:t>
+            </a:r>
+          </a:p>
+        </p:txBody>
+      </p:sp>
+      <p:sp>
+        <p:nvSpPr>
+          <p:cNvPr id="8" name="content:line-98:0"/>
+          <p:cNvSpPr txBox="1"/>
+          <p:nvPr/>
+        </p:nvSpPr>
+        <p:spPr>
+          <a:xfrm>
+            <a:off x="594360" y="3777996"/>
             <a:ext cx="11003279" cy="1132332"/>
           </a:xfrm>
           <a:prstGeom prst="rect">
@@ -4967,7 +4714,7 @@
                 </a:solidFill>
                 <a:latin typeface="Arial"/>
               </a:rPr>
-              <a:t>Keep code and CSV bytes unchanged; show successful </a:t>
+              <a:t>Instructor opens tests at public processing, API, and </a:t>
             </a:r>
             <a:br/>
             <a:r>
@@ -4977,7 +4724,7 @@
                 </a:solidFill>
                 <a:latin typeface="Arial"/>
               </a:rPr>
-              <a:t>comparisons, underlying captures, commands, logs, </a:t>
+              <a:t>comparison boundaries: expected outputs, invalid inputs, and </a:t>
             </a:r>
             <a:br/>
             <a:r>
@@ -4987,20 +4734,20 @@
                 </a:solidFill>
                 <a:latin typeface="Arial"/>
               </a:rPr>
-              <a:t>environment details, and code/input identity.</a:t>
-            </a:r>
-          </a:p>
-        </p:txBody>
-      </p:sp>
-      <p:sp>
-        <p:nvSpPr>
-          <p:cNvPr id="9" name="content:line-102:0"/>
-          <p:cNvSpPr txBox="1"/>
-          <p:nvPr/>
-        </p:nvSpPr>
-        <p:spPr>
-          <a:xfrm>
-            <a:off x="594360" y="4622292"/>
+              <a:t>agreement rules.</a:t>
+            </a:r>
+          </a:p>
+        </p:txBody>
+      </p:sp>
+      <p:sp>
+        <p:nvSpPr>
+          <p:cNvPr id="9" name="content:line-99:0"/>
+          <p:cNvSpPr txBox="1"/>
+          <p:nvPr/>
+        </p:nvSpPr>
+        <p:spPr>
+          <a:xfrm>
+            <a:off x="594360" y="4974336"/>
             <a:ext cx="11003279" cy="1132332"/>
           </a:xfrm>
           <a:prstGeom prst="rect">
@@ -5039,7 +4786,7 @@
                 </a:solidFill>
                 <a:latin typeface="Arial"/>
               </a:rPr>
-              <a:t>Reproducibility means agreement under very different </a:t>
+              <a:t>Tests check declared behavior, not scientific validity. A </a:t>
             </a:r>
             <a:br/>
             <a:r>
@@ -5049,7 +4796,7 @@
                 </a:solidFill>
                 <a:latin typeface="Arial"/>
               </a:rPr>
-              <a:t>conditions in this course; independent simulation, cross-group </a:t>
+              <a:t>workflow reporting success does not itself configure required </a:t>
             </a:r>
             <a:br/>
             <a:r>
@@ -5059,59 +4806,7 @@
                 </a:solidFill>
                 <a:latin typeface="Arial"/>
               </a:rPr>
-              <a:t>reproduction, and new-data experiments are not required.</a:t>
-            </a:r>
-          </a:p>
-        </p:txBody>
-      </p:sp>
-      <p:sp>
-        <p:nvSpPr>
-          <p:cNvPr id="10" name="content:line-103:0"/>
-          <p:cNvSpPr txBox="1"/>
-          <p:nvPr/>
-        </p:nvSpPr>
-        <p:spPr>
-          <a:xfrm>
-            <a:off x="594360" y="5818632"/>
-            <a:ext cx="11003279" cy="428244"/>
-          </a:xfrm>
-          <a:prstGeom prst="rect">
-            <a:avLst/>
-          </a:prstGeom>
-          <a:noFill/>
-        </p:spPr>
-        <p:txBody>
-          <a:bodyPr wrap="none" anchor="t" lIns="88900" rIns="88900" tIns="38100" bIns="38100">
-            <a:noAutofit/>
-          </a:bodyPr>
-          <a:lstStyle/>
-          <a:p>
-            <a:pPr marL="279400" indent="-215900">
-              <a:lnSpc>
-                <a:spcPts val="2772"/>
-              </a:lnSpc>
-              <a:spcBef>
-                <a:spcPts val="0"/>
-              </a:spcBef>
-              <a:spcAft>
-                <a:spcPts val="0"/>
-              </a:spcAft>
-              <a:defRPr sz="2100">
-                <a:solidFill>
-                  <a:srgbClr val="20344A"/>
-                </a:solidFill>
-                <a:latin typeface="Arial"/>
-              </a:defRPr>
-              <a:buChar char="•"/>
-            </a:pPr>
-            <a:r>
-              <a:rPr sz="2100" b="0" i="0">
-                <a:solidFill>
-                  <a:srgbClr val="20344A"/>
-                </a:solidFill>
-                <a:latin typeface="Arial"/>
-              </a:rPr>
-              <a:t>Use the </a:t>
+              <a:t>checks; see </a:t>
             </a:r>
             <a:r>
               <a:rPr sz="2100" b="0" i="0">
@@ -5121,7 +4816,7 @@
                 <a:latin typeface="Arial"/>
                 <a:hlinkClick r:id="rId2"/>
               </a:rPr>
-              <a:t>glossary</a:t>
+              <a:t>testing</a:t>
             </a:r>
             <a:r>
               <a:rPr sz="2100" b="0" i="0">
@@ -5140,7 +4835,7 @@
                 <a:latin typeface="Arial"/>
                 <a:hlinkClick r:id="rId3"/>
               </a:rPr>
-              <a:t>capture/comparison commands</a:t>
+              <a:t>CI</a:t>
             </a:r>
             <a:r>
               <a:rPr sz="2100" b="0" i="0">
@@ -5263,14 +4958,14 @@
               </a:defRPr>
             </a:pPr>
             <a:r>
-              <a:t>SOURCE 12 / 16</a:t>
-            </a:r>
-          </a:p>
-        </p:txBody>
-      </p:sp>
-      <p:sp>
-        <p:nvSpPr>
-          <p:cNvPr id="4" name="title:line-107"/>
+              <a:t>SOURCE 12 / 17</a:t>
+            </a:r>
+          </a:p>
+        </p:txBody>
+      </p:sp>
+      <p:sp>
+        <p:nvSpPr>
+          <p:cNvPr id="4" name="title:line-103"/>
           <p:cNvSpPr txBox="1"/>
           <p:nvPr/>
         </p:nvSpPr>
@@ -5314,7 +5009,7 @@
                 </a:solidFill>
                 <a:latin typeface="Arial"/>
               </a:rPr>
-              <a:t>Inspect agreement, field by field</a:t>
+              <a:t>Demonstrate the two practical Rs</a:t>
             </a:r>
           </a:p>
         </p:txBody>
@@ -5366,13 +5061,137 @@
       </p:sp>
       <p:sp>
         <p:nvSpPr>
-          <p:cNvPr id="6" name="content:line-109:0"/>
+          <p:cNvPr id="6" name="content:line-105:0"/>
           <p:cNvSpPr txBox="1"/>
           <p:nvPr/>
         </p:nvSpPr>
         <p:spPr>
           <a:xfrm>
             <a:off x="594360" y="1737360"/>
+            <a:ext cx="11003279" cy="780288"/>
+          </a:xfrm>
+          <a:prstGeom prst="rect">
+            <a:avLst/>
+          </a:prstGeom>
+          <a:noFill/>
+        </p:spPr>
+        <p:txBody>
+          <a:bodyPr wrap="none" anchor="t" lIns="88900" rIns="88900" tIns="38100" bIns="38100">
+            <a:noAutofit/>
+          </a:bodyPr>
+          <a:lstStyle/>
+          <a:p>
+            <a:pPr marL="279400" indent="-215900">
+              <a:lnSpc>
+                <a:spcPts val="2772"/>
+              </a:lnSpc>
+              <a:spcBef>
+                <a:spcPts val="0"/>
+              </a:spcBef>
+              <a:spcAft>
+                <a:spcPts val="0"/>
+              </a:spcAft>
+              <a:defRPr sz="2100">
+                <a:solidFill>
+                  <a:srgbClr val="20344A"/>
+                </a:solidFill>
+                <a:latin typeface="Arial"/>
+              </a:defRPr>
+              <a:buChar char="•"/>
+            </a:pPr>
+            <a:r>
+              <a:rPr sz="2100" b="0" i="0">
+                <a:solidFill>
+                  <a:srgbClr val="20344A"/>
+                </a:solidFill>
+                <a:latin typeface="Arial"/>
+              </a:rPr>
+              <a:t>Repeatability: agreement under the same conditions. Compare </a:t>
+            </a:r>
+            <a:br/>
+            <a:r>
+              <a:rPr sz="2100" b="0" i="0">
+                <a:solidFill>
+                  <a:srgbClr val="20344A"/>
+                </a:solidFill>
+                <a:latin typeface="Arial"/>
+              </a:rPr>
+              <a:t>local run 1 with local run 2.</a:t>
+            </a:r>
+          </a:p>
+        </p:txBody>
+      </p:sp>
+      <p:sp>
+        <p:nvSpPr>
+          <p:cNvPr id="7" name="content:line-106:0"/>
+          <p:cNvSpPr txBox="1"/>
+          <p:nvPr/>
+        </p:nvSpPr>
+        <p:spPr>
+          <a:xfrm>
+            <a:off x="594360" y="2581656"/>
+            <a:ext cx="11003279" cy="780288"/>
+          </a:xfrm>
+          <a:prstGeom prst="rect">
+            <a:avLst/>
+          </a:prstGeom>
+          <a:noFill/>
+        </p:spPr>
+        <p:txBody>
+          <a:bodyPr wrap="none" anchor="t" lIns="88900" rIns="88900" tIns="38100" bIns="38100">
+            <a:noAutofit/>
+          </a:bodyPr>
+          <a:lstStyle/>
+          <a:p>
+            <a:pPr marL="279400" indent="-215900">
+              <a:lnSpc>
+                <a:spcPts val="2772"/>
+              </a:lnSpc>
+              <a:spcBef>
+                <a:spcPts val="0"/>
+              </a:spcBef>
+              <a:spcAft>
+                <a:spcPts val="0"/>
+              </a:spcAft>
+              <a:defRPr sz="2100">
+                <a:solidFill>
+                  <a:srgbClr val="20344A"/>
+                </a:solidFill>
+                <a:latin typeface="Arial"/>
+              </a:defRPr>
+              <a:buChar char="•"/>
+            </a:pPr>
+            <a:r>
+              <a:rPr sz="2100" b="0" i="0">
+                <a:solidFill>
+                  <a:srgbClr val="20344A"/>
+                </a:solidFill>
+                <a:latin typeface="Arial"/>
+              </a:rPr>
+              <a:t>Replicability: agreement under slightly different conditions. </a:t>
+            </a:r>
+            <a:br/>
+            <a:r>
+              <a:rPr sz="2100" b="0" i="0">
+                <a:solidFill>
+                  <a:srgbClr val="20344A"/>
+                </a:solidFill>
+                <a:latin typeface="Arial"/>
+              </a:rPr>
+              <a:t>Compare local with real Docker execution of the same process.</a:t>
+            </a:r>
+          </a:p>
+        </p:txBody>
+      </p:sp>
+      <p:sp>
+        <p:nvSpPr>
+          <p:cNvPr id="8" name="content:line-107:0"/>
+          <p:cNvSpPr txBox="1"/>
+          <p:nvPr/>
+        </p:nvSpPr>
+        <p:spPr>
+          <a:xfrm>
+            <a:off x="594360" y="3425952"/>
             <a:ext cx="11003279" cy="1132332"/>
           </a:xfrm>
           <a:prstGeom prst="rect">
@@ -5411,7 +5230,7 @@
                 </a:solidFill>
                 <a:latin typeface="Arial"/>
               </a:rPr>
-              <a:t>Exact: cleaned records, identifiers, raw values, copied </a:t>
+              <a:t>Keep code and CSV bytes unchanged; show successful </a:t>
             </a:r>
             <a:br/>
             <a:r>
@@ -5421,7 +5240,7 @@
                 </a:solidFill>
                 <a:latin typeface="Arial"/>
               </a:rPr>
-              <a:t>baselines, counts, types, structure, ordering, and nulls. </a:t>
+              <a:t>comparisons, underlying captures, commands, logs, </a:t>
             </a:r>
             <a:br/>
             <a:r>
@@ -5431,20 +5250,20 @@
                 </a:solidFill>
                 <a:latin typeface="Arial"/>
               </a:rPr>
-              <a:t>Missing stays distinct from zero.</a:t>
-            </a:r>
-          </a:p>
-        </p:txBody>
-      </p:sp>
-      <p:sp>
-        <p:nvSpPr>
-          <p:cNvPr id="7" name="content:line-110:0"/>
-          <p:cNvSpPr txBox="1"/>
-          <p:nvPr/>
-        </p:nvSpPr>
-        <p:spPr>
-          <a:xfrm>
-            <a:off x="594360" y="2933700"/>
+              <a:t>environment details, and code/input identity.</a:t>
+            </a:r>
+          </a:p>
+        </p:txBody>
+      </p:sp>
+      <p:sp>
+        <p:nvSpPr>
+          <p:cNvPr id="9" name="content:line-108:0"/>
+          <p:cNvSpPr txBox="1"/>
+          <p:nvPr/>
+        </p:nvSpPr>
+        <p:spPr>
+          <a:xfrm>
+            <a:off x="594360" y="4622292"/>
             <a:ext cx="11003279" cy="1132332"/>
           </a:xfrm>
           <a:prstGeom prst="rect">
@@ -5483,7 +5302,7 @@
                 </a:solidFill>
                 <a:latin typeface="Arial"/>
               </a:rPr>
-              <a:t>Only derived decimals receive declared tolerances documented </a:t>
+              <a:t>Reproducibility means agreement under very different </a:t>
             </a:r>
             <a:br/>
             <a:r>
@@ -5493,7 +5312,7 @@
                 </a:solidFill>
                 <a:latin typeface="Arial"/>
               </a:rPr>
-              <a:t>in tests. In the example: change, percent_change, and </a:t>
+              <a:t>conditions in this course; independent simulation, cross-group </a:t>
             </a:r>
             <a:br/>
             <a:r>
@@ -5503,74 +5322,21 @@
                 </a:solidFill>
                 <a:latin typeface="Arial"/>
               </a:rPr>
-              <a:t>visit-summary mean.</a:t>
-            </a:r>
-          </a:p>
-        </p:txBody>
-      </p:sp>
-      <p:sp>
-        <p:nvSpPr>
-          <p:cNvPr id="8" name="content:line-113:0"/>
-          <p:cNvSpPr txBox="1"/>
-          <p:nvPr/>
-        </p:nvSpPr>
-        <p:spPr>
-          <a:xfrm>
-            <a:off x="594360" y="4130040"/>
-            <a:ext cx="11003279" cy="377952"/>
-          </a:xfrm>
-          <a:prstGeom prst="rect">
-            <a:avLst/>
-          </a:prstGeom>
-          <a:solidFill>
-            <a:srgbClr val="EDF3F6"/>
-          </a:solidFill>
-        </p:spPr>
-        <p:txBody>
-          <a:bodyPr wrap="none" anchor="t" lIns="88900" rIns="88900" tIns="38100" bIns="38100">
-            <a:noAutofit/>
-          </a:bodyPr>
-          <a:lstStyle/>
-          <a:p>
-            <a:pPr>
-              <a:lnSpc>
-                <a:spcPts val="2376"/>
-              </a:lnSpc>
-              <a:spcBef>
-                <a:spcPts val="0"/>
-              </a:spcBef>
-              <a:spcAft>
-                <a:spcPts val="0"/>
-              </a:spcAft>
-              <a:defRPr sz="1800">
-                <a:solidFill>
-                  <a:srgbClr val="20344A"/>
-                </a:solidFill>
-                <a:latin typeface="Arial"/>
-              </a:defRPr>
-            </a:pPr>
-            <a:r>
-              <a:rPr sz="1800" b="0" i="0">
-                <a:solidFill>
-                  <a:srgbClr val="20344A"/>
-                </a:solidFill>
-                <a:latin typeface="Courier New"/>
-              </a:rPr>
-              <a:t>abs(actual - expected) &lt;= max(1e-9, 1e-9 * abs(expected))</a:t>
-            </a:r>
-          </a:p>
-        </p:txBody>
-      </p:sp>
-      <p:sp>
-        <p:nvSpPr>
-          <p:cNvPr id="9" name="content:line-116:0"/>
-          <p:cNvSpPr txBox="1"/>
-          <p:nvPr/>
-        </p:nvSpPr>
-        <p:spPr>
-          <a:xfrm>
-            <a:off x="594360" y="4507992"/>
-            <a:ext cx="11003279" cy="1484376"/>
+              <a:t>reproduction, and new-data experiments are not required.</a:t>
+            </a:r>
+          </a:p>
+        </p:txBody>
+      </p:sp>
+      <p:sp>
+        <p:nvSpPr>
+          <p:cNvPr id="10" name="content:line-109:0"/>
+          <p:cNvSpPr txBox="1"/>
+          <p:nvPr/>
+        </p:nvSpPr>
+        <p:spPr>
+          <a:xfrm>
+            <a:off x="594360" y="5818632"/>
+            <a:ext cx="11003279" cy="428244"/>
           </a:xfrm>
           <a:prstGeom prst="rect">
             <a:avLst/>
@@ -5608,37 +5374,45 @@
                 </a:solidFill>
                 <a:latin typeface="Arial"/>
               </a:rPr>
-              <a:t>The first output is the reference. Instructor opens outputs </a:t>
-            </a:r>
-            <a:br/>
-            <a:r>
-              <a:rPr sz="2100" b="0" i="0">
-                <a:solidFill>
-                  <a:srgbClr val="20344A"/>
-                </a:solidFill>
-                <a:latin typeface="Arial"/>
-              </a:rPr>
-              <a:t>and diagnostics; matching charts alone are insufficient. Do not </a:t>
-            </a:r>
-            <a:br/>
-            <a:r>
-              <a:rPr sz="2100" b="0" i="0">
-                <a:solidFill>
-                  <a:srgbClr val="20344A"/>
-                </a:solidFill>
-                <a:latin typeface="Arial"/>
-              </a:rPr>
-              <a:t>drop fields, round away differences, or widen tolerance to </a:t>
-            </a:r>
-            <a:br/>
-            <a:r>
-              <a:rPr sz="2100" b="0" i="0">
-                <a:solidFill>
-                  <a:srgbClr val="20344A"/>
-                </a:solidFill>
-                <a:latin typeface="Arial"/>
-              </a:rPr>
-              <a:t>pass.</a:t>
+              <a:t>Use the </a:t>
+            </a:r>
+            <a:r>
+              <a:rPr sz="2100" b="0" i="0">
+                <a:solidFill>
+                  <a:srgbClr val="007F82"/>
+                </a:solidFill>
+                <a:latin typeface="Arial"/>
+                <a:hlinkClick r:id="rId2"/>
+              </a:rPr>
+              <a:t>glossary</a:t>
+            </a:r>
+            <a:r>
+              <a:rPr sz="2100" b="0" i="0">
+                <a:solidFill>
+                  <a:srgbClr val="20344A"/>
+                </a:solidFill>
+                <a:latin typeface="Arial"/>
+              </a:rPr>
+              <a:t> and </a:t>
+            </a:r>
+            <a:r>
+              <a:rPr sz="2100" b="0" i="0">
+                <a:solidFill>
+                  <a:srgbClr val="007F82"/>
+                </a:solidFill>
+                <a:latin typeface="Arial"/>
+                <a:hlinkClick r:id="rId3"/>
+              </a:rPr>
+              <a:t>capture/comparison commands</a:t>
+            </a:r>
+            <a:r>
+              <a:rPr sz="2100" b="0" i="0">
+                <a:solidFill>
+                  <a:srgbClr val="20344A"/>
+                </a:solidFill>
+                <a:latin typeface="Arial"/>
+              </a:rPr>
+              <a:t>.</a:t>
             </a:r>
           </a:p>
         </p:txBody>
@@ -5752,14 +5526,14 @@
               </a:defRPr>
             </a:pPr>
             <a:r>
-              <a:t>SOURCE 13 / 16</a:t>
-            </a:r>
-          </a:p>
-        </p:txBody>
-      </p:sp>
-      <p:sp>
-        <p:nvSpPr>
-          <p:cNvPr id="4" name="title:line-120"/>
+              <a:t>SOURCE 13 / 17</a:t>
+            </a:r>
+          </a:p>
+        </p:txBody>
+      </p:sp>
+      <p:sp>
+        <p:nvSpPr>
+          <p:cNvPr id="4" name="title:line-113"/>
           <p:cNvSpPr txBox="1"/>
           <p:nvPr/>
         </p:nvSpPr>
@@ -5803,7 +5577,7 @@
                 </a:solidFill>
                 <a:latin typeface="Arial"/>
               </a:rPr>
-              <a:t>Inspect collaboration and every member</a:t>
+              <a:t>Inspect agreement, field by field</a:t>
             </a:r>
           </a:p>
         </p:txBody>
@@ -5855,7 +5629,7 @@
       </p:sp>
       <p:sp>
         <p:nvSpPr>
-          <p:cNvPr id="6" name="content:line-122:0"/>
+          <p:cNvPr id="6" name="content:line-115:0"/>
           <p:cNvSpPr txBox="1"/>
           <p:nvPr/>
         </p:nvSpPr>
@@ -5900,7 +5674,7 @@
                 </a:solidFill>
                 <a:latin typeface="Arial"/>
               </a:rPr>
-              <a:t>Open feature branches, descriptive commits, PRs, and </a:t>
+              <a:t>Exact: cleaned records, identifiers, raw values, copied </a:t>
             </a:r>
             <a:br/>
             <a:r>
@@ -5910,7 +5684,7 @@
                 </a:solidFill>
                 <a:latin typeface="Arial"/>
               </a:rPr>
-              <a:t>meaningful teammate reviews about behavior, tests, or </a:t>
+              <a:t>baselines, counts, types, structure, ordering, and nulls. </a:t>
             </a:r>
             <a:br/>
             <a:r>
@@ -5920,14 +5694,14 @@
                 </a:solidFill>
                 <a:latin typeface="Arial"/>
               </a:rPr>
-              <a:t>clarity; show responses/follow-up to concerns.</a:t>
-            </a:r>
-          </a:p>
-        </p:txBody>
-      </p:sp>
-      <p:sp>
-        <p:nvSpPr>
-          <p:cNvPr id="7" name="content:line-123:0"/>
+              <a:t>Missing stays distinct from zero.</a:t>
+            </a:r>
+          </a:p>
+        </p:txBody>
+      </p:sp>
+      <p:sp>
+        <p:nvSpPr>
+          <p:cNvPr id="7" name="content:line-116:0"/>
           <p:cNvSpPr txBox="1"/>
           <p:nvPr/>
         </p:nvSpPr>
@@ -5972,7 +5746,7 @@
                 </a:solidFill>
                 <a:latin typeface="Arial"/>
               </a:rPr>
-              <a:t>For EACH student: open at least one personally authored PR </a:t>
+              <a:t>Only derived decimals receive declared tolerances documented </a:t>
             </a:r>
             <a:br/>
             <a:r>
@@ -5982,7 +5756,7 @@
                 </a:solidFill>
                 <a:latin typeface="Arial"/>
               </a:rPr>
-              <a:t>and at least one substantive review of a teammate's PR, with </a:t>
+              <a:t>in tests. In the example: change, percent_change, and </a:t>
             </a:r>
             <a:br/>
             <a:r>
@@ -5992,21 +5766,74 @@
                 </a:solidFill>
                 <a:latin typeface="Arial"/>
               </a:rPr>
-              <a:t>authorship and review permalinks.</a:t>
-            </a:r>
-          </a:p>
-        </p:txBody>
-      </p:sp>
-      <p:sp>
-        <p:nvSpPr>
-          <p:cNvPr id="8" name="content:line-124:0"/>
+              <a:t>visit-summary mean.</a:t>
+            </a:r>
+          </a:p>
+        </p:txBody>
+      </p:sp>
+      <p:sp>
+        <p:nvSpPr>
+          <p:cNvPr id="8" name="content:line-119:0"/>
           <p:cNvSpPr txBox="1"/>
           <p:nvPr/>
         </p:nvSpPr>
         <p:spPr>
           <a:xfrm>
             <a:off x="594360" y="4130040"/>
-            <a:ext cx="11003279" cy="1132332"/>
+            <a:ext cx="11003279" cy="377952"/>
+          </a:xfrm>
+          <a:prstGeom prst="rect">
+            <a:avLst/>
+          </a:prstGeom>
+          <a:solidFill>
+            <a:srgbClr val="EDF3F6"/>
+          </a:solidFill>
+        </p:spPr>
+        <p:txBody>
+          <a:bodyPr wrap="none" anchor="t" lIns="88900" rIns="88900" tIns="38100" bIns="38100">
+            <a:noAutofit/>
+          </a:bodyPr>
+          <a:lstStyle/>
+          <a:p>
+            <a:pPr>
+              <a:lnSpc>
+                <a:spcPts val="2376"/>
+              </a:lnSpc>
+              <a:spcBef>
+                <a:spcPts val="0"/>
+              </a:spcBef>
+              <a:spcAft>
+                <a:spcPts val="0"/>
+              </a:spcAft>
+              <a:defRPr sz="1800">
+                <a:solidFill>
+                  <a:srgbClr val="20344A"/>
+                </a:solidFill>
+                <a:latin typeface="Arial"/>
+              </a:defRPr>
+            </a:pPr>
+            <a:r>
+              <a:rPr sz="1800" b="0" i="0">
+                <a:solidFill>
+                  <a:srgbClr val="20344A"/>
+                </a:solidFill>
+                <a:latin typeface="Courier New"/>
+              </a:rPr>
+              <a:t>abs(actual - expected) &lt;= max(1e-9, 1e-9 * abs(expected))</a:t>
+            </a:r>
+          </a:p>
+        </p:txBody>
+      </p:sp>
+      <p:sp>
+        <p:nvSpPr>
+          <p:cNvPr id="9" name="content:line-122:0"/>
+          <p:cNvSpPr txBox="1"/>
+          <p:nvPr/>
+        </p:nvSpPr>
+        <p:spPr>
+          <a:xfrm>
+            <a:off x="594360" y="4507992"/>
+            <a:ext cx="11003279" cy="1484376"/>
           </a:xfrm>
           <a:prstGeom prst="rect">
             <a:avLst/>
@@ -6044,7 +5871,7 @@
                 </a:solidFill>
                 <a:latin typeface="Arial"/>
               </a:rPr>
-              <a:t>Each member explains their contribution, authored change, </a:t>
+              <a:t>The first output is the reference. Instructor opens outputs </a:t>
             </a:r>
             <a:br/>
             <a:r>
@@ -6054,7 +5881,7 @@
                 </a:solidFill>
                 <a:latin typeface="Arial"/>
               </a:rPr>
-              <a:t>review reasoning, and any follow-up. Approval alone or “looks </a:t>
+              <a:t>and diagnostics; matching charts alone are insufficient. Do not </a:t>
             </a:r>
             <a:br/>
             <a:r>
@@ -6064,59 +5891,7 @@
                 </a:solidFill>
                 <a:latin typeface="Arial"/>
               </a:rPr>
-              <a:t>good” is insufficient.</a:t>
-            </a:r>
-          </a:p>
-        </p:txBody>
-      </p:sp>
-      <p:sp>
-        <p:nvSpPr>
-          <p:cNvPr id="9" name="content:line-125:0"/>
-          <p:cNvSpPr txBox="1"/>
-          <p:nvPr/>
-        </p:nvSpPr>
-        <p:spPr>
-          <a:xfrm>
-            <a:off x="594360" y="5326380"/>
-            <a:ext cx="11003279" cy="780288"/>
-          </a:xfrm>
-          <a:prstGeom prst="rect">
-            <a:avLst/>
-          </a:prstGeom>
-          <a:noFill/>
-        </p:spPr>
-        <p:txBody>
-          <a:bodyPr wrap="none" anchor="t" lIns="88900" rIns="88900" tIns="38100" bIns="38100">
-            <a:noAutofit/>
-          </a:bodyPr>
-          <a:lstStyle/>
-          <a:p>
-            <a:pPr marL="279400" indent="-215900">
-              <a:lnSpc>
-                <a:spcPts val="2772"/>
-              </a:lnSpc>
-              <a:spcBef>
-                <a:spcPts val="0"/>
-              </a:spcBef>
-              <a:spcAft>
-                <a:spcPts val="0"/>
-              </a:spcAft>
-              <a:defRPr sz="2100">
-                <a:solidFill>
-                  <a:srgbClr val="20344A"/>
-                </a:solidFill>
-                <a:latin typeface="Arial"/>
-              </a:defRPr>
-              <a:buChar char="•"/>
-            </a:pPr>
-            <a:r>
-              <a:rPr sz="2100" b="0" i="0">
-                <a:solidFill>
-                  <a:srgbClr val="20344A"/>
-                </a:solidFill>
-                <a:latin typeface="Arial"/>
-              </a:rPr>
-              <a:t>Instructor completes an individual evidence row for every </a:t>
+              <a:t>drop fields, round away differences, or widen tolerance to </a:t>
             </a:r>
             <a:br/>
             <a:r>
@@ -6126,7 +5901,7 @@
                 </a:solidFill>
                 <a:latin typeface="Arial"/>
               </a:rPr>
-              <a:t>member. Template history and instructor/agent work do not </a:t>
+              <a:t>pass.</a:t>
             </a:r>
           </a:p>
         </p:txBody>
@@ -6240,14 +6015,14 @@
               </a:defRPr>
             </a:pPr>
             <a:r>
-              <a:t>SOURCE 13 / 16  ·  CONTINUED 2</a:t>
-            </a:r>
-          </a:p>
-        </p:txBody>
-      </p:sp>
-      <p:sp>
-        <p:nvSpPr>
-          <p:cNvPr id="4" name="title:line-120"/>
+              <a:t>SOURCE 14 / 17</a:t>
+            </a:r>
+          </a:p>
+        </p:txBody>
+      </p:sp>
+      <p:sp>
+        <p:nvSpPr>
+          <p:cNvPr id="4" name="title:line-126"/>
           <p:cNvSpPr txBox="1"/>
           <p:nvPr/>
         </p:nvSpPr>
@@ -6343,14 +6118,14 @@
       </p:sp>
       <p:sp>
         <p:nvSpPr>
-          <p:cNvPr id="6" name="content:line-125:2"/>
+          <p:cNvPr id="6" name="content:line-128:0"/>
           <p:cNvSpPr txBox="1"/>
           <p:nvPr/>
         </p:nvSpPr>
         <p:spPr>
           <a:xfrm>
             <a:off x="594360" y="1737360"/>
-            <a:ext cx="11003279" cy="428244"/>
+            <a:ext cx="11003279" cy="1132332"/>
           </a:xfrm>
           <a:prstGeom prst="rect">
             <a:avLst/>
@@ -6379,35 +6154,242 @@
                 </a:solidFill>
                 <a:latin typeface="Arial"/>
               </a:defRPr>
-              <a:buChar char=" "/>
-            </a:pPr>
-            <a:r>
-              <a:rPr sz="2100" b="0" i="0">
-                <a:solidFill>
-                  <a:srgbClr val="20344A"/>
-                </a:solidFill>
-                <a:latin typeface="Arial"/>
-              </a:rPr>
-              <a:t>count; see the </a:t>
-            </a:r>
-            <a:r>
-              <a:rPr sz="2100" b="0" i="0">
-                <a:solidFill>
-                  <a:srgbClr val="007F82"/>
-                </a:solidFill>
-                <a:latin typeface="Arial"/>
-                <a:hlinkClick r:id="rId2"/>
-              </a:rPr>
-              <a:t>collaboration guide</a:t>
-            </a:r>
-            <a:r>
-              <a:rPr sz="2100" b="0" i="0">
-                <a:solidFill>
-                  <a:srgbClr val="20344A"/>
-                </a:solidFill>
-                <a:latin typeface="Arial"/>
-              </a:rPr>
-              <a:t>.</a:t>
+              <a:buChar char="•"/>
+            </a:pPr>
+            <a:r>
+              <a:rPr sz="2100" b="0" i="0">
+                <a:solidFill>
+                  <a:srgbClr val="20344A"/>
+                </a:solidFill>
+                <a:latin typeface="Arial"/>
+              </a:rPr>
+              <a:t>Open feature branches, descriptive commits, PRs, and </a:t>
+            </a:r>
+            <a:br/>
+            <a:r>
+              <a:rPr sz="2100" b="0" i="0">
+                <a:solidFill>
+                  <a:srgbClr val="20344A"/>
+                </a:solidFill>
+                <a:latin typeface="Arial"/>
+              </a:rPr>
+              <a:t>meaningful teammate reviews about behavior, tests, or </a:t>
+            </a:r>
+            <a:br/>
+            <a:r>
+              <a:rPr sz="2100" b="0" i="0">
+                <a:solidFill>
+                  <a:srgbClr val="20344A"/>
+                </a:solidFill>
+                <a:latin typeface="Arial"/>
+              </a:rPr>
+              <a:t>clarity; show responses/follow-up to concerns.</a:t>
+            </a:r>
+          </a:p>
+        </p:txBody>
+      </p:sp>
+      <p:sp>
+        <p:nvSpPr>
+          <p:cNvPr id="7" name="content:line-129:0"/>
+          <p:cNvSpPr txBox="1"/>
+          <p:nvPr/>
+        </p:nvSpPr>
+        <p:spPr>
+          <a:xfrm>
+            <a:off x="594360" y="2933700"/>
+            <a:ext cx="11003279" cy="1132332"/>
+          </a:xfrm>
+          <a:prstGeom prst="rect">
+            <a:avLst/>
+          </a:prstGeom>
+          <a:noFill/>
+        </p:spPr>
+        <p:txBody>
+          <a:bodyPr wrap="none" anchor="t" lIns="88900" rIns="88900" tIns="38100" bIns="38100">
+            <a:noAutofit/>
+          </a:bodyPr>
+          <a:lstStyle/>
+          <a:p>
+            <a:pPr marL="279400" indent="-215900">
+              <a:lnSpc>
+                <a:spcPts val="2772"/>
+              </a:lnSpc>
+              <a:spcBef>
+                <a:spcPts val="0"/>
+              </a:spcBef>
+              <a:spcAft>
+                <a:spcPts val="0"/>
+              </a:spcAft>
+              <a:defRPr sz="2100">
+                <a:solidFill>
+                  <a:srgbClr val="20344A"/>
+                </a:solidFill>
+                <a:latin typeface="Arial"/>
+              </a:defRPr>
+              <a:buChar char="•"/>
+            </a:pPr>
+            <a:r>
+              <a:rPr sz="2100" b="0" i="0">
+                <a:solidFill>
+                  <a:srgbClr val="20344A"/>
+                </a:solidFill>
+                <a:latin typeface="Arial"/>
+              </a:rPr>
+              <a:t>For EACH student: open at least one personally authored PR </a:t>
+            </a:r>
+            <a:br/>
+            <a:r>
+              <a:rPr sz="2100" b="0" i="0">
+                <a:solidFill>
+                  <a:srgbClr val="20344A"/>
+                </a:solidFill>
+                <a:latin typeface="Arial"/>
+              </a:rPr>
+              <a:t>and at least one substantive review of a teammate's PR, with </a:t>
+            </a:r>
+            <a:br/>
+            <a:r>
+              <a:rPr sz="2100" b="0" i="0">
+                <a:solidFill>
+                  <a:srgbClr val="20344A"/>
+                </a:solidFill>
+                <a:latin typeface="Arial"/>
+              </a:rPr>
+              <a:t>authorship and review permalinks.</a:t>
+            </a:r>
+          </a:p>
+        </p:txBody>
+      </p:sp>
+      <p:sp>
+        <p:nvSpPr>
+          <p:cNvPr id="8" name="content:line-130:0"/>
+          <p:cNvSpPr txBox="1"/>
+          <p:nvPr/>
+        </p:nvSpPr>
+        <p:spPr>
+          <a:xfrm>
+            <a:off x="594360" y="4130040"/>
+            <a:ext cx="11003279" cy="1132332"/>
+          </a:xfrm>
+          <a:prstGeom prst="rect">
+            <a:avLst/>
+          </a:prstGeom>
+          <a:noFill/>
+        </p:spPr>
+        <p:txBody>
+          <a:bodyPr wrap="none" anchor="t" lIns="88900" rIns="88900" tIns="38100" bIns="38100">
+            <a:noAutofit/>
+          </a:bodyPr>
+          <a:lstStyle/>
+          <a:p>
+            <a:pPr marL="279400" indent="-215900">
+              <a:lnSpc>
+                <a:spcPts val="2772"/>
+              </a:lnSpc>
+              <a:spcBef>
+                <a:spcPts val="0"/>
+              </a:spcBef>
+              <a:spcAft>
+                <a:spcPts val="0"/>
+              </a:spcAft>
+              <a:defRPr sz="2100">
+                <a:solidFill>
+                  <a:srgbClr val="20344A"/>
+                </a:solidFill>
+                <a:latin typeface="Arial"/>
+              </a:defRPr>
+              <a:buChar char="•"/>
+            </a:pPr>
+            <a:r>
+              <a:rPr sz="2100" b="0" i="0">
+                <a:solidFill>
+                  <a:srgbClr val="20344A"/>
+                </a:solidFill>
+                <a:latin typeface="Arial"/>
+              </a:rPr>
+              <a:t>Each member explains their contribution, authored change, </a:t>
+            </a:r>
+            <a:br/>
+            <a:r>
+              <a:rPr sz="2100" b="0" i="0">
+                <a:solidFill>
+                  <a:srgbClr val="20344A"/>
+                </a:solidFill>
+                <a:latin typeface="Arial"/>
+              </a:rPr>
+              <a:t>review reasoning, and any follow-up. Approval alone or “looks </a:t>
+            </a:r>
+            <a:br/>
+            <a:r>
+              <a:rPr sz="2100" b="0" i="0">
+                <a:solidFill>
+                  <a:srgbClr val="20344A"/>
+                </a:solidFill>
+                <a:latin typeface="Arial"/>
+              </a:rPr>
+              <a:t>good” is insufficient.</a:t>
+            </a:r>
+          </a:p>
+        </p:txBody>
+      </p:sp>
+      <p:sp>
+        <p:nvSpPr>
+          <p:cNvPr id="9" name="content:line-131:0"/>
+          <p:cNvSpPr txBox="1"/>
+          <p:nvPr/>
+        </p:nvSpPr>
+        <p:spPr>
+          <a:xfrm>
+            <a:off x="594360" y="5326380"/>
+            <a:ext cx="11003279" cy="780288"/>
+          </a:xfrm>
+          <a:prstGeom prst="rect">
+            <a:avLst/>
+          </a:prstGeom>
+          <a:noFill/>
+        </p:spPr>
+        <p:txBody>
+          <a:bodyPr wrap="none" anchor="t" lIns="88900" rIns="88900" tIns="38100" bIns="38100">
+            <a:noAutofit/>
+          </a:bodyPr>
+          <a:lstStyle/>
+          <a:p>
+            <a:pPr marL="279400" indent="-215900">
+              <a:lnSpc>
+                <a:spcPts val="2772"/>
+              </a:lnSpc>
+              <a:spcBef>
+                <a:spcPts val="0"/>
+              </a:spcBef>
+              <a:spcAft>
+                <a:spcPts val="0"/>
+              </a:spcAft>
+              <a:defRPr sz="2100">
+                <a:solidFill>
+                  <a:srgbClr val="20344A"/>
+                </a:solidFill>
+                <a:latin typeface="Arial"/>
+              </a:defRPr>
+              <a:buChar char="•"/>
+            </a:pPr>
+            <a:r>
+              <a:rPr sz="2100" b="0" i="0">
+                <a:solidFill>
+                  <a:srgbClr val="20344A"/>
+                </a:solidFill>
+                <a:latin typeface="Arial"/>
+              </a:rPr>
+              <a:t>Instructor completes an individual evidence row for every </a:t>
+            </a:r>
+            <a:br/>
+            <a:r>
+              <a:rPr sz="2100" b="0" i="0">
+                <a:solidFill>
+                  <a:srgbClr val="20344A"/>
+                </a:solidFill>
+                <a:latin typeface="Arial"/>
+              </a:rPr>
+              <a:t>member. Template history and instructor/agent work do not </a:t>
             </a:r>
           </a:p>
         </p:txBody>
@@ -6521,14 +6503,14 @@
               </a:defRPr>
             </a:pPr>
             <a:r>
-              <a:t>SOURCE 14 / 16</a:t>
-            </a:r>
-          </a:p>
-        </p:txBody>
-      </p:sp>
-      <p:sp>
-        <p:nvSpPr>
-          <p:cNvPr id="4" name="title:line-129"/>
+              <a:t>SOURCE 14 / 17  ·  CONTINUED 2</a:t>
+            </a:r>
+          </a:p>
+        </p:txBody>
+      </p:sp>
+      <p:sp>
+        <p:nvSpPr>
+          <p:cNvPr id="4" name="title:line-126"/>
           <p:cNvSpPr txBox="1"/>
           <p:nvPr/>
         </p:nvSpPr>
@@ -6572,7 +6554,7 @@
                 </a:solidFill>
                 <a:latin typeface="Arial"/>
               </a:rPr>
-              <a:t>Questions follow the evidence</a:t>
+              <a:t>Inspect collaboration and every member</a:t>
             </a:r>
           </a:p>
         </p:txBody>
@@ -6624,14 +6606,14 @@
       </p:sp>
       <p:sp>
         <p:nvSpPr>
-          <p:cNvPr id="6" name="content:line-131:0"/>
+          <p:cNvPr id="6" name="content:line-131:2"/>
           <p:cNvSpPr txBox="1"/>
           <p:nvPr/>
         </p:nvSpPr>
         <p:spPr>
           <a:xfrm>
             <a:off x="594360" y="1737360"/>
-            <a:ext cx="11003279" cy="780288"/>
+            <a:ext cx="11003279" cy="428244"/>
           </a:xfrm>
           <a:prstGeom prst="rect">
             <a:avLst/>
@@ -6660,222 +6642,35 @@
                 </a:solidFill>
                 <a:latin typeface="Arial"/>
               </a:defRPr>
-              <a:buChar char="•"/>
-            </a:pPr>
-            <a:r>
-              <a:rPr sz="2100" b="0" i="0">
-                <a:solidFill>
-                  <a:srgbClr val="20344A"/>
-                </a:solidFill>
-                <a:latin typeface="Arial"/>
-              </a:rPr>
-              <a:t>Why does this input fail? Open the rejection and the test that </a:t>
-            </a:r>
-            <a:br/>
-            <a:r>
-              <a:rPr sz="2100" b="0" i="0">
-                <a:solidFill>
-                  <a:srgbClr val="20344A"/>
-                </a:solidFill>
-                <a:latin typeface="Arial"/>
-              </a:rPr>
-              <a:t>establishes the rule.</a:t>
-            </a:r>
-          </a:p>
-        </p:txBody>
-      </p:sp>
-      <p:sp>
-        <p:nvSpPr>
-          <p:cNvPr id="7" name="content:line-132:0"/>
-          <p:cNvSpPr txBox="1"/>
-          <p:nvPr/>
-        </p:nvSpPr>
-        <p:spPr>
-          <a:xfrm>
-            <a:off x="594360" y="2581656"/>
-            <a:ext cx="11003279" cy="1132332"/>
-          </a:xfrm>
-          <a:prstGeom prst="rect">
-            <a:avLst/>
-          </a:prstGeom>
-          <a:noFill/>
-        </p:spPr>
-        <p:txBody>
-          <a:bodyPr wrap="none" anchor="t" lIns="88900" rIns="88900" tIns="38100" bIns="38100">
-            <a:noAutofit/>
-          </a:bodyPr>
-          <a:lstStyle/>
-          <a:p>
-            <a:pPr marL="279400" indent="-215900">
-              <a:lnSpc>
-                <a:spcPts val="2772"/>
-              </a:lnSpc>
-              <a:spcBef>
-                <a:spcPts val="0"/>
-              </a:spcBef>
-              <a:spcAft>
-                <a:spcPts val="0"/>
-              </a:spcAft>
-              <a:defRPr sz="2100">
-                <a:solidFill>
-                  <a:srgbClr val="20344A"/>
-                </a:solidFill>
-                <a:latin typeface="Arial"/>
-              </a:defRPr>
-              <a:buChar char="•"/>
-            </a:pPr>
-            <a:r>
-              <a:rPr sz="2100" b="0" i="0">
-                <a:solidFill>
-                  <a:srgbClr val="20344A"/>
-                </a:solidFill>
-                <a:latin typeface="Arial"/>
-              </a:rPr>
-              <a:t>Which code and input produced these outputs? Open the </a:t>
-            </a:r>
-            <a:br/>
-            <a:r>
-              <a:rPr sz="2100" b="0" i="0">
-                <a:solidFill>
-                  <a:srgbClr val="20344A"/>
-                </a:solidFill>
-                <a:latin typeface="Arial"/>
-              </a:rPr>
-              <a:t>commit and capture fingerprints, then explain environment </a:t>
-            </a:r>
-            <a:br/>
-            <a:r>
-              <a:rPr sz="2100" b="0" i="0">
-                <a:solidFill>
-                  <a:srgbClr val="20344A"/>
-                </a:solidFill>
-                <a:latin typeface="Arial"/>
-              </a:rPr>
-              <a:t>differences.</a:t>
-            </a:r>
-          </a:p>
-        </p:txBody>
-      </p:sp>
-      <p:sp>
-        <p:nvSpPr>
-          <p:cNvPr id="8" name="content:line-133:0"/>
-          <p:cNvSpPr txBox="1"/>
-          <p:nvPr/>
-        </p:nvSpPr>
-        <p:spPr>
-          <a:xfrm>
-            <a:off x="594360" y="3777996"/>
-            <a:ext cx="11003279" cy="780288"/>
-          </a:xfrm>
-          <a:prstGeom prst="rect">
-            <a:avLst/>
-          </a:prstGeom>
-          <a:noFill/>
-        </p:spPr>
-        <p:txBody>
-          <a:bodyPr wrap="none" anchor="t" lIns="88900" rIns="88900" tIns="38100" bIns="38100">
-            <a:noAutofit/>
-          </a:bodyPr>
-          <a:lstStyle/>
-          <a:p>
-            <a:pPr marL="279400" indent="-215900">
-              <a:lnSpc>
-                <a:spcPts val="2772"/>
-              </a:lnSpc>
-              <a:spcBef>
-                <a:spcPts val="0"/>
-              </a:spcBef>
-              <a:spcAft>
-                <a:spcPts val="0"/>
-              </a:spcAft>
-              <a:defRPr sz="2100">
-                <a:solidFill>
-                  <a:srgbClr val="20344A"/>
-                </a:solidFill>
-                <a:latin typeface="Arial"/>
-              </a:defRPr>
-              <a:buChar char="•"/>
-            </a:pPr>
-            <a:r>
-              <a:rPr sz="2100" b="0" i="0">
-                <a:solidFill>
-                  <a:srgbClr val="20344A"/>
-                </a:solidFill>
-                <a:latin typeface="Arial"/>
-              </a:rPr>
-              <a:t>Which fields compare exactly, and why is a derived value </a:t>
-            </a:r>
-            <a:br/>
-            <a:r>
-              <a:rPr sz="2100" b="0" i="0">
-                <a:solidFill>
-                  <a:srgbClr val="20344A"/>
-                </a:solidFill>
-                <a:latin typeface="Arial"/>
-              </a:rPr>
-              <a:t>allowed tolerance? Open the comparison and its tests.</a:t>
-            </a:r>
-          </a:p>
-        </p:txBody>
-      </p:sp>
-      <p:sp>
-        <p:nvSpPr>
-          <p:cNvPr id="9" name="content:line-134:0"/>
-          <p:cNvSpPr txBox="1"/>
-          <p:nvPr/>
-        </p:nvSpPr>
-        <p:spPr>
-          <a:xfrm>
-            <a:off x="594360" y="4622292"/>
-            <a:ext cx="11003279" cy="780288"/>
-          </a:xfrm>
-          <a:prstGeom prst="rect">
-            <a:avLst/>
-          </a:prstGeom>
-          <a:noFill/>
-        </p:spPr>
-        <p:txBody>
-          <a:bodyPr wrap="none" anchor="t" lIns="88900" rIns="88900" tIns="38100" bIns="38100">
-            <a:noAutofit/>
-          </a:bodyPr>
-          <a:lstStyle/>
-          <a:p>
-            <a:pPr marL="279400" indent="-215900">
-              <a:lnSpc>
-                <a:spcPts val="2772"/>
-              </a:lnSpc>
-              <a:spcBef>
-                <a:spcPts val="0"/>
-              </a:spcBef>
-              <a:spcAft>
-                <a:spcPts val="0"/>
-              </a:spcAft>
-              <a:defRPr sz="2100">
-                <a:solidFill>
-                  <a:srgbClr val="20344A"/>
-                </a:solidFill>
-                <a:latin typeface="Arial"/>
-              </a:defRPr>
-              <a:buChar char="•"/>
-            </a:pPr>
-            <a:r>
-              <a:rPr sz="2100" b="0" i="0">
-                <a:solidFill>
-                  <a:srgbClr val="20344A"/>
-                </a:solidFill>
-                <a:latin typeface="Arial"/>
-              </a:rPr>
-              <a:t>What did you change or ask a teammate to improve? Open your </a:t>
-            </a:r>
-            <a:br/>
-            <a:r>
-              <a:rPr sz="2100" b="0" i="0">
-                <a:solidFill>
-                  <a:srgbClr val="20344A"/>
-                </a:solidFill>
-                <a:latin typeface="Arial"/>
-              </a:rPr>
-              <a:t>PR or review and explain the result.</a:t>
+              <a:buChar char=" "/>
+            </a:pPr>
+            <a:r>
+              <a:rPr sz="2100" b="0" i="0">
+                <a:solidFill>
+                  <a:srgbClr val="20344A"/>
+                </a:solidFill>
+                <a:latin typeface="Arial"/>
+              </a:rPr>
+              <a:t>count; see the </a:t>
+            </a:r>
+            <a:r>
+              <a:rPr sz="2100" b="0" i="0">
+                <a:solidFill>
+                  <a:srgbClr val="007F82"/>
+                </a:solidFill>
+                <a:latin typeface="Arial"/>
+                <a:hlinkClick r:id="rId2"/>
+              </a:rPr>
+              <a:t>collaboration guide</a:t>
+            </a:r>
+            <a:r>
+              <a:rPr sz="2100" b="0" i="0">
+                <a:solidFill>
+                  <a:srgbClr val="20344A"/>
+                </a:solidFill>
+                <a:latin typeface="Arial"/>
+              </a:rPr>
+              <a:t>.</a:t>
             </a:r>
           </a:p>
         </p:txBody>
@@ -6989,14 +6784,14 @@
               </a:defRPr>
             </a:pPr>
             <a:r>
-              <a:t>SOURCE 15 / 16</a:t>
-            </a:r>
-          </a:p>
-        </p:txBody>
-      </p:sp>
-      <p:sp>
-        <p:nvSpPr>
-          <p:cNvPr id="4" name="title:line-138"/>
+              <a:t>SOURCE 15 / 17</a:t>
+            </a:r>
+          </a:p>
+        </p:txBody>
+      </p:sp>
+      <p:sp>
+        <p:nvSpPr>
+          <p:cNvPr id="4" name="title:line-135"/>
           <p:cNvSpPr txBox="1"/>
           <p:nvPr/>
         </p:nvSpPr>
@@ -7040,7 +6835,7 @@
                 </a:solidFill>
                 <a:latin typeface="Arial"/>
               </a:rPr>
-              <a:t>Shared break and remaining groups</a:t>
+              <a:t>Questions follow the evidence</a:t>
             </a:r>
           </a:p>
         </p:txBody>
@@ -7092,7 +6887,7 @@
       </p:sp>
       <p:sp>
         <p:nvSpPr>
-          <p:cNvPr id="6" name="content:line-140:0"/>
+          <p:cNvPr id="6" name="content:line-137:0"/>
           <p:cNvSpPr txBox="1"/>
           <p:nvPr/>
         </p:nvSpPr>
@@ -7137,7 +6932,7 @@
                 </a:solidFill>
                 <a:latin typeface="Arial"/>
               </a:rPr>
-              <a:t>Take the reserved 15-minute break at the published slot </a:t>
+              <a:t>Why does this input fail? Open the rejection and the test that </a:t>
             </a:r>
             <a:br/>
             <a:r>
@@ -7147,20 +6942,92 @@
                 </a:solidFill>
                 <a:latin typeface="Arial"/>
               </a:rPr>
-              <a:t>boundary.</a:t>
-            </a:r>
-          </a:p>
-        </p:txBody>
-      </p:sp>
-      <p:sp>
-        <p:nvSpPr>
-          <p:cNvPr id="7" name="content:line-141:0"/>
+              <a:t>establishes the rule.</a:t>
+            </a:r>
+          </a:p>
+        </p:txBody>
+      </p:sp>
+      <p:sp>
+        <p:nvSpPr>
+          <p:cNvPr id="7" name="content:line-138:0"/>
           <p:cNvSpPr txBox="1"/>
           <p:nvPr/>
         </p:nvSpPr>
         <p:spPr>
           <a:xfrm>
             <a:off x="594360" y="2581656"/>
+            <a:ext cx="11003279" cy="1132332"/>
+          </a:xfrm>
+          <a:prstGeom prst="rect">
+            <a:avLst/>
+          </a:prstGeom>
+          <a:noFill/>
+        </p:spPr>
+        <p:txBody>
+          <a:bodyPr wrap="none" anchor="t" lIns="88900" rIns="88900" tIns="38100" bIns="38100">
+            <a:noAutofit/>
+          </a:bodyPr>
+          <a:lstStyle/>
+          <a:p>
+            <a:pPr marL="279400" indent="-215900">
+              <a:lnSpc>
+                <a:spcPts val="2772"/>
+              </a:lnSpc>
+              <a:spcBef>
+                <a:spcPts val="0"/>
+              </a:spcBef>
+              <a:spcAft>
+                <a:spcPts val="0"/>
+              </a:spcAft>
+              <a:defRPr sz="2100">
+                <a:solidFill>
+                  <a:srgbClr val="20344A"/>
+                </a:solidFill>
+                <a:latin typeface="Arial"/>
+              </a:defRPr>
+              <a:buChar char="•"/>
+            </a:pPr>
+            <a:r>
+              <a:rPr sz="2100" b="0" i="0">
+                <a:solidFill>
+                  <a:srgbClr val="20344A"/>
+                </a:solidFill>
+                <a:latin typeface="Arial"/>
+              </a:rPr>
+              <a:t>Which code and input produced these outputs? Open the </a:t>
+            </a:r>
+            <a:br/>
+            <a:r>
+              <a:rPr sz="2100" b="0" i="0">
+                <a:solidFill>
+                  <a:srgbClr val="20344A"/>
+                </a:solidFill>
+                <a:latin typeface="Arial"/>
+              </a:rPr>
+              <a:t>commit and capture fingerprints, then explain environment </a:t>
+            </a:r>
+            <a:br/>
+            <a:r>
+              <a:rPr sz="2100" b="0" i="0">
+                <a:solidFill>
+                  <a:srgbClr val="20344A"/>
+                </a:solidFill>
+                <a:latin typeface="Arial"/>
+              </a:rPr>
+              <a:t>differences.</a:t>
+            </a:r>
+          </a:p>
+        </p:txBody>
+      </p:sp>
+      <p:sp>
+        <p:nvSpPr>
+          <p:cNvPr id="8" name="content:line-139:0"/>
+          <p:cNvSpPr txBox="1"/>
+          <p:nvPr/>
+        </p:nvSpPr>
+        <p:spPr>
+          <a:xfrm>
+            <a:off x="594360" y="3777996"/>
             <a:ext cx="11003279" cy="780288"/>
           </a:xfrm>
           <a:prstGeom prst="rect">
@@ -7199,7 +7066,7 @@
                 </a:solidFill>
                 <a:latin typeface="Arial"/>
               </a:rPr>
-              <a:t>Resume with the next group's live demo, evidence inspection, </a:t>
+              <a:t>Which fields compare exactly, and why is a derived value </a:t>
             </a:r>
             <a:br/>
             <a:r>
@@ -7209,20 +7076,20 @@
                 </a:solidFill>
                 <a:latin typeface="Arial"/>
               </a:rPr>
-              <a:t>and questions using the same S allocation.</a:t>
-            </a:r>
-          </a:p>
-        </p:txBody>
-      </p:sp>
-      <p:sp>
-        <p:nvSpPr>
-          <p:cNvPr id="8" name="content:line-142:0"/>
-          <p:cNvSpPr txBox="1"/>
-          <p:nvPr/>
-        </p:nvSpPr>
-        <p:spPr>
-          <a:xfrm>
-            <a:off x="594360" y="3425952"/>
+              <a:t>allowed tolerance? Open the comparison and its tests.</a:t>
+            </a:r>
+          </a:p>
+        </p:txBody>
+      </p:sp>
+      <p:sp>
+        <p:nvSpPr>
+          <p:cNvPr id="9" name="content:line-140:0"/>
+          <p:cNvSpPr txBox="1"/>
+          <p:nvPr/>
+        </p:nvSpPr>
+        <p:spPr>
+          <a:xfrm>
+            <a:off x="594360" y="4622292"/>
             <a:ext cx="11003279" cy="780288"/>
           </a:xfrm>
           <a:prstGeom prst="rect">
@@ -7261,7 +7128,7 @@
                 </a:solidFill>
                 <a:latin typeface="Arial"/>
               </a:rPr>
-              <a:t>Every group uses the same mandatory checklist; keep the </a:t>
+              <a:t>What did you change or ask a teammate to improve? Open your </a:t>
             </a:r>
             <a:br/>
             <a:r>
@@ -7271,7 +7138,7 @@
                 </a:solidFill>
                 <a:latin typeface="Arial"/>
               </a:rPr>
-              <a:t>reserved five-minute closing within the three hours.</a:t>
+              <a:t>PR or review and explain the result.</a:t>
             </a:r>
           </a:p>
         </p:txBody>
@@ -7385,14 +7252,14 @@
               </a:defRPr>
             </a:pPr>
             <a:r>
-              <a:t>SOURCE 16 / 16</a:t>
-            </a:r>
-          </a:p>
-        </p:txBody>
-      </p:sp>
-      <p:sp>
-        <p:nvSpPr>
-          <p:cNvPr id="4" name="title:line-146"/>
+              <a:t>SOURCE 16 / 17</a:t>
+            </a:r>
+          </a:p>
+        </p:txBody>
+      </p:sp>
+      <p:sp>
+        <p:nvSpPr>
+          <p:cNvPr id="4" name="title:line-144"/>
           <p:cNvSpPr txBox="1"/>
           <p:nvPr/>
         </p:nvSpPr>
@@ -7436,7 +7303,7 @@
                 </a:solidFill>
                 <a:latin typeface="Arial"/>
               </a:rPr>
-              <a:t>Closing: connect the engineering evidence</a:t>
+              <a:t>Shared break and remaining groups</a:t>
             </a:r>
           </a:p>
         </p:txBody>
@@ -7488,7 +7355,7 @@
       </p:sp>
       <p:sp>
         <p:nvSpPr>
-          <p:cNvPr id="6" name="content:line-148:0"/>
+          <p:cNvPr id="6" name="content:line-146:0"/>
           <p:cNvSpPr txBox="1"/>
           <p:nvPr/>
         </p:nvSpPr>
@@ -7533,7 +7400,7 @@
                 </a:solidFill>
                 <a:latin typeface="Arial"/>
               </a:rPr>
-              <a:t>Use the final five minutes to connect environment, package, </a:t>
+              <a:t>Take the reserved 15-minute break at the published slot </a:t>
             </a:r>
             <a:br/>
             <a:r>
@@ -7543,14 +7410,14 @@
                 </a:solidFill>
                 <a:latin typeface="Arial"/>
               </a:rPr>
-              <a:t>API/UI, containers, tests, comparisons, and peer review.</a:t>
-            </a:r>
-          </a:p>
-        </p:txBody>
-      </p:sp>
-      <p:sp>
-        <p:nvSpPr>
-          <p:cNvPr id="7" name="content:line-149:0"/>
+              <a:t>boundary.</a:t>
+            </a:r>
+          </a:p>
+        </p:txBody>
+      </p:sp>
+      <p:sp>
+        <p:nvSpPr>
+          <p:cNvPr id="7" name="content:line-147:0"/>
           <p:cNvSpPr txBox="1"/>
           <p:nvPr/>
         </p:nvSpPr>
@@ -7595,6 +7462,402 @@
                 </a:solidFill>
                 <a:latin typeface="Arial"/>
               </a:rPr>
+              <a:t>Resume with the next group's live demo, evidence inspection, </a:t>
+            </a:r>
+            <a:br/>
+            <a:r>
+              <a:rPr sz="2100" b="0" i="0">
+                <a:solidFill>
+                  <a:srgbClr val="20344A"/>
+                </a:solidFill>
+                <a:latin typeface="Arial"/>
+              </a:rPr>
+              <a:t>and questions using the same S allocation.</a:t>
+            </a:r>
+          </a:p>
+        </p:txBody>
+      </p:sp>
+      <p:sp>
+        <p:nvSpPr>
+          <p:cNvPr id="8" name="content:line-148:0"/>
+          <p:cNvSpPr txBox="1"/>
+          <p:nvPr/>
+        </p:nvSpPr>
+        <p:spPr>
+          <a:xfrm>
+            <a:off x="594360" y="3425952"/>
+            <a:ext cx="11003279" cy="780288"/>
+          </a:xfrm>
+          <a:prstGeom prst="rect">
+            <a:avLst/>
+          </a:prstGeom>
+          <a:noFill/>
+        </p:spPr>
+        <p:txBody>
+          <a:bodyPr wrap="none" anchor="t" lIns="88900" rIns="88900" tIns="38100" bIns="38100">
+            <a:noAutofit/>
+          </a:bodyPr>
+          <a:lstStyle/>
+          <a:p>
+            <a:pPr marL="279400" indent="-215900">
+              <a:lnSpc>
+                <a:spcPts val="2772"/>
+              </a:lnSpc>
+              <a:spcBef>
+                <a:spcPts val="0"/>
+              </a:spcBef>
+              <a:spcAft>
+                <a:spcPts val="0"/>
+              </a:spcAft>
+              <a:defRPr sz="2100">
+                <a:solidFill>
+                  <a:srgbClr val="20344A"/>
+                </a:solidFill>
+                <a:latin typeface="Arial"/>
+              </a:defRPr>
+              <a:buChar char="•"/>
+            </a:pPr>
+            <a:r>
+              <a:rPr sz="2100" b="0" i="0">
+                <a:solidFill>
+                  <a:srgbClr val="20344A"/>
+                </a:solidFill>
+                <a:latin typeface="Arial"/>
+              </a:rPr>
+              <a:t>Every group uses the same mandatory checklist; keep the </a:t>
+            </a:r>
+            <a:br/>
+            <a:r>
+              <a:rPr sz="2100" b="0" i="0">
+                <a:solidFill>
+                  <a:srgbClr val="20344A"/>
+                </a:solidFill>
+                <a:latin typeface="Arial"/>
+              </a:rPr>
+              <a:t>reserved five-minute closing within the three hours.</a:t>
+            </a:r>
+          </a:p>
+        </p:txBody>
+      </p:sp>
+    </p:spTree>
+  </p:cSld>
+  <p:clrMapOvr>
+    <a:masterClrMapping/>
+  </p:clrMapOvr>
+</p:sld>
+</file>
+
+<file path=ppt/slides/slide19.xml><?xml version="1.0" encoding="utf-8"?>
+<p:sld xmlns:a="http://schemas.openxmlformats.org/drawingml/2006/main" xmlns:p="http://schemas.openxmlformats.org/presentationml/2006/main" xmlns:r="http://schemas.openxmlformats.org/officeDocument/2006/relationships">
+  <p:cSld>
+    <p:bg>
+      <p:bgPr>
+        <a:solidFill>
+          <a:srgbClr val="FAFCFD"/>
+        </a:solidFill>
+        <a:effectLst/>
+      </p:bgPr>
+    </p:bg>
+    <p:spTree>
+      <p:nvGrpSpPr>
+        <p:cNvPr id="1" name=""/>
+        <p:cNvGrpSpPr/>
+        <p:nvPr/>
+      </p:nvGrpSpPr>
+      <p:grpSpPr/>
+      <p:sp>
+        <p:nvSpPr>
+          <p:cNvPr id="2" name="accent"/>
+          <p:cNvSpPr/>
+          <p:nvPr/>
+        </p:nvSpPr>
+        <p:spPr>
+          <a:xfrm>
+            <a:off x="0" y="0"/>
+            <a:ext cx="12191999" cy="64008"/>
+          </a:xfrm>
+          <a:prstGeom prst="rect">
+            <a:avLst/>
+          </a:prstGeom>
+          <a:solidFill>
+            <a:srgbClr val="007F82"/>
+          </a:solidFill>
+          <a:ln>
+            <a:noFill/>
+          </a:ln>
+        </p:spPr>
+        <p:style>
+          <a:lnRef idx="1">
+            <a:schemeClr val="accent1"/>
+          </a:lnRef>
+          <a:fillRef idx="3">
+            <a:schemeClr val="accent1"/>
+          </a:fillRef>
+          <a:effectRef idx="2">
+            <a:schemeClr val="accent1"/>
+          </a:effectRef>
+          <a:fontRef idx="minor">
+            <a:schemeClr val="lt1"/>
+          </a:fontRef>
+        </p:style>
+        <p:txBody>
+          <a:bodyPr rtlCol="0" anchor="ctr"/>
+          <a:lstStyle/>
+          <a:p>
+            <a:pPr algn="ctr"/>
+          </a:p>
+        </p:txBody>
+      </p:sp>
+      <p:sp>
+        <p:nvSpPr>
+          <p:cNvPr id="3" name="section"/>
+          <p:cNvSpPr txBox="1"/>
+          <p:nvPr/>
+        </p:nvSpPr>
+        <p:spPr>
+          <a:xfrm>
+            <a:off x="594360" y="201168"/>
+            <a:ext cx="11003279" cy="256032"/>
+          </a:xfrm>
+          <a:prstGeom prst="rect">
+            <a:avLst/>
+          </a:prstGeom>
+          <a:noFill/>
+        </p:spPr>
+        <p:txBody>
+          <a:bodyPr wrap="none" anchor="t" lIns="88900" rIns="88900" tIns="38100" bIns="38100">
+            <a:noAutofit/>
+          </a:bodyPr>
+          <a:lstStyle/>
+          <a:p>
+            <a:pPr>
+              <a:lnSpc>
+                <a:spcPts val="1452"/>
+              </a:lnSpc>
+              <a:spcBef>
+                <a:spcPts val="0"/>
+              </a:spcBef>
+              <a:spcAft>
+                <a:spcPts val="0"/>
+              </a:spcAft>
+              <a:defRPr sz="1100">
+                <a:solidFill>
+                  <a:srgbClr val="53677A"/>
+                </a:solidFill>
+                <a:latin typeface="Arial"/>
+              </a:defRPr>
+            </a:pPr>
+            <a:r>
+              <a:t>SOURCE 17 / 17</a:t>
+            </a:r>
+          </a:p>
+        </p:txBody>
+      </p:sp>
+      <p:sp>
+        <p:nvSpPr>
+          <p:cNvPr id="4" name="title:line-152"/>
+          <p:cNvSpPr txBox="1"/>
+          <p:nvPr/>
+        </p:nvSpPr>
+        <p:spPr>
+          <a:xfrm>
+            <a:off x="594360" y="530352"/>
+            <a:ext cx="11003279" cy="1161288"/>
+          </a:xfrm>
+          <a:prstGeom prst="rect">
+            <a:avLst/>
+          </a:prstGeom>
+          <a:noFill/>
+        </p:spPr>
+        <p:txBody>
+          <a:bodyPr wrap="none" anchor="t" lIns="88900" rIns="88900" tIns="38100" bIns="38100">
+            <a:noAutofit/>
+          </a:bodyPr>
+          <a:lstStyle/>
+          <a:p>
+            <a:pPr>
+              <a:lnSpc>
+                <a:spcPts val="4000"/>
+              </a:lnSpc>
+              <a:spcBef>
+                <a:spcPts val="0"/>
+              </a:spcBef>
+              <a:spcAft>
+                <a:spcPts val="0"/>
+              </a:spcAft>
+              <a:defRPr sz="3200">
+                <a:solidFill>
+                  <a:srgbClr val="20344A"/>
+                </a:solidFill>
+                <a:latin typeface="Arial"/>
+              </a:defRPr>
+            </a:pPr>
+            <a:r>
+              <a:rPr sz="3200" b="0" i="0">
+                <a:solidFill>
+                  <a:srgbClr val="20344A"/>
+                </a:solidFill>
+                <a:latin typeface="Arial"/>
+              </a:rPr>
+              <a:t>Closing: connect the engineering evidence</a:t>
+            </a:r>
+          </a:p>
+        </p:txBody>
+      </p:sp>
+      <p:sp>
+        <p:nvSpPr>
+          <p:cNvPr id="5" name="footer"/>
+          <p:cNvSpPr txBox="1"/>
+          <p:nvPr/>
+        </p:nvSpPr>
+        <p:spPr>
+          <a:xfrm>
+            <a:off x="594360" y="6510528"/>
+            <a:ext cx="11003279" cy="219456"/>
+          </a:xfrm>
+          <a:prstGeom prst="rect">
+            <a:avLst/>
+          </a:prstGeom>
+          <a:noFill/>
+        </p:spPr>
+        <p:txBody>
+          <a:bodyPr wrap="none" anchor="t" lIns="88900" rIns="88900" tIns="38100" bIns="38100">
+            <a:noAutofit/>
+          </a:bodyPr>
+          <a:lstStyle/>
+          <a:p>
+            <a:pPr>
+              <a:lnSpc>
+                <a:spcPts val="1320"/>
+              </a:lnSpc>
+              <a:spcBef>
+                <a:spcPts val="0"/>
+              </a:spcBef>
+              <a:spcAft>
+                <a:spcPts val="0"/>
+              </a:spcAft>
+              <a:defRPr sz="1000">
+                <a:solidFill>
+                  <a:srgbClr val="53677A"/>
+                </a:solidFill>
+                <a:latin typeface="Arial"/>
+              </a:defRPr>
+            </a:pPr>
+            <a:r>
+              <a:t>session-5.md   ·   19</a:t>
+            </a:r>
+          </a:p>
+        </p:txBody>
+      </p:sp>
+      <p:sp>
+        <p:nvSpPr>
+          <p:cNvPr id="6" name="content:line-154:0"/>
+          <p:cNvSpPr txBox="1"/>
+          <p:nvPr/>
+        </p:nvSpPr>
+        <p:spPr>
+          <a:xfrm>
+            <a:off x="594360" y="1737360"/>
+            <a:ext cx="11003279" cy="780288"/>
+          </a:xfrm>
+          <a:prstGeom prst="rect">
+            <a:avLst/>
+          </a:prstGeom>
+          <a:noFill/>
+        </p:spPr>
+        <p:txBody>
+          <a:bodyPr wrap="none" anchor="t" lIns="88900" rIns="88900" tIns="38100" bIns="38100">
+            <a:noAutofit/>
+          </a:bodyPr>
+          <a:lstStyle/>
+          <a:p>
+            <a:pPr marL="279400" indent="-215900">
+              <a:lnSpc>
+                <a:spcPts val="2772"/>
+              </a:lnSpc>
+              <a:spcBef>
+                <a:spcPts val="0"/>
+              </a:spcBef>
+              <a:spcAft>
+                <a:spcPts val="0"/>
+              </a:spcAft>
+              <a:defRPr sz="2100">
+                <a:solidFill>
+                  <a:srgbClr val="20344A"/>
+                </a:solidFill>
+                <a:latin typeface="Arial"/>
+              </a:defRPr>
+              <a:buChar char="•"/>
+            </a:pPr>
+            <a:r>
+              <a:rPr sz="2100" b="0" i="0">
+                <a:solidFill>
+                  <a:srgbClr val="20344A"/>
+                </a:solidFill>
+                <a:latin typeface="Arial"/>
+              </a:rPr>
+              <a:t>Use the final five minutes to connect environment, package, </a:t>
+            </a:r>
+            <a:br/>
+            <a:r>
+              <a:rPr sz="2100" b="0" i="0">
+                <a:solidFill>
+                  <a:srgbClr val="20344A"/>
+                </a:solidFill>
+                <a:latin typeface="Arial"/>
+              </a:rPr>
+              <a:t>API/UI, containers, tests, comparisons, and peer review.</a:t>
+            </a:r>
+          </a:p>
+        </p:txBody>
+      </p:sp>
+      <p:sp>
+        <p:nvSpPr>
+          <p:cNvPr id="7" name="content:line-155:0"/>
+          <p:cNvSpPr txBox="1"/>
+          <p:nvPr/>
+        </p:nvSpPr>
+        <p:spPr>
+          <a:xfrm>
+            <a:off x="594360" y="2581656"/>
+            <a:ext cx="11003279" cy="780288"/>
+          </a:xfrm>
+          <a:prstGeom prst="rect">
+            <a:avLst/>
+          </a:prstGeom>
+          <a:noFill/>
+        </p:spPr>
+        <p:txBody>
+          <a:bodyPr wrap="none" anchor="t" lIns="88900" rIns="88900" tIns="38100" bIns="38100">
+            <a:noAutofit/>
+          </a:bodyPr>
+          <a:lstStyle/>
+          <a:p>
+            <a:pPr marL="279400" indent="-215900">
+              <a:lnSpc>
+                <a:spcPts val="2772"/>
+              </a:lnSpc>
+              <a:spcBef>
+                <a:spcPts val="0"/>
+              </a:spcBef>
+              <a:spcAft>
+                <a:spcPts val="0"/>
+              </a:spcAft>
+              <a:defRPr sz="2100">
+                <a:solidFill>
+                  <a:srgbClr val="20344A"/>
+                </a:solidFill>
+                <a:latin typeface="Arial"/>
+              </a:defRPr>
+              <a:buChar char="•"/>
+            </a:pPr>
+            <a:r>
+              <a:rPr sz="2100" b="0" i="0">
+                <a:solidFill>
+                  <a:srgbClr val="20344A"/>
+                </a:solidFill>
+                <a:latin typeface="Arial"/>
+              </a:rPr>
               <a:t>Pass requires every mandatory group row and every student's </a:t>
             </a:r>
             <a:br/>
@@ -7612,7 +7875,7 @@
       </p:sp>
       <p:sp>
         <p:nvSpPr>
-          <p:cNvPr id="8" name="content:line-150:0"/>
+          <p:cNvPr id="8" name="content:line-156:0"/>
           <p:cNvSpPr txBox="1"/>
           <p:nvPr/>
         </p:nvSpPr>
@@ -7684,7 +7947,7 @@
       </p:sp>
       <p:sp>
         <p:nvSpPr>
-          <p:cNvPr id="9" name="content:line-151:0"/>
+          <p:cNvPr id="9" name="content:line-157:0"/>
           <p:cNvSpPr txBox="1"/>
           <p:nvPr/>
         </p:nvSpPr>
@@ -7891,7 +8154,7 @@
               </a:defRPr>
             </a:pPr>
             <a:r>
-              <a:t>SOURCE 2 / 16</a:t>
+              <a:t>SOURCE 2 / 17</a:t>
             </a:r>
           </a:p>
         </p:txBody>
@@ -7942,7 +8205,7 @@
                 </a:solidFill>
                 <a:latin typeface="Arial"/>
               </a:rPr>
-              <a:t>Our 180-minute showcase</a:t>
+              <a:t>Back at the bubble tea shop</a:t>
             </a:r>
           </a:p>
         </p:txBody>
@@ -8001,7 +8264,7 @@
         <p:spPr>
           <a:xfrm>
             <a:off x="594360" y="1737360"/>
-            <a:ext cx="11003279" cy="428244"/>
+            <a:ext cx="11003279" cy="780288"/>
           </a:xfrm>
           <a:prstGeom prst="rect">
             <a:avLst/>
@@ -8014,7 +8277,7 @@
           </a:bodyPr>
           <a:lstStyle/>
           <a:p>
-            <a:pPr marL="279400" indent="-215900">
+            <a:pPr>
               <a:lnSpc>
                 <a:spcPts val="2772"/>
               </a:lnSpc>
@@ -8030,264 +8293,25 @@
                 </a:solidFill>
                 <a:latin typeface="Arial"/>
               </a:defRPr>
-              <a:buChar char="•"/>
-            </a:pPr>
-            <a:r>
-              <a:rPr sz="2100" b="0" i="0">
-                <a:solidFill>
-                  <a:srgbClr val="20344A"/>
-                </a:solidFill>
-                <a:latin typeface="Arial"/>
-              </a:rPr>
-              <a:t>Opening brief: 10 minutes. Group slots: 150 minutes in total.</a:t>
-            </a:r>
-          </a:p>
-        </p:txBody>
-      </p:sp>
-      <p:sp>
-        <p:nvSpPr>
-          <p:cNvPr id="7" name="content:line-13:0"/>
-          <p:cNvSpPr txBox="1"/>
-          <p:nvPr/>
-        </p:nvSpPr>
-        <p:spPr>
-          <a:xfrm>
-            <a:off x="594360" y="2229612"/>
-            <a:ext cx="11003279" cy="780288"/>
-          </a:xfrm>
-          <a:prstGeom prst="rect">
-            <a:avLst/>
-          </a:prstGeom>
-          <a:noFill/>
-        </p:spPr>
-        <p:txBody>
-          <a:bodyPr wrap="none" anchor="t" lIns="88900" rIns="88900" tIns="38100" bIns="38100">
-            <a:noAutofit/>
-          </a:bodyPr>
-          <a:lstStyle/>
-          <a:p>
-            <a:pPr marL="279400" indent="-215900">
-              <a:lnSpc>
-                <a:spcPts val="2772"/>
-              </a:lnSpc>
-              <a:spcBef>
-                <a:spcPts val="0"/>
-              </a:spcBef>
-              <a:spcAft>
-                <a:spcPts val="0"/>
-              </a:spcAft>
-              <a:defRPr sz="2100">
-                <a:solidFill>
-                  <a:srgbClr val="20344A"/>
-                </a:solidFill>
-                <a:latin typeface="Arial"/>
-              </a:defRPr>
-              <a:buChar char="•"/>
-            </a:pPr>
-            <a:r>
-              <a:rPr sz="2100" b="0" i="0">
-                <a:solidFill>
-                  <a:srgbClr val="20344A"/>
-                </a:solidFill>
-                <a:latin typeface="Arial"/>
-              </a:rPr>
-              <a:t>Shared break: 15 minutes between group slots. Closing: 5 </a:t>
+            </a:pPr>
+            <a:r>
+              <a:rPr sz="2100" b="1" i="0">
+                <a:solidFill>
+                  <a:srgbClr val="20344A"/>
+                </a:solidFill>
+                <a:latin typeface="Arial"/>
+              </a:rPr>
+              <a:t>How would you prove to a customer that both shops make the </a:t>
             </a:r>
             <a:br/>
             <a:r>
-              <a:rPr sz="2100" b="0" i="0">
-                <a:solidFill>
-                  <a:srgbClr val="20344A"/>
-                </a:solidFill>
-                <a:latin typeface="Arial"/>
-              </a:rPr>
-              <a:t>minutes.</a:t>
-            </a:r>
-          </a:p>
-        </p:txBody>
-      </p:sp>
-      <p:sp>
-        <p:nvSpPr>
-          <p:cNvPr id="8" name="content:line-14:0"/>
-          <p:cNvSpPr txBox="1"/>
-          <p:nvPr/>
-        </p:nvSpPr>
-        <p:spPr>
-          <a:xfrm>
-            <a:off x="594360" y="3073908"/>
-            <a:ext cx="11003279" cy="780288"/>
-          </a:xfrm>
-          <a:prstGeom prst="rect">
-            <a:avLst/>
-          </a:prstGeom>
-          <a:noFill/>
-        </p:spPr>
-        <p:txBody>
-          <a:bodyPr wrap="none" anchor="t" lIns="88900" rIns="88900" tIns="38100" bIns="38100">
-            <a:noAutofit/>
-          </a:bodyPr>
-          <a:lstStyle/>
-          <a:p>
-            <a:pPr marL="279400" indent="-215900">
-              <a:lnSpc>
-                <a:spcPts val="2772"/>
-              </a:lnSpc>
-              <a:spcBef>
-                <a:spcPts val="0"/>
-              </a:spcBef>
-              <a:spcAft>
-                <a:spcPts val="0"/>
-              </a:spcAft>
-              <a:defRPr sz="2100">
-                <a:solidFill>
-                  <a:srgbClr val="20344A"/>
-                </a:solidFill>
-                <a:latin typeface="Arial"/>
-              </a:defRPr>
-              <a:buChar char="•"/>
-            </a:pPr>
-            <a:r>
-              <a:rPr sz="2100" b="0" i="0">
-                <a:solidFill>
-                  <a:srgbClr val="20344A"/>
-                </a:solidFill>
-                <a:latin typeface="Arial"/>
-              </a:rPr>
-              <a:t>Let G be the actual number of groups; each slot is S = 150 / G </a:t>
-            </a:r>
-            <a:br/>
-            <a:r>
-              <a:rPr sz="2100" b="0" i="0">
-                <a:solidFill>
-                  <a:srgbClr val="20344A"/>
-                </a:solidFill>
-                <a:latin typeface="Arial"/>
-              </a:rPr>
-              <a:t>minutes.</a:t>
-            </a:r>
-          </a:p>
-        </p:txBody>
-      </p:sp>
-      <p:sp>
-        <p:nvSpPr>
-          <p:cNvPr id="9" name="content:line-15:0"/>
-          <p:cNvSpPr txBox="1"/>
-          <p:nvPr/>
-        </p:nvSpPr>
-        <p:spPr>
-          <a:xfrm>
-            <a:off x="594360" y="3918204"/>
-            <a:ext cx="11003279" cy="428244"/>
-          </a:xfrm>
-          <a:prstGeom prst="rect">
-            <a:avLst/>
-          </a:prstGeom>
-          <a:noFill/>
-        </p:spPr>
-        <p:txBody>
-          <a:bodyPr wrap="none" anchor="t" lIns="88900" rIns="88900" tIns="38100" bIns="38100">
-            <a:noAutofit/>
-          </a:bodyPr>
-          <a:lstStyle/>
-          <a:p>
-            <a:pPr marL="279400" indent="-215900">
-              <a:lnSpc>
-                <a:spcPts val="2772"/>
-              </a:lnSpc>
-              <a:spcBef>
-                <a:spcPts val="0"/>
-              </a:spcBef>
-              <a:spcAft>
-                <a:spcPts val="0"/>
-              </a:spcAft>
-              <a:defRPr sz="2100">
-                <a:solidFill>
-                  <a:srgbClr val="20344A"/>
-                </a:solidFill>
-                <a:latin typeface="Arial"/>
-              </a:defRPr>
-              <a:buChar char="•"/>
-            </a:pPr>
-            <a:r>
-              <a:rPr sz="2100" b="0" i="0">
-                <a:solidFill>
-                  <a:srgbClr val="20344A"/>
-                </a:solidFill>
-                <a:latin typeface="Arial"/>
-              </a:rPr>
-              <a:t>Total: 10 + G * S + 15 + 5 = 180 minutes.</a:t>
-            </a:r>
-          </a:p>
-        </p:txBody>
-      </p:sp>
-      <p:sp>
-        <p:nvSpPr>
-          <p:cNvPr id="10" name="content:line-16:0"/>
-          <p:cNvSpPr txBox="1"/>
-          <p:nvPr/>
-        </p:nvSpPr>
-        <p:spPr>
-          <a:xfrm>
-            <a:off x="594360" y="4410456"/>
-            <a:ext cx="11003279" cy="1132332"/>
-          </a:xfrm>
-          <a:prstGeom prst="rect">
-            <a:avLst/>
-          </a:prstGeom>
-          <a:noFill/>
-        </p:spPr>
-        <p:txBody>
-          <a:bodyPr wrap="none" anchor="t" lIns="88900" rIns="88900" tIns="38100" bIns="38100">
-            <a:noAutofit/>
-          </a:bodyPr>
-          <a:lstStyle/>
-          <a:p>
-            <a:pPr marL="279400" indent="-215900">
-              <a:lnSpc>
-                <a:spcPts val="2772"/>
-              </a:lnSpc>
-              <a:spcBef>
-                <a:spcPts val="0"/>
-              </a:spcBef>
-              <a:spcAft>
-                <a:spcPts val="0"/>
-              </a:spcAft>
-              <a:defRPr sz="2100">
-                <a:solidFill>
-                  <a:srgbClr val="20344A"/>
-                </a:solidFill>
-                <a:latin typeface="Arial"/>
-              </a:defRPr>
-              <a:buChar char="•"/>
-            </a:pPr>
-            <a:r>
-              <a:rPr sz="2100" b="0" i="0">
-                <a:solidFill>
-                  <a:srgbClr val="20344A"/>
-                </a:solidFill>
-                <a:latin typeface="Arial"/>
-              </a:rPr>
-              <a:t>Publish start/end times once G is known; keep fractional </a:t>
-            </a:r>
-            <a:br/>
-            <a:r>
-              <a:rPr sz="2100" b="0" i="0">
-                <a:solidFill>
-                  <a:srgbClr val="20344A"/>
-                </a:solidFill>
-                <a:latin typeface="Arial"/>
-              </a:rPr>
-              <a:t>minutes or use seconds. Include startup and transitions inside </a:t>
-            </a:r>
-            <a:br/>
-            <a:r>
-              <a:rPr sz="2100" b="0" i="0">
-                <a:solidFill>
-                  <a:srgbClr val="20344A"/>
-                </a:solidFill>
-                <a:latin typeface="Arial"/>
-              </a:rPr>
-              <a:t>slots.</a:t>
+              <a:rPr sz="2100" b="1" i="0">
+                <a:solidFill>
+                  <a:srgbClr val="20344A"/>
+                </a:solidFill>
+                <a:latin typeface="Arial"/>
+              </a:rPr>
+              <a:t>same tea?</a:t>
             </a:r>
           </a:p>
         </p:txBody>
@@ -8401,14 +8425,14 @@
               </a:defRPr>
             </a:pPr>
             <a:r>
-              <a:t>SOURCE 3 / 16</a:t>
-            </a:r>
-          </a:p>
-        </p:txBody>
-      </p:sp>
-      <p:sp>
-        <p:nvSpPr>
-          <p:cNvPr id="4" name="title:line-20"/>
+              <a:t>SOURCE 3 / 17</a:t>
+            </a:r>
+          </a:p>
+        </p:txBody>
+      </p:sp>
+      <p:sp>
+        <p:nvSpPr>
+          <p:cNvPr id="4" name="title:line-16"/>
           <p:cNvSpPr txBox="1"/>
           <p:nvPr/>
         </p:nvSpPr>
@@ -8452,7 +8476,7 @@
                 </a:solidFill>
                 <a:latin typeface="Arial"/>
               </a:rPr>
-              <a:t>Use your group slot</a:t>
+              <a:t>Our 180-minute showcase</a:t>
             </a:r>
           </a:p>
         </p:txBody>
@@ -8504,13 +8528,65 @@
       </p:sp>
       <p:sp>
         <p:nvSpPr>
-          <p:cNvPr id="6" name="content:line-22:0"/>
+          <p:cNvPr id="6" name="content:line-18:0"/>
           <p:cNvSpPr txBox="1"/>
           <p:nvPr/>
         </p:nvSpPr>
         <p:spPr>
           <a:xfrm>
             <a:off x="594360" y="1737360"/>
+            <a:ext cx="11003279" cy="428244"/>
+          </a:xfrm>
+          <a:prstGeom prst="rect">
+            <a:avLst/>
+          </a:prstGeom>
+          <a:noFill/>
+        </p:spPr>
+        <p:txBody>
+          <a:bodyPr wrap="none" anchor="t" lIns="88900" rIns="88900" tIns="38100" bIns="38100">
+            <a:noAutofit/>
+          </a:bodyPr>
+          <a:lstStyle/>
+          <a:p>
+            <a:pPr marL="279400" indent="-215900">
+              <a:lnSpc>
+                <a:spcPts val="2772"/>
+              </a:lnSpc>
+              <a:spcBef>
+                <a:spcPts val="0"/>
+              </a:spcBef>
+              <a:spcAft>
+                <a:spcPts val="0"/>
+              </a:spcAft>
+              <a:defRPr sz="2100">
+                <a:solidFill>
+                  <a:srgbClr val="20344A"/>
+                </a:solidFill>
+                <a:latin typeface="Arial"/>
+              </a:defRPr>
+              <a:buChar char="•"/>
+            </a:pPr>
+            <a:r>
+              <a:rPr sz="2100" b="0" i="0">
+                <a:solidFill>
+                  <a:srgbClr val="20344A"/>
+                </a:solidFill>
+                <a:latin typeface="Arial"/>
+              </a:rPr>
+              <a:t>Opening brief: 10 minutes. Group slots: 150 minutes in total.</a:t>
+            </a:r>
+          </a:p>
+        </p:txBody>
+      </p:sp>
+      <p:sp>
+        <p:nvSpPr>
+          <p:cNvPr id="7" name="content:line-19:0"/>
+          <p:cNvSpPr txBox="1"/>
+          <p:nvPr/>
+        </p:nvSpPr>
+        <p:spPr>
+          <a:xfrm>
+            <a:off x="594360" y="2229612"/>
             <a:ext cx="11003279" cy="780288"/>
           </a:xfrm>
           <a:prstGeom prst="rect">
@@ -8549,7 +8625,7 @@
                 </a:solidFill>
                 <a:latin typeface="Arial"/>
               </a:rPr>
-              <a:t>S / 2: live demo, including startup, CSV processing, and </a:t>
+              <a:t>Shared break: 15 minutes between group slots. Closing: 5 </a:t>
             </a:r>
             <a:br/>
             <a:r>
@@ -8559,20 +8635,20 @@
                 </a:solidFill>
                 <a:latin typeface="Arial"/>
               </a:rPr>
-              <a:t>invalid-input rejection.</a:t>
-            </a:r>
-          </a:p>
-        </p:txBody>
-      </p:sp>
-      <p:sp>
-        <p:nvSpPr>
-          <p:cNvPr id="7" name="content:line-23:0"/>
-          <p:cNvSpPr txBox="1"/>
-          <p:nvPr/>
-        </p:nvSpPr>
-        <p:spPr>
-          <a:xfrm>
-            <a:off x="594360" y="2581656"/>
+              <a:t>minutes.</a:t>
+            </a:r>
+          </a:p>
+        </p:txBody>
+      </p:sp>
+      <p:sp>
+        <p:nvSpPr>
+          <p:cNvPr id="8" name="content:line-20:0"/>
+          <p:cNvSpPr txBox="1"/>
+          <p:nvPr/>
+        </p:nvSpPr>
+        <p:spPr>
+          <a:xfrm>
+            <a:off x="594360" y="3073908"/>
             <a:ext cx="11003279" cy="780288"/>
           </a:xfrm>
           <a:prstGeom prst="rect">
@@ -8611,7 +8687,7 @@
                 </a:solidFill>
                 <a:latin typeface="Arial"/>
               </a:rPr>
-              <a:t>S / 3: inspect environment, tests, CI, comparisons, and </a:t>
+              <a:t>Let G be the actual number of groups; each slot is S = 150 / G </a:t>
             </a:r>
             <a:br/>
             <a:r>
@@ -8621,21 +8697,21 @@
                 </a:solidFill>
                 <a:latin typeface="Arial"/>
               </a:rPr>
-              <a:t>collaboration evidence.</a:t>
-            </a:r>
-          </a:p>
-        </p:txBody>
-      </p:sp>
-      <p:sp>
-        <p:nvSpPr>
-          <p:cNvPr id="8" name="content:line-24:0"/>
-          <p:cNvSpPr txBox="1"/>
-          <p:nvPr/>
-        </p:nvSpPr>
-        <p:spPr>
-          <a:xfrm>
-            <a:off x="594360" y="3425952"/>
-            <a:ext cx="11003279" cy="780288"/>
+              <a:t>minutes.</a:t>
+            </a:r>
+          </a:p>
+        </p:txBody>
+      </p:sp>
+      <p:sp>
+        <p:nvSpPr>
+          <p:cNvPr id="9" name="content:line-21:0"/>
+          <p:cNvSpPr txBox="1"/>
+          <p:nvPr/>
+        </p:nvSpPr>
+        <p:spPr>
+          <a:xfrm>
+            <a:off x="594360" y="3918204"/>
+            <a:ext cx="11003279" cy="428244"/>
           </a:xfrm>
           <a:prstGeom prst="rect">
             <a:avLst/>
@@ -8673,7 +8749,59 @@
                 </a:solidFill>
                 <a:latin typeface="Arial"/>
               </a:rPr>
-              <a:t>S / 6: questions, including individual explanations; every </a:t>
+              <a:t>Total: 10 + G * S + 15 + 5 = 180 minutes.</a:t>
+            </a:r>
+          </a:p>
+        </p:txBody>
+      </p:sp>
+      <p:sp>
+        <p:nvSpPr>
+          <p:cNvPr id="10" name="content:line-22:0"/>
+          <p:cNvSpPr txBox="1"/>
+          <p:nvPr/>
+        </p:nvSpPr>
+        <p:spPr>
+          <a:xfrm>
+            <a:off x="594360" y="4410456"/>
+            <a:ext cx="11003279" cy="1132332"/>
+          </a:xfrm>
+          <a:prstGeom prst="rect">
+            <a:avLst/>
+          </a:prstGeom>
+          <a:noFill/>
+        </p:spPr>
+        <p:txBody>
+          <a:bodyPr wrap="none" anchor="t" lIns="88900" rIns="88900" tIns="38100" bIns="38100">
+            <a:noAutofit/>
+          </a:bodyPr>
+          <a:lstStyle/>
+          <a:p>
+            <a:pPr marL="279400" indent="-215900">
+              <a:lnSpc>
+                <a:spcPts val="2772"/>
+              </a:lnSpc>
+              <a:spcBef>
+                <a:spcPts val="0"/>
+              </a:spcBef>
+              <a:spcAft>
+                <a:spcPts val="0"/>
+              </a:spcAft>
+              <a:defRPr sz="2100">
+                <a:solidFill>
+                  <a:srgbClr val="20344A"/>
+                </a:solidFill>
+                <a:latin typeface="Arial"/>
+              </a:defRPr>
+              <a:buChar char="•"/>
+            </a:pPr>
+            <a:r>
+              <a:rPr sz="2100" b="0" i="0">
+                <a:solidFill>
+                  <a:srgbClr val="20344A"/>
+                </a:solidFill>
+                <a:latin typeface="Arial"/>
+              </a:rPr>
+              <a:t>Publish start/end times once G is known; keep fractional </a:t>
             </a:r>
             <a:br/>
             <a:r>
@@ -8683,59 +8811,7 @@
                 </a:solidFill>
                 <a:latin typeface="Arial"/>
               </a:rPr>
-              <a:t>member speaks.</a:t>
-            </a:r>
-          </a:p>
-        </p:txBody>
-      </p:sp>
-      <p:sp>
-        <p:nvSpPr>
-          <p:cNvPr id="9" name="content:line-25:0"/>
-          <p:cNvSpPr txBox="1"/>
-          <p:nvPr/>
-        </p:nvSpPr>
-        <p:spPr>
-          <a:xfrm>
-            <a:off x="594360" y="4270248"/>
-            <a:ext cx="11003279" cy="780288"/>
-          </a:xfrm>
-          <a:prstGeom prst="rect">
-            <a:avLst/>
-          </a:prstGeom>
-          <a:noFill/>
-        </p:spPr>
-        <p:txBody>
-          <a:bodyPr wrap="none" anchor="t" lIns="88900" rIns="88900" tIns="38100" bIns="38100">
-            <a:noAutofit/>
-          </a:bodyPr>
-          <a:lstStyle/>
-          <a:p>
-            <a:pPr marL="279400" indent="-215900">
-              <a:lnSpc>
-                <a:spcPts val="2772"/>
-              </a:lnSpc>
-              <a:spcBef>
-                <a:spcPts val="0"/>
-              </a:spcBef>
-              <a:spcAft>
-                <a:spcPts val="0"/>
-              </a:spcAft>
-              <a:defRPr sz="2100">
-                <a:solidFill>
-                  <a:srgbClr val="20344A"/>
-                </a:solidFill>
-                <a:latin typeface="Arial"/>
-              </a:defRPr>
-              <a:buChar char="•"/>
-            </a:pPr>
-            <a:r>
-              <a:rPr sz="2100" b="0" i="0">
-                <a:solidFill>
-                  <a:srgbClr val="20344A"/>
-                </a:solidFill>
-                <a:latin typeface="Arial"/>
-              </a:rPr>
-              <a:t>These fractions sum to S. Open evidence promptly and keep </a:t>
+              <a:t>minutes or use seconds. Include startup and transitions inside </a:t>
             </a:r>
             <a:br/>
             <a:r>
@@ -8745,7 +8821,7 @@
                 </a:solidFill>
                 <a:latin typeface="Arial"/>
               </a:rPr>
-              <a:t>transitions within your slot.</a:t>
+              <a:t>slots.</a:t>
             </a:r>
           </a:p>
         </p:txBody>
@@ -8859,14 +8935,14 @@
               </a:defRPr>
             </a:pPr>
             <a:r>
-              <a:t>SOURCE 4 / 16</a:t>
-            </a:r>
-          </a:p>
-        </p:txBody>
-      </p:sp>
-      <p:sp>
-        <p:nvSpPr>
-          <p:cNvPr id="4" name="title:line-29"/>
+              <a:t>SOURCE 4 / 17</a:t>
+            </a:r>
+          </a:p>
+        </p:txBody>
+      </p:sp>
+      <p:sp>
+        <p:nvSpPr>
+          <p:cNvPr id="4" name="title:line-26"/>
           <p:cNvSpPr txBox="1"/>
           <p:nvPr/>
         </p:nvSpPr>
@@ -8910,7 +8986,7 @@
                 </a:solidFill>
                 <a:latin typeface="Arial"/>
               </a:rPr>
-              <a:t>Final-only pass/fail assessment</a:t>
+              <a:t>Use your group slot</a:t>
             </a:r>
           </a:p>
         </p:txBody>
@@ -8962,7 +9038,7 @@
       </p:sp>
       <p:sp>
         <p:nvSpPr>
-          <p:cNvPr id="6" name="content:line-31:0"/>
+          <p:cNvPr id="6" name="content:line-28:0"/>
           <p:cNvSpPr txBox="1"/>
           <p:nvPr/>
         </p:nvSpPr>
@@ -9007,7 +9083,7 @@
                 </a:solidFill>
                 <a:latin typeface="Arial"/>
               </a:rPr>
-              <a:t>Every engineering requirement and every student's </a:t>
+              <a:t>S / 2: live demo, including startup, CSV processing, and </a:t>
             </a:r>
             <a:br/>
             <a:r>
@@ -9017,21 +9093,21 @@
                 </a:solidFill>
                 <a:latin typeface="Arial"/>
               </a:rPr>
-              <a:t>participation requirement is mandatory; no weighted grades.</a:t>
-            </a:r>
-          </a:p>
-        </p:txBody>
-      </p:sp>
-      <p:sp>
-        <p:nvSpPr>
-          <p:cNvPr id="7" name="content:line-32:0"/>
+              <a:t>invalid-input rejection.</a:t>
+            </a:r>
+          </a:p>
+        </p:txBody>
+      </p:sp>
+      <p:sp>
+        <p:nvSpPr>
+          <p:cNvPr id="7" name="content:line-29:0"/>
           <p:cNvSpPr txBox="1"/>
           <p:nvPr/>
         </p:nvSpPr>
         <p:spPr>
           <a:xfrm>
             <a:off x="594360" y="2581656"/>
-            <a:ext cx="11003279" cy="1132332"/>
+            <a:ext cx="11003279" cy="780288"/>
           </a:xfrm>
           <a:prstGeom prst="rect">
             <a:avLst/>
@@ -9069,7 +9145,7 @@
                 </a:solidFill>
                 <a:latin typeface="Arial"/>
               </a:rPr>
-              <a:t>Assessment happens only at this presentation. The result is </a:t>
+              <a:t>S / 3: inspect environment, tests, CI, comparisons, and </a:t>
             </a:r>
             <a:br/>
             <a:r>
@@ -9079,7 +9155,59 @@
                 </a:solidFill>
                 <a:latin typeface="Arial"/>
               </a:rPr>
-              <a:t>final: no separate submission, resubmission, reassessment, or </a:t>
+              <a:t>collaboration evidence.</a:t>
+            </a:r>
+          </a:p>
+        </p:txBody>
+      </p:sp>
+      <p:sp>
+        <p:nvSpPr>
+          <p:cNvPr id="8" name="content:line-30:0"/>
+          <p:cNvSpPr txBox="1"/>
+          <p:nvPr/>
+        </p:nvSpPr>
+        <p:spPr>
+          <a:xfrm>
+            <a:off x="594360" y="3425952"/>
+            <a:ext cx="11003279" cy="780288"/>
+          </a:xfrm>
+          <a:prstGeom prst="rect">
+            <a:avLst/>
+          </a:prstGeom>
+          <a:noFill/>
+        </p:spPr>
+        <p:txBody>
+          <a:bodyPr wrap="none" anchor="t" lIns="88900" rIns="88900" tIns="38100" bIns="38100">
+            <a:noAutofit/>
+          </a:bodyPr>
+          <a:lstStyle/>
+          <a:p>
+            <a:pPr marL="279400" indent="-215900">
+              <a:lnSpc>
+                <a:spcPts val="2772"/>
+              </a:lnSpc>
+              <a:spcBef>
+                <a:spcPts val="0"/>
+              </a:spcBef>
+              <a:spcAft>
+                <a:spcPts val="0"/>
+              </a:spcAft>
+              <a:defRPr sz="2100">
+                <a:solidFill>
+                  <a:srgbClr val="20344A"/>
+                </a:solidFill>
+                <a:latin typeface="Arial"/>
+              </a:defRPr>
+              <a:buChar char="•"/>
+            </a:pPr>
+            <a:r>
+              <a:rPr sz="2100" b="0" i="0">
+                <a:solidFill>
+                  <a:srgbClr val="20344A"/>
+                </a:solidFill>
+                <a:latin typeface="Arial"/>
+              </a:rPr>
+              <a:t>S / 6: questions, including individual explanations; every </a:t>
             </a:r>
             <a:br/>
             <a:r>
@@ -9089,21 +9217,21 @@
                 </a:solidFill>
                 <a:latin typeface="Arial"/>
               </a:rPr>
-              <a:t>later retry.</a:t>
-            </a:r>
-          </a:p>
-        </p:txBody>
-      </p:sp>
-      <p:sp>
-        <p:nvSpPr>
-          <p:cNvPr id="8" name="content:line-33:0"/>
-          <p:cNvSpPr txBox="1"/>
-          <p:nvPr/>
-        </p:nvSpPr>
-        <p:spPr>
-          <a:xfrm>
-            <a:off x="594360" y="3777996"/>
-            <a:ext cx="11003279" cy="1132332"/>
+              <a:t>member speaks.</a:t>
+            </a:r>
+          </a:p>
+        </p:txBody>
+      </p:sp>
+      <p:sp>
+        <p:nvSpPr>
+          <p:cNvPr id="9" name="content:line-31:0"/>
+          <p:cNvSpPr txBox="1"/>
+          <p:nvPr/>
+        </p:nvSpPr>
+        <p:spPr>
+          <a:xfrm>
+            <a:off x="594360" y="4270248"/>
+            <a:ext cx="11003279" cy="780288"/>
           </a:xfrm>
           <a:prstGeom prst="rect">
             <a:avLst/>
@@ -9141,7 +9269,7 @@
                 </a:solidFill>
                 <a:latin typeface="Arial"/>
               </a:rPr>
-              <a:t>Homework and checkpoints were preparation. Modeling is </a:t>
+              <a:t>These fractions sum to S. Open evidence promptly and keep </a:t>
             </a:r>
             <a:br/>
             <a:r>
@@ -9151,98 +9279,7 @@
                 </a:solidFill>
                 <a:latin typeface="Arial"/>
               </a:rPr>
-              <a:t>optional; scientific correctness, conclusions, model </a:t>
-            </a:r>
-            <a:br/>
-            <a:r>
-              <a:rPr sz="2100" b="0" i="0">
-                <a:solidFill>
-                  <a:srgbClr val="20344A"/>
-                </a:solidFill>
-                <a:latin typeface="Arial"/>
-              </a:rPr>
-              <a:t>complexity, and UI polish are not graded.</a:t>
-            </a:r>
-          </a:p>
-        </p:txBody>
-      </p:sp>
-      <p:sp>
-        <p:nvSpPr>
-          <p:cNvPr id="9" name="content:line-34:0"/>
-          <p:cNvSpPr txBox="1"/>
-          <p:nvPr/>
-        </p:nvSpPr>
-        <p:spPr>
-          <a:xfrm>
-            <a:off x="594360" y="4974336"/>
-            <a:ext cx="11003279" cy="780288"/>
-          </a:xfrm>
-          <a:prstGeom prst="rect">
-            <a:avLst/>
-          </a:prstGeom>
-          <a:noFill/>
-        </p:spPr>
-        <p:txBody>
-          <a:bodyPr wrap="none" anchor="t" lIns="88900" rIns="88900" tIns="38100" bIns="38100">
-            <a:noAutofit/>
-          </a:bodyPr>
-          <a:lstStyle/>
-          <a:p>
-            <a:pPr marL="279400" indent="-215900">
-              <a:lnSpc>
-                <a:spcPts val="2772"/>
-              </a:lnSpc>
-              <a:spcBef>
-                <a:spcPts val="0"/>
-              </a:spcBef>
-              <a:spcAft>
-                <a:spcPts val="0"/>
-              </a:spcAft>
-              <a:defRPr sz="2100">
-                <a:solidFill>
-                  <a:srgbClr val="20344A"/>
-                </a:solidFill>
-                <a:latin typeface="Arial"/>
-              </a:defRPr>
-              <a:buChar char="•"/>
-            </a:pPr>
-            <a:r>
-              <a:rPr sz="2100" b="0" i="0">
-                <a:solidFill>
-                  <a:srgbClr val="20344A"/>
-                </a:solidFill>
-                <a:latin typeface="Arial"/>
-              </a:rPr>
-              <a:t>Tests and comparisons must still check your declared </a:t>
-            </a:r>
-            <a:br/>
-            <a:r>
-              <a:rPr sz="2100" b="0" i="0">
-                <a:solidFill>
-                  <a:srgbClr val="20344A"/>
-                </a:solidFill>
-                <a:latin typeface="Arial"/>
-              </a:rPr>
-              <a:t>processing behavior. See the </a:t>
-            </a:r>
-            <a:r>
-              <a:rPr sz="2100" b="0" i="0">
-                <a:solidFill>
-                  <a:srgbClr val="007F82"/>
-                </a:solidFill>
-                <a:latin typeface="Arial"/>
-                <a:hlinkClick r:id="rId2"/>
-              </a:rPr>
-              <a:t>assessment policy</a:t>
-            </a:r>
-            <a:r>
-              <a:rPr sz="2100" b="0" i="0">
-                <a:solidFill>
-                  <a:srgbClr val="20344A"/>
-                </a:solidFill>
-                <a:latin typeface="Arial"/>
-              </a:rPr>
-              <a:t>.</a:t>
+              <a:t>transitions within your slot.</a:t>
             </a:r>
           </a:p>
         </p:txBody>
@@ -9356,14 +9393,14 @@
               </a:defRPr>
             </a:pPr>
             <a:r>
-              <a:t>SOURCE 5 / 16</a:t>
-            </a:r>
-          </a:p>
-        </p:txBody>
-      </p:sp>
-      <p:sp>
-        <p:nvSpPr>
-          <p:cNvPr id="4" name="title:line-38"/>
+              <a:t>SOURCE 5 / 17</a:t>
+            </a:r>
+          </a:p>
+        </p:txBody>
+      </p:sp>
+      <p:sp>
+        <p:nvSpPr>
+          <p:cNvPr id="4" name="title:line-35"/>
           <p:cNvSpPr txBox="1"/>
           <p:nvPr/>
         </p:nvSpPr>
@@ -9407,7 +9444,7 @@
                 </a:solidFill>
                 <a:latin typeface="Arial"/>
               </a:rPr>
-              <a:t>Briefing: open the actual evidence</a:t>
+              <a:t>Final-only pass/fail assessment</a:t>
             </a:r>
           </a:p>
         </p:txBody>
@@ -9459,7 +9496,7 @@
       </p:sp>
       <p:sp>
         <p:nvSpPr>
-          <p:cNvPr id="6" name="content:line-40:0"/>
+          <p:cNvPr id="6" name="content:line-37:0"/>
           <p:cNvSpPr txBox="1"/>
           <p:nvPr/>
         </p:nvSpPr>
@@ -9504,7 +9541,7 @@
                 </a:solidFill>
                 <a:latin typeface="Arial"/>
               </a:rPr>
-              <a:t>Instructor demonstrates navigation using the completed </a:t>
+              <a:t>Every engineering requirement and every student's </a:t>
             </a:r>
             <a:br/>
             <a:r>
@@ -9514,14 +9551,14 @@
                 </a:solidFill>
                 <a:latin typeface="Arial"/>
               </a:rPr>
-              <a:t>synthetic example; groups then show their own work.</a:t>
-            </a:r>
-          </a:p>
-        </p:txBody>
-      </p:sp>
-      <p:sp>
-        <p:nvSpPr>
-          <p:cNvPr id="7" name="content:line-41:0"/>
+              <a:t>participation requirement is mandatory; no weighted grades.</a:t>
+            </a:r>
+          </a:p>
+        </p:txBody>
+      </p:sp>
+      <p:sp>
+        <p:nvSpPr>
+          <p:cNvPr id="7" name="content:line-38:0"/>
           <p:cNvSpPr txBox="1"/>
           <p:nvPr/>
         </p:nvSpPr>
@@ -9566,7 +9603,7 @@
                 </a:solidFill>
                 <a:latin typeface="Arial"/>
               </a:rPr>
-              <a:t>Open README evidence links: tested commit SHA, CI run, </a:t>
+              <a:t>Assessment happens only at this presentation. The result is </a:t>
             </a:r>
             <a:br/>
             <a:r>
@@ -9576,7 +9613,7 @@
                 </a:solidFill>
                 <a:latin typeface="Arial"/>
               </a:rPr>
-              <a:t>captures/logs, authored PRs, and review permalinks. A SHA </a:t>
+              <a:t>final: no separate submission, resubmission, reassessment, or </a:t>
             </a:r>
             <a:br/>
             <a:r>
@@ -9586,20 +9623,92 @@
                 </a:solidFill>
                 <a:latin typeface="Arial"/>
               </a:rPr>
-              <a:t>identifies a code version.</a:t>
-            </a:r>
-          </a:p>
-        </p:txBody>
-      </p:sp>
-      <p:sp>
-        <p:nvSpPr>
-          <p:cNvPr id="8" name="content:line-42:0"/>
+              <a:t>later retry.</a:t>
+            </a:r>
+          </a:p>
+        </p:txBody>
+      </p:sp>
+      <p:sp>
+        <p:nvSpPr>
+          <p:cNvPr id="8" name="content:line-39:0"/>
           <p:cNvSpPr txBox="1"/>
           <p:nvPr/>
         </p:nvSpPr>
         <p:spPr>
           <a:xfrm>
             <a:off x="594360" y="3777996"/>
+            <a:ext cx="11003279" cy="1132332"/>
+          </a:xfrm>
+          <a:prstGeom prst="rect">
+            <a:avLst/>
+          </a:prstGeom>
+          <a:noFill/>
+        </p:spPr>
+        <p:txBody>
+          <a:bodyPr wrap="none" anchor="t" lIns="88900" rIns="88900" tIns="38100" bIns="38100">
+            <a:noAutofit/>
+          </a:bodyPr>
+          <a:lstStyle/>
+          <a:p>
+            <a:pPr marL="279400" indent="-215900">
+              <a:lnSpc>
+                <a:spcPts val="2772"/>
+              </a:lnSpc>
+              <a:spcBef>
+                <a:spcPts val="0"/>
+              </a:spcBef>
+              <a:spcAft>
+                <a:spcPts val="0"/>
+              </a:spcAft>
+              <a:defRPr sz="2100">
+                <a:solidFill>
+                  <a:srgbClr val="20344A"/>
+                </a:solidFill>
+                <a:latin typeface="Arial"/>
+              </a:defRPr>
+              <a:buChar char="•"/>
+            </a:pPr>
+            <a:r>
+              <a:rPr sz="2100" b="0" i="0">
+                <a:solidFill>
+                  <a:srgbClr val="20344A"/>
+                </a:solidFill>
+                <a:latin typeface="Arial"/>
+              </a:rPr>
+              <a:t>Homework and checkpoints were preparation. Modeling is </a:t>
+            </a:r>
+            <a:br/>
+            <a:r>
+              <a:rPr sz="2100" b="0" i="0">
+                <a:solidFill>
+                  <a:srgbClr val="20344A"/>
+                </a:solidFill>
+                <a:latin typeface="Arial"/>
+              </a:rPr>
+              <a:t>optional; scientific correctness, conclusions, model </a:t>
+            </a:r>
+            <a:br/>
+            <a:r>
+              <a:rPr sz="2100" b="0" i="0">
+                <a:solidFill>
+                  <a:srgbClr val="20344A"/>
+                </a:solidFill>
+                <a:latin typeface="Arial"/>
+              </a:rPr>
+              <a:t>complexity, and UI polish are not graded.</a:t>
+            </a:r>
+          </a:p>
+        </p:txBody>
+      </p:sp>
+      <p:sp>
+        <p:nvSpPr>
+          <p:cNvPr id="9" name="content:line-40:0"/>
+          <p:cNvSpPr txBox="1"/>
+          <p:nvPr/>
+        </p:nvSpPr>
+        <p:spPr>
+          <a:xfrm>
+            <a:off x="594360" y="4974336"/>
             <a:ext cx="11003279" cy="780288"/>
           </a:xfrm>
           <a:prstGeom prst="rect">
@@ -9638,7 +9747,7 @@
                 </a:solidFill>
                 <a:latin typeface="Arial"/>
               </a:rPr>
-              <a:t>Instructor records repository, date, demonstrated SHA, </a:t>
+              <a:t>Tests and comparisons must still check your declared </a:t>
             </a:r>
             <a:br/>
             <a:r>
@@ -9648,79 +9757,26 @@
                 </a:solidFill>
                 <a:latin typeface="Arial"/>
               </a:rPr>
-              <a:t>members, and GitHub usernames in the checklist.</a:t>
-            </a:r>
-          </a:p>
-        </p:txBody>
-      </p:sp>
-      <p:sp>
-        <p:nvSpPr>
-          <p:cNvPr id="9" name="content:line-43:0"/>
-          <p:cNvSpPr txBox="1"/>
-          <p:nvPr/>
-        </p:nvSpPr>
-        <p:spPr>
-          <a:xfrm>
-            <a:off x="594360" y="4622292"/>
-            <a:ext cx="11003279" cy="1132332"/>
-          </a:xfrm>
-          <a:prstGeom prst="rect">
-            <a:avLst/>
-          </a:prstGeom>
-          <a:noFill/>
-        </p:spPr>
-        <p:txBody>
-          <a:bodyPr wrap="none" anchor="t" lIns="88900" rIns="88900" tIns="38100" bIns="38100">
-            <a:noAutofit/>
-          </a:bodyPr>
-          <a:lstStyle/>
-          <a:p>
-            <a:pPr marL="279400" indent="-215900">
-              <a:lnSpc>
-                <a:spcPts val="2772"/>
-              </a:lnSpc>
-              <a:spcBef>
-                <a:spcPts val="0"/>
-              </a:spcBef>
-              <a:spcAft>
-                <a:spcPts val="0"/>
-              </a:spcAft>
-              <a:defRPr sz="2100">
-                <a:solidFill>
-                  <a:srgbClr val="20344A"/>
-                </a:solidFill>
-                <a:latin typeface="Arial"/>
-              </a:defRPr>
-              <a:buChar char="•"/>
-            </a:pPr>
-            <a:r>
-              <a:rPr sz="2100" b="0" i="0">
-                <a:solidFill>
-                  <a:srgbClr val="20344A"/>
-                </a:solidFill>
-                <a:latin typeface="Arial"/>
-              </a:rPr>
-              <a:t>For every mandatory row, inspect the actual artifact and </a:t>
-            </a:r>
-            <a:br/>
-            <a:r>
-              <a:rPr sz="2100" b="0" i="0">
-                <a:solidFill>
-                  <a:srgbClr val="20344A"/>
-                </a:solidFill>
-                <a:latin typeface="Arial"/>
-              </a:rPr>
-              <a:t>record Pass/Fail, its URL/path, and an observation. Missing </a:t>
-            </a:r>
-            <a:br/>
-            <a:r>
-              <a:rPr sz="2100" b="0" i="0">
-                <a:solidFill>
-                  <a:srgbClr val="20344A"/>
-                </a:solidFill>
-                <a:latin typeface="Arial"/>
-              </a:rPr>
-              <a:t>evidence fails that requirement.</a:t>
+              <a:t>processing behavior. See the </a:t>
+            </a:r>
+            <a:r>
+              <a:rPr sz="2100" b="0" i="0">
+                <a:solidFill>
+                  <a:srgbClr val="007F82"/>
+                </a:solidFill>
+                <a:latin typeface="Arial"/>
+                <a:hlinkClick r:id="rId2"/>
+              </a:rPr>
+              <a:t>assessment policy</a:t>
+            </a:r>
+            <a:r>
+              <a:rPr sz="2100" b="0" i="0">
+                <a:solidFill>
+                  <a:srgbClr val="20344A"/>
+                </a:solidFill>
+                <a:latin typeface="Arial"/>
+              </a:rPr>
+              <a:t>.</a:t>
             </a:r>
           </a:p>
         </p:txBody>
@@ -9834,14 +9890,14 @@
               </a:defRPr>
             </a:pPr>
             <a:r>
-              <a:t>SOURCE 6 / 16</a:t>
-            </a:r>
-          </a:p>
-        </p:txBody>
-      </p:sp>
-      <p:sp>
-        <p:nvSpPr>
-          <p:cNvPr id="4" name="title:line-47"/>
+              <a:t>SOURCE 6 / 17</a:t>
+            </a:r>
+          </a:p>
+        </p:txBody>
+      </p:sp>
+      <p:sp>
+        <p:nvSpPr>
+          <p:cNvPr id="4" name="title:line-44"/>
           <p:cNvSpPr txBox="1"/>
           <p:nvPr/>
         </p:nvSpPr>
@@ -9885,7 +9941,7 @@
                 </a:solidFill>
                 <a:latin typeface="Arial"/>
               </a:rPr>
-              <a:t>Inspect environment and configuration</a:t>
+              <a:t>Briefing: open the actual evidence</a:t>
             </a:r>
           </a:p>
         </p:txBody>
@@ -9937,7 +9993,7 @@
       </p:sp>
       <p:sp>
         <p:nvSpPr>
-          <p:cNvPr id="6" name="content:line-49:0"/>
+          <p:cNvPr id="6" name="content:line-46:0"/>
           <p:cNvSpPr txBox="1"/>
           <p:nvPr/>
         </p:nvSpPr>
@@ -9982,7 +10038,7 @@
                 </a:solidFill>
                 <a:latin typeface="Arial"/>
               </a:rPr>
-              <a:t>Show Python 3.12 in an active venv, its interpreter path, and </a:t>
+              <a:t>Instructor demonstrates navigation using the completed </a:t>
             </a:r>
             <a:br/>
             <a:r>
@@ -9992,20 +10048,92 @@
                 </a:solidFill>
                 <a:latin typeface="Arial"/>
               </a:rPr>
-              <a:t>the installed reusable package working locally.</a:t>
-            </a:r>
-          </a:p>
-        </p:txBody>
-      </p:sp>
-      <p:sp>
-        <p:nvSpPr>
-          <p:cNvPr id="7" name="content:line-50:0"/>
+              <a:t>synthetic example; groups then show their own work.</a:t>
+            </a:r>
+          </a:p>
+        </p:txBody>
+      </p:sp>
+      <p:sp>
+        <p:nvSpPr>
+          <p:cNvPr id="7" name="content:line-47:0"/>
           <p:cNvSpPr txBox="1"/>
           <p:nvPr/>
         </p:nvSpPr>
         <p:spPr>
           <a:xfrm>
             <a:off x="594360" y="2581656"/>
+            <a:ext cx="11003279" cy="1132332"/>
+          </a:xfrm>
+          <a:prstGeom prst="rect">
+            <a:avLst/>
+          </a:prstGeom>
+          <a:noFill/>
+        </p:spPr>
+        <p:txBody>
+          <a:bodyPr wrap="none" anchor="t" lIns="88900" rIns="88900" tIns="38100" bIns="38100">
+            <a:noAutofit/>
+          </a:bodyPr>
+          <a:lstStyle/>
+          <a:p>
+            <a:pPr marL="279400" indent="-215900">
+              <a:lnSpc>
+                <a:spcPts val="2772"/>
+              </a:lnSpc>
+              <a:spcBef>
+                <a:spcPts val="0"/>
+              </a:spcBef>
+              <a:spcAft>
+                <a:spcPts val="0"/>
+              </a:spcAft>
+              <a:defRPr sz="2100">
+                <a:solidFill>
+                  <a:srgbClr val="20344A"/>
+                </a:solidFill>
+                <a:latin typeface="Arial"/>
+              </a:defRPr>
+              <a:buChar char="•"/>
+            </a:pPr>
+            <a:r>
+              <a:rPr sz="2100" b="0" i="0">
+                <a:solidFill>
+                  <a:srgbClr val="20344A"/>
+                </a:solidFill>
+                <a:latin typeface="Arial"/>
+              </a:rPr>
+              <a:t>Open README evidence links: tested commit SHA, CI run, </a:t>
+            </a:r>
+            <a:br/>
+            <a:r>
+              <a:rPr sz="2100" b="0" i="0">
+                <a:solidFill>
+                  <a:srgbClr val="20344A"/>
+                </a:solidFill>
+                <a:latin typeface="Arial"/>
+              </a:rPr>
+              <a:t>captures/logs, authored PRs, and review permalinks. A SHA </a:t>
+            </a:r>
+            <a:br/>
+            <a:r>
+              <a:rPr sz="2100" b="0" i="0">
+                <a:solidFill>
+                  <a:srgbClr val="20344A"/>
+                </a:solidFill>
+                <a:latin typeface="Arial"/>
+              </a:rPr>
+              <a:t>identifies a code version.</a:t>
+            </a:r>
+          </a:p>
+        </p:txBody>
+      </p:sp>
+      <p:sp>
+        <p:nvSpPr>
+          <p:cNvPr id="8" name="content:line-48:0"/>
+          <p:cNvSpPr txBox="1"/>
+          <p:nvPr/>
+        </p:nvSpPr>
+        <p:spPr>
+          <a:xfrm>
+            <a:off x="594360" y="3777996"/>
             <a:ext cx="11003279" cy="780288"/>
           </a:xfrm>
           <a:prstGeom prst="rect">
@@ -10044,26 +10172,7 @@
                 </a:solidFill>
                 <a:latin typeface="Arial"/>
               </a:rPr>
-              <a:t>Open dependency declarations in </a:t>
-            </a:r>
-            <a:r>
-              <a:rPr sz="2100" b="0" i="0">
-                <a:solidFill>
-                  <a:srgbClr val="007F82"/>
-                </a:solidFill>
-                <a:latin typeface="Arial"/>
-                <a:hlinkClick r:id="rId2"/>
-              </a:rPr>
-              <a:t>backend/pyproject.toml</a:t>
-            </a:r>
-            <a:r>
-              <a:rPr sz="2100" b="0" i="0">
-                <a:solidFill>
-                  <a:srgbClr val="20344A"/>
-                </a:solidFill>
-                <a:latin typeface="Arial"/>
-              </a:rPr>
-              <a:t>; </a:t>
+              <a:t>Instructor records repository, date, demonstrated SHA, </a:t>
             </a:r>
             <a:br/>
             <a:r>
@@ -10073,21 +10182,21 @@
                 </a:solidFill>
                 <a:latin typeface="Arial"/>
               </a:rPr>
-              <a:t>explain how the environment supplies these packages.</a:t>
-            </a:r>
-          </a:p>
-        </p:txBody>
-      </p:sp>
-      <p:sp>
-        <p:nvSpPr>
-          <p:cNvPr id="8" name="content:line-51:0"/>
-          <p:cNvSpPr txBox="1"/>
-          <p:nvPr/>
-        </p:nvSpPr>
-        <p:spPr>
-          <a:xfrm>
-            <a:off x="594360" y="3425952"/>
-            <a:ext cx="11003279" cy="780288"/>
+              <a:t>members, and GitHub usernames in the checklist.</a:t>
+            </a:r>
+          </a:p>
+        </p:txBody>
+      </p:sp>
+      <p:sp>
+        <p:nvSpPr>
+          <p:cNvPr id="9" name="content:line-49:0"/>
+          <p:cNvSpPr txBox="1"/>
+          <p:nvPr/>
+        </p:nvSpPr>
+        <p:spPr>
+          <a:xfrm>
+            <a:off x="594360" y="4622292"/>
+            <a:ext cx="11003279" cy="1132332"/>
           </a:xfrm>
           <a:prstGeom prst="rect">
             <a:avLst/>
@@ -10125,7 +10234,7 @@
                 </a:solidFill>
                 <a:latin typeface="Arial"/>
               </a:rPr>
-              <a:t>Open ignore rules and shareable .env.example; verify local .env, </a:t>
+              <a:t>For every mandatory row, inspect the actual artifact and </a:t>
             </a:r>
             <a:br/>
             <a:r>
@@ -10135,59 +10244,7 @@
                 </a:solidFill>
                 <a:latin typeface="Arial"/>
               </a:rPr>
-              <a:t>credentials, and .venv stay out of tracked files/history.</a:t>
-            </a:r>
-          </a:p>
-        </p:txBody>
-      </p:sp>
-      <p:sp>
-        <p:nvSpPr>
-          <p:cNvPr id="9" name="content:line-52:0"/>
-          <p:cNvSpPr txBox="1"/>
-          <p:nvPr/>
-        </p:nvSpPr>
-        <p:spPr>
-          <a:xfrm>
-            <a:off x="594360" y="4270248"/>
-            <a:ext cx="11003279" cy="1132332"/>
-          </a:xfrm>
-          <a:prstGeom prst="rect">
-            <a:avLst/>
-          </a:prstGeom>
-          <a:noFill/>
-        </p:spPr>
-        <p:txBody>
-          <a:bodyPr wrap="none" anchor="t" lIns="88900" rIns="88900" tIns="38100" bIns="38100">
-            <a:noAutofit/>
-          </a:bodyPr>
-          <a:lstStyle/>
-          <a:p>
-            <a:pPr marL="279400" indent="-215900">
-              <a:lnSpc>
-                <a:spcPts val="2772"/>
-              </a:lnSpc>
-              <a:spcBef>
-                <a:spcPts val="0"/>
-              </a:spcBef>
-              <a:spcAft>
-                <a:spcPts val="0"/>
-              </a:spcAft>
-              <a:defRPr sz="2100">
-                <a:solidFill>
-                  <a:srgbClr val="20344A"/>
-                </a:solidFill>
-                <a:latin typeface="Arial"/>
-              </a:defRPr>
-              <a:buChar char="•"/>
-            </a:pPr>
-            <a:r>
-              <a:rPr sz="2100" b="0" i="0">
-                <a:solidFill>
-                  <a:srgbClr val="20344A"/>
-                </a:solidFill>
-                <a:latin typeface="Arial"/>
-              </a:rPr>
-              <a:t>Explain local versus container settings without showing </a:t>
+              <a:t>record Pass/Fail, its URL/path, and an observation. Missing </a:t>
             </a:r>
             <a:br/>
             <a:r>
@@ -10197,27 +10254,7 @@
                 </a:solidFill>
                 <a:latin typeface="Arial"/>
               </a:rPr>
-              <a:t>secrets. Instructor inspects files and execution, alongside the </a:t>
-            </a:r>
-            <a:br/>
-            <a:r>
-              <a:rPr sz="2100" b="0" i="0">
-                <a:solidFill>
-                  <a:srgbClr val="007F82"/>
-                </a:solidFill>
-                <a:latin typeface="Arial"/>
-                <a:hlinkClick r:id="rId3"/>
-              </a:rPr>
-              <a:t>setup guide</a:t>
-            </a:r>
-            <a:r>
-              <a:rPr sz="2100" b="0" i="0">
-                <a:solidFill>
-                  <a:srgbClr val="20344A"/>
-                </a:solidFill>
-                <a:latin typeface="Arial"/>
-              </a:rPr>
-              <a:t>.</a:t>
+              <a:t>evidence fails that requirement.</a:t>
             </a:r>
           </a:p>
         </p:txBody>
@@ -10331,14 +10368,14 @@
               </a:defRPr>
             </a:pPr>
             <a:r>
-              <a:t>SOURCE 7 / 16</a:t>
-            </a:r>
-          </a:p>
-        </p:txBody>
-      </p:sp>
-      <p:sp>
-        <p:nvSpPr>
-          <p:cNvPr id="4" name="title:line-56"/>
+              <a:t>SOURCE 7 / 17</a:t>
+            </a:r>
+          </a:p>
+        </p:txBody>
+      </p:sp>
+      <p:sp>
+        <p:nvSpPr>
+          <p:cNvPr id="4" name="title:line-53"/>
           <p:cNvSpPr txBox="1"/>
           <p:nvPr/>
         </p:nvSpPr>
@@ -10382,7 +10419,7 @@
                 </a:solidFill>
                 <a:latin typeface="Arial"/>
               </a:rPr>
-              <a:t>Trace the working application</a:t>
+              <a:t>Inspect environment and configuration</a:t>
             </a:r>
           </a:p>
         </p:txBody>
@@ -10434,172 +10471,13 @@
       </p:sp>
       <p:sp>
         <p:nvSpPr>
-          <p:cNvPr id="6" name="content:line-59:0"/>
+          <p:cNvPr id="6" name="content:line-55:0"/>
           <p:cNvSpPr txBox="1"/>
           <p:nvPr/>
         </p:nvSpPr>
         <p:spPr>
           <a:xfrm>
             <a:off x="594360" y="1737360"/>
-            <a:ext cx="11003279" cy="377952"/>
-          </a:xfrm>
-          <a:prstGeom prst="rect">
-            <a:avLst/>
-          </a:prstGeom>
-          <a:solidFill>
-            <a:srgbClr val="EDF3F6"/>
-          </a:solidFill>
-        </p:spPr>
-        <p:txBody>
-          <a:bodyPr wrap="none" anchor="t" lIns="88900" rIns="88900" tIns="38100" bIns="38100">
-            <a:noAutofit/>
-          </a:bodyPr>
-          <a:lstStyle/>
-          <a:p>
-            <a:pPr>
-              <a:lnSpc>
-                <a:spcPts val="2376"/>
-              </a:lnSpc>
-              <a:spcBef>
-                <a:spcPts val="0"/>
-              </a:spcBef>
-              <a:spcAft>
-                <a:spcPts val="0"/>
-              </a:spcAft>
-              <a:defRPr sz="1800">
-                <a:solidFill>
-                  <a:srgbClr val="20344A"/>
-                </a:solidFill>
-                <a:latin typeface="Arial"/>
-              </a:defRPr>
-            </a:pPr>
-            <a:r>
-              <a:rPr sz="1800" b="0" i="0">
-                <a:solidFill>
-                  <a:srgbClr val="20344A"/>
-                </a:solidFill>
-                <a:latin typeface="Courier New"/>
-              </a:rPr>
-              <a:t>CSV upload -&gt; Streamlit -&gt; HTTP request -&gt; FastAPI</a:t>
-            </a:r>
-          </a:p>
-        </p:txBody>
-      </p:sp>
-      <p:sp>
-        <p:nvSpPr>
-          <p:cNvPr id="7" name="content:line-60:0"/>
-          <p:cNvSpPr txBox="1"/>
-          <p:nvPr/>
-        </p:nvSpPr>
-        <p:spPr>
-          <a:xfrm>
-            <a:off x="594360" y="2115312"/>
-            <a:ext cx="11003279" cy="377952"/>
-          </a:xfrm>
-          <a:prstGeom prst="rect">
-            <a:avLst/>
-          </a:prstGeom>
-          <a:solidFill>
-            <a:srgbClr val="EDF3F6"/>
-          </a:solidFill>
-        </p:spPr>
-        <p:txBody>
-          <a:bodyPr wrap="none" anchor="t" lIns="88900" rIns="88900" tIns="38100" bIns="38100">
-            <a:noAutofit/>
-          </a:bodyPr>
-          <a:lstStyle/>
-          <a:p>
-            <a:pPr>
-              <a:lnSpc>
-                <a:spcPts val="2376"/>
-              </a:lnSpc>
-              <a:spcBef>
-                <a:spcPts val="0"/>
-              </a:spcBef>
-              <a:spcAft>
-                <a:spcPts val="0"/>
-              </a:spcAft>
-              <a:defRPr sz="1800">
-                <a:solidFill>
-                  <a:srgbClr val="20344A"/>
-                </a:solidFill>
-                <a:latin typeface="Arial"/>
-              </a:defRPr>
-            </a:pPr>
-            <a:r>
-              <a:rPr sz="1800" b="0" i="0">
-                <a:solidFill>
-                  <a:srgbClr val="20344A"/>
-                </a:solidFill>
-                <a:latin typeface="Courier New"/>
-              </a:rPr>
-              <a:t>FastAPI -&gt; reusable stat_core processing -&gt; result</a:t>
-            </a:r>
-          </a:p>
-        </p:txBody>
-      </p:sp>
-      <p:sp>
-        <p:nvSpPr>
-          <p:cNvPr id="8" name="content:line-61:0"/>
-          <p:cNvSpPr txBox="1"/>
-          <p:nvPr/>
-        </p:nvSpPr>
-        <p:spPr>
-          <a:xfrm>
-            <a:off x="594360" y="2493264"/>
-            <a:ext cx="11003279" cy="377952"/>
-          </a:xfrm>
-          <a:prstGeom prst="rect">
-            <a:avLst/>
-          </a:prstGeom>
-          <a:solidFill>
-            <a:srgbClr val="EDF3F6"/>
-          </a:solidFill>
-        </p:spPr>
-        <p:txBody>
-          <a:bodyPr wrap="none" anchor="t" lIns="88900" rIns="88900" tIns="38100" bIns="38100">
-            <a:noAutofit/>
-          </a:bodyPr>
-          <a:lstStyle/>
-          <a:p>
-            <a:pPr>
-              <a:lnSpc>
-                <a:spcPts val="2376"/>
-              </a:lnSpc>
-              <a:spcBef>
-                <a:spcPts val="0"/>
-              </a:spcBef>
-              <a:spcAft>
-                <a:spcPts val="0"/>
-              </a:spcAft>
-              <a:defRPr sz="1800">
-                <a:solidFill>
-                  <a:srgbClr val="20344A"/>
-                </a:solidFill>
-                <a:latin typeface="Arial"/>
-              </a:defRPr>
-            </a:pPr>
-            <a:r>
-              <a:rPr sz="1800" b="0" i="0">
-                <a:solidFill>
-                  <a:srgbClr val="20344A"/>
-                </a:solidFill>
-                <a:latin typeface="Courier New"/>
-              </a:rPr>
-              <a:t>result -&gt; Streamlit -&gt; visible records/summary/chart</a:t>
-            </a:r>
-          </a:p>
-        </p:txBody>
-      </p:sp>
-      <p:sp>
-        <p:nvSpPr>
-          <p:cNvPr id="9" name="content:line-64:0"/>
-          <p:cNvSpPr txBox="1"/>
-          <p:nvPr/>
-        </p:nvSpPr>
-        <p:spPr>
-          <a:xfrm>
-            <a:off x="594360" y="2871215"/>
             <a:ext cx="11003279" cy="780288"/>
           </a:xfrm>
           <a:prstGeom prst="rect">
@@ -10638,7 +10516,7 @@
                 </a:solidFill>
                 <a:latin typeface="Arial"/>
               </a:rPr>
-              <a:t>HTTP carries requests and responses between programs; </a:t>
+              <a:t>Show Python 3.12 in an active venv, its interpreter path, and </a:t>
             </a:r>
             <a:br/>
             <a:r>
@@ -10648,20 +10526,20 @@
                 </a:solidFill>
                 <a:latin typeface="Arial"/>
               </a:rPr>
-              <a:t>reusable processing functions work without the API or UI.</a:t>
-            </a:r>
-          </a:p>
-        </p:txBody>
-      </p:sp>
-      <p:sp>
-        <p:nvSpPr>
-          <p:cNvPr id="10" name="content:line-65:0"/>
-          <p:cNvSpPr txBox="1"/>
-          <p:nvPr/>
-        </p:nvSpPr>
-        <p:spPr>
-          <a:xfrm>
-            <a:off x="594360" y="3715511"/>
+              <a:t>the installed reusable package working locally.</a:t>
+            </a:r>
+          </a:p>
+        </p:txBody>
+      </p:sp>
+      <p:sp>
+        <p:nvSpPr>
+          <p:cNvPr id="7" name="content:line-56:0"/>
+          <p:cNvSpPr txBox="1"/>
+          <p:nvPr/>
+        </p:nvSpPr>
+        <p:spPr>
+          <a:xfrm>
+            <a:off x="594360" y="2581656"/>
             <a:ext cx="11003279" cy="780288"/>
           </a:xfrm>
           <a:prstGeom prst="rect">
@@ -10700,7 +10578,7 @@
                 </a:solidFill>
                 <a:latin typeface="Arial"/>
               </a:rPr>
-              <a:t>Instructor follows one request through </a:t>
+              <a:t>Open dependency declarations in </a:t>
             </a:r>
             <a:r>
               <a:rPr sz="2100" b="0" i="0">
@@ -10710,17 +10588,152 @@
                 <a:latin typeface="Arial"/>
                 <a:hlinkClick r:id="rId2"/>
               </a:rPr>
-              <a:t>frontend</a:t>
-            </a:r>
-            <a:r>
-              <a:rPr sz="2100" b="0" i="0">
-                <a:solidFill>
-                  <a:srgbClr val="20344A"/>
-                </a:solidFill>
-                <a:latin typeface="Arial"/>
-              </a:rPr>
-              <a:t>, </a:t>
-            </a:r>
+              <a:t>backend/pyproject.toml</a:t>
+            </a:r>
+            <a:r>
+              <a:rPr sz="2100" b="0" i="0">
+                <a:solidFill>
+                  <a:srgbClr val="20344A"/>
+                </a:solidFill>
+                <a:latin typeface="Arial"/>
+              </a:rPr>
+              <a:t>; </a:t>
+            </a:r>
+            <a:br/>
+            <a:r>
+              <a:rPr sz="2100" b="0" i="0">
+                <a:solidFill>
+                  <a:srgbClr val="20344A"/>
+                </a:solidFill>
+                <a:latin typeface="Arial"/>
+              </a:rPr>
+              <a:t>explain how the environment supplies these packages.</a:t>
+            </a:r>
+          </a:p>
+        </p:txBody>
+      </p:sp>
+      <p:sp>
+        <p:nvSpPr>
+          <p:cNvPr id="8" name="content:line-57:0"/>
+          <p:cNvSpPr txBox="1"/>
+          <p:nvPr/>
+        </p:nvSpPr>
+        <p:spPr>
+          <a:xfrm>
+            <a:off x="594360" y="3425952"/>
+            <a:ext cx="11003279" cy="780288"/>
+          </a:xfrm>
+          <a:prstGeom prst="rect">
+            <a:avLst/>
+          </a:prstGeom>
+          <a:noFill/>
+        </p:spPr>
+        <p:txBody>
+          <a:bodyPr wrap="none" anchor="t" lIns="88900" rIns="88900" tIns="38100" bIns="38100">
+            <a:noAutofit/>
+          </a:bodyPr>
+          <a:lstStyle/>
+          <a:p>
+            <a:pPr marL="279400" indent="-215900">
+              <a:lnSpc>
+                <a:spcPts val="2772"/>
+              </a:lnSpc>
+              <a:spcBef>
+                <a:spcPts val="0"/>
+              </a:spcBef>
+              <a:spcAft>
+                <a:spcPts val="0"/>
+              </a:spcAft>
+              <a:defRPr sz="2100">
+                <a:solidFill>
+                  <a:srgbClr val="20344A"/>
+                </a:solidFill>
+                <a:latin typeface="Arial"/>
+              </a:defRPr>
+              <a:buChar char="•"/>
+            </a:pPr>
+            <a:r>
+              <a:rPr sz="2100" b="0" i="0">
+                <a:solidFill>
+                  <a:srgbClr val="20344A"/>
+                </a:solidFill>
+                <a:latin typeface="Arial"/>
+              </a:rPr>
+              <a:t>Open ignore rules and shareable .env.example; verify local .env, </a:t>
+            </a:r>
+            <a:br/>
+            <a:r>
+              <a:rPr sz="2100" b="0" i="0">
+                <a:solidFill>
+                  <a:srgbClr val="20344A"/>
+                </a:solidFill>
+                <a:latin typeface="Arial"/>
+              </a:rPr>
+              <a:t>credentials, and .venv stay out of tracked files/history.</a:t>
+            </a:r>
+          </a:p>
+        </p:txBody>
+      </p:sp>
+      <p:sp>
+        <p:nvSpPr>
+          <p:cNvPr id="9" name="content:line-58:0"/>
+          <p:cNvSpPr txBox="1"/>
+          <p:nvPr/>
+        </p:nvSpPr>
+        <p:spPr>
+          <a:xfrm>
+            <a:off x="594360" y="4270248"/>
+            <a:ext cx="11003279" cy="1132332"/>
+          </a:xfrm>
+          <a:prstGeom prst="rect">
+            <a:avLst/>
+          </a:prstGeom>
+          <a:noFill/>
+        </p:spPr>
+        <p:txBody>
+          <a:bodyPr wrap="none" anchor="t" lIns="88900" rIns="88900" tIns="38100" bIns="38100">
+            <a:noAutofit/>
+          </a:bodyPr>
+          <a:lstStyle/>
+          <a:p>
+            <a:pPr marL="279400" indent="-215900">
+              <a:lnSpc>
+                <a:spcPts val="2772"/>
+              </a:lnSpc>
+              <a:spcBef>
+                <a:spcPts val="0"/>
+              </a:spcBef>
+              <a:spcAft>
+                <a:spcPts val="0"/>
+              </a:spcAft>
+              <a:defRPr sz="2100">
+                <a:solidFill>
+                  <a:srgbClr val="20344A"/>
+                </a:solidFill>
+                <a:latin typeface="Arial"/>
+              </a:defRPr>
+              <a:buChar char="•"/>
+            </a:pPr>
+            <a:r>
+              <a:rPr sz="2100" b="0" i="0">
+                <a:solidFill>
+                  <a:srgbClr val="20344A"/>
+                </a:solidFill>
+                <a:latin typeface="Arial"/>
+              </a:rPr>
+              <a:t>Explain local versus container settings without showing </a:t>
+            </a:r>
+            <a:br/>
+            <a:r>
+              <a:rPr sz="2100" b="0" i="0">
+                <a:solidFill>
+                  <a:srgbClr val="20344A"/>
+                </a:solidFill>
+                <a:latin typeface="Arial"/>
+              </a:rPr>
+              <a:t>secrets. Instructor inspects files and execution, alongside the </a:t>
+            </a:r>
+            <a:br/>
             <a:r>
               <a:rPr sz="2100" b="0" i="0">
                 <a:solidFill>
@@ -10729,98 +10742,16 @@
                 <a:latin typeface="Arial"/>
                 <a:hlinkClick r:id="rId3"/>
               </a:rPr>
-              <a:t>API</a:t>
-            </a:r>
-            <a:r>
-              <a:rPr sz="2100" b="0" i="0">
-                <a:solidFill>
-                  <a:srgbClr val="20344A"/>
-                </a:solidFill>
-                <a:latin typeface="Arial"/>
-              </a:rPr>
-              <a:t>, and </a:t>
-            </a:r>
-            <a:br/>
-            <a:r>
-              <a:rPr sz="2100" b="0" i="0">
-                <a:solidFill>
-                  <a:srgbClr val="007F82"/>
-                </a:solidFill>
-                <a:latin typeface="Arial"/>
-                <a:hlinkClick r:id="rId4"/>
-              </a:rPr>
-              <a:t>package</a:t>
-            </a:r>
-            <a:r>
-              <a:rPr sz="2100" b="0" i="0">
-                <a:solidFill>
-                  <a:srgbClr val="20344A"/>
-                </a:solidFill>
-                <a:latin typeface="Arial"/>
-              </a:rPr>
-              <a:t>, checking inputs and returned results.</a:t>
-            </a:r>
-          </a:p>
-        </p:txBody>
-      </p:sp>
-      <p:sp>
-        <p:nvSpPr>
-          <p:cNvPr id="11" name="content:line-66:0"/>
-          <p:cNvSpPr txBox="1"/>
-          <p:nvPr/>
-        </p:nvSpPr>
-        <p:spPr>
-          <a:xfrm>
-            <a:off x="594360" y="4559808"/>
-            <a:ext cx="11003279" cy="780288"/>
-          </a:xfrm>
-          <a:prstGeom prst="rect">
-            <a:avLst/>
-          </a:prstGeom>
-          <a:noFill/>
-        </p:spPr>
-        <p:txBody>
-          <a:bodyPr wrap="none" anchor="t" lIns="88900" rIns="88900" tIns="38100" bIns="38100">
-            <a:noAutofit/>
-          </a:bodyPr>
-          <a:lstStyle/>
-          <a:p>
-            <a:pPr marL="279400" indent="-215900">
-              <a:lnSpc>
-                <a:spcPts val="2772"/>
-              </a:lnSpc>
-              <a:spcBef>
-                <a:spcPts val="0"/>
-              </a:spcBef>
-              <a:spcAft>
-                <a:spcPts val="0"/>
-              </a:spcAft>
-              <a:defRPr sz="2100">
-                <a:solidFill>
-                  <a:srgbClr val="20344A"/>
-                </a:solidFill>
-                <a:latin typeface="Arial"/>
-              </a:defRPr>
-              <a:buChar char="•"/>
-            </a:pPr>
-            <a:r>
-              <a:rPr sz="2100" b="0" i="0">
-                <a:solidFill>
-                  <a:srgbClr val="20344A"/>
-                </a:solidFill>
-                <a:latin typeface="Arial"/>
-              </a:rPr>
-              <a:t>State your dataset, question, and expected behavior briefly </a:t>
-            </a:r>
-            <a:br/>
-            <a:r>
-              <a:rPr sz="2100" b="0" i="0">
-                <a:solidFill>
-                  <a:srgbClr val="20344A"/>
-                </a:solidFill>
-                <a:latin typeface="Arial"/>
-              </a:rPr>
-              <a:t>before tracing your own application.</a:t>
+              <a:t>setup guide</a:t>
+            </a:r>
+            <a:r>
+              <a:rPr sz="2100" b="0" i="0">
+                <a:solidFill>
+                  <a:srgbClr val="20344A"/>
+                </a:solidFill>
+                <a:latin typeface="Arial"/>
+              </a:rPr>
+              <a:t>.</a:t>
             </a:r>
           </a:p>
         </p:txBody>
@@ -10934,14 +10865,14 @@
               </a:defRPr>
             </a:pPr>
             <a:r>
-              <a:t>SOURCE 8 / 16</a:t>
-            </a:r>
-          </a:p>
-        </p:txBody>
-      </p:sp>
-      <p:sp>
-        <p:nvSpPr>
-          <p:cNvPr id="4" name="title:line-70"/>
+              <a:t>SOURCE 8 / 17</a:t>
+            </a:r>
+          </a:p>
+        </p:txBody>
+      </p:sp>
+      <p:sp>
+        <p:nvSpPr>
+          <p:cNvPr id="4" name="title:line-62"/>
           <p:cNvSpPr txBox="1"/>
           <p:nvPr/>
         </p:nvSpPr>
@@ -10985,7 +10916,7 @@
                 </a:solidFill>
                 <a:latin typeface="Arial"/>
               </a:rPr>
-              <a:t>Show real startup and CSV results</a:t>
+              <a:t>Trace the working application</a:t>
             </a:r>
           </a:p>
         </p:txBody>
@@ -11037,14 +10968,173 @@
       </p:sp>
       <p:sp>
         <p:nvSpPr>
-          <p:cNvPr id="6" name="content:line-72:0"/>
+          <p:cNvPr id="6" name="content:line-65:0"/>
           <p:cNvSpPr txBox="1"/>
           <p:nvPr/>
         </p:nvSpPr>
         <p:spPr>
           <a:xfrm>
             <a:off x="594360" y="1737360"/>
-            <a:ext cx="11003279" cy="1132332"/>
+            <a:ext cx="11003279" cy="377952"/>
+          </a:xfrm>
+          <a:prstGeom prst="rect">
+            <a:avLst/>
+          </a:prstGeom>
+          <a:solidFill>
+            <a:srgbClr val="EDF3F6"/>
+          </a:solidFill>
+        </p:spPr>
+        <p:txBody>
+          <a:bodyPr wrap="none" anchor="t" lIns="88900" rIns="88900" tIns="38100" bIns="38100">
+            <a:noAutofit/>
+          </a:bodyPr>
+          <a:lstStyle/>
+          <a:p>
+            <a:pPr>
+              <a:lnSpc>
+                <a:spcPts val="2376"/>
+              </a:lnSpc>
+              <a:spcBef>
+                <a:spcPts val="0"/>
+              </a:spcBef>
+              <a:spcAft>
+                <a:spcPts val="0"/>
+              </a:spcAft>
+              <a:defRPr sz="1800">
+                <a:solidFill>
+                  <a:srgbClr val="20344A"/>
+                </a:solidFill>
+                <a:latin typeface="Arial"/>
+              </a:defRPr>
+            </a:pPr>
+            <a:r>
+              <a:rPr sz="1800" b="0" i="0">
+                <a:solidFill>
+                  <a:srgbClr val="20344A"/>
+                </a:solidFill>
+                <a:latin typeface="Courier New"/>
+              </a:rPr>
+              <a:t>CSV upload -&gt; Streamlit -&gt; HTTP request -&gt; FastAPI</a:t>
+            </a:r>
+          </a:p>
+        </p:txBody>
+      </p:sp>
+      <p:sp>
+        <p:nvSpPr>
+          <p:cNvPr id="7" name="content:line-66:0"/>
+          <p:cNvSpPr txBox="1"/>
+          <p:nvPr/>
+        </p:nvSpPr>
+        <p:spPr>
+          <a:xfrm>
+            <a:off x="594360" y="2115312"/>
+            <a:ext cx="11003279" cy="377952"/>
+          </a:xfrm>
+          <a:prstGeom prst="rect">
+            <a:avLst/>
+          </a:prstGeom>
+          <a:solidFill>
+            <a:srgbClr val="EDF3F6"/>
+          </a:solidFill>
+        </p:spPr>
+        <p:txBody>
+          <a:bodyPr wrap="none" anchor="t" lIns="88900" rIns="88900" tIns="38100" bIns="38100">
+            <a:noAutofit/>
+          </a:bodyPr>
+          <a:lstStyle/>
+          <a:p>
+            <a:pPr>
+              <a:lnSpc>
+                <a:spcPts val="2376"/>
+              </a:lnSpc>
+              <a:spcBef>
+                <a:spcPts val="0"/>
+              </a:spcBef>
+              <a:spcAft>
+                <a:spcPts val="0"/>
+              </a:spcAft>
+              <a:defRPr sz="1800">
+                <a:solidFill>
+                  <a:srgbClr val="20344A"/>
+                </a:solidFill>
+                <a:latin typeface="Arial"/>
+              </a:defRPr>
+            </a:pPr>
+            <a:r>
+              <a:rPr sz="1800" b="0" i="0">
+                <a:solidFill>
+                  <a:srgbClr val="20344A"/>
+                </a:solidFill>
+                <a:latin typeface="Courier New"/>
+              </a:rPr>
+              <a:t>FastAPI -&gt; reusable stat_core processing -&gt; result</a:t>
+            </a:r>
+          </a:p>
+        </p:txBody>
+      </p:sp>
+      <p:sp>
+        <p:nvSpPr>
+          <p:cNvPr id="8" name="content:line-67:0"/>
+          <p:cNvSpPr txBox="1"/>
+          <p:nvPr/>
+        </p:nvSpPr>
+        <p:spPr>
+          <a:xfrm>
+            <a:off x="594360" y="2493264"/>
+            <a:ext cx="11003279" cy="377952"/>
+          </a:xfrm>
+          <a:prstGeom prst="rect">
+            <a:avLst/>
+          </a:prstGeom>
+          <a:solidFill>
+            <a:srgbClr val="EDF3F6"/>
+          </a:solidFill>
+        </p:spPr>
+        <p:txBody>
+          <a:bodyPr wrap="none" anchor="t" lIns="88900" rIns="88900" tIns="38100" bIns="38100">
+            <a:noAutofit/>
+          </a:bodyPr>
+          <a:lstStyle/>
+          <a:p>
+            <a:pPr>
+              <a:lnSpc>
+                <a:spcPts val="2376"/>
+              </a:lnSpc>
+              <a:spcBef>
+                <a:spcPts val="0"/>
+              </a:spcBef>
+              <a:spcAft>
+                <a:spcPts val="0"/>
+              </a:spcAft>
+              <a:defRPr sz="1800">
+                <a:solidFill>
+                  <a:srgbClr val="20344A"/>
+                </a:solidFill>
+                <a:latin typeface="Arial"/>
+              </a:defRPr>
+            </a:pPr>
+            <a:r>
+              <a:rPr sz="1800" b="0" i="0">
+                <a:solidFill>
+                  <a:srgbClr val="20344A"/>
+                </a:solidFill>
+                <a:latin typeface="Courier New"/>
+              </a:rPr>
+              <a:t>result -&gt; Streamlit -&gt; visible records/summary/chart</a:t>
+            </a:r>
+          </a:p>
+        </p:txBody>
+      </p:sp>
+      <p:sp>
+        <p:nvSpPr>
+          <p:cNvPr id="9" name="content:line-70:0"/>
+          <p:cNvSpPr txBox="1"/>
+          <p:nvPr/>
+        </p:nvSpPr>
+        <p:spPr>
+          <a:xfrm>
+            <a:off x="594360" y="2871215"/>
+            <a:ext cx="11003279" cy="780288"/>
           </a:xfrm>
           <a:prstGeom prst="rect">
             <a:avLst/>
@@ -11082,25 +11172,7 @@
                 </a:solidFill>
                 <a:latin typeface="Arial"/>
               </a:rPr>
-              <a:t>Run </a:t>
-            </a:r>
-            <a:r>
-              <a:rPr sz="2100" b="0" i="0">
-                <a:solidFill>
-                  <a:srgbClr val="20344A"/>
-                </a:solidFill>
-                <a:latin typeface="Courier New"/>
-              </a:rPr>
-              <a:t>docker compose up --build</a:t>
-            </a:r>
-            <a:r>
-              <a:rPr sz="2100" b="0" i="0">
-                <a:solidFill>
-                  <a:srgbClr val="20344A"/>
-                </a:solidFill>
-                <a:latin typeface="Arial"/>
-              </a:rPr>
-              <a:t> live; show frontend/backend </a:t>
+              <a:t>HTTP carries requests and responses between programs; </a:t>
             </a:r>
             <a:br/>
             <a:r>
@@ -11110,31 +11182,131 @@
                 </a:solidFill>
                 <a:latin typeface="Arial"/>
               </a:rPr>
-              <a:t>running, backend readiness, and relevant logs or health </a:t>
+              <a:t>reusable processing functions work without the API or UI.</a:t>
+            </a:r>
+          </a:p>
+        </p:txBody>
+      </p:sp>
+      <p:sp>
+        <p:nvSpPr>
+          <p:cNvPr id="10" name="content:line-71:0"/>
+          <p:cNvSpPr txBox="1"/>
+          <p:nvPr/>
+        </p:nvSpPr>
+        <p:spPr>
+          <a:xfrm>
+            <a:off x="594360" y="3715511"/>
+            <a:ext cx="11003279" cy="780288"/>
+          </a:xfrm>
+          <a:prstGeom prst="rect">
+            <a:avLst/>
+          </a:prstGeom>
+          <a:noFill/>
+        </p:spPr>
+        <p:txBody>
+          <a:bodyPr wrap="none" anchor="t" lIns="88900" rIns="88900" tIns="38100" bIns="38100">
+            <a:noAutofit/>
+          </a:bodyPr>
+          <a:lstStyle/>
+          <a:p>
+            <a:pPr marL="279400" indent="-215900">
+              <a:lnSpc>
+                <a:spcPts val="2772"/>
+              </a:lnSpc>
+              <a:spcBef>
+                <a:spcPts val="0"/>
+              </a:spcBef>
+              <a:spcAft>
+                <a:spcPts val="0"/>
+              </a:spcAft>
+              <a:defRPr sz="2100">
+                <a:solidFill>
+                  <a:srgbClr val="20344A"/>
+                </a:solidFill>
+                <a:latin typeface="Arial"/>
+              </a:defRPr>
+              <a:buChar char="•"/>
+            </a:pPr>
+            <a:r>
+              <a:rPr sz="2100" b="0" i="0">
+                <a:solidFill>
+                  <a:srgbClr val="20344A"/>
+                </a:solidFill>
+                <a:latin typeface="Arial"/>
+              </a:rPr>
+              <a:t>Instructor follows one request through </a:t>
+            </a:r>
+            <a:r>
+              <a:rPr sz="2100" b="0" i="0">
+                <a:solidFill>
+                  <a:srgbClr val="007F82"/>
+                </a:solidFill>
+                <a:latin typeface="Arial"/>
+                <a:hlinkClick r:id="rId2"/>
+              </a:rPr>
+              <a:t>frontend</a:t>
+            </a:r>
+            <a:r>
+              <a:rPr sz="2100" b="0" i="0">
+                <a:solidFill>
+                  <a:srgbClr val="20344A"/>
+                </a:solidFill>
+                <a:latin typeface="Arial"/>
+              </a:rPr>
+              <a:t>, </a:t>
+            </a:r>
+            <a:r>
+              <a:rPr sz="2100" b="0" i="0">
+                <a:solidFill>
+                  <a:srgbClr val="007F82"/>
+                </a:solidFill>
+                <a:latin typeface="Arial"/>
+                <a:hlinkClick r:id="rId3"/>
+              </a:rPr>
+              <a:t>API</a:t>
+            </a:r>
+            <a:r>
+              <a:rPr sz="2100" b="0" i="0">
+                <a:solidFill>
+                  <a:srgbClr val="20344A"/>
+                </a:solidFill>
+                <a:latin typeface="Arial"/>
+              </a:rPr>
+              <a:t>, and </a:t>
             </a:r>
             <a:br/>
             <a:r>
               <a:rPr sz="2100" b="0" i="0">
                 <a:solidFill>
-                  <a:srgbClr val="20344A"/>
-                </a:solidFill>
-                <a:latin typeface="Arial"/>
-              </a:rPr>
-              <a:t>responses.</a:t>
-            </a:r>
-          </a:p>
-        </p:txBody>
-      </p:sp>
-      <p:sp>
-        <p:nvSpPr>
-          <p:cNvPr id="7" name="content:line-73:0"/>
-          <p:cNvSpPr txBox="1"/>
-          <p:nvPr/>
-        </p:nvSpPr>
-        <p:spPr>
-          <a:xfrm>
-            <a:off x="594360" y="2933700"/>
-            <a:ext cx="11003279" cy="1132332"/>
+                  <a:srgbClr val="007F82"/>
+                </a:solidFill>
+                <a:latin typeface="Arial"/>
+                <a:hlinkClick r:id="rId4"/>
+              </a:rPr>
+              <a:t>package</a:t>
+            </a:r>
+            <a:r>
+              <a:rPr sz="2100" b="0" i="0">
+                <a:solidFill>
+                  <a:srgbClr val="20344A"/>
+                </a:solidFill>
+                <a:latin typeface="Arial"/>
+              </a:rPr>
+              <a:t>, checking inputs and returned results.</a:t>
+            </a:r>
+          </a:p>
+        </p:txBody>
+      </p:sp>
+      <p:sp>
+        <p:nvSpPr>
+          <p:cNvPr id="11" name="content:line-72:0"/>
+          <p:cNvSpPr txBox="1"/>
+          <p:nvPr/>
+        </p:nvSpPr>
+        <p:spPr>
+          <a:xfrm>
+            <a:off x="594360" y="4559808"/>
+            <a:ext cx="11003279" cy="780288"/>
           </a:xfrm>
           <a:prstGeom prst="rect">
             <a:avLst/>
@@ -11172,25 +11344,7 @@
                 </a:solidFill>
                 <a:latin typeface="Arial"/>
               </a:rPr>
-              <a:t>Browser opens </a:t>
-            </a:r>
-            <a:r>
-              <a:rPr sz="2100" b="0" i="0">
-                <a:solidFill>
-                  <a:srgbClr val="20344A"/>
-                </a:solidFill>
-                <a:latin typeface="Courier New"/>
-              </a:rPr>
-              <a:t>http://127.0.0.1:8501</a:t>
-            </a:r>
-            <a:r>
-              <a:rPr sz="2100" b="0" i="0">
-                <a:solidFill>
-                  <a:srgbClr val="20344A"/>
-                </a:solidFill>
-                <a:latin typeface="Arial"/>
-              </a:rPr>
-              <a:t>; frontend calls </a:t>
+              <a:t>State your dataset, question, and expected behavior briefly </a:t>
             </a:r>
             <a:br/>
             <a:r>
@@ -11198,181 +11352,9 @@
                 <a:solidFill>
                   <a:srgbClr val="20344A"/>
                 </a:solidFill>
-                <a:latin typeface="Courier New"/>
-              </a:rPr>
-              <a:t>http://backend:8000</a:t>
-            </a:r>
-            <a:r>
-              <a:rPr sz="2100" b="0" i="0">
-                <a:solidFill>
-                  <a:srgbClr val="20344A"/>
-                </a:solidFill>
-                <a:latin typeface="Arial"/>
-              </a:rPr>
-              <a:t> inside Compose. There, localhost means </a:t>
-            </a:r>
-            <a:br/>
-            <a:r>
-              <a:rPr sz="2100" b="0" i="0">
-                <a:solidFill>
-                  <a:srgbClr val="20344A"/>
-                </a:solidFill>
-                <a:latin typeface="Arial"/>
-              </a:rPr>
-              <a:t>the frontend itself.</a:t>
-            </a:r>
-          </a:p>
-        </p:txBody>
-      </p:sp>
-      <p:sp>
-        <p:nvSpPr>
-          <p:cNvPr id="8" name="content:line-74:0"/>
-          <p:cNvSpPr txBox="1"/>
-          <p:nvPr/>
-        </p:nvSpPr>
-        <p:spPr>
-          <a:xfrm>
-            <a:off x="594360" y="4130040"/>
-            <a:ext cx="11003279" cy="1132332"/>
-          </a:xfrm>
-          <a:prstGeom prst="rect">
-            <a:avLst/>
-          </a:prstGeom>
-          <a:noFill/>
-        </p:spPr>
-        <p:txBody>
-          <a:bodyPr wrap="none" anchor="t" lIns="88900" rIns="88900" tIns="38100" bIns="38100">
-            <a:noAutofit/>
-          </a:bodyPr>
-          <a:lstStyle/>
-          <a:p>
-            <a:pPr marL="279400" indent="-215900">
-              <a:lnSpc>
-                <a:spcPts val="2772"/>
-              </a:lnSpc>
-              <a:spcBef>
-                <a:spcPts val="0"/>
-              </a:spcBef>
-              <a:spcAft>
-                <a:spcPts val="0"/>
-              </a:spcAft>
-              <a:defRPr sz="2100">
-                <a:solidFill>
-                  <a:srgbClr val="20344A"/>
-                </a:solidFill>
-                <a:latin typeface="Arial"/>
-              </a:defRPr>
-              <a:buChar char="•"/>
-            </a:pPr>
-            <a:r>
-              <a:rPr sz="2100" b="0" i="0">
-                <a:solidFill>
-                  <a:srgbClr val="20344A"/>
-                </a:solidFill>
-                <a:latin typeface="Arial"/>
-              </a:rPr>
-              <a:t>Upload and process CSVs; show results or a chart. In the </a:t>
-            </a:r>
-            <a:br/>
-            <a:r>
-              <a:rPr sz="2100" b="0" i="0">
-                <a:solidFill>
-                  <a:srgbClr val="20344A"/>
-                </a:solidFill>
-                <a:latin typeface="Arial"/>
-              </a:rPr>
-              <a:t>supplied example, upload DM and LB: 24 participants, 96 </a:t>
-            </a:r>
-            <a:br/>
-            <a:r>
-              <a:rPr sz="2100" b="0" i="0">
-                <a:solidFill>
-                  <a:srgbClr val="20344A"/>
-                </a:solidFill>
-                <a:latin typeface="Arial"/>
-              </a:rPr>
-              <a:t>records, 95 observed, 1 missing.</a:t>
-            </a:r>
-          </a:p>
-        </p:txBody>
-      </p:sp>
-      <p:sp>
-        <p:nvSpPr>
-          <p:cNvPr id="9" name="content:line-75:0"/>
-          <p:cNvSpPr txBox="1"/>
-          <p:nvPr/>
-        </p:nvSpPr>
-        <p:spPr>
-          <a:xfrm>
-            <a:off x="594360" y="5326380"/>
-            <a:ext cx="11003279" cy="780288"/>
-          </a:xfrm>
-          <a:prstGeom prst="rect">
-            <a:avLst/>
-          </a:prstGeom>
-          <a:noFill/>
-        </p:spPr>
-        <p:txBody>
-          <a:bodyPr wrap="none" anchor="t" lIns="88900" rIns="88900" tIns="38100" bIns="38100">
-            <a:noAutofit/>
-          </a:bodyPr>
-          <a:lstStyle/>
-          <a:p>
-            <a:pPr marL="279400" indent="-215900">
-              <a:lnSpc>
-                <a:spcPts val="2772"/>
-              </a:lnSpc>
-              <a:spcBef>
-                <a:spcPts val="0"/>
-              </a:spcBef>
-              <a:spcAft>
-                <a:spcPts val="0"/>
-              </a:spcAft>
-              <a:defRPr sz="2100">
-                <a:solidFill>
-                  <a:srgbClr val="20344A"/>
-                </a:solidFill>
-                <a:latin typeface="Arial"/>
-              </a:defRPr>
-              <a:buChar char="•"/>
-            </a:pPr>
-            <a:r>
-              <a:rPr sz="2100" b="0" i="0">
-                <a:solidFill>
-                  <a:srgbClr val="20344A"/>
-                </a:solidFill>
-                <a:latin typeface="Arial"/>
-              </a:rPr>
-              <a:t>Instructor inspects actual service communication and output, </a:t>
-            </a:r>
-            <a:br/>
-            <a:r>
-              <a:rPr sz="2100" b="0" i="0">
-                <a:solidFill>
-                  <a:srgbClr val="20344A"/>
-                </a:solidFill>
-                <a:latin typeface="Arial"/>
-              </a:rPr>
-              <a:t>not only configuration. Follow the </a:t>
-            </a:r>
-            <a:r>
-              <a:rPr sz="2100" b="0" i="0">
-                <a:solidFill>
-                  <a:srgbClr val="007F82"/>
-                </a:solidFill>
-                <a:latin typeface="Arial"/>
-                <a:hlinkClick r:id="rId2"/>
-              </a:rPr>
-              <a:t>Compose guide</a:t>
-            </a:r>
-            <a:r>
-              <a:rPr sz="2100" b="0" i="0">
-                <a:solidFill>
-                  <a:srgbClr val="20344A"/>
-                </a:solidFill>
-                <a:latin typeface="Arial"/>
-              </a:rPr>
-              <a:t>; stop </a:t>
+                <a:latin typeface="Arial"/>
+              </a:rPr>
+              <a:t>before tracing your own application.</a:t>
             </a:r>
           </a:p>
         </p:txBody>
@@ -11486,14 +11468,14 @@
               </a:defRPr>
             </a:pPr>
             <a:r>
-              <a:t>SOURCE 8 / 16  ·  CONTINUED 2</a:t>
-            </a:r>
-          </a:p>
-        </p:txBody>
-      </p:sp>
-      <p:sp>
-        <p:nvSpPr>
-          <p:cNvPr id="4" name="title:line-70"/>
+              <a:t>SOURCE 9 / 17</a:t>
+            </a:r>
+          </a:p>
+        </p:txBody>
+      </p:sp>
+      <p:sp>
+        <p:nvSpPr>
+          <p:cNvPr id="4" name="title:line-76"/>
           <p:cNvSpPr txBox="1"/>
           <p:nvPr/>
         </p:nvSpPr>
@@ -11589,14 +11571,14 @@
       </p:sp>
       <p:sp>
         <p:nvSpPr>
-          <p:cNvPr id="6" name="content:line-75:2"/>
+          <p:cNvPr id="6" name="content:line-78:0"/>
           <p:cNvSpPr txBox="1"/>
           <p:nvPr/>
         </p:nvSpPr>
         <p:spPr>
           <a:xfrm>
             <a:off x="594360" y="1737360"/>
-            <a:ext cx="11003279" cy="428244"/>
+            <a:ext cx="11003279" cy="1132332"/>
           </a:xfrm>
           <a:prstGeom prst="rect">
             <a:avLst/>
@@ -11625,16 +11607,306 @@
                 </a:solidFill>
                 <a:latin typeface="Arial"/>
               </a:defRPr>
-              <a:buChar char=" "/>
-            </a:pPr>
-            <a:r>
-              <a:rPr sz="2100" b="0" i="0">
-                <a:solidFill>
-                  <a:srgbClr val="20344A"/>
-                </a:solidFill>
-                <a:latin typeface="Arial"/>
-              </a:rPr>
-              <a:t>standalone servers using the same ports first.</a:t>
+              <a:buChar char="•"/>
+            </a:pPr>
+            <a:r>
+              <a:rPr sz="2100" b="0" i="0">
+                <a:solidFill>
+                  <a:srgbClr val="20344A"/>
+                </a:solidFill>
+                <a:latin typeface="Arial"/>
+              </a:rPr>
+              <a:t>Run </a:t>
+            </a:r>
+            <a:r>
+              <a:rPr sz="2100" b="0" i="0">
+                <a:solidFill>
+                  <a:srgbClr val="20344A"/>
+                </a:solidFill>
+                <a:latin typeface="Courier New"/>
+              </a:rPr>
+              <a:t>docker compose up --build</a:t>
+            </a:r>
+            <a:r>
+              <a:rPr sz="2100" b="0" i="0">
+                <a:solidFill>
+                  <a:srgbClr val="20344A"/>
+                </a:solidFill>
+                <a:latin typeface="Arial"/>
+              </a:rPr>
+              <a:t> live; show frontend/backend </a:t>
+            </a:r>
+            <a:br/>
+            <a:r>
+              <a:rPr sz="2100" b="0" i="0">
+                <a:solidFill>
+                  <a:srgbClr val="20344A"/>
+                </a:solidFill>
+                <a:latin typeface="Arial"/>
+              </a:rPr>
+              <a:t>running, backend readiness, and relevant logs or health </a:t>
+            </a:r>
+            <a:br/>
+            <a:r>
+              <a:rPr sz="2100" b="0" i="0">
+                <a:solidFill>
+                  <a:srgbClr val="20344A"/>
+                </a:solidFill>
+                <a:latin typeface="Arial"/>
+              </a:rPr>
+              <a:t>responses.</a:t>
+            </a:r>
+          </a:p>
+        </p:txBody>
+      </p:sp>
+      <p:sp>
+        <p:nvSpPr>
+          <p:cNvPr id="7" name="content:line-79:0"/>
+          <p:cNvSpPr txBox="1"/>
+          <p:nvPr/>
+        </p:nvSpPr>
+        <p:spPr>
+          <a:xfrm>
+            <a:off x="594360" y="2933700"/>
+            <a:ext cx="11003279" cy="1132332"/>
+          </a:xfrm>
+          <a:prstGeom prst="rect">
+            <a:avLst/>
+          </a:prstGeom>
+          <a:noFill/>
+        </p:spPr>
+        <p:txBody>
+          <a:bodyPr wrap="none" anchor="t" lIns="88900" rIns="88900" tIns="38100" bIns="38100">
+            <a:noAutofit/>
+          </a:bodyPr>
+          <a:lstStyle/>
+          <a:p>
+            <a:pPr marL="279400" indent="-215900">
+              <a:lnSpc>
+                <a:spcPts val="2772"/>
+              </a:lnSpc>
+              <a:spcBef>
+                <a:spcPts val="0"/>
+              </a:spcBef>
+              <a:spcAft>
+                <a:spcPts val="0"/>
+              </a:spcAft>
+              <a:defRPr sz="2100">
+                <a:solidFill>
+                  <a:srgbClr val="20344A"/>
+                </a:solidFill>
+                <a:latin typeface="Arial"/>
+              </a:defRPr>
+              <a:buChar char="•"/>
+            </a:pPr>
+            <a:r>
+              <a:rPr sz="2100" b="0" i="0">
+                <a:solidFill>
+                  <a:srgbClr val="20344A"/>
+                </a:solidFill>
+                <a:latin typeface="Arial"/>
+              </a:rPr>
+              <a:t>Browser opens </a:t>
+            </a:r>
+            <a:r>
+              <a:rPr sz="2100" b="0" i="0">
+                <a:solidFill>
+                  <a:srgbClr val="20344A"/>
+                </a:solidFill>
+                <a:latin typeface="Courier New"/>
+              </a:rPr>
+              <a:t>http://127.0.0.1:8501</a:t>
+            </a:r>
+            <a:r>
+              <a:rPr sz="2100" b="0" i="0">
+                <a:solidFill>
+                  <a:srgbClr val="20344A"/>
+                </a:solidFill>
+                <a:latin typeface="Arial"/>
+              </a:rPr>
+              <a:t>; frontend calls </a:t>
+            </a:r>
+            <a:br/>
+            <a:r>
+              <a:rPr sz="2100" b="0" i="0">
+                <a:solidFill>
+                  <a:srgbClr val="20344A"/>
+                </a:solidFill>
+                <a:latin typeface="Courier New"/>
+              </a:rPr>
+              <a:t>http://backend:8000</a:t>
+            </a:r>
+            <a:r>
+              <a:rPr sz="2100" b="0" i="0">
+                <a:solidFill>
+                  <a:srgbClr val="20344A"/>
+                </a:solidFill>
+                <a:latin typeface="Arial"/>
+              </a:rPr>
+              <a:t> inside Compose. There, localhost means </a:t>
+            </a:r>
+            <a:br/>
+            <a:r>
+              <a:rPr sz="2100" b="0" i="0">
+                <a:solidFill>
+                  <a:srgbClr val="20344A"/>
+                </a:solidFill>
+                <a:latin typeface="Arial"/>
+              </a:rPr>
+              <a:t>the frontend itself.</a:t>
+            </a:r>
+          </a:p>
+        </p:txBody>
+      </p:sp>
+      <p:sp>
+        <p:nvSpPr>
+          <p:cNvPr id="8" name="content:line-80:0"/>
+          <p:cNvSpPr txBox="1"/>
+          <p:nvPr/>
+        </p:nvSpPr>
+        <p:spPr>
+          <a:xfrm>
+            <a:off x="594360" y="4130040"/>
+            <a:ext cx="11003279" cy="1132332"/>
+          </a:xfrm>
+          <a:prstGeom prst="rect">
+            <a:avLst/>
+          </a:prstGeom>
+          <a:noFill/>
+        </p:spPr>
+        <p:txBody>
+          <a:bodyPr wrap="none" anchor="t" lIns="88900" rIns="88900" tIns="38100" bIns="38100">
+            <a:noAutofit/>
+          </a:bodyPr>
+          <a:lstStyle/>
+          <a:p>
+            <a:pPr marL="279400" indent="-215900">
+              <a:lnSpc>
+                <a:spcPts val="2772"/>
+              </a:lnSpc>
+              <a:spcBef>
+                <a:spcPts val="0"/>
+              </a:spcBef>
+              <a:spcAft>
+                <a:spcPts val="0"/>
+              </a:spcAft>
+              <a:defRPr sz="2100">
+                <a:solidFill>
+                  <a:srgbClr val="20344A"/>
+                </a:solidFill>
+                <a:latin typeface="Arial"/>
+              </a:defRPr>
+              <a:buChar char="•"/>
+            </a:pPr>
+            <a:r>
+              <a:rPr sz="2100" b="0" i="0">
+                <a:solidFill>
+                  <a:srgbClr val="20344A"/>
+                </a:solidFill>
+                <a:latin typeface="Arial"/>
+              </a:rPr>
+              <a:t>Upload and process CSVs; show results or a chart. In the </a:t>
+            </a:r>
+            <a:br/>
+            <a:r>
+              <a:rPr sz="2100" b="0" i="0">
+                <a:solidFill>
+                  <a:srgbClr val="20344A"/>
+                </a:solidFill>
+                <a:latin typeface="Arial"/>
+              </a:rPr>
+              <a:t>supplied example, upload DM and LB: 24 participants, 96 </a:t>
+            </a:r>
+            <a:br/>
+            <a:r>
+              <a:rPr sz="2100" b="0" i="0">
+                <a:solidFill>
+                  <a:srgbClr val="20344A"/>
+                </a:solidFill>
+                <a:latin typeface="Arial"/>
+              </a:rPr>
+              <a:t>records, 95 observed, 1 missing.</a:t>
+            </a:r>
+          </a:p>
+        </p:txBody>
+      </p:sp>
+      <p:sp>
+        <p:nvSpPr>
+          <p:cNvPr id="9" name="content:line-81:0"/>
+          <p:cNvSpPr txBox="1"/>
+          <p:nvPr/>
+        </p:nvSpPr>
+        <p:spPr>
+          <a:xfrm>
+            <a:off x="594360" y="5326380"/>
+            <a:ext cx="11003279" cy="780288"/>
+          </a:xfrm>
+          <a:prstGeom prst="rect">
+            <a:avLst/>
+          </a:prstGeom>
+          <a:noFill/>
+        </p:spPr>
+        <p:txBody>
+          <a:bodyPr wrap="none" anchor="t" lIns="88900" rIns="88900" tIns="38100" bIns="38100">
+            <a:noAutofit/>
+          </a:bodyPr>
+          <a:lstStyle/>
+          <a:p>
+            <a:pPr marL="279400" indent="-215900">
+              <a:lnSpc>
+                <a:spcPts val="2772"/>
+              </a:lnSpc>
+              <a:spcBef>
+                <a:spcPts val="0"/>
+              </a:spcBef>
+              <a:spcAft>
+                <a:spcPts val="0"/>
+              </a:spcAft>
+              <a:defRPr sz="2100">
+                <a:solidFill>
+                  <a:srgbClr val="20344A"/>
+                </a:solidFill>
+                <a:latin typeface="Arial"/>
+              </a:defRPr>
+              <a:buChar char="•"/>
+            </a:pPr>
+            <a:r>
+              <a:rPr sz="2100" b="0" i="0">
+                <a:solidFill>
+                  <a:srgbClr val="20344A"/>
+                </a:solidFill>
+                <a:latin typeface="Arial"/>
+              </a:rPr>
+              <a:t>Instructor inspects actual service communication and output, </a:t>
+            </a:r>
+            <a:br/>
+            <a:r>
+              <a:rPr sz="2100" b="0" i="0">
+                <a:solidFill>
+                  <a:srgbClr val="20344A"/>
+                </a:solidFill>
+                <a:latin typeface="Arial"/>
+              </a:rPr>
+              <a:t>not only configuration. Follow the </a:t>
+            </a:r>
+            <a:r>
+              <a:rPr sz="2100" b="0" i="0">
+                <a:solidFill>
+                  <a:srgbClr val="007F82"/>
+                </a:solidFill>
+                <a:latin typeface="Arial"/>
+                <a:hlinkClick r:id="rId2"/>
+              </a:rPr>
+              <a:t>Compose guide</a:t>
+            </a:r>
+            <a:r>
+              <a:rPr sz="2100" b="0" i="0">
+                <a:solidFill>
+                  <a:srgbClr val="20344A"/>
+                </a:solidFill>
+                <a:latin typeface="Arial"/>
+              </a:rPr>
+              <a:t>; stop </a:t>
             </a:r>
           </a:p>
         </p:txBody>

--- a/materials/slides/session-5.pptx
+++ b/materials/slides/session-5.pptx
@@ -24,6 +24,8 @@
     <p:sldId id="272" r:id="rId23"/>
     <p:sldId id="273" r:id="rId24"/>
     <p:sldId id="274" r:id="rId25"/>
+    <p:sldId id="275" r:id="rId26"/>
+    <p:sldId id="276" r:id="rId27"/>
   </p:sldIdLst>
   <p:sldSz cx="12191999" cy="6858000" type="screen4x3"/>
   <p:notesSz cx="6858000" cy="9144000"/>
@@ -3197,7 +3199,7 @@
               </a:defRPr>
             </a:pPr>
             <a:r>
-              <a:t>SOURCE 1 / 17</a:t>
+              <a:t>SOURCE 1 / 18</a:t>
             </a:r>
           </a:p>
         </p:txBody>
@@ -3674,14 +3676,14 @@
               </a:defRPr>
             </a:pPr>
             <a:r>
-              <a:t>SOURCE 9 / 17  ·  CONTINUED 2</a:t>
-            </a:r>
-          </a:p>
-        </p:txBody>
-      </p:sp>
-      <p:sp>
-        <p:nvSpPr>
-          <p:cNvPr id="4" name="title:line-76"/>
+              <a:t>SOURCE 9 / 18</a:t>
+            </a:r>
+          </a:p>
+        </p:txBody>
+      </p:sp>
+      <p:sp>
+        <p:nvSpPr>
+          <p:cNvPr id="4" name="title:line-74"/>
           <p:cNvSpPr txBox="1"/>
           <p:nvPr/>
         </p:nvSpPr>
@@ -3725,7 +3727,7 @@
                 </a:solidFill>
                 <a:latin typeface="Arial"/>
               </a:rPr>
-              <a:t>Show real startup and CSV results</a:t>
+              <a:t>Trace the working application</a:t>
             </a:r>
           </a:p>
         </p:txBody>
@@ -3777,14 +3779,173 @@
       </p:sp>
       <p:sp>
         <p:nvSpPr>
-          <p:cNvPr id="6" name="content:line-81:2"/>
+          <p:cNvPr id="6" name="content:line-77:0"/>
           <p:cNvSpPr txBox="1"/>
           <p:nvPr/>
         </p:nvSpPr>
         <p:spPr>
           <a:xfrm>
             <a:off x="594360" y="1737360"/>
-            <a:ext cx="11003279" cy="428244"/>
+            <a:ext cx="11003279" cy="377952"/>
+          </a:xfrm>
+          <a:prstGeom prst="rect">
+            <a:avLst/>
+          </a:prstGeom>
+          <a:solidFill>
+            <a:srgbClr val="EDF3F6"/>
+          </a:solidFill>
+        </p:spPr>
+        <p:txBody>
+          <a:bodyPr wrap="none" anchor="t" lIns="88900" rIns="88900" tIns="38100" bIns="38100">
+            <a:noAutofit/>
+          </a:bodyPr>
+          <a:lstStyle/>
+          <a:p>
+            <a:pPr>
+              <a:lnSpc>
+                <a:spcPts val="2376"/>
+              </a:lnSpc>
+              <a:spcBef>
+                <a:spcPts val="0"/>
+              </a:spcBef>
+              <a:spcAft>
+                <a:spcPts val="0"/>
+              </a:spcAft>
+              <a:defRPr sz="1800">
+                <a:solidFill>
+                  <a:srgbClr val="20344A"/>
+                </a:solidFill>
+                <a:latin typeface="Arial"/>
+              </a:defRPr>
+            </a:pPr>
+            <a:r>
+              <a:rPr sz="1800" b="0" i="0">
+                <a:solidFill>
+                  <a:srgbClr val="20344A"/>
+                </a:solidFill>
+                <a:latin typeface="Courier New"/>
+              </a:rPr>
+              <a:t>CSV upload -&gt; Streamlit -&gt; HTTP request -&gt; FastAPI</a:t>
+            </a:r>
+          </a:p>
+        </p:txBody>
+      </p:sp>
+      <p:sp>
+        <p:nvSpPr>
+          <p:cNvPr id="7" name="content:line-78:0"/>
+          <p:cNvSpPr txBox="1"/>
+          <p:nvPr/>
+        </p:nvSpPr>
+        <p:spPr>
+          <a:xfrm>
+            <a:off x="594360" y="2115312"/>
+            <a:ext cx="11003279" cy="377952"/>
+          </a:xfrm>
+          <a:prstGeom prst="rect">
+            <a:avLst/>
+          </a:prstGeom>
+          <a:solidFill>
+            <a:srgbClr val="EDF3F6"/>
+          </a:solidFill>
+        </p:spPr>
+        <p:txBody>
+          <a:bodyPr wrap="none" anchor="t" lIns="88900" rIns="88900" tIns="38100" bIns="38100">
+            <a:noAutofit/>
+          </a:bodyPr>
+          <a:lstStyle/>
+          <a:p>
+            <a:pPr>
+              <a:lnSpc>
+                <a:spcPts val="2376"/>
+              </a:lnSpc>
+              <a:spcBef>
+                <a:spcPts val="0"/>
+              </a:spcBef>
+              <a:spcAft>
+                <a:spcPts val="0"/>
+              </a:spcAft>
+              <a:defRPr sz="1800">
+                <a:solidFill>
+                  <a:srgbClr val="20344A"/>
+                </a:solidFill>
+                <a:latin typeface="Arial"/>
+              </a:defRPr>
+            </a:pPr>
+            <a:r>
+              <a:rPr sz="1800" b="0" i="0">
+                <a:solidFill>
+                  <a:srgbClr val="20344A"/>
+                </a:solidFill>
+                <a:latin typeface="Courier New"/>
+              </a:rPr>
+              <a:t>FastAPI -&gt; reusable stat_core processing -&gt; result</a:t>
+            </a:r>
+          </a:p>
+        </p:txBody>
+      </p:sp>
+      <p:sp>
+        <p:nvSpPr>
+          <p:cNvPr id="8" name="content:line-79:0"/>
+          <p:cNvSpPr txBox="1"/>
+          <p:nvPr/>
+        </p:nvSpPr>
+        <p:spPr>
+          <a:xfrm>
+            <a:off x="594360" y="2493264"/>
+            <a:ext cx="11003279" cy="377952"/>
+          </a:xfrm>
+          <a:prstGeom prst="rect">
+            <a:avLst/>
+          </a:prstGeom>
+          <a:solidFill>
+            <a:srgbClr val="EDF3F6"/>
+          </a:solidFill>
+        </p:spPr>
+        <p:txBody>
+          <a:bodyPr wrap="none" anchor="t" lIns="88900" rIns="88900" tIns="38100" bIns="38100">
+            <a:noAutofit/>
+          </a:bodyPr>
+          <a:lstStyle/>
+          <a:p>
+            <a:pPr>
+              <a:lnSpc>
+                <a:spcPts val="2376"/>
+              </a:lnSpc>
+              <a:spcBef>
+                <a:spcPts val="0"/>
+              </a:spcBef>
+              <a:spcAft>
+                <a:spcPts val="0"/>
+              </a:spcAft>
+              <a:defRPr sz="1800">
+                <a:solidFill>
+                  <a:srgbClr val="20344A"/>
+                </a:solidFill>
+                <a:latin typeface="Arial"/>
+              </a:defRPr>
+            </a:pPr>
+            <a:r>
+              <a:rPr sz="1800" b="0" i="0">
+                <a:solidFill>
+                  <a:srgbClr val="20344A"/>
+                </a:solidFill>
+                <a:latin typeface="Courier New"/>
+              </a:rPr>
+              <a:t>result -&gt; Streamlit -&gt; visible records/summary/chart</a:t>
+            </a:r>
+          </a:p>
+        </p:txBody>
+      </p:sp>
+      <p:sp>
+        <p:nvSpPr>
+          <p:cNvPr id="9" name="content:line-82:0"/>
+          <p:cNvSpPr txBox="1"/>
+          <p:nvPr/>
+        </p:nvSpPr>
+        <p:spPr>
+          <a:xfrm>
+            <a:off x="594360" y="2871215"/>
+            <a:ext cx="11003279" cy="780288"/>
           </a:xfrm>
           <a:prstGeom prst="rect">
             <a:avLst/>
@@ -3813,16 +3974,198 @@
                 </a:solidFill>
                 <a:latin typeface="Arial"/>
               </a:defRPr>
-              <a:buChar char=" "/>
-            </a:pPr>
-            <a:r>
-              <a:rPr sz="2100" b="0" i="0">
-                <a:solidFill>
-                  <a:srgbClr val="20344A"/>
-                </a:solidFill>
-                <a:latin typeface="Arial"/>
-              </a:rPr>
-              <a:t>standalone servers using the same ports first.</a:t>
+              <a:buChar char="•"/>
+            </a:pPr>
+            <a:r>
+              <a:rPr sz="2100" b="0" i="0">
+                <a:solidFill>
+                  <a:srgbClr val="20344A"/>
+                </a:solidFill>
+                <a:latin typeface="Arial"/>
+              </a:rPr>
+              <a:t>HTTP carries requests and responses between programs; </a:t>
+            </a:r>
+            <a:br/>
+            <a:r>
+              <a:rPr sz="2100" b="0" i="0">
+                <a:solidFill>
+                  <a:srgbClr val="20344A"/>
+                </a:solidFill>
+                <a:latin typeface="Arial"/>
+              </a:rPr>
+              <a:t>reusable processing functions work without the API or UI.</a:t>
+            </a:r>
+          </a:p>
+        </p:txBody>
+      </p:sp>
+      <p:sp>
+        <p:nvSpPr>
+          <p:cNvPr id="10" name="content:line-83:0"/>
+          <p:cNvSpPr txBox="1"/>
+          <p:nvPr/>
+        </p:nvSpPr>
+        <p:spPr>
+          <a:xfrm>
+            <a:off x="594360" y="3715511"/>
+            <a:ext cx="11003279" cy="780288"/>
+          </a:xfrm>
+          <a:prstGeom prst="rect">
+            <a:avLst/>
+          </a:prstGeom>
+          <a:noFill/>
+        </p:spPr>
+        <p:txBody>
+          <a:bodyPr wrap="none" anchor="t" lIns="88900" rIns="88900" tIns="38100" bIns="38100">
+            <a:noAutofit/>
+          </a:bodyPr>
+          <a:lstStyle/>
+          <a:p>
+            <a:pPr marL="279400" indent="-215900">
+              <a:lnSpc>
+                <a:spcPts val="2772"/>
+              </a:lnSpc>
+              <a:spcBef>
+                <a:spcPts val="0"/>
+              </a:spcBef>
+              <a:spcAft>
+                <a:spcPts val="0"/>
+              </a:spcAft>
+              <a:defRPr sz="2100">
+                <a:solidFill>
+                  <a:srgbClr val="20344A"/>
+                </a:solidFill>
+                <a:latin typeface="Arial"/>
+              </a:defRPr>
+              <a:buChar char="•"/>
+            </a:pPr>
+            <a:r>
+              <a:rPr sz="2100" b="0" i="0">
+                <a:solidFill>
+                  <a:srgbClr val="20344A"/>
+                </a:solidFill>
+                <a:latin typeface="Arial"/>
+              </a:rPr>
+              <a:t>Instructor follows one request through </a:t>
+            </a:r>
+            <a:r>
+              <a:rPr sz="2100" b="0" i="0">
+                <a:solidFill>
+                  <a:srgbClr val="007F82"/>
+                </a:solidFill>
+                <a:latin typeface="Arial"/>
+                <a:hlinkClick r:id="rId2"/>
+              </a:rPr>
+              <a:t>frontend</a:t>
+            </a:r>
+            <a:r>
+              <a:rPr sz="2100" b="0" i="0">
+                <a:solidFill>
+                  <a:srgbClr val="20344A"/>
+                </a:solidFill>
+                <a:latin typeface="Arial"/>
+              </a:rPr>
+              <a:t>, </a:t>
+            </a:r>
+            <a:r>
+              <a:rPr sz="2100" b="0" i="0">
+                <a:solidFill>
+                  <a:srgbClr val="007F82"/>
+                </a:solidFill>
+                <a:latin typeface="Arial"/>
+                <a:hlinkClick r:id="rId3"/>
+              </a:rPr>
+              <a:t>API</a:t>
+            </a:r>
+            <a:r>
+              <a:rPr sz="2100" b="0" i="0">
+                <a:solidFill>
+                  <a:srgbClr val="20344A"/>
+                </a:solidFill>
+                <a:latin typeface="Arial"/>
+              </a:rPr>
+              <a:t>, and </a:t>
+            </a:r>
+            <a:br/>
+            <a:r>
+              <a:rPr sz="2100" b="0" i="0">
+                <a:solidFill>
+                  <a:srgbClr val="007F82"/>
+                </a:solidFill>
+                <a:latin typeface="Arial"/>
+                <a:hlinkClick r:id="rId4"/>
+              </a:rPr>
+              <a:t>package</a:t>
+            </a:r>
+            <a:r>
+              <a:rPr sz="2100" b="0" i="0">
+                <a:solidFill>
+                  <a:srgbClr val="20344A"/>
+                </a:solidFill>
+                <a:latin typeface="Arial"/>
+              </a:rPr>
+              <a:t>, checking inputs and returned results.</a:t>
+            </a:r>
+          </a:p>
+        </p:txBody>
+      </p:sp>
+      <p:sp>
+        <p:nvSpPr>
+          <p:cNvPr id="11" name="content:line-84:0"/>
+          <p:cNvSpPr txBox="1"/>
+          <p:nvPr/>
+        </p:nvSpPr>
+        <p:spPr>
+          <a:xfrm>
+            <a:off x="594360" y="4559808"/>
+            <a:ext cx="11003279" cy="780288"/>
+          </a:xfrm>
+          <a:prstGeom prst="rect">
+            <a:avLst/>
+          </a:prstGeom>
+          <a:noFill/>
+        </p:spPr>
+        <p:txBody>
+          <a:bodyPr wrap="none" anchor="t" lIns="88900" rIns="88900" tIns="38100" bIns="38100">
+            <a:noAutofit/>
+          </a:bodyPr>
+          <a:lstStyle/>
+          <a:p>
+            <a:pPr marL="279400" indent="-215900">
+              <a:lnSpc>
+                <a:spcPts val="2772"/>
+              </a:lnSpc>
+              <a:spcBef>
+                <a:spcPts val="0"/>
+              </a:spcBef>
+              <a:spcAft>
+                <a:spcPts val="0"/>
+              </a:spcAft>
+              <a:defRPr sz="2100">
+                <a:solidFill>
+                  <a:srgbClr val="20344A"/>
+                </a:solidFill>
+                <a:latin typeface="Arial"/>
+              </a:defRPr>
+              <a:buChar char="•"/>
+            </a:pPr>
+            <a:r>
+              <a:rPr sz="2100" b="0" i="0">
+                <a:solidFill>
+                  <a:srgbClr val="20344A"/>
+                </a:solidFill>
+                <a:latin typeface="Arial"/>
+              </a:rPr>
+              <a:t>State your dataset, question, and expected behavior briefly </a:t>
+            </a:r>
+            <a:br/>
+            <a:r>
+              <a:rPr sz="2100" b="0" i="0">
+                <a:solidFill>
+                  <a:srgbClr val="20344A"/>
+                </a:solidFill>
+                <a:latin typeface="Arial"/>
+              </a:rPr>
+              <a:t>before tracing your own application.</a:t>
             </a:r>
           </a:p>
         </p:txBody>
@@ -3936,14 +4279,14 @@
               </a:defRPr>
             </a:pPr>
             <a:r>
-              <a:t>SOURCE 10 / 17</a:t>
-            </a:r>
-          </a:p>
-        </p:txBody>
-      </p:sp>
-      <p:sp>
-        <p:nvSpPr>
-          <p:cNvPr id="4" name="title:line-85"/>
+              <a:t>SOURCE 10 / 18</a:t>
+            </a:r>
+          </a:p>
+        </p:txBody>
+      </p:sp>
+      <p:sp>
+        <p:nvSpPr>
+          <p:cNvPr id="4" name="title:line-88"/>
           <p:cNvSpPr txBox="1"/>
           <p:nvPr/>
         </p:nvSpPr>
@@ -3987,7 +4330,7 @@
                 </a:solidFill>
                 <a:latin typeface="Arial"/>
               </a:rPr>
-              <a:t>Show validation and its test</a:t>
+              <a:t>Show real startup and CSV results</a:t>
             </a:r>
           </a:p>
         </p:txBody>
@@ -4039,13 +4382,274 @@
       </p:sp>
       <p:sp>
         <p:nvSpPr>
-          <p:cNvPr id="6" name="content:line-87:0"/>
+          <p:cNvPr id="6" name="content:line-90:0"/>
           <p:cNvSpPr txBox="1"/>
           <p:nvPr/>
         </p:nvSpPr>
         <p:spPr>
           <a:xfrm>
             <a:off x="594360" y="1737360"/>
+            <a:ext cx="11003279" cy="1132332"/>
+          </a:xfrm>
+          <a:prstGeom prst="rect">
+            <a:avLst/>
+          </a:prstGeom>
+          <a:noFill/>
+        </p:spPr>
+        <p:txBody>
+          <a:bodyPr wrap="none" anchor="t" lIns="88900" rIns="88900" tIns="38100" bIns="38100">
+            <a:noAutofit/>
+          </a:bodyPr>
+          <a:lstStyle/>
+          <a:p>
+            <a:pPr marL="279400" indent="-215900">
+              <a:lnSpc>
+                <a:spcPts val="2772"/>
+              </a:lnSpc>
+              <a:spcBef>
+                <a:spcPts val="0"/>
+              </a:spcBef>
+              <a:spcAft>
+                <a:spcPts val="0"/>
+              </a:spcAft>
+              <a:defRPr sz="2100">
+                <a:solidFill>
+                  <a:srgbClr val="20344A"/>
+                </a:solidFill>
+                <a:latin typeface="Arial"/>
+              </a:defRPr>
+              <a:buChar char="•"/>
+            </a:pPr>
+            <a:r>
+              <a:rPr sz="2100" b="0" i="0">
+                <a:solidFill>
+                  <a:srgbClr val="20344A"/>
+                </a:solidFill>
+                <a:latin typeface="Arial"/>
+              </a:rPr>
+              <a:t>Run </a:t>
+            </a:r>
+            <a:r>
+              <a:rPr sz="2100" b="0" i="0">
+                <a:solidFill>
+                  <a:srgbClr val="20344A"/>
+                </a:solidFill>
+                <a:latin typeface="Courier New"/>
+              </a:rPr>
+              <a:t>docker compose up --build</a:t>
+            </a:r>
+            <a:r>
+              <a:rPr sz="2100" b="0" i="0">
+                <a:solidFill>
+                  <a:srgbClr val="20344A"/>
+                </a:solidFill>
+                <a:latin typeface="Arial"/>
+              </a:rPr>
+              <a:t> live; show frontend/backend </a:t>
+            </a:r>
+            <a:br/>
+            <a:r>
+              <a:rPr sz="2100" b="0" i="0">
+                <a:solidFill>
+                  <a:srgbClr val="20344A"/>
+                </a:solidFill>
+                <a:latin typeface="Arial"/>
+              </a:rPr>
+              <a:t>running, backend readiness, and relevant logs or health </a:t>
+            </a:r>
+            <a:br/>
+            <a:r>
+              <a:rPr sz="2100" b="0" i="0">
+                <a:solidFill>
+                  <a:srgbClr val="20344A"/>
+                </a:solidFill>
+                <a:latin typeface="Arial"/>
+              </a:rPr>
+              <a:t>responses.</a:t>
+            </a:r>
+          </a:p>
+        </p:txBody>
+      </p:sp>
+      <p:sp>
+        <p:nvSpPr>
+          <p:cNvPr id="7" name="content:line-91:0"/>
+          <p:cNvSpPr txBox="1"/>
+          <p:nvPr/>
+        </p:nvSpPr>
+        <p:spPr>
+          <a:xfrm>
+            <a:off x="594360" y="2933700"/>
+            <a:ext cx="11003279" cy="1132332"/>
+          </a:xfrm>
+          <a:prstGeom prst="rect">
+            <a:avLst/>
+          </a:prstGeom>
+          <a:noFill/>
+        </p:spPr>
+        <p:txBody>
+          <a:bodyPr wrap="none" anchor="t" lIns="88900" rIns="88900" tIns="38100" bIns="38100">
+            <a:noAutofit/>
+          </a:bodyPr>
+          <a:lstStyle/>
+          <a:p>
+            <a:pPr marL="279400" indent="-215900">
+              <a:lnSpc>
+                <a:spcPts val="2772"/>
+              </a:lnSpc>
+              <a:spcBef>
+                <a:spcPts val="0"/>
+              </a:spcBef>
+              <a:spcAft>
+                <a:spcPts val="0"/>
+              </a:spcAft>
+              <a:defRPr sz="2100">
+                <a:solidFill>
+                  <a:srgbClr val="20344A"/>
+                </a:solidFill>
+                <a:latin typeface="Arial"/>
+              </a:defRPr>
+              <a:buChar char="•"/>
+            </a:pPr>
+            <a:r>
+              <a:rPr sz="2100" b="0" i="0">
+                <a:solidFill>
+                  <a:srgbClr val="20344A"/>
+                </a:solidFill>
+                <a:latin typeface="Arial"/>
+              </a:rPr>
+              <a:t>Browser opens </a:t>
+            </a:r>
+            <a:r>
+              <a:rPr sz="2100" b="0" i="0">
+                <a:solidFill>
+                  <a:srgbClr val="20344A"/>
+                </a:solidFill>
+                <a:latin typeface="Courier New"/>
+              </a:rPr>
+              <a:t>http://127.0.0.1:8501</a:t>
+            </a:r>
+            <a:r>
+              <a:rPr sz="2100" b="0" i="0">
+                <a:solidFill>
+                  <a:srgbClr val="20344A"/>
+                </a:solidFill>
+                <a:latin typeface="Arial"/>
+              </a:rPr>
+              <a:t>; frontend calls </a:t>
+            </a:r>
+            <a:br/>
+            <a:r>
+              <a:rPr sz="2100" b="0" i="0">
+                <a:solidFill>
+                  <a:srgbClr val="20344A"/>
+                </a:solidFill>
+                <a:latin typeface="Courier New"/>
+              </a:rPr>
+              <a:t>http://backend:8000</a:t>
+            </a:r>
+            <a:r>
+              <a:rPr sz="2100" b="0" i="0">
+                <a:solidFill>
+                  <a:srgbClr val="20344A"/>
+                </a:solidFill>
+                <a:latin typeface="Arial"/>
+              </a:rPr>
+              <a:t> inside Compose. There, localhost means </a:t>
+            </a:r>
+            <a:br/>
+            <a:r>
+              <a:rPr sz="2100" b="0" i="0">
+                <a:solidFill>
+                  <a:srgbClr val="20344A"/>
+                </a:solidFill>
+                <a:latin typeface="Arial"/>
+              </a:rPr>
+              <a:t>the frontend itself.</a:t>
+            </a:r>
+          </a:p>
+        </p:txBody>
+      </p:sp>
+      <p:sp>
+        <p:nvSpPr>
+          <p:cNvPr id="8" name="content:line-92:0"/>
+          <p:cNvSpPr txBox="1"/>
+          <p:nvPr/>
+        </p:nvSpPr>
+        <p:spPr>
+          <a:xfrm>
+            <a:off x="594360" y="4130040"/>
+            <a:ext cx="11003279" cy="1132332"/>
+          </a:xfrm>
+          <a:prstGeom prst="rect">
+            <a:avLst/>
+          </a:prstGeom>
+          <a:noFill/>
+        </p:spPr>
+        <p:txBody>
+          <a:bodyPr wrap="none" anchor="t" lIns="88900" rIns="88900" tIns="38100" bIns="38100">
+            <a:noAutofit/>
+          </a:bodyPr>
+          <a:lstStyle/>
+          <a:p>
+            <a:pPr marL="279400" indent="-215900">
+              <a:lnSpc>
+                <a:spcPts val="2772"/>
+              </a:lnSpc>
+              <a:spcBef>
+                <a:spcPts val="0"/>
+              </a:spcBef>
+              <a:spcAft>
+                <a:spcPts val="0"/>
+              </a:spcAft>
+              <a:defRPr sz="2100">
+                <a:solidFill>
+                  <a:srgbClr val="20344A"/>
+                </a:solidFill>
+                <a:latin typeface="Arial"/>
+              </a:defRPr>
+              <a:buChar char="•"/>
+            </a:pPr>
+            <a:r>
+              <a:rPr sz="2100" b="0" i="0">
+                <a:solidFill>
+                  <a:srgbClr val="20344A"/>
+                </a:solidFill>
+                <a:latin typeface="Arial"/>
+              </a:rPr>
+              <a:t>Upload and process CSVs; show results or a chart. In the </a:t>
+            </a:r>
+            <a:br/>
+            <a:r>
+              <a:rPr sz="2100" b="0" i="0">
+                <a:solidFill>
+                  <a:srgbClr val="20344A"/>
+                </a:solidFill>
+                <a:latin typeface="Arial"/>
+              </a:rPr>
+              <a:t>supplied example, upload DM and LB: 24 participants, 96 </a:t>
+            </a:r>
+            <a:br/>
+            <a:r>
+              <a:rPr sz="2100" b="0" i="0">
+                <a:solidFill>
+                  <a:srgbClr val="20344A"/>
+                </a:solidFill>
+                <a:latin typeface="Arial"/>
+              </a:rPr>
+              <a:t>records, 95 observed, 1 missing.</a:t>
+            </a:r>
+          </a:p>
+        </p:txBody>
+      </p:sp>
+      <p:sp>
+        <p:nvSpPr>
+          <p:cNvPr id="9" name="content:line-93:0"/>
+          <p:cNvSpPr txBox="1"/>
+          <p:nvPr/>
+        </p:nvSpPr>
+        <p:spPr>
+          <a:xfrm>
+            <a:off x="594360" y="5326380"/>
             <a:ext cx="11003279" cy="780288"/>
           </a:xfrm>
           <a:prstGeom prst="rect">
@@ -4084,7 +4688,7 @@
                 </a:solidFill>
                 <a:latin typeface="Arial"/>
               </a:rPr>
-              <a:t>Demonstrate one invalid input rejected clearly; it must not </a:t>
+              <a:t>Instructor inspects actual service communication and output, </a:t>
             </a:r>
             <a:br/>
             <a:r>
@@ -4094,183 +4698,7 @@
                 </a:solidFill>
                 <a:latin typeface="Arial"/>
               </a:rPr>
-              <a:t>appear as a successful result.</a:t>
-            </a:r>
-          </a:p>
-        </p:txBody>
-      </p:sp>
-      <p:sp>
-        <p:nvSpPr>
-          <p:cNvPr id="7" name="content:line-88:0"/>
-          <p:cNvSpPr txBox="1"/>
-          <p:nvPr/>
-        </p:nvSpPr>
-        <p:spPr>
-          <a:xfrm>
-            <a:off x="594360" y="2581656"/>
-            <a:ext cx="11003279" cy="780288"/>
-          </a:xfrm>
-          <a:prstGeom prst="rect">
-            <a:avLst/>
-          </a:prstGeom>
-          <a:noFill/>
-        </p:spPr>
-        <p:txBody>
-          <a:bodyPr wrap="none" anchor="t" lIns="88900" rIns="88900" tIns="38100" bIns="38100">
-            <a:noAutofit/>
-          </a:bodyPr>
-          <a:lstStyle/>
-          <a:p>
-            <a:pPr marL="279400" indent="-215900">
-              <a:lnSpc>
-                <a:spcPts val="2772"/>
-              </a:lnSpc>
-              <a:spcBef>
-                <a:spcPts val="0"/>
-              </a:spcBef>
-              <a:spcAft>
-                <a:spcPts val="0"/>
-              </a:spcAft>
-              <a:defRPr sz="2100">
-                <a:solidFill>
-                  <a:srgbClr val="20344A"/>
-                </a:solidFill>
-                <a:latin typeface="Arial"/>
-              </a:defRPr>
-              <a:buChar char="•"/>
-            </a:pPr>
-            <a:r>
-              <a:rPr sz="2100" b="0" i="0">
-                <a:solidFill>
-                  <a:srgbClr val="20344A"/>
-                </a:solidFill>
-                <a:latin typeface="Arial"/>
-              </a:rPr>
-              <a:t>Explain the rule: expected types, allowed bounds, or </a:t>
-            </a:r>
-            <a:br/>
-            <a:r>
-              <a:rPr sz="2100" b="0" i="0">
-                <a:solidFill>
-                  <a:srgbClr val="20344A"/>
-                </a:solidFill>
-                <a:latin typeface="Arial"/>
-              </a:rPr>
-              <a:t>missing-value handling. Missing does not mean zero.</a:t>
-            </a:r>
-          </a:p>
-        </p:txBody>
-      </p:sp>
-      <p:sp>
-        <p:nvSpPr>
-          <p:cNvPr id="8" name="content:line-89:0"/>
-          <p:cNvSpPr txBox="1"/>
-          <p:nvPr/>
-        </p:nvSpPr>
-        <p:spPr>
-          <a:xfrm>
-            <a:off x="594360" y="3425952"/>
-            <a:ext cx="11003279" cy="780288"/>
-          </a:xfrm>
-          <a:prstGeom prst="rect">
-            <a:avLst/>
-          </a:prstGeom>
-          <a:noFill/>
-        </p:spPr>
-        <p:txBody>
-          <a:bodyPr wrap="none" anchor="t" lIns="88900" rIns="88900" tIns="38100" bIns="38100">
-            <a:noAutofit/>
-          </a:bodyPr>
-          <a:lstStyle/>
-          <a:p>
-            <a:pPr marL="279400" indent="-215900">
-              <a:lnSpc>
-                <a:spcPts val="2772"/>
-              </a:lnSpc>
-              <a:spcBef>
-                <a:spcPts val="0"/>
-              </a:spcBef>
-              <a:spcAft>
-                <a:spcPts val="0"/>
-              </a:spcAft>
-              <a:defRPr sz="2100">
-                <a:solidFill>
-                  <a:srgbClr val="20344A"/>
-                </a:solidFill>
-                <a:latin typeface="Arial"/>
-              </a:defRPr>
-              <a:buChar char="•"/>
-            </a:pPr>
-            <a:r>
-              <a:rPr sz="2100" b="0" i="0">
-                <a:solidFill>
-                  <a:srgbClr val="20344A"/>
-                </a:solidFill>
-                <a:latin typeface="Arial"/>
-              </a:rPr>
-              <a:t>In the supplied example, show the API error and open its </a:t>
-            </a:r>
-            <a:br/>
-            <a:r>
-              <a:rPr sz="2100" b="0" i="0">
-                <a:solidFill>
-                  <a:srgbClr val="20344A"/>
-                </a:solidFill>
-                <a:latin typeface="Arial"/>
-              </a:rPr>
-              <a:t>corresponding passing validation test.</a:t>
-            </a:r>
-          </a:p>
-        </p:txBody>
-      </p:sp>
-      <p:sp>
-        <p:nvSpPr>
-          <p:cNvPr id="9" name="content:line-90:0"/>
-          <p:cNvSpPr txBox="1"/>
-          <p:nvPr/>
-        </p:nvSpPr>
-        <p:spPr>
-          <a:xfrm>
-            <a:off x="594360" y="4270248"/>
-            <a:ext cx="11003279" cy="780288"/>
-          </a:xfrm>
-          <a:prstGeom prst="rect">
-            <a:avLst/>
-          </a:prstGeom>
-          <a:noFill/>
-        </p:spPr>
-        <p:txBody>
-          <a:bodyPr wrap="none" anchor="t" lIns="88900" rIns="88900" tIns="38100" bIns="38100">
-            <a:noAutofit/>
-          </a:bodyPr>
-          <a:lstStyle/>
-          <a:p>
-            <a:pPr marL="279400" indent="-215900">
-              <a:lnSpc>
-                <a:spcPts val="2772"/>
-              </a:lnSpc>
-              <a:spcBef>
-                <a:spcPts val="0"/>
-              </a:spcBef>
-              <a:spcAft>
-                <a:spcPts val="0"/>
-              </a:spcAft>
-              <a:defRPr sz="2100">
-                <a:solidFill>
-                  <a:srgbClr val="20344A"/>
-                </a:solidFill>
-                <a:latin typeface="Arial"/>
-              </a:defRPr>
-              <a:buChar char="•"/>
-            </a:pPr>
-            <a:r>
-              <a:rPr sz="2100" b="0" i="0">
-                <a:solidFill>
-                  <a:srgbClr val="20344A"/>
-                </a:solidFill>
-                <a:latin typeface="Arial"/>
-              </a:rPr>
-              <a:t>Instructor checks the observed rejection against the </a:t>
+              <a:t>not only configuration. Follow the </a:t>
             </a:r>
             <a:r>
               <a:rPr sz="2100" b="0" i="0">
@@ -4280,27 +4708,16 @@
                 <a:latin typeface="Arial"/>
                 <a:hlinkClick r:id="rId2"/>
               </a:rPr>
-              <a:t>API </a:t>
-            </a:r>
-            <a:br/>
-            <a:r>
-              <a:rPr sz="2100" b="0" i="0">
-                <a:solidFill>
-                  <a:srgbClr val="007F82"/>
-                </a:solidFill>
-                <a:latin typeface="Arial"/>
-                <a:hlinkClick r:id="rId2"/>
-              </a:rPr>
-              <a:t>contract</a:t>
-            </a:r>
-            <a:r>
-              <a:rPr sz="2100" b="0" i="0">
-                <a:solidFill>
-                  <a:srgbClr val="20344A"/>
-                </a:solidFill>
-                <a:latin typeface="Arial"/>
-              </a:rPr>
-              <a:t> and the group's declared rule.</a:t>
+              <a:t>Compose guide</a:t>
+            </a:r>
+            <a:r>
+              <a:rPr sz="2100" b="0" i="0">
+                <a:solidFill>
+                  <a:srgbClr val="20344A"/>
+                </a:solidFill>
+                <a:latin typeface="Arial"/>
+              </a:rPr>
+              <a:t>; stop </a:t>
             </a:r>
           </a:p>
         </p:txBody>
@@ -4414,14 +4831,14 @@
               </a:defRPr>
             </a:pPr>
             <a:r>
-              <a:t>SOURCE 11 / 17</a:t>
-            </a:r>
-          </a:p>
-        </p:txBody>
-      </p:sp>
-      <p:sp>
-        <p:nvSpPr>
-          <p:cNvPr id="4" name="title:line-94"/>
+              <a:t>SOURCE 10 / 18  ·  CONTINUED 2</a:t>
+            </a:r>
+          </a:p>
+        </p:txBody>
+      </p:sp>
+      <p:sp>
+        <p:nvSpPr>
+          <p:cNvPr id="4" name="title:line-88"/>
           <p:cNvSpPr txBox="1"/>
           <p:nvPr/>
         </p:nvSpPr>
@@ -4465,7 +4882,7 @@
                 </a:solidFill>
                 <a:latin typeface="Arial"/>
               </a:rPr>
-              <a:t>Inspect local tests and hosted CI</a:t>
+              <a:t>Show real startup and CSV results</a:t>
             </a:r>
           </a:p>
         </p:txBody>
@@ -4517,14 +4934,14 @@
       </p:sp>
       <p:sp>
         <p:nvSpPr>
-          <p:cNvPr id="6" name="content:line-96:0"/>
+          <p:cNvPr id="6" name="content:line-93:2"/>
           <p:cNvSpPr txBox="1"/>
           <p:nvPr/>
         </p:nvSpPr>
         <p:spPr>
           <a:xfrm>
             <a:off x="594360" y="1737360"/>
-            <a:ext cx="11003279" cy="780288"/>
+            <a:ext cx="11003279" cy="428244"/>
           </a:xfrm>
           <a:prstGeom prst="rect">
             <a:avLst/>
@@ -4553,298 +4970,16 @@
                 </a:solidFill>
                 <a:latin typeface="Arial"/>
               </a:defRPr>
-              <a:buChar char="•"/>
-            </a:pPr>
-            <a:r>
-              <a:rPr sz="2100" b="0" i="0">
-                <a:solidFill>
-                  <a:srgbClr val="20344A"/>
-                </a:solidFill>
-                <a:latin typeface="Arial"/>
-              </a:rPr>
-              <a:t>In the active local environment, run </a:t>
-            </a:r>
-            <a:r>
-              <a:rPr sz="2100" b="0" i="0">
-                <a:solidFill>
-                  <a:srgbClr val="20344A"/>
-                </a:solidFill>
-                <a:latin typeface="Courier New"/>
-              </a:rPr>
-              <a:t>python -m pytest </a:t>
-            </a:r>
-            <a:br/>
-            <a:r>
-              <a:rPr sz="2100" b="0" i="0">
-                <a:solidFill>
-                  <a:srgbClr val="20344A"/>
-                </a:solidFill>
-                <a:latin typeface="Courier New"/>
-              </a:rPr>
-              <a:t>backend/tests</a:t>
-            </a:r>
-            <a:r>
-              <a:rPr sz="2100" b="0" i="0">
-                <a:solidFill>
-                  <a:srgbClr val="20344A"/>
-                </a:solidFill>
-                <a:latin typeface="Arial"/>
-              </a:rPr>
-              <a:t>; show passing output.</a:t>
-            </a:r>
-          </a:p>
-        </p:txBody>
-      </p:sp>
-      <p:sp>
-        <p:nvSpPr>
-          <p:cNvPr id="7" name="content:line-97:0"/>
-          <p:cNvSpPr txBox="1"/>
-          <p:nvPr/>
-        </p:nvSpPr>
-        <p:spPr>
-          <a:xfrm>
-            <a:off x="594360" y="2581656"/>
-            <a:ext cx="11003279" cy="1132332"/>
-          </a:xfrm>
-          <a:prstGeom prst="rect">
-            <a:avLst/>
-          </a:prstGeom>
-          <a:noFill/>
-        </p:spPr>
-        <p:txBody>
-          <a:bodyPr wrap="none" anchor="t" lIns="88900" rIns="88900" tIns="38100" bIns="38100">
-            <a:noAutofit/>
-          </a:bodyPr>
-          <a:lstStyle/>
-          <a:p>
-            <a:pPr marL="279400" indent="-215900">
-              <a:lnSpc>
-                <a:spcPts val="2772"/>
-              </a:lnSpc>
-              <a:spcBef>
-                <a:spcPts val="0"/>
-              </a:spcBef>
-              <a:spcAft>
-                <a:spcPts val="0"/>
-              </a:spcAft>
-              <a:defRPr sz="2100">
-                <a:solidFill>
-                  <a:srgbClr val="20344A"/>
-                </a:solidFill>
-                <a:latin typeface="Arial"/>
-              </a:defRPr>
-              <a:buChar char="•"/>
-            </a:pPr>
-            <a:r>
-              <a:rPr sz="2100" b="0" i="0">
-                <a:solidFill>
-                  <a:srgbClr val="20344A"/>
-                </a:solidFill>
-                <a:latin typeface="Arial"/>
-              </a:rPr>
-              <a:t>Open a successful GitHub Actions run for the demonstrated </a:t>
-            </a:r>
-            <a:br/>
-            <a:r>
-              <a:rPr sz="2100" b="0" i="0">
-                <a:solidFill>
-                  <a:srgbClr val="20344A"/>
-                </a:solidFill>
-                <a:latin typeface="Arial"/>
-              </a:rPr>
-              <a:t>commit. CI means automated checks on GitHub; a local pass </a:t>
-            </a:r>
-            <a:br/>
-            <a:r>
-              <a:rPr sz="2100" b="0" i="0">
-                <a:solidFill>
-                  <a:srgbClr val="20344A"/>
-                </a:solidFill>
-                <a:latin typeface="Arial"/>
-              </a:rPr>
-              <a:t>alone is insufficient.</a:t>
-            </a:r>
-          </a:p>
-        </p:txBody>
-      </p:sp>
-      <p:sp>
-        <p:nvSpPr>
-          <p:cNvPr id="8" name="content:line-98:0"/>
-          <p:cNvSpPr txBox="1"/>
-          <p:nvPr/>
-        </p:nvSpPr>
-        <p:spPr>
-          <a:xfrm>
-            <a:off x="594360" y="3777996"/>
-            <a:ext cx="11003279" cy="1132332"/>
-          </a:xfrm>
-          <a:prstGeom prst="rect">
-            <a:avLst/>
-          </a:prstGeom>
-          <a:noFill/>
-        </p:spPr>
-        <p:txBody>
-          <a:bodyPr wrap="none" anchor="t" lIns="88900" rIns="88900" tIns="38100" bIns="38100">
-            <a:noAutofit/>
-          </a:bodyPr>
-          <a:lstStyle/>
-          <a:p>
-            <a:pPr marL="279400" indent="-215900">
-              <a:lnSpc>
-                <a:spcPts val="2772"/>
-              </a:lnSpc>
-              <a:spcBef>
-                <a:spcPts val="0"/>
-              </a:spcBef>
-              <a:spcAft>
-                <a:spcPts val="0"/>
-              </a:spcAft>
-              <a:defRPr sz="2100">
-                <a:solidFill>
-                  <a:srgbClr val="20344A"/>
-                </a:solidFill>
-                <a:latin typeface="Arial"/>
-              </a:defRPr>
-              <a:buChar char="•"/>
-            </a:pPr>
-            <a:r>
-              <a:rPr sz="2100" b="0" i="0">
-                <a:solidFill>
-                  <a:srgbClr val="20344A"/>
-                </a:solidFill>
-                <a:latin typeface="Arial"/>
-              </a:rPr>
-              <a:t>Instructor opens tests at public processing, API, and </a:t>
-            </a:r>
-            <a:br/>
-            <a:r>
-              <a:rPr sz="2100" b="0" i="0">
-                <a:solidFill>
-                  <a:srgbClr val="20344A"/>
-                </a:solidFill>
-                <a:latin typeface="Arial"/>
-              </a:rPr>
-              <a:t>comparison boundaries: expected outputs, invalid inputs, and </a:t>
-            </a:r>
-            <a:br/>
-            <a:r>
-              <a:rPr sz="2100" b="0" i="0">
-                <a:solidFill>
-                  <a:srgbClr val="20344A"/>
-                </a:solidFill>
-                <a:latin typeface="Arial"/>
-              </a:rPr>
-              <a:t>agreement rules.</a:t>
-            </a:r>
-          </a:p>
-        </p:txBody>
-      </p:sp>
-      <p:sp>
-        <p:nvSpPr>
-          <p:cNvPr id="9" name="content:line-99:0"/>
-          <p:cNvSpPr txBox="1"/>
-          <p:nvPr/>
-        </p:nvSpPr>
-        <p:spPr>
-          <a:xfrm>
-            <a:off x="594360" y="4974336"/>
-            <a:ext cx="11003279" cy="1132332"/>
-          </a:xfrm>
-          <a:prstGeom prst="rect">
-            <a:avLst/>
-          </a:prstGeom>
-          <a:noFill/>
-        </p:spPr>
-        <p:txBody>
-          <a:bodyPr wrap="none" anchor="t" lIns="88900" rIns="88900" tIns="38100" bIns="38100">
-            <a:noAutofit/>
-          </a:bodyPr>
-          <a:lstStyle/>
-          <a:p>
-            <a:pPr marL="279400" indent="-215900">
-              <a:lnSpc>
-                <a:spcPts val="2772"/>
-              </a:lnSpc>
-              <a:spcBef>
-                <a:spcPts val="0"/>
-              </a:spcBef>
-              <a:spcAft>
-                <a:spcPts val="0"/>
-              </a:spcAft>
-              <a:defRPr sz="2100">
-                <a:solidFill>
-                  <a:srgbClr val="20344A"/>
-                </a:solidFill>
-                <a:latin typeface="Arial"/>
-              </a:defRPr>
-              <a:buChar char="•"/>
-            </a:pPr>
-            <a:r>
-              <a:rPr sz="2100" b="0" i="0">
-                <a:solidFill>
-                  <a:srgbClr val="20344A"/>
-                </a:solidFill>
-                <a:latin typeface="Arial"/>
-              </a:rPr>
-              <a:t>Tests check declared behavior, not scientific validity. A </a:t>
-            </a:r>
-            <a:br/>
-            <a:r>
-              <a:rPr sz="2100" b="0" i="0">
-                <a:solidFill>
-                  <a:srgbClr val="20344A"/>
-                </a:solidFill>
-                <a:latin typeface="Arial"/>
-              </a:rPr>
-              <a:t>workflow reporting success does not itself configure required </a:t>
-            </a:r>
-            <a:br/>
-            <a:r>
-              <a:rPr sz="2100" b="0" i="0">
-                <a:solidFill>
-                  <a:srgbClr val="20344A"/>
-                </a:solidFill>
-                <a:latin typeface="Arial"/>
-              </a:rPr>
-              <a:t>checks; see </a:t>
-            </a:r>
-            <a:r>
-              <a:rPr sz="2100" b="0" i="0">
-                <a:solidFill>
-                  <a:srgbClr val="007F82"/>
-                </a:solidFill>
-                <a:latin typeface="Arial"/>
-                <a:hlinkClick r:id="rId2"/>
-              </a:rPr>
-              <a:t>testing</a:t>
-            </a:r>
-            <a:r>
-              <a:rPr sz="2100" b="0" i="0">
-                <a:solidFill>
-                  <a:srgbClr val="20344A"/>
-                </a:solidFill>
-                <a:latin typeface="Arial"/>
-              </a:rPr>
-              <a:t> and </a:t>
-            </a:r>
-            <a:r>
-              <a:rPr sz="2100" b="0" i="0">
-                <a:solidFill>
-                  <a:srgbClr val="007F82"/>
-                </a:solidFill>
-                <a:latin typeface="Arial"/>
-                <a:hlinkClick r:id="rId3"/>
-              </a:rPr>
-              <a:t>CI</a:t>
-            </a:r>
-            <a:r>
-              <a:rPr sz="2100" b="0" i="0">
-                <a:solidFill>
-                  <a:srgbClr val="20344A"/>
-                </a:solidFill>
-                <a:latin typeface="Arial"/>
-              </a:rPr>
-              <a:t>.</a:t>
+              <a:buChar char=" "/>
+            </a:pPr>
+            <a:r>
+              <a:rPr sz="2100" b="0" i="0">
+                <a:solidFill>
+                  <a:srgbClr val="20344A"/>
+                </a:solidFill>
+                <a:latin typeface="Arial"/>
+              </a:rPr>
+              <a:t>standalone servers using the same ports first.</a:t>
             </a:r>
           </a:p>
         </p:txBody>
@@ -4958,14 +5093,14 @@
               </a:defRPr>
             </a:pPr>
             <a:r>
-              <a:t>SOURCE 12 / 17</a:t>
-            </a:r>
-          </a:p>
-        </p:txBody>
-      </p:sp>
-      <p:sp>
-        <p:nvSpPr>
-          <p:cNvPr id="4" name="title:line-103"/>
+              <a:t>SOURCE 11 / 18</a:t>
+            </a:r>
+          </a:p>
+        </p:txBody>
+      </p:sp>
+      <p:sp>
+        <p:nvSpPr>
+          <p:cNvPr id="4" name="title:line-97"/>
           <p:cNvSpPr txBox="1"/>
           <p:nvPr/>
         </p:nvSpPr>
@@ -5009,7 +5144,7 @@
                 </a:solidFill>
                 <a:latin typeface="Arial"/>
               </a:rPr>
-              <a:t>Demonstrate the two practical Rs</a:t>
+              <a:t>Show validation and its test</a:t>
             </a:r>
           </a:p>
         </p:txBody>
@@ -5061,7 +5196,7 @@
       </p:sp>
       <p:sp>
         <p:nvSpPr>
-          <p:cNvPr id="6" name="content:line-105:0"/>
+          <p:cNvPr id="6" name="content:line-99:0"/>
           <p:cNvSpPr txBox="1"/>
           <p:nvPr/>
         </p:nvSpPr>
@@ -5106,7 +5241,7 @@
                 </a:solidFill>
                 <a:latin typeface="Arial"/>
               </a:rPr>
-              <a:t>Repeatability: agreement under the same conditions. Compare </a:t>
+              <a:t>Demonstrate one invalid input rejected clearly; it must not </a:t>
             </a:r>
             <a:br/>
             <a:r>
@@ -5116,14 +5251,14 @@
                 </a:solidFill>
                 <a:latin typeface="Arial"/>
               </a:rPr>
-              <a:t>local run 1 with local run 2.</a:t>
-            </a:r>
-          </a:p>
-        </p:txBody>
-      </p:sp>
-      <p:sp>
-        <p:nvSpPr>
-          <p:cNvPr id="7" name="content:line-106:0"/>
+              <a:t>appear as a successful result.</a:t>
+            </a:r>
+          </a:p>
+        </p:txBody>
+      </p:sp>
+      <p:sp>
+        <p:nvSpPr>
+          <p:cNvPr id="7" name="content:line-100:0"/>
           <p:cNvSpPr txBox="1"/>
           <p:nvPr/>
         </p:nvSpPr>
@@ -5168,7 +5303,7 @@
                 </a:solidFill>
                 <a:latin typeface="Arial"/>
               </a:rPr>
-              <a:t>Replicability: agreement under slightly different conditions. </a:t>
+              <a:t>Explain the rule: expected types, allowed bounds, or </a:t>
             </a:r>
             <a:br/>
             <a:r>
@@ -5178,21 +5313,21 @@
                 </a:solidFill>
                 <a:latin typeface="Arial"/>
               </a:rPr>
-              <a:t>Compare local with real Docker execution of the same process.</a:t>
-            </a:r>
-          </a:p>
-        </p:txBody>
-      </p:sp>
-      <p:sp>
-        <p:nvSpPr>
-          <p:cNvPr id="8" name="content:line-107:0"/>
+              <a:t>missing-value handling. Missing does not mean zero.</a:t>
+            </a:r>
+          </a:p>
+        </p:txBody>
+      </p:sp>
+      <p:sp>
+        <p:nvSpPr>
+          <p:cNvPr id="8" name="content:line-101:0"/>
           <p:cNvSpPr txBox="1"/>
           <p:nvPr/>
         </p:nvSpPr>
         <p:spPr>
           <a:xfrm>
             <a:off x="594360" y="3425952"/>
-            <a:ext cx="11003279" cy="1132332"/>
+            <a:ext cx="11003279" cy="780288"/>
           </a:xfrm>
           <a:prstGeom prst="rect">
             <a:avLst/>
@@ -5230,7 +5365,7 @@
                 </a:solidFill>
                 <a:latin typeface="Arial"/>
               </a:rPr>
-              <a:t>Keep code and CSV bytes unchanged; show successful </a:t>
+              <a:t>In the supplied example, show the API error and open its </a:t>
             </a:r>
             <a:br/>
             <a:r>
@@ -5240,179 +5375,89 @@
                 </a:solidFill>
                 <a:latin typeface="Arial"/>
               </a:rPr>
-              <a:t>comparisons, underlying captures, commands, logs, </a:t>
+              <a:t>corresponding passing validation test.</a:t>
+            </a:r>
+          </a:p>
+        </p:txBody>
+      </p:sp>
+      <p:sp>
+        <p:nvSpPr>
+          <p:cNvPr id="9" name="content:line-102:0"/>
+          <p:cNvSpPr txBox="1"/>
+          <p:nvPr/>
+        </p:nvSpPr>
+        <p:spPr>
+          <a:xfrm>
+            <a:off x="594360" y="4270248"/>
+            <a:ext cx="11003279" cy="780288"/>
+          </a:xfrm>
+          <a:prstGeom prst="rect">
+            <a:avLst/>
+          </a:prstGeom>
+          <a:noFill/>
+        </p:spPr>
+        <p:txBody>
+          <a:bodyPr wrap="none" anchor="t" lIns="88900" rIns="88900" tIns="38100" bIns="38100">
+            <a:noAutofit/>
+          </a:bodyPr>
+          <a:lstStyle/>
+          <a:p>
+            <a:pPr marL="279400" indent="-215900">
+              <a:lnSpc>
+                <a:spcPts val="2772"/>
+              </a:lnSpc>
+              <a:spcBef>
+                <a:spcPts val="0"/>
+              </a:spcBef>
+              <a:spcAft>
+                <a:spcPts val="0"/>
+              </a:spcAft>
+              <a:defRPr sz="2100">
+                <a:solidFill>
+                  <a:srgbClr val="20344A"/>
+                </a:solidFill>
+                <a:latin typeface="Arial"/>
+              </a:defRPr>
+              <a:buChar char="•"/>
+            </a:pPr>
+            <a:r>
+              <a:rPr sz="2100" b="0" i="0">
+                <a:solidFill>
+                  <a:srgbClr val="20344A"/>
+                </a:solidFill>
+                <a:latin typeface="Arial"/>
+              </a:rPr>
+              <a:t>Instructor checks the observed rejection against the </a:t>
+            </a:r>
+            <a:r>
+              <a:rPr sz="2100" b="0" i="0">
+                <a:solidFill>
+                  <a:srgbClr val="007F82"/>
+                </a:solidFill>
+                <a:latin typeface="Arial"/>
+                <a:hlinkClick r:id="rId2"/>
+              </a:rPr>
+              <a:t>API </a:t>
             </a:r>
             <a:br/>
             <a:r>
               <a:rPr sz="2100" b="0" i="0">
                 <a:solidFill>
-                  <a:srgbClr val="20344A"/>
-                </a:solidFill>
-                <a:latin typeface="Arial"/>
-              </a:rPr>
-              <a:t>environment details, and code/input identity.</a:t>
-            </a:r>
-          </a:p>
-        </p:txBody>
-      </p:sp>
-      <p:sp>
-        <p:nvSpPr>
-          <p:cNvPr id="9" name="content:line-108:0"/>
-          <p:cNvSpPr txBox="1"/>
-          <p:nvPr/>
-        </p:nvSpPr>
-        <p:spPr>
-          <a:xfrm>
-            <a:off x="594360" y="4622292"/>
-            <a:ext cx="11003279" cy="1132332"/>
-          </a:xfrm>
-          <a:prstGeom prst="rect">
-            <a:avLst/>
-          </a:prstGeom>
-          <a:noFill/>
-        </p:spPr>
-        <p:txBody>
-          <a:bodyPr wrap="none" anchor="t" lIns="88900" rIns="88900" tIns="38100" bIns="38100">
-            <a:noAutofit/>
-          </a:bodyPr>
-          <a:lstStyle/>
-          <a:p>
-            <a:pPr marL="279400" indent="-215900">
-              <a:lnSpc>
-                <a:spcPts val="2772"/>
-              </a:lnSpc>
-              <a:spcBef>
-                <a:spcPts val="0"/>
-              </a:spcBef>
-              <a:spcAft>
-                <a:spcPts val="0"/>
-              </a:spcAft>
-              <a:defRPr sz="2100">
-                <a:solidFill>
-                  <a:srgbClr val="20344A"/>
-                </a:solidFill>
-                <a:latin typeface="Arial"/>
-              </a:defRPr>
-              <a:buChar char="•"/>
-            </a:pPr>
-            <a:r>
-              <a:rPr sz="2100" b="0" i="0">
-                <a:solidFill>
-                  <a:srgbClr val="20344A"/>
-                </a:solidFill>
-                <a:latin typeface="Arial"/>
-              </a:rPr>
-              <a:t>Reproducibility means agreement under very different </a:t>
-            </a:r>
-            <a:br/>
-            <a:r>
-              <a:rPr sz="2100" b="0" i="0">
-                <a:solidFill>
-                  <a:srgbClr val="20344A"/>
-                </a:solidFill>
-                <a:latin typeface="Arial"/>
-              </a:rPr>
-              <a:t>conditions in this course; independent simulation, cross-group </a:t>
-            </a:r>
-            <a:br/>
-            <a:r>
-              <a:rPr sz="2100" b="0" i="0">
-                <a:solidFill>
-                  <a:srgbClr val="20344A"/>
-                </a:solidFill>
-                <a:latin typeface="Arial"/>
-              </a:rPr>
-              <a:t>reproduction, and new-data experiments are not required.</a:t>
-            </a:r>
-          </a:p>
-        </p:txBody>
-      </p:sp>
-      <p:sp>
-        <p:nvSpPr>
-          <p:cNvPr id="10" name="content:line-109:0"/>
-          <p:cNvSpPr txBox="1"/>
-          <p:nvPr/>
-        </p:nvSpPr>
-        <p:spPr>
-          <a:xfrm>
-            <a:off x="594360" y="5818632"/>
-            <a:ext cx="11003279" cy="428244"/>
-          </a:xfrm>
-          <a:prstGeom prst="rect">
-            <a:avLst/>
-          </a:prstGeom>
-          <a:noFill/>
-        </p:spPr>
-        <p:txBody>
-          <a:bodyPr wrap="none" anchor="t" lIns="88900" rIns="88900" tIns="38100" bIns="38100">
-            <a:noAutofit/>
-          </a:bodyPr>
-          <a:lstStyle/>
-          <a:p>
-            <a:pPr marL="279400" indent="-215900">
-              <a:lnSpc>
-                <a:spcPts val="2772"/>
-              </a:lnSpc>
-              <a:spcBef>
-                <a:spcPts val="0"/>
-              </a:spcBef>
-              <a:spcAft>
-                <a:spcPts val="0"/>
-              </a:spcAft>
-              <a:defRPr sz="2100">
-                <a:solidFill>
-                  <a:srgbClr val="20344A"/>
-                </a:solidFill>
-                <a:latin typeface="Arial"/>
-              </a:defRPr>
-              <a:buChar char="•"/>
-            </a:pPr>
-            <a:r>
-              <a:rPr sz="2100" b="0" i="0">
-                <a:solidFill>
-                  <a:srgbClr val="20344A"/>
-                </a:solidFill>
-                <a:latin typeface="Arial"/>
-              </a:rPr>
-              <a:t>Use the </a:t>
-            </a:r>
-            <a:r>
-              <a:rPr sz="2100" b="0" i="0">
-                <a:solidFill>
                   <a:srgbClr val="007F82"/>
                 </a:solidFill>
                 <a:latin typeface="Arial"/>
                 <a:hlinkClick r:id="rId2"/>
               </a:rPr>
-              <a:t>glossary</a:t>
-            </a:r>
-            <a:r>
-              <a:rPr sz="2100" b="0" i="0">
-                <a:solidFill>
-                  <a:srgbClr val="20344A"/>
-                </a:solidFill>
-                <a:latin typeface="Arial"/>
-              </a:rPr>
-              <a:t> and </a:t>
-            </a:r>
-            <a:r>
-              <a:rPr sz="2100" b="0" i="0">
-                <a:solidFill>
-                  <a:srgbClr val="007F82"/>
-                </a:solidFill>
-                <a:latin typeface="Arial"/>
-                <a:hlinkClick r:id="rId3"/>
-              </a:rPr>
-              <a:t>capture/comparison commands</a:t>
-            </a:r>
-            <a:r>
-              <a:rPr sz="2100" b="0" i="0">
-                <a:solidFill>
-                  <a:srgbClr val="20344A"/>
-                </a:solidFill>
-                <a:latin typeface="Arial"/>
-              </a:rPr>
-              <a:t>.</a:t>
+              <a:t>contract</a:t>
+            </a:r>
+            <a:r>
+              <a:rPr sz="2100" b="0" i="0">
+                <a:solidFill>
+                  <a:srgbClr val="20344A"/>
+                </a:solidFill>
+                <a:latin typeface="Arial"/>
+              </a:rPr>
+              <a:t> and the group's declared rule.</a:t>
             </a:r>
           </a:p>
         </p:txBody>
@@ -5526,14 +5571,14 @@
               </a:defRPr>
             </a:pPr>
             <a:r>
-              <a:t>SOURCE 13 / 17</a:t>
-            </a:r>
-          </a:p>
-        </p:txBody>
-      </p:sp>
-      <p:sp>
-        <p:nvSpPr>
-          <p:cNvPr id="4" name="title:line-113"/>
+              <a:t>SOURCE 12 / 18</a:t>
+            </a:r>
+          </a:p>
+        </p:txBody>
+      </p:sp>
+      <p:sp>
+        <p:nvSpPr>
+          <p:cNvPr id="4" name="title:line-106"/>
           <p:cNvSpPr txBox="1"/>
           <p:nvPr/>
         </p:nvSpPr>
@@ -5577,7 +5622,7 @@
                 </a:solidFill>
                 <a:latin typeface="Arial"/>
               </a:rPr>
-              <a:t>Inspect agreement, field by field</a:t>
+              <a:t>Inspect local tests and hosted CI</a:t>
             </a:r>
           </a:p>
         </p:txBody>
@@ -5629,13 +5674,93 @@
       </p:sp>
       <p:sp>
         <p:nvSpPr>
-          <p:cNvPr id="6" name="content:line-115:0"/>
+          <p:cNvPr id="6" name="content:line-108:0"/>
           <p:cNvSpPr txBox="1"/>
           <p:nvPr/>
         </p:nvSpPr>
         <p:spPr>
           <a:xfrm>
             <a:off x="594360" y="1737360"/>
+            <a:ext cx="11003279" cy="780288"/>
+          </a:xfrm>
+          <a:prstGeom prst="rect">
+            <a:avLst/>
+          </a:prstGeom>
+          <a:noFill/>
+        </p:spPr>
+        <p:txBody>
+          <a:bodyPr wrap="none" anchor="t" lIns="88900" rIns="88900" tIns="38100" bIns="38100">
+            <a:noAutofit/>
+          </a:bodyPr>
+          <a:lstStyle/>
+          <a:p>
+            <a:pPr marL="279400" indent="-215900">
+              <a:lnSpc>
+                <a:spcPts val="2772"/>
+              </a:lnSpc>
+              <a:spcBef>
+                <a:spcPts val="0"/>
+              </a:spcBef>
+              <a:spcAft>
+                <a:spcPts val="0"/>
+              </a:spcAft>
+              <a:defRPr sz="2100">
+                <a:solidFill>
+                  <a:srgbClr val="20344A"/>
+                </a:solidFill>
+                <a:latin typeface="Arial"/>
+              </a:defRPr>
+              <a:buChar char="•"/>
+            </a:pPr>
+            <a:r>
+              <a:rPr sz="2100" b="0" i="0">
+                <a:solidFill>
+                  <a:srgbClr val="20344A"/>
+                </a:solidFill>
+                <a:latin typeface="Arial"/>
+              </a:rPr>
+              <a:t>In the active local environment, run </a:t>
+            </a:r>
+            <a:r>
+              <a:rPr sz="2100" b="0" i="0">
+                <a:solidFill>
+                  <a:srgbClr val="20344A"/>
+                </a:solidFill>
+                <a:latin typeface="Courier New"/>
+              </a:rPr>
+              <a:t>python -m pytest </a:t>
+            </a:r>
+            <a:br/>
+            <a:r>
+              <a:rPr sz="2100" b="0" i="0">
+                <a:solidFill>
+                  <a:srgbClr val="20344A"/>
+                </a:solidFill>
+                <a:latin typeface="Courier New"/>
+              </a:rPr>
+              <a:t>backend/tests</a:t>
+            </a:r>
+            <a:r>
+              <a:rPr sz="2100" b="0" i="0">
+                <a:solidFill>
+                  <a:srgbClr val="20344A"/>
+                </a:solidFill>
+                <a:latin typeface="Arial"/>
+              </a:rPr>
+              <a:t>; show passing output.</a:t>
+            </a:r>
+          </a:p>
+        </p:txBody>
+      </p:sp>
+      <p:sp>
+        <p:nvSpPr>
+          <p:cNvPr id="7" name="content:line-109:0"/>
+          <p:cNvSpPr txBox="1"/>
+          <p:nvPr/>
+        </p:nvSpPr>
+        <p:spPr>
+          <a:xfrm>
+            <a:off x="594360" y="2581656"/>
             <a:ext cx="11003279" cy="1132332"/>
           </a:xfrm>
           <a:prstGeom prst="rect">
@@ -5674,7 +5799,7 @@
                 </a:solidFill>
                 <a:latin typeface="Arial"/>
               </a:rPr>
-              <a:t>Exact: cleaned records, identifiers, raw values, copied </a:t>
+              <a:t>Open a successful GitHub Actions run for the demonstrated </a:t>
             </a:r>
             <a:br/>
             <a:r>
@@ -5684,7 +5809,7 @@
                 </a:solidFill>
                 <a:latin typeface="Arial"/>
               </a:rPr>
-              <a:t>baselines, counts, types, structure, ordering, and nulls. </a:t>
+              <a:t>commit. CI means automated checks on GitHub; a local pass </a:t>
             </a:r>
             <a:br/>
             <a:r>
@@ -5694,20 +5819,20 @@
                 </a:solidFill>
                 <a:latin typeface="Arial"/>
               </a:rPr>
-              <a:t>Missing stays distinct from zero.</a:t>
-            </a:r>
-          </a:p>
-        </p:txBody>
-      </p:sp>
-      <p:sp>
-        <p:nvSpPr>
-          <p:cNvPr id="7" name="content:line-116:0"/>
-          <p:cNvSpPr txBox="1"/>
-          <p:nvPr/>
-        </p:nvSpPr>
-        <p:spPr>
-          <a:xfrm>
-            <a:off x="594360" y="2933700"/>
+              <a:t>alone is insufficient.</a:t>
+            </a:r>
+          </a:p>
+        </p:txBody>
+      </p:sp>
+      <p:sp>
+        <p:nvSpPr>
+          <p:cNvPr id="8" name="content:line-110:0"/>
+          <p:cNvSpPr txBox="1"/>
+          <p:nvPr/>
+        </p:nvSpPr>
+        <p:spPr>
+          <a:xfrm>
+            <a:off x="594360" y="3777996"/>
             <a:ext cx="11003279" cy="1132332"/>
           </a:xfrm>
           <a:prstGeom prst="rect">
@@ -5746,7 +5871,7 @@
                 </a:solidFill>
                 <a:latin typeface="Arial"/>
               </a:rPr>
-              <a:t>Only derived decimals receive declared tolerances documented </a:t>
+              <a:t>Instructor opens tests at public processing, API, and </a:t>
             </a:r>
             <a:br/>
             <a:r>
@@ -5756,7 +5881,7 @@
                 </a:solidFill>
                 <a:latin typeface="Arial"/>
               </a:rPr>
-              <a:t>in tests. In the example: change, percent_change, and </a:t>
+              <a:t>comparison boundaries: expected outputs, invalid inputs, and </a:t>
             </a:r>
             <a:br/>
             <a:r>
@@ -5766,74 +5891,21 @@
                 </a:solidFill>
                 <a:latin typeface="Arial"/>
               </a:rPr>
-              <a:t>visit-summary mean.</a:t>
-            </a:r>
-          </a:p>
-        </p:txBody>
-      </p:sp>
-      <p:sp>
-        <p:nvSpPr>
-          <p:cNvPr id="8" name="content:line-119:0"/>
-          <p:cNvSpPr txBox="1"/>
-          <p:nvPr/>
-        </p:nvSpPr>
-        <p:spPr>
-          <a:xfrm>
-            <a:off x="594360" y="4130040"/>
-            <a:ext cx="11003279" cy="377952"/>
-          </a:xfrm>
-          <a:prstGeom prst="rect">
-            <a:avLst/>
-          </a:prstGeom>
-          <a:solidFill>
-            <a:srgbClr val="EDF3F6"/>
-          </a:solidFill>
-        </p:spPr>
-        <p:txBody>
-          <a:bodyPr wrap="none" anchor="t" lIns="88900" rIns="88900" tIns="38100" bIns="38100">
-            <a:noAutofit/>
-          </a:bodyPr>
-          <a:lstStyle/>
-          <a:p>
-            <a:pPr>
-              <a:lnSpc>
-                <a:spcPts val="2376"/>
-              </a:lnSpc>
-              <a:spcBef>
-                <a:spcPts val="0"/>
-              </a:spcBef>
-              <a:spcAft>
-                <a:spcPts val="0"/>
-              </a:spcAft>
-              <a:defRPr sz="1800">
-                <a:solidFill>
-                  <a:srgbClr val="20344A"/>
-                </a:solidFill>
-                <a:latin typeface="Arial"/>
-              </a:defRPr>
-            </a:pPr>
-            <a:r>
-              <a:rPr sz="1800" b="0" i="0">
-                <a:solidFill>
-                  <a:srgbClr val="20344A"/>
-                </a:solidFill>
-                <a:latin typeface="Courier New"/>
-              </a:rPr>
-              <a:t>abs(actual - expected) &lt;= max(1e-9, 1e-9 * abs(expected))</a:t>
-            </a:r>
-          </a:p>
-        </p:txBody>
-      </p:sp>
-      <p:sp>
-        <p:nvSpPr>
-          <p:cNvPr id="9" name="content:line-122:0"/>
-          <p:cNvSpPr txBox="1"/>
-          <p:nvPr/>
-        </p:nvSpPr>
-        <p:spPr>
-          <a:xfrm>
-            <a:off x="594360" y="4507992"/>
-            <a:ext cx="11003279" cy="1484376"/>
+              <a:t>agreement rules.</a:t>
+            </a:r>
+          </a:p>
+        </p:txBody>
+      </p:sp>
+      <p:sp>
+        <p:nvSpPr>
+          <p:cNvPr id="9" name="content:line-111:0"/>
+          <p:cNvSpPr txBox="1"/>
+          <p:nvPr/>
+        </p:nvSpPr>
+        <p:spPr>
+          <a:xfrm>
+            <a:off x="594360" y="4974336"/>
+            <a:ext cx="11003279" cy="1132332"/>
           </a:xfrm>
           <a:prstGeom prst="rect">
             <a:avLst/>
@@ -5871,7 +5943,7 @@
                 </a:solidFill>
                 <a:latin typeface="Arial"/>
               </a:rPr>
-              <a:t>The first output is the reference. Instructor opens outputs </a:t>
+              <a:t>Tests check declared behavior, not scientific validity. A </a:t>
             </a:r>
             <a:br/>
             <a:r>
@@ -5881,7 +5953,7 @@
                 </a:solidFill>
                 <a:latin typeface="Arial"/>
               </a:rPr>
-              <a:t>and diagnostics; matching charts alone are insufficient. Do not </a:t>
+              <a:t>workflow reporting success does not itself configure required </a:t>
             </a:r>
             <a:br/>
             <a:r>
@@ -5891,17 +5963,45 @@
                 </a:solidFill>
                 <a:latin typeface="Arial"/>
               </a:rPr>
-              <a:t>drop fields, round away differences, or widen tolerance to </a:t>
-            </a:r>
-            <a:br/>
-            <a:r>
-              <a:rPr sz="2100" b="0" i="0">
-                <a:solidFill>
-                  <a:srgbClr val="20344A"/>
-                </a:solidFill>
-                <a:latin typeface="Arial"/>
-              </a:rPr>
-              <a:t>pass.</a:t>
+              <a:t>checks; see </a:t>
+            </a:r>
+            <a:r>
+              <a:rPr sz="2100" b="0" i="0">
+                <a:solidFill>
+                  <a:srgbClr val="007F82"/>
+                </a:solidFill>
+                <a:latin typeface="Arial"/>
+                <a:hlinkClick r:id="rId2"/>
+              </a:rPr>
+              <a:t>testing</a:t>
+            </a:r>
+            <a:r>
+              <a:rPr sz="2100" b="0" i="0">
+                <a:solidFill>
+                  <a:srgbClr val="20344A"/>
+                </a:solidFill>
+                <a:latin typeface="Arial"/>
+              </a:rPr>
+              <a:t> and </a:t>
+            </a:r>
+            <a:r>
+              <a:rPr sz="2100" b="0" i="0">
+                <a:solidFill>
+                  <a:srgbClr val="007F82"/>
+                </a:solidFill>
+                <a:latin typeface="Arial"/>
+                <a:hlinkClick r:id="rId3"/>
+              </a:rPr>
+              <a:t>CI</a:t>
+            </a:r>
+            <a:r>
+              <a:rPr sz="2100" b="0" i="0">
+                <a:solidFill>
+                  <a:srgbClr val="20344A"/>
+                </a:solidFill>
+                <a:latin typeface="Arial"/>
+              </a:rPr>
+              <a:t>.</a:t>
             </a:r>
           </a:p>
         </p:txBody>
@@ -6015,14 +6115,14 @@
               </a:defRPr>
             </a:pPr>
             <a:r>
-              <a:t>SOURCE 14 / 17</a:t>
-            </a:r>
-          </a:p>
-        </p:txBody>
-      </p:sp>
-      <p:sp>
-        <p:nvSpPr>
-          <p:cNvPr id="4" name="title:line-126"/>
+              <a:t>SOURCE 13 / 18</a:t>
+            </a:r>
+          </a:p>
+        </p:txBody>
+      </p:sp>
+      <p:sp>
+        <p:nvSpPr>
+          <p:cNvPr id="4" name="title:line-115"/>
           <p:cNvSpPr txBox="1"/>
           <p:nvPr/>
         </p:nvSpPr>
@@ -6066,7 +6166,7 @@
                 </a:solidFill>
                 <a:latin typeface="Arial"/>
               </a:rPr>
-              <a:t>Inspect collaboration and every member</a:t>
+              <a:t>Demonstrate the two practical Rs</a:t>
             </a:r>
           </a:p>
         </p:txBody>
@@ -6118,13 +6218,137 @@
       </p:sp>
       <p:sp>
         <p:nvSpPr>
-          <p:cNvPr id="6" name="content:line-128:0"/>
+          <p:cNvPr id="6" name="content:line-117:0"/>
           <p:cNvSpPr txBox="1"/>
           <p:nvPr/>
         </p:nvSpPr>
         <p:spPr>
           <a:xfrm>
             <a:off x="594360" y="1737360"/>
+            <a:ext cx="11003279" cy="780288"/>
+          </a:xfrm>
+          <a:prstGeom prst="rect">
+            <a:avLst/>
+          </a:prstGeom>
+          <a:noFill/>
+        </p:spPr>
+        <p:txBody>
+          <a:bodyPr wrap="none" anchor="t" lIns="88900" rIns="88900" tIns="38100" bIns="38100">
+            <a:noAutofit/>
+          </a:bodyPr>
+          <a:lstStyle/>
+          <a:p>
+            <a:pPr marL="279400" indent="-215900">
+              <a:lnSpc>
+                <a:spcPts val="2772"/>
+              </a:lnSpc>
+              <a:spcBef>
+                <a:spcPts val="0"/>
+              </a:spcBef>
+              <a:spcAft>
+                <a:spcPts val="0"/>
+              </a:spcAft>
+              <a:defRPr sz="2100">
+                <a:solidFill>
+                  <a:srgbClr val="20344A"/>
+                </a:solidFill>
+                <a:latin typeface="Arial"/>
+              </a:defRPr>
+              <a:buChar char="•"/>
+            </a:pPr>
+            <a:r>
+              <a:rPr sz="2100" b="0" i="0">
+                <a:solidFill>
+                  <a:srgbClr val="20344A"/>
+                </a:solidFill>
+                <a:latin typeface="Arial"/>
+              </a:rPr>
+              <a:t>Repeatability: agreement under the same conditions. Compare </a:t>
+            </a:r>
+            <a:br/>
+            <a:r>
+              <a:rPr sz="2100" b="0" i="0">
+                <a:solidFill>
+                  <a:srgbClr val="20344A"/>
+                </a:solidFill>
+                <a:latin typeface="Arial"/>
+              </a:rPr>
+              <a:t>local run 1 with local run 2.</a:t>
+            </a:r>
+          </a:p>
+        </p:txBody>
+      </p:sp>
+      <p:sp>
+        <p:nvSpPr>
+          <p:cNvPr id="7" name="content:line-118:0"/>
+          <p:cNvSpPr txBox="1"/>
+          <p:nvPr/>
+        </p:nvSpPr>
+        <p:spPr>
+          <a:xfrm>
+            <a:off x="594360" y="2581656"/>
+            <a:ext cx="11003279" cy="780288"/>
+          </a:xfrm>
+          <a:prstGeom prst="rect">
+            <a:avLst/>
+          </a:prstGeom>
+          <a:noFill/>
+        </p:spPr>
+        <p:txBody>
+          <a:bodyPr wrap="none" anchor="t" lIns="88900" rIns="88900" tIns="38100" bIns="38100">
+            <a:noAutofit/>
+          </a:bodyPr>
+          <a:lstStyle/>
+          <a:p>
+            <a:pPr marL="279400" indent="-215900">
+              <a:lnSpc>
+                <a:spcPts val="2772"/>
+              </a:lnSpc>
+              <a:spcBef>
+                <a:spcPts val="0"/>
+              </a:spcBef>
+              <a:spcAft>
+                <a:spcPts val="0"/>
+              </a:spcAft>
+              <a:defRPr sz="2100">
+                <a:solidFill>
+                  <a:srgbClr val="20344A"/>
+                </a:solidFill>
+                <a:latin typeface="Arial"/>
+              </a:defRPr>
+              <a:buChar char="•"/>
+            </a:pPr>
+            <a:r>
+              <a:rPr sz="2100" b="0" i="0">
+                <a:solidFill>
+                  <a:srgbClr val="20344A"/>
+                </a:solidFill>
+                <a:latin typeface="Arial"/>
+              </a:rPr>
+              <a:t>Replicability: agreement under slightly different conditions. </a:t>
+            </a:r>
+            <a:br/>
+            <a:r>
+              <a:rPr sz="2100" b="0" i="0">
+                <a:solidFill>
+                  <a:srgbClr val="20344A"/>
+                </a:solidFill>
+                <a:latin typeface="Arial"/>
+              </a:rPr>
+              <a:t>Compare local with real Docker execution of the same process.</a:t>
+            </a:r>
+          </a:p>
+        </p:txBody>
+      </p:sp>
+      <p:sp>
+        <p:nvSpPr>
+          <p:cNvPr id="8" name="content:line-119:0"/>
+          <p:cNvSpPr txBox="1"/>
+          <p:nvPr/>
+        </p:nvSpPr>
+        <p:spPr>
+          <a:xfrm>
+            <a:off x="594360" y="3425952"/>
             <a:ext cx="11003279" cy="1132332"/>
           </a:xfrm>
           <a:prstGeom prst="rect">
@@ -6163,7 +6387,7 @@
                 </a:solidFill>
                 <a:latin typeface="Arial"/>
               </a:rPr>
-              <a:t>Open feature branches, descriptive commits, PRs, and </a:t>
+              <a:t>Keep code and CSV bytes unchanged; show successful </a:t>
             </a:r>
             <a:br/>
             <a:r>
@@ -6173,7 +6397,7 @@
                 </a:solidFill>
                 <a:latin typeface="Arial"/>
               </a:rPr>
-              <a:t>meaningful teammate reviews about behavior, tests, or </a:t>
+              <a:t>comparisons, underlying captures, commands, logs, </a:t>
             </a:r>
             <a:br/>
             <a:r>
@@ -6183,20 +6407,20 @@
                 </a:solidFill>
                 <a:latin typeface="Arial"/>
               </a:rPr>
-              <a:t>clarity; show responses/follow-up to concerns.</a:t>
-            </a:r>
-          </a:p>
-        </p:txBody>
-      </p:sp>
-      <p:sp>
-        <p:nvSpPr>
-          <p:cNvPr id="7" name="content:line-129:0"/>
-          <p:cNvSpPr txBox="1"/>
-          <p:nvPr/>
-        </p:nvSpPr>
-        <p:spPr>
-          <a:xfrm>
-            <a:off x="594360" y="2933700"/>
+              <a:t>environment details, and code/input identity.</a:t>
+            </a:r>
+          </a:p>
+        </p:txBody>
+      </p:sp>
+      <p:sp>
+        <p:nvSpPr>
+          <p:cNvPr id="9" name="content:line-120:0"/>
+          <p:cNvSpPr txBox="1"/>
+          <p:nvPr/>
+        </p:nvSpPr>
+        <p:spPr>
+          <a:xfrm>
+            <a:off x="594360" y="4622292"/>
             <a:ext cx="11003279" cy="1132332"/>
           </a:xfrm>
           <a:prstGeom prst="rect">
@@ -6235,7 +6459,7 @@
                 </a:solidFill>
                 <a:latin typeface="Arial"/>
               </a:rPr>
-              <a:t>For EACH student: open at least one personally authored PR </a:t>
+              <a:t>Reproducibility means agreement under very different </a:t>
             </a:r>
             <a:br/>
             <a:r>
@@ -6245,7 +6469,7 @@
                 </a:solidFill>
                 <a:latin typeface="Arial"/>
               </a:rPr>
-              <a:t>and at least one substantive review of a teammate's PR, with </a:t>
+              <a:t>conditions in this course; independent simulation, cross-group </a:t>
             </a:r>
             <a:br/>
             <a:r>
@@ -6255,21 +6479,21 @@
                 </a:solidFill>
                 <a:latin typeface="Arial"/>
               </a:rPr>
-              <a:t>authorship and review permalinks.</a:t>
-            </a:r>
-          </a:p>
-        </p:txBody>
-      </p:sp>
-      <p:sp>
-        <p:nvSpPr>
-          <p:cNvPr id="8" name="content:line-130:0"/>
-          <p:cNvSpPr txBox="1"/>
-          <p:nvPr/>
-        </p:nvSpPr>
-        <p:spPr>
-          <a:xfrm>
-            <a:off x="594360" y="4130040"/>
-            <a:ext cx="11003279" cy="1132332"/>
+              <a:t>reproduction, and new-data experiments are not required.</a:t>
+            </a:r>
+          </a:p>
+        </p:txBody>
+      </p:sp>
+      <p:sp>
+        <p:nvSpPr>
+          <p:cNvPr id="10" name="content:line-121:0"/>
+          <p:cNvSpPr txBox="1"/>
+          <p:nvPr/>
+        </p:nvSpPr>
+        <p:spPr>
+          <a:xfrm>
+            <a:off x="594360" y="5818632"/>
+            <a:ext cx="11003279" cy="428244"/>
           </a:xfrm>
           <a:prstGeom prst="rect">
             <a:avLst/>
@@ -6307,89 +6531,45 @@
                 </a:solidFill>
                 <a:latin typeface="Arial"/>
               </a:rPr>
-              <a:t>Each member explains their contribution, authored change, </a:t>
-            </a:r>
-            <a:br/>
-            <a:r>
-              <a:rPr sz="2100" b="0" i="0">
-                <a:solidFill>
-                  <a:srgbClr val="20344A"/>
-                </a:solidFill>
-                <a:latin typeface="Arial"/>
-              </a:rPr>
-              <a:t>review reasoning, and any follow-up. Approval alone or “looks </a:t>
-            </a:r>
-            <a:br/>
-            <a:r>
-              <a:rPr sz="2100" b="0" i="0">
-                <a:solidFill>
-                  <a:srgbClr val="20344A"/>
-                </a:solidFill>
-                <a:latin typeface="Arial"/>
-              </a:rPr>
-              <a:t>good” is insufficient.</a:t>
-            </a:r>
-          </a:p>
-        </p:txBody>
-      </p:sp>
-      <p:sp>
-        <p:nvSpPr>
-          <p:cNvPr id="9" name="content:line-131:0"/>
-          <p:cNvSpPr txBox="1"/>
-          <p:nvPr/>
-        </p:nvSpPr>
-        <p:spPr>
-          <a:xfrm>
-            <a:off x="594360" y="5326380"/>
-            <a:ext cx="11003279" cy="780288"/>
-          </a:xfrm>
-          <a:prstGeom prst="rect">
-            <a:avLst/>
-          </a:prstGeom>
-          <a:noFill/>
-        </p:spPr>
-        <p:txBody>
-          <a:bodyPr wrap="none" anchor="t" lIns="88900" rIns="88900" tIns="38100" bIns="38100">
-            <a:noAutofit/>
-          </a:bodyPr>
-          <a:lstStyle/>
-          <a:p>
-            <a:pPr marL="279400" indent="-215900">
-              <a:lnSpc>
-                <a:spcPts val="2772"/>
-              </a:lnSpc>
-              <a:spcBef>
-                <a:spcPts val="0"/>
-              </a:spcBef>
-              <a:spcAft>
-                <a:spcPts val="0"/>
-              </a:spcAft>
-              <a:defRPr sz="2100">
-                <a:solidFill>
-                  <a:srgbClr val="20344A"/>
-                </a:solidFill>
-                <a:latin typeface="Arial"/>
-              </a:defRPr>
-              <a:buChar char="•"/>
-            </a:pPr>
-            <a:r>
-              <a:rPr sz="2100" b="0" i="0">
-                <a:solidFill>
-                  <a:srgbClr val="20344A"/>
-                </a:solidFill>
-                <a:latin typeface="Arial"/>
-              </a:rPr>
-              <a:t>Instructor completes an individual evidence row for every </a:t>
-            </a:r>
-            <a:br/>
-            <a:r>
-              <a:rPr sz="2100" b="0" i="0">
-                <a:solidFill>
-                  <a:srgbClr val="20344A"/>
-                </a:solidFill>
-                <a:latin typeface="Arial"/>
-              </a:rPr>
-              <a:t>member. Template history and instructor/agent work do not </a:t>
+              <a:t>Use the </a:t>
+            </a:r>
+            <a:r>
+              <a:rPr sz="2100" b="0" i="0">
+                <a:solidFill>
+                  <a:srgbClr val="007F82"/>
+                </a:solidFill>
+                <a:latin typeface="Arial"/>
+                <a:hlinkClick r:id="rId2"/>
+              </a:rPr>
+              <a:t>glossary</a:t>
+            </a:r>
+            <a:r>
+              <a:rPr sz="2100" b="0" i="0">
+                <a:solidFill>
+                  <a:srgbClr val="20344A"/>
+                </a:solidFill>
+                <a:latin typeface="Arial"/>
+              </a:rPr>
+              <a:t> and </a:t>
+            </a:r>
+            <a:r>
+              <a:rPr sz="2100" b="0" i="0">
+                <a:solidFill>
+                  <a:srgbClr val="007F82"/>
+                </a:solidFill>
+                <a:latin typeface="Arial"/>
+                <a:hlinkClick r:id="rId3"/>
+              </a:rPr>
+              <a:t>capture/comparison commands</a:t>
+            </a:r>
+            <a:r>
+              <a:rPr sz="2100" b="0" i="0">
+                <a:solidFill>
+                  <a:srgbClr val="20344A"/>
+                </a:solidFill>
+                <a:latin typeface="Arial"/>
+              </a:rPr>
+              <a:t>.</a:t>
             </a:r>
           </a:p>
         </p:txBody>
@@ -6503,14 +6683,14 @@
               </a:defRPr>
             </a:pPr>
             <a:r>
-              <a:t>SOURCE 14 / 17  ·  CONTINUED 2</a:t>
-            </a:r>
-          </a:p>
-        </p:txBody>
-      </p:sp>
-      <p:sp>
-        <p:nvSpPr>
-          <p:cNvPr id="4" name="title:line-126"/>
+              <a:t>SOURCE 14 / 18</a:t>
+            </a:r>
+          </a:p>
+        </p:txBody>
+      </p:sp>
+      <p:sp>
+        <p:nvSpPr>
+          <p:cNvPr id="4" name="title:line-125"/>
           <p:cNvSpPr txBox="1"/>
           <p:nvPr/>
         </p:nvSpPr>
@@ -6554,7 +6734,7 @@
                 </a:solidFill>
                 <a:latin typeface="Arial"/>
               </a:rPr>
-              <a:t>Inspect collaboration and every member</a:t>
+              <a:t>Inspect agreement, field by field</a:t>
             </a:r>
           </a:p>
         </p:txBody>
@@ -6606,14 +6786,14 @@
       </p:sp>
       <p:sp>
         <p:nvSpPr>
-          <p:cNvPr id="6" name="content:line-131:2"/>
+          <p:cNvPr id="6" name="content:line-127:0"/>
           <p:cNvSpPr txBox="1"/>
           <p:nvPr/>
         </p:nvSpPr>
         <p:spPr>
           <a:xfrm>
             <a:off x="594360" y="1737360"/>
-            <a:ext cx="11003279" cy="428244"/>
+            <a:ext cx="11003279" cy="1132332"/>
           </a:xfrm>
           <a:prstGeom prst="rect">
             <a:avLst/>
@@ -6642,35 +6822,243 @@
                 </a:solidFill>
                 <a:latin typeface="Arial"/>
               </a:defRPr>
-              <a:buChar char=" "/>
-            </a:pPr>
-            <a:r>
-              <a:rPr sz="2100" b="0" i="0">
-                <a:solidFill>
-                  <a:srgbClr val="20344A"/>
-                </a:solidFill>
-                <a:latin typeface="Arial"/>
-              </a:rPr>
-              <a:t>count; see the </a:t>
-            </a:r>
-            <a:r>
-              <a:rPr sz="2100" b="0" i="0">
-                <a:solidFill>
-                  <a:srgbClr val="007F82"/>
-                </a:solidFill>
-                <a:latin typeface="Arial"/>
-                <a:hlinkClick r:id="rId2"/>
-              </a:rPr>
-              <a:t>collaboration guide</a:t>
-            </a:r>
-            <a:r>
-              <a:rPr sz="2100" b="0" i="0">
-                <a:solidFill>
-                  <a:srgbClr val="20344A"/>
-                </a:solidFill>
-                <a:latin typeface="Arial"/>
-              </a:rPr>
-              <a:t>.</a:t>
+              <a:buChar char="•"/>
+            </a:pPr>
+            <a:r>
+              <a:rPr sz="2100" b="0" i="0">
+                <a:solidFill>
+                  <a:srgbClr val="20344A"/>
+                </a:solidFill>
+                <a:latin typeface="Arial"/>
+              </a:rPr>
+              <a:t>Exact: cleaned records, identifiers, raw values, copied </a:t>
+            </a:r>
+            <a:br/>
+            <a:r>
+              <a:rPr sz="2100" b="0" i="0">
+                <a:solidFill>
+                  <a:srgbClr val="20344A"/>
+                </a:solidFill>
+                <a:latin typeface="Arial"/>
+              </a:rPr>
+              <a:t>baselines, counts, types, structure, ordering, and nulls. </a:t>
+            </a:r>
+            <a:br/>
+            <a:r>
+              <a:rPr sz="2100" b="0" i="0">
+                <a:solidFill>
+                  <a:srgbClr val="20344A"/>
+                </a:solidFill>
+                <a:latin typeface="Arial"/>
+              </a:rPr>
+              <a:t>Missing stays distinct from zero.</a:t>
+            </a:r>
+          </a:p>
+        </p:txBody>
+      </p:sp>
+      <p:sp>
+        <p:nvSpPr>
+          <p:cNvPr id="7" name="content:line-128:0"/>
+          <p:cNvSpPr txBox="1"/>
+          <p:nvPr/>
+        </p:nvSpPr>
+        <p:spPr>
+          <a:xfrm>
+            <a:off x="594360" y="2933700"/>
+            <a:ext cx="11003279" cy="1132332"/>
+          </a:xfrm>
+          <a:prstGeom prst="rect">
+            <a:avLst/>
+          </a:prstGeom>
+          <a:noFill/>
+        </p:spPr>
+        <p:txBody>
+          <a:bodyPr wrap="none" anchor="t" lIns="88900" rIns="88900" tIns="38100" bIns="38100">
+            <a:noAutofit/>
+          </a:bodyPr>
+          <a:lstStyle/>
+          <a:p>
+            <a:pPr marL="279400" indent="-215900">
+              <a:lnSpc>
+                <a:spcPts val="2772"/>
+              </a:lnSpc>
+              <a:spcBef>
+                <a:spcPts val="0"/>
+              </a:spcBef>
+              <a:spcAft>
+                <a:spcPts val="0"/>
+              </a:spcAft>
+              <a:defRPr sz="2100">
+                <a:solidFill>
+                  <a:srgbClr val="20344A"/>
+                </a:solidFill>
+                <a:latin typeface="Arial"/>
+              </a:defRPr>
+              <a:buChar char="•"/>
+            </a:pPr>
+            <a:r>
+              <a:rPr sz="2100" b="0" i="0">
+                <a:solidFill>
+                  <a:srgbClr val="20344A"/>
+                </a:solidFill>
+                <a:latin typeface="Arial"/>
+              </a:rPr>
+              <a:t>Only derived decimals receive declared tolerances documented </a:t>
+            </a:r>
+            <a:br/>
+            <a:r>
+              <a:rPr sz="2100" b="0" i="0">
+                <a:solidFill>
+                  <a:srgbClr val="20344A"/>
+                </a:solidFill>
+                <a:latin typeface="Arial"/>
+              </a:rPr>
+              <a:t>in tests. In the example: change, percent_change, and </a:t>
+            </a:r>
+            <a:br/>
+            <a:r>
+              <a:rPr sz="2100" b="0" i="0">
+                <a:solidFill>
+                  <a:srgbClr val="20344A"/>
+                </a:solidFill>
+                <a:latin typeface="Arial"/>
+              </a:rPr>
+              <a:t>visit-summary mean.</a:t>
+            </a:r>
+          </a:p>
+        </p:txBody>
+      </p:sp>
+      <p:sp>
+        <p:nvSpPr>
+          <p:cNvPr id="8" name="content:line-131:0"/>
+          <p:cNvSpPr txBox="1"/>
+          <p:nvPr/>
+        </p:nvSpPr>
+        <p:spPr>
+          <a:xfrm>
+            <a:off x="594360" y="4130040"/>
+            <a:ext cx="11003279" cy="377952"/>
+          </a:xfrm>
+          <a:prstGeom prst="rect">
+            <a:avLst/>
+          </a:prstGeom>
+          <a:solidFill>
+            <a:srgbClr val="EDF3F6"/>
+          </a:solidFill>
+        </p:spPr>
+        <p:txBody>
+          <a:bodyPr wrap="none" anchor="t" lIns="88900" rIns="88900" tIns="38100" bIns="38100">
+            <a:noAutofit/>
+          </a:bodyPr>
+          <a:lstStyle/>
+          <a:p>
+            <a:pPr>
+              <a:lnSpc>
+                <a:spcPts val="2376"/>
+              </a:lnSpc>
+              <a:spcBef>
+                <a:spcPts val="0"/>
+              </a:spcBef>
+              <a:spcAft>
+                <a:spcPts val="0"/>
+              </a:spcAft>
+              <a:defRPr sz="1800">
+                <a:solidFill>
+                  <a:srgbClr val="20344A"/>
+                </a:solidFill>
+                <a:latin typeface="Arial"/>
+              </a:defRPr>
+            </a:pPr>
+            <a:r>
+              <a:rPr sz="1800" b="0" i="0">
+                <a:solidFill>
+                  <a:srgbClr val="20344A"/>
+                </a:solidFill>
+                <a:latin typeface="Courier New"/>
+              </a:rPr>
+              <a:t>abs(actual - expected) &lt;= max(1e-9, 1e-9 * abs(expected))</a:t>
+            </a:r>
+          </a:p>
+        </p:txBody>
+      </p:sp>
+      <p:sp>
+        <p:nvSpPr>
+          <p:cNvPr id="9" name="content:line-134:0"/>
+          <p:cNvSpPr txBox="1"/>
+          <p:nvPr/>
+        </p:nvSpPr>
+        <p:spPr>
+          <a:xfrm>
+            <a:off x="594360" y="4507992"/>
+            <a:ext cx="11003279" cy="1484376"/>
+          </a:xfrm>
+          <a:prstGeom prst="rect">
+            <a:avLst/>
+          </a:prstGeom>
+          <a:noFill/>
+        </p:spPr>
+        <p:txBody>
+          <a:bodyPr wrap="none" anchor="t" lIns="88900" rIns="88900" tIns="38100" bIns="38100">
+            <a:noAutofit/>
+          </a:bodyPr>
+          <a:lstStyle/>
+          <a:p>
+            <a:pPr marL="279400" indent="-215900">
+              <a:lnSpc>
+                <a:spcPts val="2772"/>
+              </a:lnSpc>
+              <a:spcBef>
+                <a:spcPts val="0"/>
+              </a:spcBef>
+              <a:spcAft>
+                <a:spcPts val="0"/>
+              </a:spcAft>
+              <a:defRPr sz="2100">
+                <a:solidFill>
+                  <a:srgbClr val="20344A"/>
+                </a:solidFill>
+                <a:latin typeface="Arial"/>
+              </a:defRPr>
+              <a:buChar char="•"/>
+            </a:pPr>
+            <a:r>
+              <a:rPr sz="2100" b="0" i="0">
+                <a:solidFill>
+                  <a:srgbClr val="20344A"/>
+                </a:solidFill>
+                <a:latin typeface="Arial"/>
+              </a:rPr>
+              <a:t>The first output is the reference. Instructor opens outputs </a:t>
+            </a:r>
+            <a:br/>
+            <a:r>
+              <a:rPr sz="2100" b="0" i="0">
+                <a:solidFill>
+                  <a:srgbClr val="20344A"/>
+                </a:solidFill>
+                <a:latin typeface="Arial"/>
+              </a:rPr>
+              <a:t>and diagnostics; matching charts alone are insufficient. Do not </a:t>
+            </a:r>
+            <a:br/>
+            <a:r>
+              <a:rPr sz="2100" b="0" i="0">
+                <a:solidFill>
+                  <a:srgbClr val="20344A"/>
+                </a:solidFill>
+                <a:latin typeface="Arial"/>
+              </a:rPr>
+              <a:t>drop fields, round away differences, or widen tolerance to </a:t>
+            </a:r>
+            <a:br/>
+            <a:r>
+              <a:rPr sz="2100" b="0" i="0">
+                <a:solidFill>
+                  <a:srgbClr val="20344A"/>
+                </a:solidFill>
+                <a:latin typeface="Arial"/>
+              </a:rPr>
+              <a:t>pass.</a:t>
             </a:r>
           </a:p>
         </p:txBody>
@@ -6784,14 +7172,14 @@
               </a:defRPr>
             </a:pPr>
             <a:r>
-              <a:t>SOURCE 15 / 17</a:t>
-            </a:r>
-          </a:p>
-        </p:txBody>
-      </p:sp>
-      <p:sp>
-        <p:nvSpPr>
-          <p:cNvPr id="4" name="title:line-135"/>
+              <a:t>SOURCE 15 / 18</a:t>
+            </a:r>
+          </a:p>
+        </p:txBody>
+      </p:sp>
+      <p:sp>
+        <p:nvSpPr>
+          <p:cNvPr id="4" name="title:line-138"/>
           <p:cNvSpPr txBox="1"/>
           <p:nvPr/>
         </p:nvSpPr>
@@ -6835,7 +7223,7 @@
                 </a:solidFill>
                 <a:latin typeface="Arial"/>
               </a:rPr>
-              <a:t>Questions follow the evidence</a:t>
+              <a:t>Inspect collaboration and every member</a:t>
             </a:r>
           </a:p>
         </p:txBody>
@@ -6887,13 +7275,229 @@
       </p:sp>
       <p:sp>
         <p:nvSpPr>
-          <p:cNvPr id="6" name="content:line-137:0"/>
+          <p:cNvPr id="6" name="content:line-140:0"/>
           <p:cNvSpPr txBox="1"/>
           <p:nvPr/>
         </p:nvSpPr>
         <p:spPr>
           <a:xfrm>
             <a:off x="594360" y="1737360"/>
+            <a:ext cx="11003279" cy="1132332"/>
+          </a:xfrm>
+          <a:prstGeom prst="rect">
+            <a:avLst/>
+          </a:prstGeom>
+          <a:noFill/>
+        </p:spPr>
+        <p:txBody>
+          <a:bodyPr wrap="none" anchor="t" lIns="88900" rIns="88900" tIns="38100" bIns="38100">
+            <a:noAutofit/>
+          </a:bodyPr>
+          <a:lstStyle/>
+          <a:p>
+            <a:pPr marL="279400" indent="-215900">
+              <a:lnSpc>
+                <a:spcPts val="2772"/>
+              </a:lnSpc>
+              <a:spcBef>
+                <a:spcPts val="0"/>
+              </a:spcBef>
+              <a:spcAft>
+                <a:spcPts val="0"/>
+              </a:spcAft>
+              <a:defRPr sz="2100">
+                <a:solidFill>
+                  <a:srgbClr val="20344A"/>
+                </a:solidFill>
+                <a:latin typeface="Arial"/>
+              </a:defRPr>
+              <a:buChar char="•"/>
+            </a:pPr>
+            <a:r>
+              <a:rPr sz="2100" b="0" i="0">
+                <a:solidFill>
+                  <a:srgbClr val="20344A"/>
+                </a:solidFill>
+                <a:latin typeface="Arial"/>
+              </a:rPr>
+              <a:t>Open feature branches, descriptive commits, PRs, and </a:t>
+            </a:r>
+            <a:br/>
+            <a:r>
+              <a:rPr sz="2100" b="0" i="0">
+                <a:solidFill>
+                  <a:srgbClr val="20344A"/>
+                </a:solidFill>
+                <a:latin typeface="Arial"/>
+              </a:rPr>
+              <a:t>meaningful teammate reviews about behavior, tests, or </a:t>
+            </a:r>
+            <a:br/>
+            <a:r>
+              <a:rPr sz="2100" b="0" i="0">
+                <a:solidFill>
+                  <a:srgbClr val="20344A"/>
+                </a:solidFill>
+                <a:latin typeface="Arial"/>
+              </a:rPr>
+              <a:t>clarity; show responses/follow-up to concerns.</a:t>
+            </a:r>
+          </a:p>
+        </p:txBody>
+      </p:sp>
+      <p:sp>
+        <p:nvSpPr>
+          <p:cNvPr id="7" name="content:line-141:0"/>
+          <p:cNvSpPr txBox="1"/>
+          <p:nvPr/>
+        </p:nvSpPr>
+        <p:spPr>
+          <a:xfrm>
+            <a:off x="594360" y="2933700"/>
+            <a:ext cx="11003279" cy="1132332"/>
+          </a:xfrm>
+          <a:prstGeom prst="rect">
+            <a:avLst/>
+          </a:prstGeom>
+          <a:noFill/>
+        </p:spPr>
+        <p:txBody>
+          <a:bodyPr wrap="none" anchor="t" lIns="88900" rIns="88900" tIns="38100" bIns="38100">
+            <a:noAutofit/>
+          </a:bodyPr>
+          <a:lstStyle/>
+          <a:p>
+            <a:pPr marL="279400" indent="-215900">
+              <a:lnSpc>
+                <a:spcPts val="2772"/>
+              </a:lnSpc>
+              <a:spcBef>
+                <a:spcPts val="0"/>
+              </a:spcBef>
+              <a:spcAft>
+                <a:spcPts val="0"/>
+              </a:spcAft>
+              <a:defRPr sz="2100">
+                <a:solidFill>
+                  <a:srgbClr val="20344A"/>
+                </a:solidFill>
+                <a:latin typeface="Arial"/>
+              </a:defRPr>
+              <a:buChar char="•"/>
+            </a:pPr>
+            <a:r>
+              <a:rPr sz="2100" b="0" i="0">
+                <a:solidFill>
+                  <a:srgbClr val="20344A"/>
+                </a:solidFill>
+                <a:latin typeface="Arial"/>
+              </a:rPr>
+              <a:t>For EACH student: open at least one personally authored PR </a:t>
+            </a:r>
+            <a:br/>
+            <a:r>
+              <a:rPr sz="2100" b="0" i="0">
+                <a:solidFill>
+                  <a:srgbClr val="20344A"/>
+                </a:solidFill>
+                <a:latin typeface="Arial"/>
+              </a:rPr>
+              <a:t>and at least one substantive review of a teammate's PR, with </a:t>
+            </a:r>
+            <a:br/>
+            <a:r>
+              <a:rPr sz="2100" b="0" i="0">
+                <a:solidFill>
+                  <a:srgbClr val="20344A"/>
+                </a:solidFill>
+                <a:latin typeface="Arial"/>
+              </a:rPr>
+              <a:t>authorship and review permalinks.</a:t>
+            </a:r>
+          </a:p>
+        </p:txBody>
+      </p:sp>
+      <p:sp>
+        <p:nvSpPr>
+          <p:cNvPr id="8" name="content:line-142:0"/>
+          <p:cNvSpPr txBox="1"/>
+          <p:nvPr/>
+        </p:nvSpPr>
+        <p:spPr>
+          <a:xfrm>
+            <a:off x="594360" y="4130040"/>
+            <a:ext cx="11003279" cy="1132332"/>
+          </a:xfrm>
+          <a:prstGeom prst="rect">
+            <a:avLst/>
+          </a:prstGeom>
+          <a:noFill/>
+        </p:spPr>
+        <p:txBody>
+          <a:bodyPr wrap="none" anchor="t" lIns="88900" rIns="88900" tIns="38100" bIns="38100">
+            <a:noAutofit/>
+          </a:bodyPr>
+          <a:lstStyle/>
+          <a:p>
+            <a:pPr marL="279400" indent="-215900">
+              <a:lnSpc>
+                <a:spcPts val="2772"/>
+              </a:lnSpc>
+              <a:spcBef>
+                <a:spcPts val="0"/>
+              </a:spcBef>
+              <a:spcAft>
+                <a:spcPts val="0"/>
+              </a:spcAft>
+              <a:defRPr sz="2100">
+                <a:solidFill>
+                  <a:srgbClr val="20344A"/>
+                </a:solidFill>
+                <a:latin typeface="Arial"/>
+              </a:defRPr>
+              <a:buChar char="•"/>
+            </a:pPr>
+            <a:r>
+              <a:rPr sz="2100" b="0" i="0">
+                <a:solidFill>
+                  <a:srgbClr val="20344A"/>
+                </a:solidFill>
+                <a:latin typeface="Arial"/>
+              </a:rPr>
+              <a:t>Each member explains their contribution, authored change, </a:t>
+            </a:r>
+            <a:br/>
+            <a:r>
+              <a:rPr sz="2100" b="0" i="0">
+                <a:solidFill>
+                  <a:srgbClr val="20344A"/>
+                </a:solidFill>
+                <a:latin typeface="Arial"/>
+              </a:rPr>
+              <a:t>review reasoning, and any follow-up. Approval alone or “looks </a:t>
+            </a:r>
+            <a:br/>
+            <a:r>
+              <a:rPr sz="2100" b="0" i="0">
+                <a:solidFill>
+                  <a:srgbClr val="20344A"/>
+                </a:solidFill>
+                <a:latin typeface="Arial"/>
+              </a:rPr>
+              <a:t>good” is insufficient.</a:t>
+            </a:r>
+          </a:p>
+        </p:txBody>
+      </p:sp>
+      <p:sp>
+        <p:nvSpPr>
+          <p:cNvPr id="9" name="content:line-143:0"/>
+          <p:cNvSpPr txBox="1"/>
+          <p:nvPr/>
+        </p:nvSpPr>
+        <p:spPr>
+          <a:xfrm>
+            <a:off x="594360" y="5326380"/>
             <a:ext cx="11003279" cy="780288"/>
           </a:xfrm>
           <a:prstGeom prst="rect">
@@ -6932,7 +7536,7 @@
                 </a:solidFill>
                 <a:latin typeface="Arial"/>
               </a:rPr>
-              <a:t>Why does this input fail? Open the rejection and the test that </a:t>
+              <a:t>Instructor completes an individual evidence row for every </a:t>
             </a:r>
             <a:br/>
             <a:r>
@@ -6942,203 +7546,7 @@
                 </a:solidFill>
                 <a:latin typeface="Arial"/>
               </a:rPr>
-              <a:t>establishes the rule.</a:t>
-            </a:r>
-          </a:p>
-        </p:txBody>
-      </p:sp>
-      <p:sp>
-        <p:nvSpPr>
-          <p:cNvPr id="7" name="content:line-138:0"/>
-          <p:cNvSpPr txBox="1"/>
-          <p:nvPr/>
-        </p:nvSpPr>
-        <p:spPr>
-          <a:xfrm>
-            <a:off x="594360" y="2581656"/>
-            <a:ext cx="11003279" cy="1132332"/>
-          </a:xfrm>
-          <a:prstGeom prst="rect">
-            <a:avLst/>
-          </a:prstGeom>
-          <a:noFill/>
-        </p:spPr>
-        <p:txBody>
-          <a:bodyPr wrap="none" anchor="t" lIns="88900" rIns="88900" tIns="38100" bIns="38100">
-            <a:noAutofit/>
-          </a:bodyPr>
-          <a:lstStyle/>
-          <a:p>
-            <a:pPr marL="279400" indent="-215900">
-              <a:lnSpc>
-                <a:spcPts val="2772"/>
-              </a:lnSpc>
-              <a:spcBef>
-                <a:spcPts val="0"/>
-              </a:spcBef>
-              <a:spcAft>
-                <a:spcPts val="0"/>
-              </a:spcAft>
-              <a:defRPr sz="2100">
-                <a:solidFill>
-                  <a:srgbClr val="20344A"/>
-                </a:solidFill>
-                <a:latin typeface="Arial"/>
-              </a:defRPr>
-              <a:buChar char="•"/>
-            </a:pPr>
-            <a:r>
-              <a:rPr sz="2100" b="0" i="0">
-                <a:solidFill>
-                  <a:srgbClr val="20344A"/>
-                </a:solidFill>
-                <a:latin typeface="Arial"/>
-              </a:rPr>
-              <a:t>Which code and input produced these outputs? Open the </a:t>
-            </a:r>
-            <a:br/>
-            <a:r>
-              <a:rPr sz="2100" b="0" i="0">
-                <a:solidFill>
-                  <a:srgbClr val="20344A"/>
-                </a:solidFill>
-                <a:latin typeface="Arial"/>
-              </a:rPr>
-              <a:t>commit and capture fingerprints, then explain environment </a:t>
-            </a:r>
-            <a:br/>
-            <a:r>
-              <a:rPr sz="2100" b="0" i="0">
-                <a:solidFill>
-                  <a:srgbClr val="20344A"/>
-                </a:solidFill>
-                <a:latin typeface="Arial"/>
-              </a:rPr>
-              <a:t>differences.</a:t>
-            </a:r>
-          </a:p>
-        </p:txBody>
-      </p:sp>
-      <p:sp>
-        <p:nvSpPr>
-          <p:cNvPr id="8" name="content:line-139:0"/>
-          <p:cNvSpPr txBox="1"/>
-          <p:nvPr/>
-        </p:nvSpPr>
-        <p:spPr>
-          <a:xfrm>
-            <a:off x="594360" y="3777996"/>
-            <a:ext cx="11003279" cy="780288"/>
-          </a:xfrm>
-          <a:prstGeom prst="rect">
-            <a:avLst/>
-          </a:prstGeom>
-          <a:noFill/>
-        </p:spPr>
-        <p:txBody>
-          <a:bodyPr wrap="none" anchor="t" lIns="88900" rIns="88900" tIns="38100" bIns="38100">
-            <a:noAutofit/>
-          </a:bodyPr>
-          <a:lstStyle/>
-          <a:p>
-            <a:pPr marL="279400" indent="-215900">
-              <a:lnSpc>
-                <a:spcPts val="2772"/>
-              </a:lnSpc>
-              <a:spcBef>
-                <a:spcPts val="0"/>
-              </a:spcBef>
-              <a:spcAft>
-                <a:spcPts val="0"/>
-              </a:spcAft>
-              <a:defRPr sz="2100">
-                <a:solidFill>
-                  <a:srgbClr val="20344A"/>
-                </a:solidFill>
-                <a:latin typeface="Arial"/>
-              </a:defRPr>
-              <a:buChar char="•"/>
-            </a:pPr>
-            <a:r>
-              <a:rPr sz="2100" b="0" i="0">
-                <a:solidFill>
-                  <a:srgbClr val="20344A"/>
-                </a:solidFill>
-                <a:latin typeface="Arial"/>
-              </a:rPr>
-              <a:t>Which fields compare exactly, and why is a derived value </a:t>
-            </a:r>
-            <a:br/>
-            <a:r>
-              <a:rPr sz="2100" b="0" i="0">
-                <a:solidFill>
-                  <a:srgbClr val="20344A"/>
-                </a:solidFill>
-                <a:latin typeface="Arial"/>
-              </a:rPr>
-              <a:t>allowed tolerance? Open the comparison and its tests.</a:t>
-            </a:r>
-          </a:p>
-        </p:txBody>
-      </p:sp>
-      <p:sp>
-        <p:nvSpPr>
-          <p:cNvPr id="9" name="content:line-140:0"/>
-          <p:cNvSpPr txBox="1"/>
-          <p:nvPr/>
-        </p:nvSpPr>
-        <p:spPr>
-          <a:xfrm>
-            <a:off x="594360" y="4622292"/>
-            <a:ext cx="11003279" cy="780288"/>
-          </a:xfrm>
-          <a:prstGeom prst="rect">
-            <a:avLst/>
-          </a:prstGeom>
-          <a:noFill/>
-        </p:spPr>
-        <p:txBody>
-          <a:bodyPr wrap="none" anchor="t" lIns="88900" rIns="88900" tIns="38100" bIns="38100">
-            <a:noAutofit/>
-          </a:bodyPr>
-          <a:lstStyle/>
-          <a:p>
-            <a:pPr marL="279400" indent="-215900">
-              <a:lnSpc>
-                <a:spcPts val="2772"/>
-              </a:lnSpc>
-              <a:spcBef>
-                <a:spcPts val="0"/>
-              </a:spcBef>
-              <a:spcAft>
-                <a:spcPts val="0"/>
-              </a:spcAft>
-              <a:defRPr sz="2100">
-                <a:solidFill>
-                  <a:srgbClr val="20344A"/>
-                </a:solidFill>
-                <a:latin typeface="Arial"/>
-              </a:defRPr>
-              <a:buChar char="•"/>
-            </a:pPr>
-            <a:r>
-              <a:rPr sz="2100" b="0" i="0">
-                <a:solidFill>
-                  <a:srgbClr val="20344A"/>
-                </a:solidFill>
-                <a:latin typeface="Arial"/>
-              </a:rPr>
-              <a:t>What did you change or ask a teammate to improve? Open your </a:t>
-            </a:r>
-            <a:br/>
-            <a:r>
-              <a:rPr sz="2100" b="0" i="0">
-                <a:solidFill>
-                  <a:srgbClr val="20344A"/>
-                </a:solidFill>
-                <a:latin typeface="Arial"/>
-              </a:rPr>
-              <a:t>PR or review and explain the result.</a:t>
+              <a:t>member. Template history and instructor/agent work do not </a:t>
             </a:r>
           </a:p>
         </p:txBody>
@@ -7252,14 +7660,14 @@
               </a:defRPr>
             </a:pPr>
             <a:r>
-              <a:t>SOURCE 16 / 17</a:t>
-            </a:r>
-          </a:p>
-        </p:txBody>
-      </p:sp>
-      <p:sp>
-        <p:nvSpPr>
-          <p:cNvPr id="4" name="title:line-144"/>
+              <a:t>SOURCE 15 / 18  ·  CONTINUED 2</a:t>
+            </a:r>
+          </a:p>
+        </p:txBody>
+      </p:sp>
+      <p:sp>
+        <p:nvSpPr>
+          <p:cNvPr id="4" name="title:line-138"/>
           <p:cNvSpPr txBox="1"/>
           <p:nvPr/>
         </p:nvSpPr>
@@ -7303,7 +7711,7 @@
                 </a:solidFill>
                 <a:latin typeface="Arial"/>
               </a:rPr>
-              <a:t>Shared break and remaining groups</a:t>
+              <a:t>Inspect collaboration and every member</a:t>
             </a:r>
           </a:p>
         </p:txBody>
@@ -7355,14 +7763,14 @@
       </p:sp>
       <p:sp>
         <p:nvSpPr>
-          <p:cNvPr id="6" name="content:line-146:0"/>
+          <p:cNvPr id="6" name="content:line-143:2"/>
           <p:cNvSpPr txBox="1"/>
           <p:nvPr/>
         </p:nvSpPr>
         <p:spPr>
           <a:xfrm>
             <a:off x="594360" y="1737360"/>
-            <a:ext cx="11003279" cy="780288"/>
+            <a:ext cx="11003279" cy="428244"/>
           </a:xfrm>
           <a:prstGeom prst="rect">
             <a:avLst/>
@@ -7391,150 +7799,35 @@
                 </a:solidFill>
                 <a:latin typeface="Arial"/>
               </a:defRPr>
-              <a:buChar char="•"/>
-            </a:pPr>
-            <a:r>
-              <a:rPr sz="2100" b="0" i="0">
-                <a:solidFill>
-                  <a:srgbClr val="20344A"/>
-                </a:solidFill>
-                <a:latin typeface="Arial"/>
-              </a:rPr>
-              <a:t>Take the reserved 15-minute break at the published slot </a:t>
-            </a:r>
-            <a:br/>
-            <a:r>
-              <a:rPr sz="2100" b="0" i="0">
-                <a:solidFill>
-                  <a:srgbClr val="20344A"/>
-                </a:solidFill>
-                <a:latin typeface="Arial"/>
-              </a:rPr>
-              <a:t>boundary.</a:t>
-            </a:r>
-          </a:p>
-        </p:txBody>
-      </p:sp>
-      <p:sp>
-        <p:nvSpPr>
-          <p:cNvPr id="7" name="content:line-147:0"/>
-          <p:cNvSpPr txBox="1"/>
-          <p:nvPr/>
-        </p:nvSpPr>
-        <p:spPr>
-          <a:xfrm>
-            <a:off x="594360" y="2581656"/>
-            <a:ext cx="11003279" cy="780288"/>
-          </a:xfrm>
-          <a:prstGeom prst="rect">
-            <a:avLst/>
-          </a:prstGeom>
-          <a:noFill/>
-        </p:spPr>
-        <p:txBody>
-          <a:bodyPr wrap="none" anchor="t" lIns="88900" rIns="88900" tIns="38100" bIns="38100">
-            <a:noAutofit/>
-          </a:bodyPr>
-          <a:lstStyle/>
-          <a:p>
-            <a:pPr marL="279400" indent="-215900">
-              <a:lnSpc>
-                <a:spcPts val="2772"/>
-              </a:lnSpc>
-              <a:spcBef>
-                <a:spcPts val="0"/>
-              </a:spcBef>
-              <a:spcAft>
-                <a:spcPts val="0"/>
-              </a:spcAft>
-              <a:defRPr sz="2100">
-                <a:solidFill>
-                  <a:srgbClr val="20344A"/>
-                </a:solidFill>
-                <a:latin typeface="Arial"/>
-              </a:defRPr>
-              <a:buChar char="•"/>
-            </a:pPr>
-            <a:r>
-              <a:rPr sz="2100" b="0" i="0">
-                <a:solidFill>
-                  <a:srgbClr val="20344A"/>
-                </a:solidFill>
-                <a:latin typeface="Arial"/>
-              </a:rPr>
-              <a:t>Resume with the next group's live demo, evidence inspection, </a:t>
-            </a:r>
-            <a:br/>
-            <a:r>
-              <a:rPr sz="2100" b="0" i="0">
-                <a:solidFill>
-                  <a:srgbClr val="20344A"/>
-                </a:solidFill>
-                <a:latin typeface="Arial"/>
-              </a:rPr>
-              <a:t>and questions using the same S allocation.</a:t>
-            </a:r>
-          </a:p>
-        </p:txBody>
-      </p:sp>
-      <p:sp>
-        <p:nvSpPr>
-          <p:cNvPr id="8" name="content:line-148:0"/>
-          <p:cNvSpPr txBox="1"/>
-          <p:nvPr/>
-        </p:nvSpPr>
-        <p:spPr>
-          <a:xfrm>
-            <a:off x="594360" y="3425952"/>
-            <a:ext cx="11003279" cy="780288"/>
-          </a:xfrm>
-          <a:prstGeom prst="rect">
-            <a:avLst/>
-          </a:prstGeom>
-          <a:noFill/>
-        </p:spPr>
-        <p:txBody>
-          <a:bodyPr wrap="none" anchor="t" lIns="88900" rIns="88900" tIns="38100" bIns="38100">
-            <a:noAutofit/>
-          </a:bodyPr>
-          <a:lstStyle/>
-          <a:p>
-            <a:pPr marL="279400" indent="-215900">
-              <a:lnSpc>
-                <a:spcPts val="2772"/>
-              </a:lnSpc>
-              <a:spcBef>
-                <a:spcPts val="0"/>
-              </a:spcBef>
-              <a:spcAft>
-                <a:spcPts val="0"/>
-              </a:spcAft>
-              <a:defRPr sz="2100">
-                <a:solidFill>
-                  <a:srgbClr val="20344A"/>
-                </a:solidFill>
-                <a:latin typeface="Arial"/>
-              </a:defRPr>
-              <a:buChar char="•"/>
-            </a:pPr>
-            <a:r>
-              <a:rPr sz="2100" b="0" i="0">
-                <a:solidFill>
-                  <a:srgbClr val="20344A"/>
-                </a:solidFill>
-                <a:latin typeface="Arial"/>
-              </a:rPr>
-              <a:t>Every group uses the same mandatory checklist; keep the </a:t>
-            </a:r>
-            <a:br/>
-            <a:r>
-              <a:rPr sz="2100" b="0" i="0">
-                <a:solidFill>
-                  <a:srgbClr val="20344A"/>
-                </a:solidFill>
-                <a:latin typeface="Arial"/>
-              </a:rPr>
-              <a:t>reserved five-minute closing within the three hours.</a:t>
+              <a:buChar char=" "/>
+            </a:pPr>
+            <a:r>
+              <a:rPr sz="2100" b="0" i="0">
+                <a:solidFill>
+                  <a:srgbClr val="20344A"/>
+                </a:solidFill>
+                <a:latin typeface="Arial"/>
+              </a:rPr>
+              <a:t>count; see the </a:t>
+            </a:r>
+            <a:r>
+              <a:rPr sz="2100" b="0" i="0">
+                <a:solidFill>
+                  <a:srgbClr val="007F82"/>
+                </a:solidFill>
+                <a:latin typeface="Arial"/>
+                <a:hlinkClick r:id="rId2"/>
+              </a:rPr>
+              <a:t>collaboration guide</a:t>
+            </a:r>
+            <a:r>
+              <a:rPr sz="2100" b="0" i="0">
+                <a:solidFill>
+                  <a:srgbClr val="20344A"/>
+                </a:solidFill>
+                <a:latin typeface="Arial"/>
+              </a:rPr>
+              <a:t>.</a:t>
             </a:r>
           </a:p>
         </p:txBody>
@@ -7648,14 +7941,14 @@
               </a:defRPr>
             </a:pPr>
             <a:r>
-              <a:t>SOURCE 17 / 17</a:t>
-            </a:r>
-          </a:p>
-        </p:txBody>
-      </p:sp>
-      <p:sp>
-        <p:nvSpPr>
-          <p:cNvPr id="4" name="title:line-152"/>
+              <a:t>SOURCE 16 / 18</a:t>
+            </a:r>
+          </a:p>
+        </p:txBody>
+      </p:sp>
+      <p:sp>
+        <p:nvSpPr>
+          <p:cNvPr id="4" name="title:line-147"/>
           <p:cNvSpPr txBox="1"/>
           <p:nvPr/>
         </p:nvSpPr>
@@ -7699,7 +7992,7 @@
                 </a:solidFill>
                 <a:latin typeface="Arial"/>
               </a:rPr>
-              <a:t>Closing: connect the engineering evidence</a:t>
+              <a:t>Questions follow the evidence</a:t>
             </a:r>
           </a:p>
         </p:txBody>
@@ -7751,7 +8044,7 @@
       </p:sp>
       <p:sp>
         <p:nvSpPr>
-          <p:cNvPr id="6" name="content:line-154:0"/>
+          <p:cNvPr id="6" name="content:line-149:0"/>
           <p:cNvSpPr txBox="1"/>
           <p:nvPr/>
         </p:nvSpPr>
@@ -7796,7 +8089,7 @@
                 </a:solidFill>
                 <a:latin typeface="Arial"/>
               </a:rPr>
-              <a:t>Use the final five minutes to connect environment, package, </a:t>
+              <a:t>Why does this input fail? Open the rejection and the test that </a:t>
             </a:r>
             <a:br/>
             <a:r>
@@ -7806,20 +8099,92 @@
                 </a:solidFill>
                 <a:latin typeface="Arial"/>
               </a:rPr>
-              <a:t>API/UI, containers, tests, comparisons, and peer review.</a:t>
-            </a:r>
-          </a:p>
-        </p:txBody>
-      </p:sp>
-      <p:sp>
-        <p:nvSpPr>
-          <p:cNvPr id="7" name="content:line-155:0"/>
+              <a:t>establishes the rule.</a:t>
+            </a:r>
+          </a:p>
+        </p:txBody>
+      </p:sp>
+      <p:sp>
+        <p:nvSpPr>
+          <p:cNvPr id="7" name="content:line-150:0"/>
           <p:cNvSpPr txBox="1"/>
           <p:nvPr/>
         </p:nvSpPr>
         <p:spPr>
           <a:xfrm>
             <a:off x="594360" y="2581656"/>
+            <a:ext cx="11003279" cy="1132332"/>
+          </a:xfrm>
+          <a:prstGeom prst="rect">
+            <a:avLst/>
+          </a:prstGeom>
+          <a:noFill/>
+        </p:spPr>
+        <p:txBody>
+          <a:bodyPr wrap="none" anchor="t" lIns="88900" rIns="88900" tIns="38100" bIns="38100">
+            <a:noAutofit/>
+          </a:bodyPr>
+          <a:lstStyle/>
+          <a:p>
+            <a:pPr marL="279400" indent="-215900">
+              <a:lnSpc>
+                <a:spcPts val="2772"/>
+              </a:lnSpc>
+              <a:spcBef>
+                <a:spcPts val="0"/>
+              </a:spcBef>
+              <a:spcAft>
+                <a:spcPts val="0"/>
+              </a:spcAft>
+              <a:defRPr sz="2100">
+                <a:solidFill>
+                  <a:srgbClr val="20344A"/>
+                </a:solidFill>
+                <a:latin typeface="Arial"/>
+              </a:defRPr>
+              <a:buChar char="•"/>
+            </a:pPr>
+            <a:r>
+              <a:rPr sz="2100" b="0" i="0">
+                <a:solidFill>
+                  <a:srgbClr val="20344A"/>
+                </a:solidFill>
+                <a:latin typeface="Arial"/>
+              </a:rPr>
+              <a:t>Which code and input produced these outputs? Open the </a:t>
+            </a:r>
+            <a:br/>
+            <a:r>
+              <a:rPr sz="2100" b="0" i="0">
+                <a:solidFill>
+                  <a:srgbClr val="20344A"/>
+                </a:solidFill>
+                <a:latin typeface="Arial"/>
+              </a:rPr>
+              <a:t>commit and capture fingerprints, then explain environment </a:t>
+            </a:r>
+            <a:br/>
+            <a:r>
+              <a:rPr sz="2100" b="0" i="0">
+                <a:solidFill>
+                  <a:srgbClr val="20344A"/>
+                </a:solidFill>
+                <a:latin typeface="Arial"/>
+              </a:rPr>
+              <a:t>differences.</a:t>
+            </a:r>
+          </a:p>
+        </p:txBody>
+      </p:sp>
+      <p:sp>
+        <p:nvSpPr>
+          <p:cNvPr id="8" name="content:line-151:0"/>
+          <p:cNvSpPr txBox="1"/>
+          <p:nvPr/>
+        </p:nvSpPr>
+        <p:spPr>
+          <a:xfrm>
+            <a:off x="594360" y="3777996"/>
             <a:ext cx="11003279" cy="780288"/>
           </a:xfrm>
           <a:prstGeom prst="rect">
@@ -7858,7 +8223,7 @@
                 </a:solidFill>
                 <a:latin typeface="Arial"/>
               </a:rPr>
-              <a:t>Pass requires every mandatory group row and every student's </a:t>
+              <a:t>Which fields compare exactly, and why is a derived value </a:t>
             </a:r>
             <a:br/>
             <a:r>
@@ -7868,86 +8233,14 @@
                 </a:solidFill>
                 <a:latin typeface="Arial"/>
               </a:rPr>
-              <a:t>individual participation requirement to pass.</a:t>
-            </a:r>
-          </a:p>
-        </p:txBody>
-      </p:sp>
-      <p:sp>
-        <p:nvSpPr>
-          <p:cNvPr id="8" name="content:line-156:0"/>
-          <p:cNvSpPr txBox="1"/>
-          <p:nvPr/>
-        </p:nvSpPr>
-        <p:spPr>
-          <a:xfrm>
-            <a:off x="594360" y="3425952"/>
-            <a:ext cx="11003279" cy="1132332"/>
-          </a:xfrm>
-          <a:prstGeom prst="rect">
-            <a:avLst/>
-          </a:prstGeom>
-          <a:noFill/>
-        </p:spPr>
-        <p:txBody>
-          <a:bodyPr wrap="none" anchor="t" lIns="88900" rIns="88900" tIns="38100" bIns="38100">
-            <a:noAutofit/>
-          </a:bodyPr>
-          <a:lstStyle/>
-          <a:p>
-            <a:pPr marL="279400" indent="-215900">
-              <a:lnSpc>
-                <a:spcPts val="2772"/>
-              </a:lnSpc>
-              <a:spcBef>
-                <a:spcPts val="0"/>
-              </a:spcBef>
-              <a:spcAft>
-                <a:spcPts val="0"/>
-              </a:spcAft>
-              <a:defRPr sz="2100">
-                <a:solidFill>
-                  <a:srgbClr val="20344A"/>
-                </a:solidFill>
-                <a:latin typeface="Arial"/>
-              </a:defRPr>
-              <a:buChar char="•"/>
-            </a:pPr>
-            <a:r>
-              <a:rPr sz="2100" b="0" i="0">
-                <a:solidFill>
-                  <a:srgbClr val="20344A"/>
-                </a:solidFill>
-                <a:latin typeface="Arial"/>
-              </a:rPr>
-              <a:t>Instructor records failed rows and reasons at the </a:t>
-            </a:r>
-            <a:br/>
-            <a:r>
-              <a:rPr sz="2100" b="0" i="0">
-                <a:solidFill>
-                  <a:srgbClr val="20344A"/>
-                </a:solidFill>
-                <a:latin typeface="Arial"/>
-              </a:rPr>
-              <a:t>presentation; no averaging or complexity bonuses, and no later </a:t>
-            </a:r>
-            <a:br/>
-            <a:r>
-              <a:rPr sz="2100" b="0" i="0">
-                <a:solidFill>
-                  <a:srgbClr val="20344A"/>
-                </a:solidFill>
-                <a:latin typeface="Arial"/>
-              </a:rPr>
-              <a:t>retry.</a:t>
-            </a:r>
-          </a:p>
-        </p:txBody>
-      </p:sp>
-      <p:sp>
-        <p:nvSpPr>
-          <p:cNvPr id="9" name="content:line-157:0"/>
+              <a:t>allowed tolerance? Open the comparison and its tests.</a:t>
+            </a:r>
+          </a:p>
+        </p:txBody>
+      </p:sp>
+      <p:sp>
+        <p:nvSpPr>
+          <p:cNvPr id="9" name="content:line-152:0"/>
           <p:cNvSpPr txBox="1"/>
           <p:nvPr/>
         </p:nvSpPr>
@@ -7992,45 +8285,7 @@
                 </a:solidFill>
                 <a:latin typeface="Arial"/>
               </a:rPr>
-              <a:t>The </a:t>
-            </a:r>
-            <a:r>
-              <a:rPr sz="2100" b="0" i="0">
-                <a:solidFill>
-                  <a:srgbClr val="007F82"/>
-                </a:solidFill>
-                <a:latin typeface="Arial"/>
-                <a:hlinkClick r:id="rId2"/>
-              </a:rPr>
-              <a:t>final checklist</a:t>
-            </a:r>
-            <a:r>
-              <a:rPr sz="2100" b="0" i="0">
-                <a:solidFill>
-                  <a:srgbClr val="20344A"/>
-                </a:solidFill>
-                <a:latin typeface="Arial"/>
-              </a:rPr>
-              <a:t> and </a:t>
-            </a:r>
-            <a:r>
-              <a:rPr sz="2100" b="0" i="0">
-                <a:solidFill>
-                  <a:srgbClr val="007F82"/>
-                </a:solidFill>
-                <a:latin typeface="Arial"/>
-                <a:hlinkClick r:id="rId3"/>
-              </a:rPr>
-              <a:t>syllabus</a:t>
-            </a:r>
-            <a:r>
-              <a:rPr sz="2100" b="0" i="0">
-                <a:solidFill>
-                  <a:srgbClr val="20344A"/>
-                </a:solidFill>
-                <a:latin typeface="Arial"/>
-              </a:rPr>
-              <a:t> remain the assessment </a:t>
+              <a:t>What did you change or ask a teammate to improve? Open your </a:t>
             </a:r>
             <a:br/>
             <a:r>
@@ -8040,7 +8295,7 @@
                 </a:solidFill>
                 <a:latin typeface="Arial"/>
               </a:rPr>
-              <a:t>reference.</a:t>
+              <a:t>PR or review and explain the result.</a:t>
             </a:r>
           </a:p>
         </p:txBody>
@@ -8154,7 +8409,7 @@
               </a:defRPr>
             </a:pPr>
             <a:r>
-              <a:t>SOURCE 2 / 17</a:t>
+              <a:t>SOURCE 2 / 18</a:t>
             </a:r>
           </a:p>
         </p:txBody>
@@ -8312,6 +8567,908 @@
                 <a:latin typeface="Arial"/>
               </a:rPr>
               <a:t>same tea?</a:t>
+            </a:r>
+          </a:p>
+        </p:txBody>
+      </p:sp>
+    </p:spTree>
+  </p:cSld>
+  <p:clrMapOvr>
+    <a:masterClrMapping/>
+  </p:clrMapOvr>
+</p:sld>
+</file>
+
+<file path=ppt/slides/slide20.xml><?xml version="1.0" encoding="utf-8"?>
+<p:sld xmlns:a="http://schemas.openxmlformats.org/drawingml/2006/main" xmlns:p="http://schemas.openxmlformats.org/presentationml/2006/main" xmlns:r="http://schemas.openxmlformats.org/officeDocument/2006/relationships">
+  <p:cSld>
+    <p:bg>
+      <p:bgPr>
+        <a:solidFill>
+          <a:srgbClr val="FAFCFD"/>
+        </a:solidFill>
+        <a:effectLst/>
+      </p:bgPr>
+    </p:bg>
+    <p:spTree>
+      <p:nvGrpSpPr>
+        <p:cNvPr id="1" name=""/>
+        <p:cNvGrpSpPr/>
+        <p:nvPr/>
+      </p:nvGrpSpPr>
+      <p:grpSpPr/>
+      <p:sp>
+        <p:nvSpPr>
+          <p:cNvPr id="2" name="accent"/>
+          <p:cNvSpPr/>
+          <p:nvPr/>
+        </p:nvSpPr>
+        <p:spPr>
+          <a:xfrm>
+            <a:off x="0" y="0"/>
+            <a:ext cx="12191999" cy="64008"/>
+          </a:xfrm>
+          <a:prstGeom prst="rect">
+            <a:avLst/>
+          </a:prstGeom>
+          <a:solidFill>
+            <a:srgbClr val="007F82"/>
+          </a:solidFill>
+          <a:ln>
+            <a:noFill/>
+          </a:ln>
+        </p:spPr>
+        <p:style>
+          <a:lnRef idx="1">
+            <a:schemeClr val="accent1"/>
+          </a:lnRef>
+          <a:fillRef idx="3">
+            <a:schemeClr val="accent1"/>
+          </a:fillRef>
+          <a:effectRef idx="2">
+            <a:schemeClr val="accent1"/>
+          </a:effectRef>
+          <a:fontRef idx="minor">
+            <a:schemeClr val="lt1"/>
+          </a:fontRef>
+        </p:style>
+        <p:txBody>
+          <a:bodyPr rtlCol="0" anchor="ctr"/>
+          <a:lstStyle/>
+          <a:p>
+            <a:pPr algn="ctr"/>
+          </a:p>
+        </p:txBody>
+      </p:sp>
+      <p:sp>
+        <p:nvSpPr>
+          <p:cNvPr id="3" name="section"/>
+          <p:cNvSpPr txBox="1"/>
+          <p:nvPr/>
+        </p:nvSpPr>
+        <p:spPr>
+          <a:xfrm>
+            <a:off x="594360" y="201168"/>
+            <a:ext cx="11003279" cy="256032"/>
+          </a:xfrm>
+          <a:prstGeom prst="rect">
+            <a:avLst/>
+          </a:prstGeom>
+          <a:noFill/>
+        </p:spPr>
+        <p:txBody>
+          <a:bodyPr wrap="none" anchor="t" lIns="88900" rIns="88900" tIns="38100" bIns="38100">
+            <a:noAutofit/>
+          </a:bodyPr>
+          <a:lstStyle/>
+          <a:p>
+            <a:pPr>
+              <a:lnSpc>
+                <a:spcPts val="1452"/>
+              </a:lnSpc>
+              <a:spcBef>
+                <a:spcPts val="0"/>
+              </a:spcBef>
+              <a:spcAft>
+                <a:spcPts val="0"/>
+              </a:spcAft>
+              <a:defRPr sz="1100">
+                <a:solidFill>
+                  <a:srgbClr val="53677A"/>
+                </a:solidFill>
+                <a:latin typeface="Arial"/>
+              </a:defRPr>
+            </a:pPr>
+            <a:r>
+              <a:t>SOURCE 17 / 18</a:t>
+            </a:r>
+          </a:p>
+        </p:txBody>
+      </p:sp>
+      <p:sp>
+        <p:nvSpPr>
+          <p:cNvPr id="4" name="title:line-156"/>
+          <p:cNvSpPr txBox="1"/>
+          <p:nvPr/>
+        </p:nvSpPr>
+        <p:spPr>
+          <a:xfrm>
+            <a:off x="594360" y="530352"/>
+            <a:ext cx="11003279" cy="1161288"/>
+          </a:xfrm>
+          <a:prstGeom prst="rect">
+            <a:avLst/>
+          </a:prstGeom>
+          <a:noFill/>
+        </p:spPr>
+        <p:txBody>
+          <a:bodyPr wrap="none" anchor="t" lIns="88900" rIns="88900" tIns="38100" bIns="38100">
+            <a:noAutofit/>
+          </a:bodyPr>
+          <a:lstStyle/>
+          <a:p>
+            <a:pPr>
+              <a:lnSpc>
+                <a:spcPts val="4000"/>
+              </a:lnSpc>
+              <a:spcBef>
+                <a:spcPts val="0"/>
+              </a:spcBef>
+              <a:spcAft>
+                <a:spcPts val="0"/>
+              </a:spcAft>
+              <a:defRPr sz="3200">
+                <a:solidFill>
+                  <a:srgbClr val="20344A"/>
+                </a:solidFill>
+                <a:latin typeface="Arial"/>
+              </a:defRPr>
+            </a:pPr>
+            <a:r>
+              <a:rPr sz="3200" b="0" i="0">
+                <a:solidFill>
+                  <a:srgbClr val="20344A"/>
+                </a:solidFill>
+                <a:latin typeface="Arial"/>
+              </a:rPr>
+              <a:t>Shared break and remaining groups</a:t>
+            </a:r>
+          </a:p>
+        </p:txBody>
+      </p:sp>
+      <p:sp>
+        <p:nvSpPr>
+          <p:cNvPr id="5" name="footer"/>
+          <p:cNvSpPr txBox="1"/>
+          <p:nvPr/>
+        </p:nvSpPr>
+        <p:spPr>
+          <a:xfrm>
+            <a:off x="594360" y="6510528"/>
+            <a:ext cx="11003279" cy="219456"/>
+          </a:xfrm>
+          <a:prstGeom prst="rect">
+            <a:avLst/>
+          </a:prstGeom>
+          <a:noFill/>
+        </p:spPr>
+        <p:txBody>
+          <a:bodyPr wrap="none" anchor="t" lIns="88900" rIns="88900" tIns="38100" bIns="38100">
+            <a:noAutofit/>
+          </a:bodyPr>
+          <a:lstStyle/>
+          <a:p>
+            <a:pPr>
+              <a:lnSpc>
+                <a:spcPts val="1320"/>
+              </a:lnSpc>
+              <a:spcBef>
+                <a:spcPts val="0"/>
+              </a:spcBef>
+              <a:spcAft>
+                <a:spcPts val="0"/>
+              </a:spcAft>
+              <a:defRPr sz="1000">
+                <a:solidFill>
+                  <a:srgbClr val="53677A"/>
+                </a:solidFill>
+                <a:latin typeface="Arial"/>
+              </a:defRPr>
+            </a:pPr>
+            <a:r>
+              <a:t>session-5.md   ·   20</a:t>
+            </a:r>
+          </a:p>
+        </p:txBody>
+      </p:sp>
+      <p:sp>
+        <p:nvSpPr>
+          <p:cNvPr id="6" name="content:line-158:0"/>
+          <p:cNvSpPr txBox="1"/>
+          <p:nvPr/>
+        </p:nvSpPr>
+        <p:spPr>
+          <a:xfrm>
+            <a:off x="594360" y="1737360"/>
+            <a:ext cx="11003279" cy="780288"/>
+          </a:xfrm>
+          <a:prstGeom prst="rect">
+            <a:avLst/>
+          </a:prstGeom>
+          <a:noFill/>
+        </p:spPr>
+        <p:txBody>
+          <a:bodyPr wrap="none" anchor="t" lIns="88900" rIns="88900" tIns="38100" bIns="38100">
+            <a:noAutofit/>
+          </a:bodyPr>
+          <a:lstStyle/>
+          <a:p>
+            <a:pPr marL="279400" indent="-215900">
+              <a:lnSpc>
+                <a:spcPts val="2772"/>
+              </a:lnSpc>
+              <a:spcBef>
+                <a:spcPts val="0"/>
+              </a:spcBef>
+              <a:spcAft>
+                <a:spcPts val="0"/>
+              </a:spcAft>
+              <a:defRPr sz="2100">
+                <a:solidFill>
+                  <a:srgbClr val="20344A"/>
+                </a:solidFill>
+                <a:latin typeface="Arial"/>
+              </a:defRPr>
+              <a:buChar char="•"/>
+            </a:pPr>
+            <a:r>
+              <a:rPr sz="2100" b="0" i="0">
+                <a:solidFill>
+                  <a:srgbClr val="20344A"/>
+                </a:solidFill>
+                <a:latin typeface="Arial"/>
+              </a:rPr>
+              <a:t>Take the reserved 15-minute break at the published slot </a:t>
+            </a:r>
+            <a:br/>
+            <a:r>
+              <a:rPr sz="2100" b="0" i="0">
+                <a:solidFill>
+                  <a:srgbClr val="20344A"/>
+                </a:solidFill>
+                <a:latin typeface="Arial"/>
+              </a:rPr>
+              <a:t>boundary.</a:t>
+            </a:r>
+          </a:p>
+        </p:txBody>
+      </p:sp>
+      <p:sp>
+        <p:nvSpPr>
+          <p:cNvPr id="7" name="content:line-159:0"/>
+          <p:cNvSpPr txBox="1"/>
+          <p:nvPr/>
+        </p:nvSpPr>
+        <p:spPr>
+          <a:xfrm>
+            <a:off x="594360" y="2581656"/>
+            <a:ext cx="11003279" cy="780288"/>
+          </a:xfrm>
+          <a:prstGeom prst="rect">
+            <a:avLst/>
+          </a:prstGeom>
+          <a:noFill/>
+        </p:spPr>
+        <p:txBody>
+          <a:bodyPr wrap="none" anchor="t" lIns="88900" rIns="88900" tIns="38100" bIns="38100">
+            <a:noAutofit/>
+          </a:bodyPr>
+          <a:lstStyle/>
+          <a:p>
+            <a:pPr marL="279400" indent="-215900">
+              <a:lnSpc>
+                <a:spcPts val="2772"/>
+              </a:lnSpc>
+              <a:spcBef>
+                <a:spcPts val="0"/>
+              </a:spcBef>
+              <a:spcAft>
+                <a:spcPts val="0"/>
+              </a:spcAft>
+              <a:defRPr sz="2100">
+                <a:solidFill>
+                  <a:srgbClr val="20344A"/>
+                </a:solidFill>
+                <a:latin typeface="Arial"/>
+              </a:defRPr>
+              <a:buChar char="•"/>
+            </a:pPr>
+            <a:r>
+              <a:rPr sz="2100" b="0" i="0">
+                <a:solidFill>
+                  <a:srgbClr val="20344A"/>
+                </a:solidFill>
+                <a:latin typeface="Arial"/>
+              </a:rPr>
+              <a:t>Resume with the next group's live demo, evidence inspection, </a:t>
+            </a:r>
+            <a:br/>
+            <a:r>
+              <a:rPr sz="2100" b="0" i="0">
+                <a:solidFill>
+                  <a:srgbClr val="20344A"/>
+                </a:solidFill>
+                <a:latin typeface="Arial"/>
+              </a:rPr>
+              <a:t>and questions using the same S allocation.</a:t>
+            </a:r>
+          </a:p>
+        </p:txBody>
+      </p:sp>
+      <p:sp>
+        <p:nvSpPr>
+          <p:cNvPr id="8" name="content:line-160:0"/>
+          <p:cNvSpPr txBox="1"/>
+          <p:nvPr/>
+        </p:nvSpPr>
+        <p:spPr>
+          <a:xfrm>
+            <a:off x="594360" y="3425952"/>
+            <a:ext cx="11003279" cy="780288"/>
+          </a:xfrm>
+          <a:prstGeom prst="rect">
+            <a:avLst/>
+          </a:prstGeom>
+          <a:noFill/>
+        </p:spPr>
+        <p:txBody>
+          <a:bodyPr wrap="none" anchor="t" lIns="88900" rIns="88900" tIns="38100" bIns="38100">
+            <a:noAutofit/>
+          </a:bodyPr>
+          <a:lstStyle/>
+          <a:p>
+            <a:pPr marL="279400" indent="-215900">
+              <a:lnSpc>
+                <a:spcPts val="2772"/>
+              </a:lnSpc>
+              <a:spcBef>
+                <a:spcPts val="0"/>
+              </a:spcBef>
+              <a:spcAft>
+                <a:spcPts val="0"/>
+              </a:spcAft>
+              <a:defRPr sz="2100">
+                <a:solidFill>
+                  <a:srgbClr val="20344A"/>
+                </a:solidFill>
+                <a:latin typeface="Arial"/>
+              </a:defRPr>
+              <a:buChar char="•"/>
+            </a:pPr>
+            <a:r>
+              <a:rPr sz="2100" b="0" i="0">
+                <a:solidFill>
+                  <a:srgbClr val="20344A"/>
+                </a:solidFill>
+                <a:latin typeface="Arial"/>
+              </a:rPr>
+              <a:t>Every group uses the same mandatory checklist; keep the </a:t>
+            </a:r>
+            <a:br/>
+            <a:r>
+              <a:rPr sz="2100" b="0" i="0">
+                <a:solidFill>
+                  <a:srgbClr val="20344A"/>
+                </a:solidFill>
+                <a:latin typeface="Arial"/>
+              </a:rPr>
+              <a:t>reserved five-minute closing within the three hours.</a:t>
+            </a:r>
+          </a:p>
+        </p:txBody>
+      </p:sp>
+    </p:spTree>
+  </p:cSld>
+  <p:clrMapOvr>
+    <a:masterClrMapping/>
+  </p:clrMapOvr>
+</p:sld>
+</file>
+
+<file path=ppt/slides/slide21.xml><?xml version="1.0" encoding="utf-8"?>
+<p:sld xmlns:a="http://schemas.openxmlformats.org/drawingml/2006/main" xmlns:p="http://schemas.openxmlformats.org/presentationml/2006/main" xmlns:r="http://schemas.openxmlformats.org/officeDocument/2006/relationships">
+  <p:cSld>
+    <p:bg>
+      <p:bgPr>
+        <a:solidFill>
+          <a:srgbClr val="FAFCFD"/>
+        </a:solidFill>
+        <a:effectLst/>
+      </p:bgPr>
+    </p:bg>
+    <p:spTree>
+      <p:nvGrpSpPr>
+        <p:cNvPr id="1" name=""/>
+        <p:cNvGrpSpPr/>
+        <p:nvPr/>
+      </p:nvGrpSpPr>
+      <p:grpSpPr/>
+      <p:sp>
+        <p:nvSpPr>
+          <p:cNvPr id="2" name="accent"/>
+          <p:cNvSpPr/>
+          <p:nvPr/>
+        </p:nvSpPr>
+        <p:spPr>
+          <a:xfrm>
+            <a:off x="0" y="0"/>
+            <a:ext cx="12191999" cy="64008"/>
+          </a:xfrm>
+          <a:prstGeom prst="rect">
+            <a:avLst/>
+          </a:prstGeom>
+          <a:solidFill>
+            <a:srgbClr val="007F82"/>
+          </a:solidFill>
+          <a:ln>
+            <a:noFill/>
+          </a:ln>
+        </p:spPr>
+        <p:style>
+          <a:lnRef idx="1">
+            <a:schemeClr val="accent1"/>
+          </a:lnRef>
+          <a:fillRef idx="3">
+            <a:schemeClr val="accent1"/>
+          </a:fillRef>
+          <a:effectRef idx="2">
+            <a:schemeClr val="accent1"/>
+          </a:effectRef>
+          <a:fontRef idx="minor">
+            <a:schemeClr val="lt1"/>
+          </a:fontRef>
+        </p:style>
+        <p:txBody>
+          <a:bodyPr rtlCol="0" anchor="ctr"/>
+          <a:lstStyle/>
+          <a:p>
+            <a:pPr algn="ctr"/>
+          </a:p>
+        </p:txBody>
+      </p:sp>
+      <p:sp>
+        <p:nvSpPr>
+          <p:cNvPr id="3" name="section"/>
+          <p:cNvSpPr txBox="1"/>
+          <p:nvPr/>
+        </p:nvSpPr>
+        <p:spPr>
+          <a:xfrm>
+            <a:off x="594360" y="201168"/>
+            <a:ext cx="11003279" cy="256032"/>
+          </a:xfrm>
+          <a:prstGeom prst="rect">
+            <a:avLst/>
+          </a:prstGeom>
+          <a:noFill/>
+        </p:spPr>
+        <p:txBody>
+          <a:bodyPr wrap="none" anchor="t" lIns="88900" rIns="88900" tIns="38100" bIns="38100">
+            <a:noAutofit/>
+          </a:bodyPr>
+          <a:lstStyle/>
+          <a:p>
+            <a:pPr>
+              <a:lnSpc>
+                <a:spcPts val="1452"/>
+              </a:lnSpc>
+              <a:spcBef>
+                <a:spcPts val="0"/>
+              </a:spcBef>
+              <a:spcAft>
+                <a:spcPts val="0"/>
+              </a:spcAft>
+              <a:defRPr sz="1100">
+                <a:solidFill>
+                  <a:srgbClr val="53677A"/>
+                </a:solidFill>
+                <a:latin typeface="Arial"/>
+              </a:defRPr>
+            </a:pPr>
+            <a:r>
+              <a:t>SOURCE 18 / 18</a:t>
+            </a:r>
+          </a:p>
+        </p:txBody>
+      </p:sp>
+      <p:sp>
+        <p:nvSpPr>
+          <p:cNvPr id="4" name="title:line-164"/>
+          <p:cNvSpPr txBox="1"/>
+          <p:nvPr/>
+        </p:nvSpPr>
+        <p:spPr>
+          <a:xfrm>
+            <a:off x="594360" y="530352"/>
+            <a:ext cx="11003279" cy="1161288"/>
+          </a:xfrm>
+          <a:prstGeom prst="rect">
+            <a:avLst/>
+          </a:prstGeom>
+          <a:noFill/>
+        </p:spPr>
+        <p:txBody>
+          <a:bodyPr wrap="none" anchor="t" lIns="88900" rIns="88900" tIns="38100" bIns="38100">
+            <a:noAutofit/>
+          </a:bodyPr>
+          <a:lstStyle/>
+          <a:p>
+            <a:pPr>
+              <a:lnSpc>
+                <a:spcPts val="4000"/>
+              </a:lnSpc>
+              <a:spcBef>
+                <a:spcPts val="0"/>
+              </a:spcBef>
+              <a:spcAft>
+                <a:spcPts val="0"/>
+              </a:spcAft>
+              <a:defRPr sz="3200">
+                <a:solidFill>
+                  <a:srgbClr val="20344A"/>
+                </a:solidFill>
+                <a:latin typeface="Arial"/>
+              </a:defRPr>
+            </a:pPr>
+            <a:r>
+              <a:rPr sz="3200" b="0" i="0">
+                <a:solidFill>
+                  <a:srgbClr val="20344A"/>
+                </a:solidFill>
+                <a:latin typeface="Arial"/>
+              </a:rPr>
+              <a:t>Closing: connect the engineering evidence</a:t>
+            </a:r>
+          </a:p>
+        </p:txBody>
+      </p:sp>
+      <p:sp>
+        <p:nvSpPr>
+          <p:cNvPr id="5" name="footer"/>
+          <p:cNvSpPr txBox="1"/>
+          <p:nvPr/>
+        </p:nvSpPr>
+        <p:spPr>
+          <a:xfrm>
+            <a:off x="594360" y="6510528"/>
+            <a:ext cx="11003279" cy="219456"/>
+          </a:xfrm>
+          <a:prstGeom prst="rect">
+            <a:avLst/>
+          </a:prstGeom>
+          <a:noFill/>
+        </p:spPr>
+        <p:txBody>
+          <a:bodyPr wrap="none" anchor="t" lIns="88900" rIns="88900" tIns="38100" bIns="38100">
+            <a:noAutofit/>
+          </a:bodyPr>
+          <a:lstStyle/>
+          <a:p>
+            <a:pPr>
+              <a:lnSpc>
+                <a:spcPts val="1320"/>
+              </a:lnSpc>
+              <a:spcBef>
+                <a:spcPts val="0"/>
+              </a:spcBef>
+              <a:spcAft>
+                <a:spcPts val="0"/>
+              </a:spcAft>
+              <a:defRPr sz="1000">
+                <a:solidFill>
+                  <a:srgbClr val="53677A"/>
+                </a:solidFill>
+                <a:latin typeface="Arial"/>
+              </a:defRPr>
+            </a:pPr>
+            <a:r>
+              <a:t>session-5.md   ·   21</a:t>
+            </a:r>
+          </a:p>
+        </p:txBody>
+      </p:sp>
+      <p:sp>
+        <p:nvSpPr>
+          <p:cNvPr id="6" name="content:line-166:0"/>
+          <p:cNvSpPr txBox="1"/>
+          <p:nvPr/>
+        </p:nvSpPr>
+        <p:spPr>
+          <a:xfrm>
+            <a:off x="594360" y="1737360"/>
+            <a:ext cx="11003279" cy="780288"/>
+          </a:xfrm>
+          <a:prstGeom prst="rect">
+            <a:avLst/>
+          </a:prstGeom>
+          <a:noFill/>
+        </p:spPr>
+        <p:txBody>
+          <a:bodyPr wrap="none" anchor="t" lIns="88900" rIns="88900" tIns="38100" bIns="38100">
+            <a:noAutofit/>
+          </a:bodyPr>
+          <a:lstStyle/>
+          <a:p>
+            <a:pPr marL="279400" indent="-215900">
+              <a:lnSpc>
+                <a:spcPts val="2772"/>
+              </a:lnSpc>
+              <a:spcBef>
+                <a:spcPts val="0"/>
+              </a:spcBef>
+              <a:spcAft>
+                <a:spcPts val="0"/>
+              </a:spcAft>
+              <a:defRPr sz="2100">
+                <a:solidFill>
+                  <a:srgbClr val="20344A"/>
+                </a:solidFill>
+                <a:latin typeface="Arial"/>
+              </a:defRPr>
+              <a:buChar char="•"/>
+            </a:pPr>
+            <a:r>
+              <a:rPr sz="2100" b="0" i="0">
+                <a:solidFill>
+                  <a:srgbClr val="20344A"/>
+                </a:solidFill>
+                <a:latin typeface="Arial"/>
+              </a:rPr>
+              <a:t>Use the final five minutes to connect environment, package, </a:t>
+            </a:r>
+            <a:br/>
+            <a:r>
+              <a:rPr sz="2100" b="0" i="0">
+                <a:solidFill>
+                  <a:srgbClr val="20344A"/>
+                </a:solidFill>
+                <a:latin typeface="Arial"/>
+              </a:rPr>
+              <a:t>API/UI, containers, tests, comparisons, and peer review.</a:t>
+            </a:r>
+          </a:p>
+        </p:txBody>
+      </p:sp>
+      <p:sp>
+        <p:nvSpPr>
+          <p:cNvPr id="7" name="content:line-167:0"/>
+          <p:cNvSpPr txBox="1"/>
+          <p:nvPr/>
+        </p:nvSpPr>
+        <p:spPr>
+          <a:xfrm>
+            <a:off x="594360" y="2581656"/>
+            <a:ext cx="11003279" cy="780288"/>
+          </a:xfrm>
+          <a:prstGeom prst="rect">
+            <a:avLst/>
+          </a:prstGeom>
+          <a:noFill/>
+        </p:spPr>
+        <p:txBody>
+          <a:bodyPr wrap="none" anchor="t" lIns="88900" rIns="88900" tIns="38100" bIns="38100">
+            <a:noAutofit/>
+          </a:bodyPr>
+          <a:lstStyle/>
+          <a:p>
+            <a:pPr marL="279400" indent="-215900">
+              <a:lnSpc>
+                <a:spcPts val="2772"/>
+              </a:lnSpc>
+              <a:spcBef>
+                <a:spcPts val="0"/>
+              </a:spcBef>
+              <a:spcAft>
+                <a:spcPts val="0"/>
+              </a:spcAft>
+              <a:defRPr sz="2100">
+                <a:solidFill>
+                  <a:srgbClr val="20344A"/>
+                </a:solidFill>
+                <a:latin typeface="Arial"/>
+              </a:defRPr>
+              <a:buChar char="•"/>
+            </a:pPr>
+            <a:r>
+              <a:rPr sz="2100" b="0" i="0">
+                <a:solidFill>
+                  <a:srgbClr val="20344A"/>
+                </a:solidFill>
+                <a:latin typeface="Arial"/>
+              </a:rPr>
+              <a:t>Pass requires every mandatory group row and every student's </a:t>
+            </a:r>
+            <a:br/>
+            <a:r>
+              <a:rPr sz="2100" b="0" i="0">
+                <a:solidFill>
+                  <a:srgbClr val="20344A"/>
+                </a:solidFill>
+                <a:latin typeface="Arial"/>
+              </a:rPr>
+              <a:t>individual participation requirement to pass.</a:t>
+            </a:r>
+          </a:p>
+        </p:txBody>
+      </p:sp>
+      <p:sp>
+        <p:nvSpPr>
+          <p:cNvPr id="8" name="content:line-168:0"/>
+          <p:cNvSpPr txBox="1"/>
+          <p:nvPr/>
+        </p:nvSpPr>
+        <p:spPr>
+          <a:xfrm>
+            <a:off x="594360" y="3425952"/>
+            <a:ext cx="11003279" cy="1132332"/>
+          </a:xfrm>
+          <a:prstGeom prst="rect">
+            <a:avLst/>
+          </a:prstGeom>
+          <a:noFill/>
+        </p:spPr>
+        <p:txBody>
+          <a:bodyPr wrap="none" anchor="t" lIns="88900" rIns="88900" tIns="38100" bIns="38100">
+            <a:noAutofit/>
+          </a:bodyPr>
+          <a:lstStyle/>
+          <a:p>
+            <a:pPr marL="279400" indent="-215900">
+              <a:lnSpc>
+                <a:spcPts val="2772"/>
+              </a:lnSpc>
+              <a:spcBef>
+                <a:spcPts val="0"/>
+              </a:spcBef>
+              <a:spcAft>
+                <a:spcPts val="0"/>
+              </a:spcAft>
+              <a:defRPr sz="2100">
+                <a:solidFill>
+                  <a:srgbClr val="20344A"/>
+                </a:solidFill>
+                <a:latin typeface="Arial"/>
+              </a:defRPr>
+              <a:buChar char="•"/>
+            </a:pPr>
+            <a:r>
+              <a:rPr sz="2100" b="0" i="0">
+                <a:solidFill>
+                  <a:srgbClr val="20344A"/>
+                </a:solidFill>
+                <a:latin typeface="Arial"/>
+              </a:rPr>
+              <a:t>Instructor records failed rows and reasons at the </a:t>
+            </a:r>
+            <a:br/>
+            <a:r>
+              <a:rPr sz="2100" b="0" i="0">
+                <a:solidFill>
+                  <a:srgbClr val="20344A"/>
+                </a:solidFill>
+                <a:latin typeface="Arial"/>
+              </a:rPr>
+              <a:t>presentation; no averaging or complexity bonuses, and no later </a:t>
+            </a:r>
+            <a:br/>
+            <a:r>
+              <a:rPr sz="2100" b="0" i="0">
+                <a:solidFill>
+                  <a:srgbClr val="20344A"/>
+                </a:solidFill>
+                <a:latin typeface="Arial"/>
+              </a:rPr>
+              <a:t>retry.</a:t>
+            </a:r>
+          </a:p>
+        </p:txBody>
+      </p:sp>
+      <p:sp>
+        <p:nvSpPr>
+          <p:cNvPr id="9" name="content:line-169:0"/>
+          <p:cNvSpPr txBox="1"/>
+          <p:nvPr/>
+        </p:nvSpPr>
+        <p:spPr>
+          <a:xfrm>
+            <a:off x="594360" y="4622292"/>
+            <a:ext cx="11003279" cy="780288"/>
+          </a:xfrm>
+          <a:prstGeom prst="rect">
+            <a:avLst/>
+          </a:prstGeom>
+          <a:noFill/>
+        </p:spPr>
+        <p:txBody>
+          <a:bodyPr wrap="none" anchor="t" lIns="88900" rIns="88900" tIns="38100" bIns="38100">
+            <a:noAutofit/>
+          </a:bodyPr>
+          <a:lstStyle/>
+          <a:p>
+            <a:pPr marL="279400" indent="-215900">
+              <a:lnSpc>
+                <a:spcPts val="2772"/>
+              </a:lnSpc>
+              <a:spcBef>
+                <a:spcPts val="0"/>
+              </a:spcBef>
+              <a:spcAft>
+                <a:spcPts val="0"/>
+              </a:spcAft>
+              <a:defRPr sz="2100">
+                <a:solidFill>
+                  <a:srgbClr val="20344A"/>
+                </a:solidFill>
+                <a:latin typeface="Arial"/>
+              </a:defRPr>
+              <a:buChar char="•"/>
+            </a:pPr>
+            <a:r>
+              <a:rPr sz="2100" b="0" i="0">
+                <a:solidFill>
+                  <a:srgbClr val="20344A"/>
+                </a:solidFill>
+                <a:latin typeface="Arial"/>
+              </a:rPr>
+              <a:t>The </a:t>
+            </a:r>
+            <a:r>
+              <a:rPr sz="2100" b="0" i="0">
+                <a:solidFill>
+                  <a:srgbClr val="007F82"/>
+                </a:solidFill>
+                <a:latin typeface="Arial"/>
+                <a:hlinkClick r:id="rId2"/>
+              </a:rPr>
+              <a:t>final checklist</a:t>
+            </a:r>
+            <a:r>
+              <a:rPr sz="2100" b="0" i="0">
+                <a:solidFill>
+                  <a:srgbClr val="20344A"/>
+                </a:solidFill>
+                <a:latin typeface="Arial"/>
+              </a:rPr>
+              <a:t> and </a:t>
+            </a:r>
+            <a:r>
+              <a:rPr sz="2100" b="0" i="0">
+                <a:solidFill>
+                  <a:srgbClr val="007F82"/>
+                </a:solidFill>
+                <a:latin typeface="Arial"/>
+                <a:hlinkClick r:id="rId3"/>
+              </a:rPr>
+              <a:t>syllabus</a:t>
+            </a:r>
+            <a:r>
+              <a:rPr sz="2100" b="0" i="0">
+                <a:solidFill>
+                  <a:srgbClr val="20344A"/>
+                </a:solidFill>
+                <a:latin typeface="Arial"/>
+              </a:rPr>
+              <a:t> remain the assessment </a:t>
+            </a:r>
+            <a:br/>
+            <a:r>
+              <a:rPr sz="2100" b="0" i="0">
+                <a:solidFill>
+                  <a:srgbClr val="20344A"/>
+                </a:solidFill>
+                <a:latin typeface="Arial"/>
+              </a:rPr>
+              <a:t>reference.</a:t>
             </a:r>
           </a:p>
         </p:txBody>
@@ -8425,7 +9582,7 @@
               </a:defRPr>
             </a:pPr>
             <a:r>
-              <a:t>SOURCE 3 / 17</a:t>
+              <a:t>SOURCE 3 / 18</a:t>
             </a:r>
           </a:p>
         </p:txBody>
@@ -8476,7 +9633,17 @@
                 </a:solidFill>
                 <a:latin typeface="Arial"/>
               </a:rPr>
-              <a:t>Our 180-minute showcase</a:t>
+              <a:t>The device example: seven stages, pain to </a:t>
+            </a:r>
+            <a:br/>
+            <a:r>
+              <a:rPr sz="3200" b="0" i="0">
+                <a:solidFill>
+                  <a:srgbClr val="20344A"/>
+                </a:solidFill>
+                <a:latin typeface="Arial"/>
+              </a:rPr>
+              <a:t>fix</a:t>
             </a:r>
           </a:p>
         </p:txBody>
@@ -8535,7 +9702,7 @@
         <p:spPr>
           <a:xfrm>
             <a:off x="594360" y="1737360"/>
-            <a:ext cx="11003279" cy="428244"/>
+            <a:ext cx="11003279" cy="780288"/>
           </a:xfrm>
           <a:prstGeom prst="rect">
             <a:avLst/>
@@ -8573,7 +9740,80 @@
                 </a:solidFill>
                 <a:latin typeface="Arial"/>
               </a:rPr>
-              <a:t>Opening brief: 10 minutes. Group slots: 150 minutes in total.</a:t>
+              <a:t>Stage 1 (Session 1): notebook copied as </a:t>
+            </a:r>
+            <a:r>
+              <a:rPr sz="2100" b="0" i="0">
+                <a:solidFill>
+                  <a:srgbClr val="20344A"/>
+                </a:solidFill>
+                <a:latin typeface="Courier New"/>
+              </a:rPr>
+              <a:t>v1</a:t>
+            </a:r>
+            <a:r>
+              <a:rPr sz="2100" b="0" i="0">
+                <a:solidFill>
+                  <a:srgbClr val="20344A"/>
+                </a:solidFill>
+                <a:latin typeface="Arial"/>
+              </a:rPr>
+              <a:t>/</a:t>
+            </a:r>
+            <a:r>
+              <a:rPr sz="2100" b="0" i="0">
+                <a:solidFill>
+                  <a:srgbClr val="20344A"/>
+                </a:solidFill>
+                <a:latin typeface="Courier New"/>
+              </a:rPr>
+              <a:t>v2</a:t>
+            </a:r>
+            <a:r>
+              <a:rPr sz="2100" b="0" i="0">
+                <a:solidFill>
+                  <a:srgbClr val="20344A"/>
+                </a:solidFill>
+                <a:latin typeface="Arial"/>
+              </a:rPr>
+              <a:t>/</a:t>
+            </a:r>
+            <a:r>
+              <a:rPr sz="2100" b="0" i="0">
+                <a:solidFill>
+                  <a:srgbClr val="20344A"/>
+                </a:solidFill>
+                <a:latin typeface="Courier New"/>
+              </a:rPr>
+              <a:t>v3</a:t>
+            </a:r>
+            <a:r>
+              <a:rPr sz="2100" b="0" i="0">
+                <a:solidFill>
+                  <a:srgbClr val="20344A"/>
+                </a:solidFill>
+                <a:latin typeface="Arial"/>
+              </a:rPr>
+              <a:t>; which copy </a:t>
+            </a:r>
+            <a:br/>
+            <a:r>
+              <a:rPr sz="2100" b="0" i="0">
+                <a:solidFill>
+                  <a:srgbClr val="20344A"/>
+                </a:solidFill>
+                <a:latin typeface="Arial"/>
+              </a:rPr>
+              <a:t>made the report? </a:t>
+            </a:r>
+            <a:r>
+              <a:rPr sz="2100" b="1" i="0">
+                <a:solidFill>
+                  <a:srgbClr val="20344A"/>
+                </a:solidFill>
+                <a:latin typeface="Arial"/>
+              </a:rPr>
+              <a:t>Fix: Git.</a:t>
             </a:r>
           </a:p>
         </p:txBody>
@@ -8586,7 +9826,88 @@
         </p:nvSpPr>
         <p:spPr>
           <a:xfrm>
-            <a:off x="594360" y="2229612"/>
+            <a:off x="594360" y="2581656"/>
+            <a:ext cx="11003279" cy="1132332"/>
+          </a:xfrm>
+          <a:prstGeom prst="rect">
+            <a:avLst/>
+          </a:prstGeom>
+          <a:noFill/>
+        </p:spPr>
+        <p:txBody>
+          <a:bodyPr wrap="none" anchor="t" lIns="88900" rIns="88900" tIns="38100" bIns="38100">
+            <a:noAutofit/>
+          </a:bodyPr>
+          <a:lstStyle/>
+          <a:p>
+            <a:pPr marL="279400" indent="-215900">
+              <a:lnSpc>
+                <a:spcPts val="2772"/>
+              </a:lnSpc>
+              <a:spcBef>
+                <a:spcPts val="0"/>
+              </a:spcBef>
+              <a:spcAft>
+                <a:spcPts val="0"/>
+              </a:spcAft>
+              <a:defRPr sz="2100">
+                <a:solidFill>
+                  <a:srgbClr val="20344A"/>
+                </a:solidFill>
+                <a:latin typeface="Arial"/>
+              </a:defRPr>
+              <a:buChar char="•"/>
+            </a:pPr>
+            <a:r>
+              <a:rPr sz="2100" b="0" i="0">
+                <a:solidFill>
+                  <a:srgbClr val="20344A"/>
+                </a:solidFill>
+                <a:latin typeface="Arial"/>
+              </a:rPr>
+              <a:t>Stage 2 (Session 1): helper files; works with pandas 1.5, </a:t>
+            </a:r>
+            <a:br/>
+            <a:r>
+              <a:rPr sz="2100" b="0" i="0">
+                <a:solidFill>
+                  <a:srgbClr val="20344A"/>
+                </a:solidFill>
+                <a:latin typeface="Arial"/>
+              </a:rPr>
+              <a:t>crashes with pandas 2.x. </a:t>
+            </a:r>
+            <a:r>
+              <a:rPr sz="2100" b="1" i="0">
+                <a:solidFill>
+                  <a:srgbClr val="20344A"/>
+                </a:solidFill>
+                <a:latin typeface="Arial"/>
+              </a:rPr>
+              <a:t>Fix: isolated environment and </a:t>
+            </a:r>
+            <a:br/>
+            <a:r>
+              <a:rPr sz="2100" b="1" i="0">
+                <a:solidFill>
+                  <a:srgbClr val="20344A"/>
+                </a:solidFill>
+                <a:latin typeface="Arial"/>
+              </a:rPr>
+              <a:t>declared dependencies.</a:t>
+            </a:r>
+          </a:p>
+        </p:txBody>
+      </p:sp>
+      <p:sp>
+        <p:nvSpPr>
+          <p:cNvPr id="8" name="content:line-20:0"/>
+          <p:cNvSpPr txBox="1"/>
+          <p:nvPr/>
+        </p:nvSpPr>
+        <p:spPr>
+          <a:xfrm>
+            <a:off x="594360" y="3777996"/>
             <a:ext cx="11003279" cy="780288"/>
           </a:xfrm>
           <a:prstGeom prst="rect">
@@ -8625,7 +9946,25 @@
                 </a:solidFill>
                 <a:latin typeface="Arial"/>
               </a:rPr>
-              <a:t>Shared break: 15 minutes between group slots. Closing: 5 </a:t>
+              <a:t>Stage 3 (Session 2): </a:t>
+            </a:r>
+            <a:r>
+              <a:rPr sz="2100" b="0" i="0">
+                <a:solidFill>
+                  <a:srgbClr val="20344A"/>
+                </a:solidFill>
+                <a:latin typeface="Courier New"/>
+              </a:rPr>
+              <a:t>requirements.txt</a:t>
+            </a:r>
+            <a:r>
+              <a:rPr sz="2100" b="0" i="0">
+                <a:solidFill>
+                  <a:srgbClr val="20344A"/>
+                </a:solidFill>
+                <a:latin typeface="Arial"/>
+              </a:rPr>
+              <a:t>; rerunning a cell moves </a:t>
             </a:r>
             <a:br/>
             <a:r>
@@ -8635,20 +9974,29 @@
                 </a:solidFill>
                 <a:latin typeface="Arial"/>
               </a:rPr>
-              <a:t>minutes.</a:t>
-            </a:r>
-          </a:p>
-        </p:txBody>
-      </p:sp>
-      <p:sp>
-        <p:nvSpPr>
-          <p:cNvPr id="8" name="content:line-20:0"/>
-          <p:cNvSpPr txBox="1"/>
-          <p:nvPr/>
-        </p:nvSpPr>
-        <p:spPr>
-          <a:xfrm>
-            <a:off x="594360" y="3073908"/>
+              <a:t>the date. </a:t>
+            </a:r>
+            <a:r>
+              <a:rPr sz="2100" b="1" i="0">
+                <a:solidFill>
+                  <a:srgbClr val="20344A"/>
+                </a:solidFill>
+                <a:latin typeface="Arial"/>
+              </a:rPr>
+              <a:t>Fix: functions with inputs and outputs.</a:t>
+            </a:r>
+          </a:p>
+        </p:txBody>
+      </p:sp>
+      <p:sp>
+        <p:nvSpPr>
+          <p:cNvPr id="9" name="content:line-21:0"/>
+          <p:cNvSpPr txBox="1"/>
+          <p:nvPr/>
+        </p:nvSpPr>
+        <p:spPr>
+          <a:xfrm>
+            <a:off x="594360" y="4622292"/>
             <a:ext cx="11003279" cy="780288"/>
           </a:xfrm>
           <a:prstGeom prst="rect">
@@ -8687,7 +10035,7 @@
                 </a:solidFill>
                 <a:latin typeface="Arial"/>
               </a:rPr>
-              <a:t>Let G be the actual number of groups; each slot is S = 150 / G </a:t>
+              <a:t>Stage 4 (Session 2): package; fails from another folder, and a </a:t>
             </a:r>
             <a:br/>
             <a:r>
@@ -8697,21 +10045,30 @@
                 </a:solidFill>
                 <a:latin typeface="Arial"/>
               </a:rPr>
-              <a:t>minutes.</a:t>
-            </a:r>
-          </a:p>
-        </p:txBody>
-      </p:sp>
-      <p:sp>
-        <p:nvSpPr>
-          <p:cNvPr id="9" name="content:line-21:0"/>
-          <p:cNvSpPr txBox="1"/>
-          <p:nvPr/>
-        </p:nvSpPr>
-        <p:spPr>
-          <a:xfrm>
-            <a:off x="594360" y="3918204"/>
-            <a:ext cx="11003279" cy="428244"/>
+              <a:t>cleanup quietly moves the date. </a:t>
+            </a:r>
+            <a:r>
+              <a:rPr sz="2100" b="1" i="0">
+                <a:solidFill>
+                  <a:srgbClr val="20344A"/>
+                </a:solidFill>
+                <a:latin typeface="Arial"/>
+              </a:rPr>
+              <a:t>Fix: tests.</a:t>
+            </a:r>
+          </a:p>
+        </p:txBody>
+      </p:sp>
+      <p:sp>
+        <p:nvSpPr>
+          <p:cNvPr id="10" name="content:line-22:0"/>
+          <p:cNvSpPr txBox="1"/>
+          <p:nvPr/>
+        </p:nvSpPr>
+        <p:spPr>
+          <a:xfrm>
+            <a:off x="594360" y="5466588"/>
+            <a:ext cx="11003279" cy="780288"/>
           </a:xfrm>
           <a:prstGeom prst="rect">
             <a:avLst/>
@@ -8749,59 +10106,7 @@
                 </a:solidFill>
                 <a:latin typeface="Arial"/>
               </a:rPr>
-              <a:t>Total: 10 + G * S + 15 + 5 = 180 minutes.</a:t>
-            </a:r>
-          </a:p>
-        </p:txBody>
-      </p:sp>
-      <p:sp>
-        <p:nvSpPr>
-          <p:cNvPr id="10" name="content:line-22:0"/>
-          <p:cNvSpPr txBox="1"/>
-          <p:nvPr/>
-        </p:nvSpPr>
-        <p:spPr>
-          <a:xfrm>
-            <a:off x="594360" y="4410456"/>
-            <a:ext cx="11003279" cy="1132332"/>
-          </a:xfrm>
-          <a:prstGeom prst="rect">
-            <a:avLst/>
-          </a:prstGeom>
-          <a:noFill/>
-        </p:spPr>
-        <p:txBody>
-          <a:bodyPr wrap="none" anchor="t" lIns="88900" rIns="88900" tIns="38100" bIns="38100">
-            <a:noAutofit/>
-          </a:bodyPr>
-          <a:lstStyle/>
-          <a:p>
-            <a:pPr marL="279400" indent="-215900">
-              <a:lnSpc>
-                <a:spcPts val="2772"/>
-              </a:lnSpc>
-              <a:spcBef>
-                <a:spcPts val="0"/>
-              </a:spcBef>
-              <a:spcAft>
-                <a:spcPts val="0"/>
-              </a:spcAft>
-              <a:defRPr sz="2100">
-                <a:solidFill>
-                  <a:srgbClr val="20344A"/>
-                </a:solidFill>
-                <a:latin typeface="Arial"/>
-              </a:defRPr>
-              <a:buChar char="•"/>
-            </a:pPr>
-            <a:r>
-              <a:rPr sz="2100" b="0" i="0">
-                <a:solidFill>
-                  <a:srgbClr val="20344A"/>
-                </a:solidFill>
-                <a:latin typeface="Arial"/>
-              </a:rPr>
-              <a:t>Publish start/end times once G is known; keep fractional </a:t>
+              <a:t>Stage 5 (Session 3): tests and CI; CI turns red on that </a:t>
             </a:r>
             <a:br/>
             <a:r>
@@ -8811,17 +10116,16 @@
                 </a:solidFill>
                 <a:latin typeface="Arial"/>
               </a:rPr>
-              <a:t>minutes or use seconds. Include startup and transitions inside </a:t>
-            </a:r>
-            <a:br/>
-            <a:r>
-              <a:rPr sz="2100" b="0" i="0">
-                <a:solidFill>
-                  <a:srgbClr val="20344A"/>
-                </a:solidFill>
-                <a:latin typeface="Arial"/>
-              </a:rPr>
-              <a:t>slots.</a:t>
+              <a:t>cleanup, but only programmers get a prediction. </a:t>
+            </a:r>
+            <a:r>
+              <a:rPr sz="2100" b="1" i="0">
+                <a:solidFill>
+                  <a:srgbClr val="20344A"/>
+                </a:solidFill>
+                <a:latin typeface="Arial"/>
+              </a:rPr>
+              <a:t>Fix: API and </a:t>
             </a:r>
           </a:p>
         </p:txBody>
@@ -8935,14 +10239,14 @@
               </a:defRPr>
             </a:pPr>
             <a:r>
-              <a:t>SOURCE 4 / 17</a:t>
-            </a:r>
-          </a:p>
-        </p:txBody>
-      </p:sp>
-      <p:sp>
-        <p:nvSpPr>
-          <p:cNvPr id="4" name="title:line-26"/>
+              <a:t>SOURCE 3 / 18  ·  CONTINUED 2</a:t>
+            </a:r>
+          </a:p>
+        </p:txBody>
+      </p:sp>
+      <p:sp>
+        <p:nvSpPr>
+          <p:cNvPr id="4" name="title:line-16"/>
           <p:cNvSpPr txBox="1"/>
           <p:nvPr/>
         </p:nvSpPr>
@@ -8986,7 +10290,17 @@
                 </a:solidFill>
                 <a:latin typeface="Arial"/>
               </a:rPr>
-              <a:t>Use your group slot</a:t>
+              <a:t>The device example: seven stages, pain to </a:t>
+            </a:r>
+            <a:br/>
+            <a:r>
+              <a:rPr sz="3200" b="0" i="0">
+                <a:solidFill>
+                  <a:srgbClr val="20344A"/>
+                </a:solidFill>
+                <a:latin typeface="Arial"/>
+              </a:rPr>
+              <a:t>fix</a:t>
             </a:r>
           </a:p>
         </p:txBody>
@@ -9038,13 +10352,65 @@
       </p:sp>
       <p:sp>
         <p:nvSpPr>
-          <p:cNvPr id="6" name="content:line-28:0"/>
+          <p:cNvPr id="6" name="content:line-22:2"/>
           <p:cNvSpPr txBox="1"/>
           <p:nvPr/>
         </p:nvSpPr>
         <p:spPr>
           <a:xfrm>
             <a:off x="594360" y="1737360"/>
+            <a:ext cx="11003279" cy="428244"/>
+          </a:xfrm>
+          <a:prstGeom prst="rect">
+            <a:avLst/>
+          </a:prstGeom>
+          <a:noFill/>
+        </p:spPr>
+        <p:txBody>
+          <a:bodyPr wrap="none" anchor="t" lIns="88900" rIns="88900" tIns="38100" bIns="38100">
+            <a:noAutofit/>
+          </a:bodyPr>
+          <a:lstStyle/>
+          <a:p>
+            <a:pPr marL="279400" indent="-215900">
+              <a:lnSpc>
+                <a:spcPts val="2772"/>
+              </a:lnSpc>
+              <a:spcBef>
+                <a:spcPts val="0"/>
+              </a:spcBef>
+              <a:spcAft>
+                <a:spcPts val="0"/>
+              </a:spcAft>
+              <a:defRPr sz="2100">
+                <a:solidFill>
+                  <a:srgbClr val="20344A"/>
+                </a:solidFill>
+                <a:latin typeface="Arial"/>
+              </a:defRPr>
+              <a:buChar char=" "/>
+            </a:pPr>
+            <a:r>
+              <a:rPr sz="2100" b="1" i="0">
+                <a:solidFill>
+                  <a:srgbClr val="20344A"/>
+                </a:solidFill>
+                <a:latin typeface="Arial"/>
+              </a:rPr>
+              <a:t>UI.</a:t>
+            </a:r>
+          </a:p>
+        </p:txBody>
+      </p:sp>
+      <p:sp>
+        <p:nvSpPr>
+          <p:cNvPr id="7" name="content:line-23:0"/>
+          <p:cNvSpPr txBox="1"/>
+          <p:nvPr/>
+        </p:nvSpPr>
+        <p:spPr>
+          <a:xfrm>
+            <a:off x="594360" y="2229612"/>
             <a:ext cx="11003279" cy="780288"/>
           </a:xfrm>
           <a:prstGeom prst="rect">
@@ -9083,7 +10449,7 @@
                 </a:solidFill>
                 <a:latin typeface="Arial"/>
               </a:rPr>
-              <a:t>S / 2: live demo, including startup, CSV processing, and </a:t>
+              <a:t>Stage 6 (Sessions 3–4): FastAPI and Streamlit; works only on </a:t>
             </a:r>
             <a:br/>
             <a:r>
@@ -9093,21 +10459,30 @@
                 </a:solidFill>
                 <a:latin typeface="Arial"/>
               </a:rPr>
-              <a:t>invalid-input rejection.</a:t>
-            </a:r>
-          </a:p>
-        </p:txBody>
-      </p:sp>
-      <p:sp>
-        <p:nvSpPr>
-          <p:cNvPr id="7" name="content:line-29:0"/>
-          <p:cNvSpPr txBox="1"/>
-          <p:nvPr/>
-        </p:nvSpPr>
-        <p:spPr>
-          <a:xfrm>
-            <a:off x="594360" y="2581656"/>
-            <a:ext cx="11003279" cy="780288"/>
+              <a:t>a correctly set-up machine. </a:t>
+            </a:r>
+            <a:r>
+              <a:rPr sz="2100" b="1" i="0">
+                <a:solidFill>
+                  <a:srgbClr val="20344A"/>
+                </a:solidFill>
+                <a:latin typeface="Arial"/>
+              </a:rPr>
+              <a:t>Fix: Docker.</a:t>
+            </a:r>
+          </a:p>
+        </p:txBody>
+      </p:sp>
+      <p:sp>
+        <p:nvSpPr>
+          <p:cNvPr id="8" name="content:line-24:0"/>
+          <p:cNvSpPr txBox="1"/>
+          <p:nvPr/>
+        </p:nvSpPr>
+        <p:spPr>
+          <a:xfrm>
+            <a:off x="594360" y="3073908"/>
+            <a:ext cx="11003279" cy="1132332"/>
           </a:xfrm>
           <a:prstGeom prst="rect">
             <a:avLst/>
@@ -9145,7 +10520,7 @@
                 </a:solidFill>
                 <a:latin typeface="Arial"/>
               </a:rPr>
-              <a:t>S / 3: inspect environment, tests, CI, comparisons, and </a:t>
+              <a:t>Stage 7 (Session 4): Docker; local and Docker give the same </a:t>
             </a:r>
             <a:br/>
             <a:r>
@@ -9155,131 +10530,37 @@
                 </a:solidFill>
                 <a:latin typeface="Arial"/>
               </a:rPr>
-              <a:t>collaboration evidence.</a:t>
-            </a:r>
-          </a:p>
-        </p:txBody>
-      </p:sp>
-      <p:sp>
-        <p:nvSpPr>
-          <p:cNvPr id="8" name="content:line-30:0"/>
-          <p:cNvSpPr txBox="1"/>
-          <p:nvPr/>
-        </p:nvSpPr>
-        <p:spPr>
-          <a:xfrm>
-            <a:off x="594360" y="3425952"/>
-            <a:ext cx="11003279" cy="780288"/>
-          </a:xfrm>
-          <a:prstGeom prst="rect">
-            <a:avLst/>
-          </a:prstGeom>
-          <a:noFill/>
-        </p:spPr>
-        <p:txBody>
-          <a:bodyPr wrap="none" anchor="t" lIns="88900" rIns="88900" tIns="38100" bIns="38100">
-            <a:noAutofit/>
-          </a:bodyPr>
-          <a:lstStyle/>
-          <a:p>
-            <a:pPr marL="279400" indent="-215900">
-              <a:lnSpc>
-                <a:spcPts val="2772"/>
-              </a:lnSpc>
-              <a:spcBef>
-                <a:spcPts val="0"/>
-              </a:spcBef>
-              <a:spcAft>
-                <a:spcPts val="0"/>
-              </a:spcAft>
-              <a:defRPr sz="2100">
-                <a:solidFill>
-                  <a:srgbClr val="20344A"/>
-                </a:solidFill>
-                <a:latin typeface="Arial"/>
-              </a:defRPr>
-              <a:buChar char="•"/>
-            </a:pPr>
-            <a:r>
-              <a:rPr sz="2100" b="0" i="0">
-                <a:solidFill>
-                  <a:srgbClr val="20344A"/>
-                </a:solidFill>
-                <a:latin typeface="Arial"/>
-              </a:rPr>
-              <a:t>S / 6: questions, including individual explanations; every </a:t>
+              <a:t>limit date. Tell this story in your final presentation. (</a:t>
+            </a:r>
+            <a:r>
+              <a:rPr sz="2100" b="0" i="0">
+                <a:solidFill>
+                  <a:srgbClr val="007F82"/>
+                </a:solidFill>
+                <a:latin typeface="Arial"/>
+                <a:hlinkClick r:id="rId2"/>
+              </a:rPr>
+              <a:t>Stage </a:t>
             </a:r>
             <a:br/>
             <a:r>
               <a:rPr sz="2100" b="0" i="0">
                 <a:solidFill>
-                  <a:srgbClr val="20344A"/>
-                </a:solidFill>
-                <a:latin typeface="Arial"/>
-              </a:rPr>
-              <a:t>member speaks.</a:t>
-            </a:r>
-          </a:p>
-        </p:txBody>
-      </p:sp>
-      <p:sp>
-        <p:nvSpPr>
-          <p:cNvPr id="9" name="content:line-31:0"/>
-          <p:cNvSpPr txBox="1"/>
-          <p:nvPr/>
-        </p:nvSpPr>
-        <p:spPr>
-          <a:xfrm>
-            <a:off x="594360" y="4270248"/>
-            <a:ext cx="11003279" cy="780288"/>
-          </a:xfrm>
-          <a:prstGeom prst="rect">
-            <a:avLst/>
-          </a:prstGeom>
-          <a:noFill/>
-        </p:spPr>
-        <p:txBody>
-          <a:bodyPr wrap="none" anchor="t" lIns="88900" rIns="88900" tIns="38100" bIns="38100">
-            <a:noAutofit/>
-          </a:bodyPr>
-          <a:lstStyle/>
-          <a:p>
-            <a:pPr marL="279400" indent="-215900">
-              <a:lnSpc>
-                <a:spcPts val="2772"/>
-              </a:lnSpc>
-              <a:spcBef>
-                <a:spcPts val="0"/>
-              </a:spcBef>
-              <a:spcAft>
-                <a:spcPts val="0"/>
-              </a:spcAft>
-              <a:defRPr sz="2100">
-                <a:solidFill>
-                  <a:srgbClr val="20344A"/>
-                </a:solidFill>
-                <a:latin typeface="Arial"/>
-              </a:defRPr>
-              <a:buChar char="•"/>
-            </a:pPr>
-            <a:r>
-              <a:rPr sz="2100" b="0" i="0">
-                <a:solidFill>
-                  <a:srgbClr val="20344A"/>
-                </a:solidFill>
-                <a:latin typeface="Arial"/>
-              </a:rPr>
-              <a:t>These fractions sum to S. Open evidence promptly and keep </a:t>
-            </a:r>
-            <a:br/>
-            <a:r>
-              <a:rPr sz="2100" b="0" i="0">
-                <a:solidFill>
-                  <a:srgbClr val="20344A"/>
-                </a:solidFill>
-                <a:latin typeface="Arial"/>
-              </a:rPr>
-              <a:t>transitions within your slot.</a:t>
+                  <a:srgbClr val="007F82"/>
+                </a:solidFill>
+                <a:latin typeface="Arial"/>
+                <a:hlinkClick r:id="rId2"/>
+              </a:rPr>
+              <a:t>READMEs</a:t>
+            </a:r>
+            <a:r>
+              <a:rPr sz="2100" b="0" i="0">
+                <a:solidFill>
+                  <a:srgbClr val="20344A"/>
+                </a:solidFill>
+                <a:latin typeface="Arial"/>
+              </a:rPr>
+              <a:t>)</a:t>
             </a:r>
           </a:p>
         </p:txBody>
@@ -9393,14 +10674,14 @@
               </a:defRPr>
             </a:pPr>
             <a:r>
-              <a:t>SOURCE 5 / 17</a:t>
-            </a:r>
-          </a:p>
-        </p:txBody>
-      </p:sp>
-      <p:sp>
-        <p:nvSpPr>
-          <p:cNvPr id="4" name="title:line-35"/>
+              <a:t>SOURCE 4 / 18</a:t>
+            </a:r>
+          </a:p>
+        </p:txBody>
+      </p:sp>
+      <p:sp>
+        <p:nvSpPr>
+          <p:cNvPr id="4" name="title:line-28"/>
           <p:cNvSpPr txBox="1"/>
           <p:nvPr/>
         </p:nvSpPr>
@@ -9444,7 +10725,7 @@
                 </a:solidFill>
                 <a:latin typeface="Arial"/>
               </a:rPr>
-              <a:t>Final-only pass/fail assessment</a:t>
+              <a:t>Our 180-minute showcase</a:t>
             </a:r>
           </a:p>
         </p:txBody>
@@ -9496,13 +10777,65 @@
       </p:sp>
       <p:sp>
         <p:nvSpPr>
-          <p:cNvPr id="6" name="content:line-37:0"/>
+          <p:cNvPr id="6" name="content:line-30:0"/>
           <p:cNvSpPr txBox="1"/>
           <p:nvPr/>
         </p:nvSpPr>
         <p:spPr>
           <a:xfrm>
             <a:off x="594360" y="1737360"/>
+            <a:ext cx="11003279" cy="428244"/>
+          </a:xfrm>
+          <a:prstGeom prst="rect">
+            <a:avLst/>
+          </a:prstGeom>
+          <a:noFill/>
+        </p:spPr>
+        <p:txBody>
+          <a:bodyPr wrap="none" anchor="t" lIns="88900" rIns="88900" tIns="38100" bIns="38100">
+            <a:noAutofit/>
+          </a:bodyPr>
+          <a:lstStyle/>
+          <a:p>
+            <a:pPr marL="279400" indent="-215900">
+              <a:lnSpc>
+                <a:spcPts val="2772"/>
+              </a:lnSpc>
+              <a:spcBef>
+                <a:spcPts val="0"/>
+              </a:spcBef>
+              <a:spcAft>
+                <a:spcPts val="0"/>
+              </a:spcAft>
+              <a:defRPr sz="2100">
+                <a:solidFill>
+                  <a:srgbClr val="20344A"/>
+                </a:solidFill>
+                <a:latin typeface="Arial"/>
+              </a:defRPr>
+              <a:buChar char="•"/>
+            </a:pPr>
+            <a:r>
+              <a:rPr sz="2100" b="0" i="0">
+                <a:solidFill>
+                  <a:srgbClr val="20344A"/>
+                </a:solidFill>
+                <a:latin typeface="Arial"/>
+              </a:rPr>
+              <a:t>Opening brief: 10 minutes. Group slots: 150 minutes in total.</a:t>
+            </a:r>
+          </a:p>
+        </p:txBody>
+      </p:sp>
+      <p:sp>
+        <p:nvSpPr>
+          <p:cNvPr id="7" name="content:line-31:0"/>
+          <p:cNvSpPr txBox="1"/>
+          <p:nvPr/>
+        </p:nvSpPr>
+        <p:spPr>
+          <a:xfrm>
+            <a:off x="594360" y="2229612"/>
             <a:ext cx="11003279" cy="780288"/>
           </a:xfrm>
           <a:prstGeom prst="rect">
@@ -9541,7 +10874,7 @@
                 </a:solidFill>
                 <a:latin typeface="Arial"/>
               </a:rPr>
-              <a:t>Every engineering requirement and every student's </a:t>
+              <a:t>Shared break: 15 minutes between group slots. Closing: 5 </a:t>
             </a:r>
             <a:br/>
             <a:r>
@@ -9551,20 +10884,134 @@
                 </a:solidFill>
                 <a:latin typeface="Arial"/>
               </a:rPr>
-              <a:t>participation requirement is mandatory; no weighted grades.</a:t>
-            </a:r>
-          </a:p>
-        </p:txBody>
-      </p:sp>
-      <p:sp>
-        <p:nvSpPr>
-          <p:cNvPr id="7" name="content:line-38:0"/>
-          <p:cNvSpPr txBox="1"/>
-          <p:nvPr/>
-        </p:nvSpPr>
-        <p:spPr>
-          <a:xfrm>
-            <a:off x="594360" y="2581656"/>
+              <a:t>minutes.</a:t>
+            </a:r>
+          </a:p>
+        </p:txBody>
+      </p:sp>
+      <p:sp>
+        <p:nvSpPr>
+          <p:cNvPr id="8" name="content:line-32:0"/>
+          <p:cNvSpPr txBox="1"/>
+          <p:nvPr/>
+        </p:nvSpPr>
+        <p:spPr>
+          <a:xfrm>
+            <a:off x="594360" y="3073908"/>
+            <a:ext cx="11003279" cy="780288"/>
+          </a:xfrm>
+          <a:prstGeom prst="rect">
+            <a:avLst/>
+          </a:prstGeom>
+          <a:noFill/>
+        </p:spPr>
+        <p:txBody>
+          <a:bodyPr wrap="none" anchor="t" lIns="88900" rIns="88900" tIns="38100" bIns="38100">
+            <a:noAutofit/>
+          </a:bodyPr>
+          <a:lstStyle/>
+          <a:p>
+            <a:pPr marL="279400" indent="-215900">
+              <a:lnSpc>
+                <a:spcPts val="2772"/>
+              </a:lnSpc>
+              <a:spcBef>
+                <a:spcPts val="0"/>
+              </a:spcBef>
+              <a:spcAft>
+                <a:spcPts val="0"/>
+              </a:spcAft>
+              <a:defRPr sz="2100">
+                <a:solidFill>
+                  <a:srgbClr val="20344A"/>
+                </a:solidFill>
+                <a:latin typeface="Arial"/>
+              </a:defRPr>
+              <a:buChar char="•"/>
+            </a:pPr>
+            <a:r>
+              <a:rPr sz="2100" b="0" i="0">
+                <a:solidFill>
+                  <a:srgbClr val="20344A"/>
+                </a:solidFill>
+                <a:latin typeface="Arial"/>
+              </a:rPr>
+              <a:t>Let G be the actual number of groups; each slot is S = 150 / G </a:t>
+            </a:r>
+            <a:br/>
+            <a:r>
+              <a:rPr sz="2100" b="0" i="0">
+                <a:solidFill>
+                  <a:srgbClr val="20344A"/>
+                </a:solidFill>
+                <a:latin typeface="Arial"/>
+              </a:rPr>
+              <a:t>minutes.</a:t>
+            </a:r>
+          </a:p>
+        </p:txBody>
+      </p:sp>
+      <p:sp>
+        <p:nvSpPr>
+          <p:cNvPr id="9" name="content:line-33:0"/>
+          <p:cNvSpPr txBox="1"/>
+          <p:nvPr/>
+        </p:nvSpPr>
+        <p:spPr>
+          <a:xfrm>
+            <a:off x="594360" y="3918204"/>
+            <a:ext cx="11003279" cy="428244"/>
+          </a:xfrm>
+          <a:prstGeom prst="rect">
+            <a:avLst/>
+          </a:prstGeom>
+          <a:noFill/>
+        </p:spPr>
+        <p:txBody>
+          <a:bodyPr wrap="none" anchor="t" lIns="88900" rIns="88900" tIns="38100" bIns="38100">
+            <a:noAutofit/>
+          </a:bodyPr>
+          <a:lstStyle/>
+          <a:p>
+            <a:pPr marL="279400" indent="-215900">
+              <a:lnSpc>
+                <a:spcPts val="2772"/>
+              </a:lnSpc>
+              <a:spcBef>
+                <a:spcPts val="0"/>
+              </a:spcBef>
+              <a:spcAft>
+                <a:spcPts val="0"/>
+              </a:spcAft>
+              <a:defRPr sz="2100">
+                <a:solidFill>
+                  <a:srgbClr val="20344A"/>
+                </a:solidFill>
+                <a:latin typeface="Arial"/>
+              </a:defRPr>
+              <a:buChar char="•"/>
+            </a:pPr>
+            <a:r>
+              <a:rPr sz="2100" b="0" i="0">
+                <a:solidFill>
+                  <a:srgbClr val="20344A"/>
+                </a:solidFill>
+                <a:latin typeface="Arial"/>
+              </a:rPr>
+              <a:t>Total: 10 + G * S + 15 + 5 = 180 minutes.</a:t>
+            </a:r>
+          </a:p>
+        </p:txBody>
+      </p:sp>
+      <p:sp>
+        <p:nvSpPr>
+          <p:cNvPr id="10" name="content:line-34:0"/>
+          <p:cNvSpPr txBox="1"/>
+          <p:nvPr/>
+        </p:nvSpPr>
+        <p:spPr>
+          <a:xfrm>
+            <a:off x="594360" y="4410456"/>
             <a:ext cx="11003279" cy="1132332"/>
           </a:xfrm>
           <a:prstGeom prst="rect">
@@ -9603,7 +11050,7 @@
                 </a:solidFill>
                 <a:latin typeface="Arial"/>
               </a:rPr>
-              <a:t>Assessment happens only at this presentation. The result is </a:t>
+              <a:t>Publish start/end times once G is known; keep fractional </a:t>
             </a:r>
             <a:br/>
             <a:r>
@@ -9613,7 +11060,7 @@
                 </a:solidFill>
                 <a:latin typeface="Arial"/>
               </a:rPr>
-              <a:t>final: no separate submission, resubmission, reassessment, or </a:t>
+              <a:t>minutes or use seconds. Include startup and transitions inside </a:t>
             </a:r>
             <a:br/>
             <a:r>
@@ -9623,160 +11070,7 @@
                 </a:solidFill>
                 <a:latin typeface="Arial"/>
               </a:rPr>
-              <a:t>later retry.</a:t>
-            </a:r>
-          </a:p>
-        </p:txBody>
-      </p:sp>
-      <p:sp>
-        <p:nvSpPr>
-          <p:cNvPr id="8" name="content:line-39:0"/>
-          <p:cNvSpPr txBox="1"/>
-          <p:nvPr/>
-        </p:nvSpPr>
-        <p:spPr>
-          <a:xfrm>
-            <a:off x="594360" y="3777996"/>
-            <a:ext cx="11003279" cy="1132332"/>
-          </a:xfrm>
-          <a:prstGeom prst="rect">
-            <a:avLst/>
-          </a:prstGeom>
-          <a:noFill/>
-        </p:spPr>
-        <p:txBody>
-          <a:bodyPr wrap="none" anchor="t" lIns="88900" rIns="88900" tIns="38100" bIns="38100">
-            <a:noAutofit/>
-          </a:bodyPr>
-          <a:lstStyle/>
-          <a:p>
-            <a:pPr marL="279400" indent="-215900">
-              <a:lnSpc>
-                <a:spcPts val="2772"/>
-              </a:lnSpc>
-              <a:spcBef>
-                <a:spcPts val="0"/>
-              </a:spcBef>
-              <a:spcAft>
-                <a:spcPts val="0"/>
-              </a:spcAft>
-              <a:defRPr sz="2100">
-                <a:solidFill>
-                  <a:srgbClr val="20344A"/>
-                </a:solidFill>
-                <a:latin typeface="Arial"/>
-              </a:defRPr>
-              <a:buChar char="•"/>
-            </a:pPr>
-            <a:r>
-              <a:rPr sz="2100" b="0" i="0">
-                <a:solidFill>
-                  <a:srgbClr val="20344A"/>
-                </a:solidFill>
-                <a:latin typeface="Arial"/>
-              </a:rPr>
-              <a:t>Homework and checkpoints were preparation. Modeling is </a:t>
-            </a:r>
-            <a:br/>
-            <a:r>
-              <a:rPr sz="2100" b="0" i="0">
-                <a:solidFill>
-                  <a:srgbClr val="20344A"/>
-                </a:solidFill>
-                <a:latin typeface="Arial"/>
-              </a:rPr>
-              <a:t>optional; scientific correctness, conclusions, model </a:t>
-            </a:r>
-            <a:br/>
-            <a:r>
-              <a:rPr sz="2100" b="0" i="0">
-                <a:solidFill>
-                  <a:srgbClr val="20344A"/>
-                </a:solidFill>
-                <a:latin typeface="Arial"/>
-              </a:rPr>
-              <a:t>complexity, and UI polish are not graded.</a:t>
-            </a:r>
-          </a:p>
-        </p:txBody>
-      </p:sp>
-      <p:sp>
-        <p:nvSpPr>
-          <p:cNvPr id="9" name="content:line-40:0"/>
-          <p:cNvSpPr txBox="1"/>
-          <p:nvPr/>
-        </p:nvSpPr>
-        <p:spPr>
-          <a:xfrm>
-            <a:off x="594360" y="4974336"/>
-            <a:ext cx="11003279" cy="780288"/>
-          </a:xfrm>
-          <a:prstGeom prst="rect">
-            <a:avLst/>
-          </a:prstGeom>
-          <a:noFill/>
-        </p:spPr>
-        <p:txBody>
-          <a:bodyPr wrap="none" anchor="t" lIns="88900" rIns="88900" tIns="38100" bIns="38100">
-            <a:noAutofit/>
-          </a:bodyPr>
-          <a:lstStyle/>
-          <a:p>
-            <a:pPr marL="279400" indent="-215900">
-              <a:lnSpc>
-                <a:spcPts val="2772"/>
-              </a:lnSpc>
-              <a:spcBef>
-                <a:spcPts val="0"/>
-              </a:spcBef>
-              <a:spcAft>
-                <a:spcPts val="0"/>
-              </a:spcAft>
-              <a:defRPr sz="2100">
-                <a:solidFill>
-                  <a:srgbClr val="20344A"/>
-                </a:solidFill>
-                <a:latin typeface="Arial"/>
-              </a:defRPr>
-              <a:buChar char="•"/>
-            </a:pPr>
-            <a:r>
-              <a:rPr sz="2100" b="0" i="0">
-                <a:solidFill>
-                  <a:srgbClr val="20344A"/>
-                </a:solidFill>
-                <a:latin typeface="Arial"/>
-              </a:rPr>
-              <a:t>Tests and comparisons must still check your declared </a:t>
-            </a:r>
-            <a:br/>
-            <a:r>
-              <a:rPr sz="2100" b="0" i="0">
-                <a:solidFill>
-                  <a:srgbClr val="20344A"/>
-                </a:solidFill>
-                <a:latin typeface="Arial"/>
-              </a:rPr>
-              <a:t>processing behavior. See the </a:t>
-            </a:r>
-            <a:r>
-              <a:rPr sz="2100" b="0" i="0">
-                <a:solidFill>
-                  <a:srgbClr val="007F82"/>
-                </a:solidFill>
-                <a:latin typeface="Arial"/>
-                <a:hlinkClick r:id="rId2"/>
-              </a:rPr>
-              <a:t>assessment policy</a:t>
-            </a:r>
-            <a:r>
-              <a:rPr sz="2100" b="0" i="0">
-                <a:solidFill>
-                  <a:srgbClr val="20344A"/>
-                </a:solidFill>
-                <a:latin typeface="Arial"/>
-              </a:rPr>
-              <a:t>.</a:t>
+              <a:t>slots.</a:t>
             </a:r>
           </a:p>
         </p:txBody>
@@ -9890,14 +11184,14 @@
               </a:defRPr>
             </a:pPr>
             <a:r>
-              <a:t>SOURCE 6 / 17</a:t>
-            </a:r>
-          </a:p>
-        </p:txBody>
-      </p:sp>
-      <p:sp>
-        <p:nvSpPr>
-          <p:cNvPr id="4" name="title:line-44"/>
+              <a:t>SOURCE 5 / 18</a:t>
+            </a:r>
+          </a:p>
+        </p:txBody>
+      </p:sp>
+      <p:sp>
+        <p:nvSpPr>
+          <p:cNvPr id="4" name="title:line-38"/>
           <p:cNvSpPr txBox="1"/>
           <p:nvPr/>
         </p:nvSpPr>
@@ -9941,7 +11235,7 @@
                 </a:solidFill>
                 <a:latin typeface="Arial"/>
               </a:rPr>
-              <a:t>Briefing: open the actual evidence</a:t>
+              <a:t>Use your group slot</a:t>
             </a:r>
           </a:p>
         </p:txBody>
@@ -9993,7 +11287,7 @@
       </p:sp>
       <p:sp>
         <p:nvSpPr>
-          <p:cNvPr id="6" name="content:line-46:0"/>
+          <p:cNvPr id="6" name="content:line-40:0"/>
           <p:cNvSpPr txBox="1"/>
           <p:nvPr/>
         </p:nvSpPr>
@@ -10038,7 +11332,7 @@
                 </a:solidFill>
                 <a:latin typeface="Arial"/>
               </a:rPr>
-              <a:t>Instructor demonstrates navigation using the completed </a:t>
+              <a:t>S / 2: live demo, including startup, CSV processing, and </a:t>
             </a:r>
             <a:br/>
             <a:r>
@@ -10048,21 +11342,21 @@
                 </a:solidFill>
                 <a:latin typeface="Arial"/>
               </a:rPr>
-              <a:t>synthetic example; groups then show their own work.</a:t>
-            </a:r>
-          </a:p>
-        </p:txBody>
-      </p:sp>
-      <p:sp>
-        <p:nvSpPr>
-          <p:cNvPr id="7" name="content:line-47:0"/>
+              <a:t>invalid-input rejection.</a:t>
+            </a:r>
+          </a:p>
+        </p:txBody>
+      </p:sp>
+      <p:sp>
+        <p:nvSpPr>
+          <p:cNvPr id="7" name="content:line-41:0"/>
           <p:cNvSpPr txBox="1"/>
           <p:nvPr/>
         </p:nvSpPr>
         <p:spPr>
           <a:xfrm>
             <a:off x="594360" y="2581656"/>
-            <a:ext cx="11003279" cy="1132332"/>
+            <a:ext cx="11003279" cy="780288"/>
           </a:xfrm>
           <a:prstGeom prst="rect">
             <a:avLst/>
@@ -10100,7 +11394,7 @@
                 </a:solidFill>
                 <a:latin typeface="Arial"/>
               </a:rPr>
-              <a:t>Open README evidence links: tested commit SHA, CI run, </a:t>
+              <a:t>S / 3: inspect environment, tests, CI, comparisons, and </a:t>
             </a:r>
             <a:br/>
             <a:r>
@@ -10110,7 +11404,59 @@
                 </a:solidFill>
                 <a:latin typeface="Arial"/>
               </a:rPr>
-              <a:t>captures/logs, authored PRs, and review permalinks. A SHA </a:t>
+              <a:t>collaboration evidence.</a:t>
+            </a:r>
+          </a:p>
+        </p:txBody>
+      </p:sp>
+      <p:sp>
+        <p:nvSpPr>
+          <p:cNvPr id="8" name="content:line-42:0"/>
+          <p:cNvSpPr txBox="1"/>
+          <p:nvPr/>
+        </p:nvSpPr>
+        <p:spPr>
+          <a:xfrm>
+            <a:off x="594360" y="3425952"/>
+            <a:ext cx="11003279" cy="780288"/>
+          </a:xfrm>
+          <a:prstGeom prst="rect">
+            <a:avLst/>
+          </a:prstGeom>
+          <a:noFill/>
+        </p:spPr>
+        <p:txBody>
+          <a:bodyPr wrap="none" anchor="t" lIns="88900" rIns="88900" tIns="38100" bIns="38100">
+            <a:noAutofit/>
+          </a:bodyPr>
+          <a:lstStyle/>
+          <a:p>
+            <a:pPr marL="279400" indent="-215900">
+              <a:lnSpc>
+                <a:spcPts val="2772"/>
+              </a:lnSpc>
+              <a:spcBef>
+                <a:spcPts val="0"/>
+              </a:spcBef>
+              <a:spcAft>
+                <a:spcPts val="0"/>
+              </a:spcAft>
+              <a:defRPr sz="2100">
+                <a:solidFill>
+                  <a:srgbClr val="20344A"/>
+                </a:solidFill>
+                <a:latin typeface="Arial"/>
+              </a:defRPr>
+              <a:buChar char="•"/>
+            </a:pPr>
+            <a:r>
+              <a:rPr sz="2100" b="0" i="0">
+                <a:solidFill>
+                  <a:srgbClr val="20344A"/>
+                </a:solidFill>
+                <a:latin typeface="Arial"/>
+              </a:rPr>
+              <a:t>S / 6: questions, including individual explanations; every </a:t>
             </a:r>
             <a:br/>
             <a:r>
@@ -10120,20 +11466,20 @@
                 </a:solidFill>
                 <a:latin typeface="Arial"/>
               </a:rPr>
-              <a:t>identifies a code version.</a:t>
-            </a:r>
-          </a:p>
-        </p:txBody>
-      </p:sp>
-      <p:sp>
-        <p:nvSpPr>
-          <p:cNvPr id="8" name="content:line-48:0"/>
-          <p:cNvSpPr txBox="1"/>
-          <p:nvPr/>
-        </p:nvSpPr>
-        <p:spPr>
-          <a:xfrm>
-            <a:off x="594360" y="3777996"/>
+              <a:t>member speaks.</a:t>
+            </a:r>
+          </a:p>
+        </p:txBody>
+      </p:sp>
+      <p:sp>
+        <p:nvSpPr>
+          <p:cNvPr id="9" name="content:line-43:0"/>
+          <p:cNvSpPr txBox="1"/>
+          <p:nvPr/>
+        </p:nvSpPr>
+        <p:spPr>
+          <a:xfrm>
+            <a:off x="594360" y="4270248"/>
             <a:ext cx="11003279" cy="780288"/>
           </a:xfrm>
           <a:prstGeom prst="rect">
@@ -10172,7 +11518,7 @@
                 </a:solidFill>
                 <a:latin typeface="Arial"/>
               </a:rPr>
-              <a:t>Instructor records repository, date, demonstrated SHA, </a:t>
+              <a:t>These fractions sum to S. Open evidence promptly and keep </a:t>
             </a:r>
             <a:br/>
             <a:r>
@@ -10182,79 +11528,7 @@
                 </a:solidFill>
                 <a:latin typeface="Arial"/>
               </a:rPr>
-              <a:t>members, and GitHub usernames in the checklist.</a:t>
-            </a:r>
-          </a:p>
-        </p:txBody>
-      </p:sp>
-      <p:sp>
-        <p:nvSpPr>
-          <p:cNvPr id="9" name="content:line-49:0"/>
-          <p:cNvSpPr txBox="1"/>
-          <p:nvPr/>
-        </p:nvSpPr>
-        <p:spPr>
-          <a:xfrm>
-            <a:off x="594360" y="4622292"/>
-            <a:ext cx="11003279" cy="1132332"/>
-          </a:xfrm>
-          <a:prstGeom prst="rect">
-            <a:avLst/>
-          </a:prstGeom>
-          <a:noFill/>
-        </p:spPr>
-        <p:txBody>
-          <a:bodyPr wrap="none" anchor="t" lIns="88900" rIns="88900" tIns="38100" bIns="38100">
-            <a:noAutofit/>
-          </a:bodyPr>
-          <a:lstStyle/>
-          <a:p>
-            <a:pPr marL="279400" indent="-215900">
-              <a:lnSpc>
-                <a:spcPts val="2772"/>
-              </a:lnSpc>
-              <a:spcBef>
-                <a:spcPts val="0"/>
-              </a:spcBef>
-              <a:spcAft>
-                <a:spcPts val="0"/>
-              </a:spcAft>
-              <a:defRPr sz="2100">
-                <a:solidFill>
-                  <a:srgbClr val="20344A"/>
-                </a:solidFill>
-                <a:latin typeface="Arial"/>
-              </a:defRPr>
-              <a:buChar char="•"/>
-            </a:pPr>
-            <a:r>
-              <a:rPr sz="2100" b="0" i="0">
-                <a:solidFill>
-                  <a:srgbClr val="20344A"/>
-                </a:solidFill>
-                <a:latin typeface="Arial"/>
-              </a:rPr>
-              <a:t>For every mandatory row, inspect the actual artifact and </a:t>
-            </a:r>
-            <a:br/>
-            <a:r>
-              <a:rPr sz="2100" b="0" i="0">
-                <a:solidFill>
-                  <a:srgbClr val="20344A"/>
-                </a:solidFill>
-                <a:latin typeface="Arial"/>
-              </a:rPr>
-              <a:t>record Pass/Fail, its URL/path, and an observation. Missing </a:t>
-            </a:r>
-            <a:br/>
-            <a:r>
-              <a:rPr sz="2100" b="0" i="0">
-                <a:solidFill>
-                  <a:srgbClr val="20344A"/>
-                </a:solidFill>
-                <a:latin typeface="Arial"/>
-              </a:rPr>
-              <a:t>evidence fails that requirement.</a:t>
+              <a:t>transitions within your slot.</a:t>
             </a:r>
           </a:p>
         </p:txBody>
@@ -10368,14 +11642,14 @@
               </a:defRPr>
             </a:pPr>
             <a:r>
-              <a:t>SOURCE 7 / 17</a:t>
-            </a:r>
-          </a:p>
-        </p:txBody>
-      </p:sp>
-      <p:sp>
-        <p:nvSpPr>
-          <p:cNvPr id="4" name="title:line-53"/>
+              <a:t>SOURCE 6 / 18</a:t>
+            </a:r>
+          </a:p>
+        </p:txBody>
+      </p:sp>
+      <p:sp>
+        <p:nvSpPr>
+          <p:cNvPr id="4" name="title:line-47"/>
           <p:cNvSpPr txBox="1"/>
           <p:nvPr/>
         </p:nvSpPr>
@@ -10419,7 +11693,7 @@
                 </a:solidFill>
                 <a:latin typeface="Arial"/>
               </a:rPr>
-              <a:t>Inspect environment and configuration</a:t>
+              <a:t>Final-only pass/fail assessment</a:t>
             </a:r>
           </a:p>
         </p:txBody>
@@ -10471,7 +11745,7 @@
       </p:sp>
       <p:sp>
         <p:nvSpPr>
-          <p:cNvPr id="6" name="content:line-55:0"/>
+          <p:cNvPr id="6" name="content:line-49:0"/>
           <p:cNvSpPr txBox="1"/>
           <p:nvPr/>
         </p:nvSpPr>
@@ -10516,7 +11790,7 @@
                 </a:solidFill>
                 <a:latin typeface="Arial"/>
               </a:rPr>
-              <a:t>Show Python 3.12 in an active venv, its interpreter path, and </a:t>
+              <a:t>Every engineering requirement and every student's </a:t>
             </a:r>
             <a:br/>
             <a:r>
@@ -10526,20 +11800,164 @@
                 </a:solidFill>
                 <a:latin typeface="Arial"/>
               </a:rPr>
-              <a:t>the installed reusable package working locally.</a:t>
-            </a:r>
-          </a:p>
-        </p:txBody>
-      </p:sp>
-      <p:sp>
-        <p:nvSpPr>
-          <p:cNvPr id="7" name="content:line-56:0"/>
+              <a:t>participation requirement is mandatory; no weighted grades.</a:t>
+            </a:r>
+          </a:p>
+        </p:txBody>
+      </p:sp>
+      <p:sp>
+        <p:nvSpPr>
+          <p:cNvPr id="7" name="content:line-50:0"/>
           <p:cNvSpPr txBox="1"/>
           <p:nvPr/>
         </p:nvSpPr>
         <p:spPr>
           <a:xfrm>
             <a:off x="594360" y="2581656"/>
+            <a:ext cx="11003279" cy="1132332"/>
+          </a:xfrm>
+          <a:prstGeom prst="rect">
+            <a:avLst/>
+          </a:prstGeom>
+          <a:noFill/>
+        </p:spPr>
+        <p:txBody>
+          <a:bodyPr wrap="none" anchor="t" lIns="88900" rIns="88900" tIns="38100" bIns="38100">
+            <a:noAutofit/>
+          </a:bodyPr>
+          <a:lstStyle/>
+          <a:p>
+            <a:pPr marL="279400" indent="-215900">
+              <a:lnSpc>
+                <a:spcPts val="2772"/>
+              </a:lnSpc>
+              <a:spcBef>
+                <a:spcPts val="0"/>
+              </a:spcBef>
+              <a:spcAft>
+                <a:spcPts val="0"/>
+              </a:spcAft>
+              <a:defRPr sz="2100">
+                <a:solidFill>
+                  <a:srgbClr val="20344A"/>
+                </a:solidFill>
+                <a:latin typeface="Arial"/>
+              </a:defRPr>
+              <a:buChar char="•"/>
+            </a:pPr>
+            <a:r>
+              <a:rPr sz="2100" b="0" i="0">
+                <a:solidFill>
+                  <a:srgbClr val="20344A"/>
+                </a:solidFill>
+                <a:latin typeface="Arial"/>
+              </a:rPr>
+              <a:t>Assessment happens only at this presentation. The result is </a:t>
+            </a:r>
+            <a:br/>
+            <a:r>
+              <a:rPr sz="2100" b="0" i="0">
+                <a:solidFill>
+                  <a:srgbClr val="20344A"/>
+                </a:solidFill>
+                <a:latin typeface="Arial"/>
+              </a:rPr>
+              <a:t>final: no separate submission, resubmission, reassessment, or </a:t>
+            </a:r>
+            <a:br/>
+            <a:r>
+              <a:rPr sz="2100" b="0" i="0">
+                <a:solidFill>
+                  <a:srgbClr val="20344A"/>
+                </a:solidFill>
+                <a:latin typeface="Arial"/>
+              </a:rPr>
+              <a:t>later retry.</a:t>
+            </a:r>
+          </a:p>
+        </p:txBody>
+      </p:sp>
+      <p:sp>
+        <p:nvSpPr>
+          <p:cNvPr id="8" name="content:line-51:0"/>
+          <p:cNvSpPr txBox="1"/>
+          <p:nvPr/>
+        </p:nvSpPr>
+        <p:spPr>
+          <a:xfrm>
+            <a:off x="594360" y="3777996"/>
+            <a:ext cx="11003279" cy="1132332"/>
+          </a:xfrm>
+          <a:prstGeom prst="rect">
+            <a:avLst/>
+          </a:prstGeom>
+          <a:noFill/>
+        </p:spPr>
+        <p:txBody>
+          <a:bodyPr wrap="none" anchor="t" lIns="88900" rIns="88900" tIns="38100" bIns="38100">
+            <a:noAutofit/>
+          </a:bodyPr>
+          <a:lstStyle/>
+          <a:p>
+            <a:pPr marL="279400" indent="-215900">
+              <a:lnSpc>
+                <a:spcPts val="2772"/>
+              </a:lnSpc>
+              <a:spcBef>
+                <a:spcPts val="0"/>
+              </a:spcBef>
+              <a:spcAft>
+                <a:spcPts val="0"/>
+              </a:spcAft>
+              <a:defRPr sz="2100">
+                <a:solidFill>
+                  <a:srgbClr val="20344A"/>
+                </a:solidFill>
+                <a:latin typeface="Arial"/>
+              </a:defRPr>
+              <a:buChar char="•"/>
+            </a:pPr>
+            <a:r>
+              <a:rPr sz="2100" b="0" i="0">
+                <a:solidFill>
+                  <a:srgbClr val="20344A"/>
+                </a:solidFill>
+                <a:latin typeface="Arial"/>
+              </a:rPr>
+              <a:t>Homework and checkpoints were preparation. Modeling is </a:t>
+            </a:r>
+            <a:br/>
+            <a:r>
+              <a:rPr sz="2100" b="0" i="0">
+                <a:solidFill>
+                  <a:srgbClr val="20344A"/>
+                </a:solidFill>
+                <a:latin typeface="Arial"/>
+              </a:rPr>
+              <a:t>optional; scientific correctness, conclusions, model </a:t>
+            </a:r>
+            <a:br/>
+            <a:r>
+              <a:rPr sz="2100" b="0" i="0">
+                <a:solidFill>
+                  <a:srgbClr val="20344A"/>
+                </a:solidFill>
+                <a:latin typeface="Arial"/>
+              </a:rPr>
+              <a:t>complexity, and UI polish are not graded.</a:t>
+            </a:r>
+          </a:p>
+        </p:txBody>
+      </p:sp>
+      <p:sp>
+        <p:nvSpPr>
+          <p:cNvPr id="9" name="content:line-52:0"/>
+          <p:cNvSpPr txBox="1"/>
+          <p:nvPr/>
+        </p:nvSpPr>
+        <p:spPr>
+          <a:xfrm>
+            <a:off x="594360" y="4974336"/>
             <a:ext cx="11003279" cy="780288"/>
           </a:xfrm>
           <a:prstGeom prst="rect">
@@ -10578,7 +11996,17 @@
                 </a:solidFill>
                 <a:latin typeface="Arial"/>
               </a:rPr>
-              <a:t>Open dependency declarations in </a:t>
+              <a:t>Tests and comparisons must still check your declared </a:t>
+            </a:r>
+            <a:br/>
+            <a:r>
+              <a:rPr sz="2100" b="0" i="0">
+                <a:solidFill>
+                  <a:srgbClr val="20344A"/>
+                </a:solidFill>
+                <a:latin typeface="Arial"/>
+              </a:rPr>
+              <a:t>processing behavior. See the </a:t>
             </a:r>
             <a:r>
               <a:rPr sz="2100" b="0" i="0">
@@ -10588,161 +12016,7 @@
                 <a:latin typeface="Arial"/>
                 <a:hlinkClick r:id="rId2"/>
               </a:rPr>
-              <a:t>backend/pyproject.toml</a:t>
-            </a:r>
-            <a:r>
-              <a:rPr sz="2100" b="0" i="0">
-                <a:solidFill>
-                  <a:srgbClr val="20344A"/>
-                </a:solidFill>
-                <a:latin typeface="Arial"/>
-              </a:rPr>
-              <a:t>; </a:t>
-            </a:r>
-            <a:br/>
-            <a:r>
-              <a:rPr sz="2100" b="0" i="0">
-                <a:solidFill>
-                  <a:srgbClr val="20344A"/>
-                </a:solidFill>
-                <a:latin typeface="Arial"/>
-              </a:rPr>
-              <a:t>explain how the environment supplies these packages.</a:t>
-            </a:r>
-          </a:p>
-        </p:txBody>
-      </p:sp>
-      <p:sp>
-        <p:nvSpPr>
-          <p:cNvPr id="8" name="content:line-57:0"/>
-          <p:cNvSpPr txBox="1"/>
-          <p:nvPr/>
-        </p:nvSpPr>
-        <p:spPr>
-          <a:xfrm>
-            <a:off x="594360" y="3425952"/>
-            <a:ext cx="11003279" cy="780288"/>
-          </a:xfrm>
-          <a:prstGeom prst="rect">
-            <a:avLst/>
-          </a:prstGeom>
-          <a:noFill/>
-        </p:spPr>
-        <p:txBody>
-          <a:bodyPr wrap="none" anchor="t" lIns="88900" rIns="88900" tIns="38100" bIns="38100">
-            <a:noAutofit/>
-          </a:bodyPr>
-          <a:lstStyle/>
-          <a:p>
-            <a:pPr marL="279400" indent="-215900">
-              <a:lnSpc>
-                <a:spcPts val="2772"/>
-              </a:lnSpc>
-              <a:spcBef>
-                <a:spcPts val="0"/>
-              </a:spcBef>
-              <a:spcAft>
-                <a:spcPts val="0"/>
-              </a:spcAft>
-              <a:defRPr sz="2100">
-                <a:solidFill>
-                  <a:srgbClr val="20344A"/>
-                </a:solidFill>
-                <a:latin typeface="Arial"/>
-              </a:defRPr>
-              <a:buChar char="•"/>
-            </a:pPr>
-            <a:r>
-              <a:rPr sz="2100" b="0" i="0">
-                <a:solidFill>
-                  <a:srgbClr val="20344A"/>
-                </a:solidFill>
-                <a:latin typeface="Arial"/>
-              </a:rPr>
-              <a:t>Open ignore rules and shareable .env.example; verify local .env, </a:t>
-            </a:r>
-            <a:br/>
-            <a:r>
-              <a:rPr sz="2100" b="0" i="0">
-                <a:solidFill>
-                  <a:srgbClr val="20344A"/>
-                </a:solidFill>
-                <a:latin typeface="Arial"/>
-              </a:rPr>
-              <a:t>credentials, and .venv stay out of tracked files/history.</a:t>
-            </a:r>
-          </a:p>
-        </p:txBody>
-      </p:sp>
-      <p:sp>
-        <p:nvSpPr>
-          <p:cNvPr id="9" name="content:line-58:0"/>
-          <p:cNvSpPr txBox="1"/>
-          <p:nvPr/>
-        </p:nvSpPr>
-        <p:spPr>
-          <a:xfrm>
-            <a:off x="594360" y="4270248"/>
-            <a:ext cx="11003279" cy="1132332"/>
-          </a:xfrm>
-          <a:prstGeom prst="rect">
-            <a:avLst/>
-          </a:prstGeom>
-          <a:noFill/>
-        </p:spPr>
-        <p:txBody>
-          <a:bodyPr wrap="none" anchor="t" lIns="88900" rIns="88900" tIns="38100" bIns="38100">
-            <a:noAutofit/>
-          </a:bodyPr>
-          <a:lstStyle/>
-          <a:p>
-            <a:pPr marL="279400" indent="-215900">
-              <a:lnSpc>
-                <a:spcPts val="2772"/>
-              </a:lnSpc>
-              <a:spcBef>
-                <a:spcPts val="0"/>
-              </a:spcBef>
-              <a:spcAft>
-                <a:spcPts val="0"/>
-              </a:spcAft>
-              <a:defRPr sz="2100">
-                <a:solidFill>
-                  <a:srgbClr val="20344A"/>
-                </a:solidFill>
-                <a:latin typeface="Arial"/>
-              </a:defRPr>
-              <a:buChar char="•"/>
-            </a:pPr>
-            <a:r>
-              <a:rPr sz="2100" b="0" i="0">
-                <a:solidFill>
-                  <a:srgbClr val="20344A"/>
-                </a:solidFill>
-                <a:latin typeface="Arial"/>
-              </a:rPr>
-              <a:t>Explain local versus container settings without showing </a:t>
-            </a:r>
-            <a:br/>
-            <a:r>
-              <a:rPr sz="2100" b="0" i="0">
-                <a:solidFill>
-                  <a:srgbClr val="20344A"/>
-                </a:solidFill>
-                <a:latin typeface="Arial"/>
-              </a:rPr>
-              <a:t>secrets. Instructor inspects files and execution, alongside the </a:t>
-            </a:r>
-            <a:br/>
-            <a:r>
-              <a:rPr sz="2100" b="0" i="0">
-                <a:solidFill>
-                  <a:srgbClr val="007F82"/>
-                </a:solidFill>
-                <a:latin typeface="Arial"/>
-                <a:hlinkClick r:id="rId3"/>
-              </a:rPr>
-              <a:t>setup guide</a:t>
+              <a:t>assessment policy</a:t>
             </a:r>
             <a:r>
               <a:rPr sz="2100" b="0" i="0">
@@ -10865,14 +12139,14 @@
               </a:defRPr>
             </a:pPr>
             <a:r>
-              <a:t>SOURCE 8 / 17</a:t>
-            </a:r>
-          </a:p>
-        </p:txBody>
-      </p:sp>
-      <p:sp>
-        <p:nvSpPr>
-          <p:cNvPr id="4" name="title:line-62"/>
+              <a:t>SOURCE 7 / 18</a:t>
+            </a:r>
+          </a:p>
+        </p:txBody>
+      </p:sp>
+      <p:sp>
+        <p:nvSpPr>
+          <p:cNvPr id="4" name="title:line-56"/>
           <p:cNvSpPr txBox="1"/>
           <p:nvPr/>
         </p:nvSpPr>
@@ -10916,7 +12190,7 @@
                 </a:solidFill>
                 <a:latin typeface="Arial"/>
               </a:rPr>
-              <a:t>Trace the working application</a:t>
+              <a:t>Briefing: open the actual evidence</a:t>
             </a:r>
           </a:p>
         </p:txBody>
@@ -10968,172 +12242,13 @@
       </p:sp>
       <p:sp>
         <p:nvSpPr>
-          <p:cNvPr id="6" name="content:line-65:0"/>
+          <p:cNvPr id="6" name="content:line-58:0"/>
           <p:cNvSpPr txBox="1"/>
           <p:nvPr/>
         </p:nvSpPr>
         <p:spPr>
           <a:xfrm>
             <a:off x="594360" y="1737360"/>
-            <a:ext cx="11003279" cy="377952"/>
-          </a:xfrm>
-          <a:prstGeom prst="rect">
-            <a:avLst/>
-          </a:prstGeom>
-          <a:solidFill>
-            <a:srgbClr val="EDF3F6"/>
-          </a:solidFill>
-        </p:spPr>
-        <p:txBody>
-          <a:bodyPr wrap="none" anchor="t" lIns="88900" rIns="88900" tIns="38100" bIns="38100">
-            <a:noAutofit/>
-          </a:bodyPr>
-          <a:lstStyle/>
-          <a:p>
-            <a:pPr>
-              <a:lnSpc>
-                <a:spcPts val="2376"/>
-              </a:lnSpc>
-              <a:spcBef>
-                <a:spcPts val="0"/>
-              </a:spcBef>
-              <a:spcAft>
-                <a:spcPts val="0"/>
-              </a:spcAft>
-              <a:defRPr sz="1800">
-                <a:solidFill>
-                  <a:srgbClr val="20344A"/>
-                </a:solidFill>
-                <a:latin typeface="Arial"/>
-              </a:defRPr>
-            </a:pPr>
-            <a:r>
-              <a:rPr sz="1800" b="0" i="0">
-                <a:solidFill>
-                  <a:srgbClr val="20344A"/>
-                </a:solidFill>
-                <a:latin typeface="Courier New"/>
-              </a:rPr>
-              <a:t>CSV upload -&gt; Streamlit -&gt; HTTP request -&gt; FastAPI</a:t>
-            </a:r>
-          </a:p>
-        </p:txBody>
-      </p:sp>
-      <p:sp>
-        <p:nvSpPr>
-          <p:cNvPr id="7" name="content:line-66:0"/>
-          <p:cNvSpPr txBox="1"/>
-          <p:nvPr/>
-        </p:nvSpPr>
-        <p:spPr>
-          <a:xfrm>
-            <a:off x="594360" y="2115312"/>
-            <a:ext cx="11003279" cy="377952"/>
-          </a:xfrm>
-          <a:prstGeom prst="rect">
-            <a:avLst/>
-          </a:prstGeom>
-          <a:solidFill>
-            <a:srgbClr val="EDF3F6"/>
-          </a:solidFill>
-        </p:spPr>
-        <p:txBody>
-          <a:bodyPr wrap="none" anchor="t" lIns="88900" rIns="88900" tIns="38100" bIns="38100">
-            <a:noAutofit/>
-          </a:bodyPr>
-          <a:lstStyle/>
-          <a:p>
-            <a:pPr>
-              <a:lnSpc>
-                <a:spcPts val="2376"/>
-              </a:lnSpc>
-              <a:spcBef>
-                <a:spcPts val="0"/>
-              </a:spcBef>
-              <a:spcAft>
-                <a:spcPts val="0"/>
-              </a:spcAft>
-              <a:defRPr sz="1800">
-                <a:solidFill>
-                  <a:srgbClr val="20344A"/>
-                </a:solidFill>
-                <a:latin typeface="Arial"/>
-              </a:defRPr>
-            </a:pPr>
-            <a:r>
-              <a:rPr sz="1800" b="0" i="0">
-                <a:solidFill>
-                  <a:srgbClr val="20344A"/>
-                </a:solidFill>
-                <a:latin typeface="Courier New"/>
-              </a:rPr>
-              <a:t>FastAPI -&gt; reusable stat_core processing -&gt; result</a:t>
-            </a:r>
-          </a:p>
-        </p:txBody>
-      </p:sp>
-      <p:sp>
-        <p:nvSpPr>
-          <p:cNvPr id="8" name="content:line-67:0"/>
-          <p:cNvSpPr txBox="1"/>
-          <p:nvPr/>
-        </p:nvSpPr>
-        <p:spPr>
-          <a:xfrm>
-            <a:off x="594360" y="2493264"/>
-            <a:ext cx="11003279" cy="377952"/>
-          </a:xfrm>
-          <a:prstGeom prst="rect">
-            <a:avLst/>
-          </a:prstGeom>
-          <a:solidFill>
-            <a:srgbClr val="EDF3F6"/>
-          </a:solidFill>
-        </p:spPr>
-        <p:txBody>
-          <a:bodyPr wrap="none" anchor="t" lIns="88900" rIns="88900" tIns="38100" bIns="38100">
-            <a:noAutofit/>
-          </a:bodyPr>
-          <a:lstStyle/>
-          <a:p>
-            <a:pPr>
-              <a:lnSpc>
-                <a:spcPts val="2376"/>
-              </a:lnSpc>
-              <a:spcBef>
-                <a:spcPts val="0"/>
-              </a:spcBef>
-              <a:spcAft>
-                <a:spcPts val="0"/>
-              </a:spcAft>
-              <a:defRPr sz="1800">
-                <a:solidFill>
-                  <a:srgbClr val="20344A"/>
-                </a:solidFill>
-                <a:latin typeface="Arial"/>
-              </a:defRPr>
-            </a:pPr>
-            <a:r>
-              <a:rPr sz="1800" b="0" i="0">
-                <a:solidFill>
-                  <a:srgbClr val="20344A"/>
-                </a:solidFill>
-                <a:latin typeface="Courier New"/>
-              </a:rPr>
-              <a:t>result -&gt; Streamlit -&gt; visible records/summary/chart</a:t>
-            </a:r>
-          </a:p>
-        </p:txBody>
-      </p:sp>
-      <p:sp>
-        <p:nvSpPr>
-          <p:cNvPr id="9" name="content:line-70:0"/>
-          <p:cNvSpPr txBox="1"/>
-          <p:nvPr/>
-        </p:nvSpPr>
-        <p:spPr>
-          <a:xfrm>
-            <a:off x="594360" y="2871215"/>
             <a:ext cx="11003279" cy="780288"/>
           </a:xfrm>
           <a:prstGeom prst="rect">
@@ -11172,7 +12287,7 @@
                 </a:solidFill>
                 <a:latin typeface="Arial"/>
               </a:rPr>
-              <a:t>HTTP carries requests and responses between programs; </a:t>
+              <a:t>Instructor demonstrates navigation using the completed </a:t>
             </a:r>
             <a:br/>
             <a:r>
@@ -11182,20 +12297,92 @@
                 </a:solidFill>
                 <a:latin typeface="Arial"/>
               </a:rPr>
-              <a:t>reusable processing functions work without the API or UI.</a:t>
-            </a:r>
-          </a:p>
-        </p:txBody>
-      </p:sp>
-      <p:sp>
-        <p:nvSpPr>
-          <p:cNvPr id="10" name="content:line-71:0"/>
-          <p:cNvSpPr txBox="1"/>
-          <p:nvPr/>
-        </p:nvSpPr>
-        <p:spPr>
-          <a:xfrm>
-            <a:off x="594360" y="3715511"/>
+              <a:t>synthetic example; groups then show their own work.</a:t>
+            </a:r>
+          </a:p>
+        </p:txBody>
+      </p:sp>
+      <p:sp>
+        <p:nvSpPr>
+          <p:cNvPr id="7" name="content:line-59:0"/>
+          <p:cNvSpPr txBox="1"/>
+          <p:nvPr/>
+        </p:nvSpPr>
+        <p:spPr>
+          <a:xfrm>
+            <a:off x="594360" y="2581656"/>
+            <a:ext cx="11003279" cy="1132332"/>
+          </a:xfrm>
+          <a:prstGeom prst="rect">
+            <a:avLst/>
+          </a:prstGeom>
+          <a:noFill/>
+        </p:spPr>
+        <p:txBody>
+          <a:bodyPr wrap="none" anchor="t" lIns="88900" rIns="88900" tIns="38100" bIns="38100">
+            <a:noAutofit/>
+          </a:bodyPr>
+          <a:lstStyle/>
+          <a:p>
+            <a:pPr marL="279400" indent="-215900">
+              <a:lnSpc>
+                <a:spcPts val="2772"/>
+              </a:lnSpc>
+              <a:spcBef>
+                <a:spcPts val="0"/>
+              </a:spcBef>
+              <a:spcAft>
+                <a:spcPts val="0"/>
+              </a:spcAft>
+              <a:defRPr sz="2100">
+                <a:solidFill>
+                  <a:srgbClr val="20344A"/>
+                </a:solidFill>
+                <a:latin typeface="Arial"/>
+              </a:defRPr>
+              <a:buChar char="•"/>
+            </a:pPr>
+            <a:r>
+              <a:rPr sz="2100" b="0" i="0">
+                <a:solidFill>
+                  <a:srgbClr val="20344A"/>
+                </a:solidFill>
+                <a:latin typeface="Arial"/>
+              </a:rPr>
+              <a:t>Open README evidence links: tested commit SHA, CI run, </a:t>
+            </a:r>
+            <a:br/>
+            <a:r>
+              <a:rPr sz="2100" b="0" i="0">
+                <a:solidFill>
+                  <a:srgbClr val="20344A"/>
+                </a:solidFill>
+                <a:latin typeface="Arial"/>
+              </a:rPr>
+              <a:t>captures/logs, authored PRs, and review permalinks. A SHA </a:t>
+            </a:r>
+            <a:br/>
+            <a:r>
+              <a:rPr sz="2100" b="0" i="0">
+                <a:solidFill>
+                  <a:srgbClr val="20344A"/>
+                </a:solidFill>
+                <a:latin typeface="Arial"/>
+              </a:rPr>
+              <a:t>identifies a code version.</a:t>
+            </a:r>
+          </a:p>
+        </p:txBody>
+      </p:sp>
+      <p:sp>
+        <p:nvSpPr>
+          <p:cNvPr id="8" name="content:line-60:0"/>
+          <p:cNvSpPr txBox="1"/>
+          <p:nvPr/>
+        </p:nvSpPr>
+        <p:spPr>
+          <a:xfrm>
+            <a:off x="594360" y="3777996"/>
             <a:ext cx="11003279" cy="780288"/>
           </a:xfrm>
           <a:prstGeom prst="rect">
@@ -11234,79 +12421,31 @@
                 </a:solidFill>
                 <a:latin typeface="Arial"/>
               </a:rPr>
-              <a:t>Instructor follows one request through </a:t>
-            </a:r>
-            <a:r>
-              <a:rPr sz="2100" b="0" i="0">
-                <a:solidFill>
-                  <a:srgbClr val="007F82"/>
-                </a:solidFill>
-                <a:latin typeface="Arial"/>
-                <a:hlinkClick r:id="rId2"/>
-              </a:rPr>
-              <a:t>frontend</a:t>
-            </a:r>
-            <a:r>
-              <a:rPr sz="2100" b="0" i="0">
-                <a:solidFill>
-                  <a:srgbClr val="20344A"/>
-                </a:solidFill>
-                <a:latin typeface="Arial"/>
-              </a:rPr>
-              <a:t>, </a:t>
-            </a:r>
-            <a:r>
-              <a:rPr sz="2100" b="0" i="0">
-                <a:solidFill>
-                  <a:srgbClr val="007F82"/>
-                </a:solidFill>
-                <a:latin typeface="Arial"/>
-                <a:hlinkClick r:id="rId3"/>
-              </a:rPr>
-              <a:t>API</a:t>
-            </a:r>
-            <a:r>
-              <a:rPr sz="2100" b="0" i="0">
-                <a:solidFill>
-                  <a:srgbClr val="20344A"/>
-                </a:solidFill>
-                <a:latin typeface="Arial"/>
-              </a:rPr>
-              <a:t>, and </a:t>
+              <a:t>Instructor records repository, date, demonstrated SHA, </a:t>
             </a:r>
             <a:br/>
             <a:r>
               <a:rPr sz="2100" b="0" i="0">
                 <a:solidFill>
-                  <a:srgbClr val="007F82"/>
-                </a:solidFill>
-                <a:latin typeface="Arial"/>
-                <a:hlinkClick r:id="rId4"/>
-              </a:rPr>
-              <a:t>package</a:t>
-            </a:r>
-            <a:r>
-              <a:rPr sz="2100" b="0" i="0">
-                <a:solidFill>
-                  <a:srgbClr val="20344A"/>
-                </a:solidFill>
-                <a:latin typeface="Arial"/>
-              </a:rPr>
-              <a:t>, checking inputs and returned results.</a:t>
-            </a:r>
-          </a:p>
-        </p:txBody>
-      </p:sp>
-      <p:sp>
-        <p:nvSpPr>
-          <p:cNvPr id="11" name="content:line-72:0"/>
-          <p:cNvSpPr txBox="1"/>
-          <p:nvPr/>
-        </p:nvSpPr>
-        <p:spPr>
-          <a:xfrm>
-            <a:off x="594360" y="4559808"/>
-            <a:ext cx="11003279" cy="780288"/>
+                  <a:srgbClr val="20344A"/>
+                </a:solidFill>
+                <a:latin typeface="Arial"/>
+              </a:rPr>
+              <a:t>members, and GitHub usernames in the checklist.</a:t>
+            </a:r>
+          </a:p>
+        </p:txBody>
+      </p:sp>
+      <p:sp>
+        <p:nvSpPr>
+          <p:cNvPr id="9" name="content:line-61:0"/>
+          <p:cNvSpPr txBox="1"/>
+          <p:nvPr/>
+        </p:nvSpPr>
+        <p:spPr>
+          <a:xfrm>
+            <a:off x="594360" y="4622292"/>
+            <a:ext cx="11003279" cy="1132332"/>
           </a:xfrm>
           <a:prstGeom prst="rect">
             <a:avLst/>
@@ -11344,7 +12483,7 @@
                 </a:solidFill>
                 <a:latin typeface="Arial"/>
               </a:rPr>
-              <a:t>State your dataset, question, and expected behavior briefly </a:t>
+              <a:t>For every mandatory row, inspect the actual artifact and </a:t>
             </a:r>
             <a:br/>
             <a:r>
@@ -11354,7 +12493,17 @@
                 </a:solidFill>
                 <a:latin typeface="Arial"/>
               </a:rPr>
-              <a:t>before tracing your own application.</a:t>
+              <a:t>record Pass/Fail, its URL/path, and an observation. Missing </a:t>
+            </a:r>
+            <a:br/>
+            <a:r>
+              <a:rPr sz="2100" b="0" i="0">
+                <a:solidFill>
+                  <a:srgbClr val="20344A"/>
+                </a:solidFill>
+                <a:latin typeface="Arial"/>
+              </a:rPr>
+              <a:t>evidence fails that requirement.</a:t>
             </a:r>
           </a:p>
         </p:txBody>
@@ -11468,14 +12617,14 @@
               </a:defRPr>
             </a:pPr>
             <a:r>
-              <a:t>SOURCE 9 / 17</a:t>
-            </a:r>
-          </a:p>
-        </p:txBody>
-      </p:sp>
-      <p:sp>
-        <p:nvSpPr>
-          <p:cNvPr id="4" name="title:line-76"/>
+              <a:t>SOURCE 8 / 18</a:t>
+            </a:r>
+          </a:p>
+        </p:txBody>
+      </p:sp>
+      <p:sp>
+        <p:nvSpPr>
+          <p:cNvPr id="4" name="title:line-65"/>
           <p:cNvSpPr txBox="1"/>
           <p:nvPr/>
         </p:nvSpPr>
@@ -11519,7 +12668,7 @@
                 </a:solidFill>
                 <a:latin typeface="Arial"/>
               </a:rPr>
-              <a:t>Show real startup and CSV results</a:t>
+              <a:t>Inspect environment and configuration</a:t>
             </a:r>
           </a:p>
         </p:txBody>
@@ -11571,13 +12720,218 @@
       </p:sp>
       <p:sp>
         <p:nvSpPr>
-          <p:cNvPr id="6" name="content:line-78:0"/>
+          <p:cNvPr id="6" name="content:line-67:0"/>
           <p:cNvSpPr txBox="1"/>
           <p:nvPr/>
         </p:nvSpPr>
         <p:spPr>
           <a:xfrm>
             <a:off x="594360" y="1737360"/>
+            <a:ext cx="11003279" cy="780288"/>
+          </a:xfrm>
+          <a:prstGeom prst="rect">
+            <a:avLst/>
+          </a:prstGeom>
+          <a:noFill/>
+        </p:spPr>
+        <p:txBody>
+          <a:bodyPr wrap="none" anchor="t" lIns="88900" rIns="88900" tIns="38100" bIns="38100">
+            <a:noAutofit/>
+          </a:bodyPr>
+          <a:lstStyle/>
+          <a:p>
+            <a:pPr marL="279400" indent="-215900">
+              <a:lnSpc>
+                <a:spcPts val="2772"/>
+              </a:lnSpc>
+              <a:spcBef>
+                <a:spcPts val="0"/>
+              </a:spcBef>
+              <a:spcAft>
+                <a:spcPts val="0"/>
+              </a:spcAft>
+              <a:defRPr sz="2100">
+                <a:solidFill>
+                  <a:srgbClr val="20344A"/>
+                </a:solidFill>
+                <a:latin typeface="Arial"/>
+              </a:defRPr>
+              <a:buChar char="•"/>
+            </a:pPr>
+            <a:r>
+              <a:rPr sz="2100" b="0" i="0">
+                <a:solidFill>
+                  <a:srgbClr val="20344A"/>
+                </a:solidFill>
+                <a:latin typeface="Arial"/>
+              </a:rPr>
+              <a:t>Show Python 3.12 in an active venv, its interpreter path, and </a:t>
+            </a:r>
+            <a:br/>
+            <a:r>
+              <a:rPr sz="2100" b="0" i="0">
+                <a:solidFill>
+                  <a:srgbClr val="20344A"/>
+                </a:solidFill>
+                <a:latin typeface="Arial"/>
+              </a:rPr>
+              <a:t>the installed reusable package working locally.</a:t>
+            </a:r>
+          </a:p>
+        </p:txBody>
+      </p:sp>
+      <p:sp>
+        <p:nvSpPr>
+          <p:cNvPr id="7" name="content:line-68:0"/>
+          <p:cNvSpPr txBox="1"/>
+          <p:nvPr/>
+        </p:nvSpPr>
+        <p:spPr>
+          <a:xfrm>
+            <a:off x="594360" y="2581656"/>
+            <a:ext cx="11003279" cy="780288"/>
+          </a:xfrm>
+          <a:prstGeom prst="rect">
+            <a:avLst/>
+          </a:prstGeom>
+          <a:noFill/>
+        </p:spPr>
+        <p:txBody>
+          <a:bodyPr wrap="none" anchor="t" lIns="88900" rIns="88900" tIns="38100" bIns="38100">
+            <a:noAutofit/>
+          </a:bodyPr>
+          <a:lstStyle/>
+          <a:p>
+            <a:pPr marL="279400" indent="-215900">
+              <a:lnSpc>
+                <a:spcPts val="2772"/>
+              </a:lnSpc>
+              <a:spcBef>
+                <a:spcPts val="0"/>
+              </a:spcBef>
+              <a:spcAft>
+                <a:spcPts val="0"/>
+              </a:spcAft>
+              <a:defRPr sz="2100">
+                <a:solidFill>
+                  <a:srgbClr val="20344A"/>
+                </a:solidFill>
+                <a:latin typeface="Arial"/>
+              </a:defRPr>
+              <a:buChar char="•"/>
+            </a:pPr>
+            <a:r>
+              <a:rPr sz="2100" b="0" i="0">
+                <a:solidFill>
+                  <a:srgbClr val="20344A"/>
+                </a:solidFill>
+                <a:latin typeface="Arial"/>
+              </a:rPr>
+              <a:t>Open dependency declarations in </a:t>
+            </a:r>
+            <a:r>
+              <a:rPr sz="2100" b="0" i="0">
+                <a:solidFill>
+                  <a:srgbClr val="007F82"/>
+                </a:solidFill>
+                <a:latin typeface="Arial"/>
+                <a:hlinkClick r:id="rId2"/>
+              </a:rPr>
+              <a:t>backend/pyproject.toml</a:t>
+            </a:r>
+            <a:r>
+              <a:rPr sz="2100" b="0" i="0">
+                <a:solidFill>
+                  <a:srgbClr val="20344A"/>
+                </a:solidFill>
+                <a:latin typeface="Arial"/>
+              </a:rPr>
+              <a:t>; </a:t>
+            </a:r>
+            <a:br/>
+            <a:r>
+              <a:rPr sz="2100" b="0" i="0">
+                <a:solidFill>
+                  <a:srgbClr val="20344A"/>
+                </a:solidFill>
+                <a:latin typeface="Arial"/>
+              </a:rPr>
+              <a:t>explain how the environment supplies these packages.</a:t>
+            </a:r>
+          </a:p>
+        </p:txBody>
+      </p:sp>
+      <p:sp>
+        <p:nvSpPr>
+          <p:cNvPr id="8" name="content:line-69:0"/>
+          <p:cNvSpPr txBox="1"/>
+          <p:nvPr/>
+        </p:nvSpPr>
+        <p:spPr>
+          <a:xfrm>
+            <a:off x="594360" y="3425952"/>
+            <a:ext cx="11003279" cy="780288"/>
+          </a:xfrm>
+          <a:prstGeom prst="rect">
+            <a:avLst/>
+          </a:prstGeom>
+          <a:noFill/>
+        </p:spPr>
+        <p:txBody>
+          <a:bodyPr wrap="none" anchor="t" lIns="88900" rIns="88900" tIns="38100" bIns="38100">
+            <a:noAutofit/>
+          </a:bodyPr>
+          <a:lstStyle/>
+          <a:p>
+            <a:pPr marL="279400" indent="-215900">
+              <a:lnSpc>
+                <a:spcPts val="2772"/>
+              </a:lnSpc>
+              <a:spcBef>
+                <a:spcPts val="0"/>
+              </a:spcBef>
+              <a:spcAft>
+                <a:spcPts val="0"/>
+              </a:spcAft>
+              <a:defRPr sz="2100">
+                <a:solidFill>
+                  <a:srgbClr val="20344A"/>
+                </a:solidFill>
+                <a:latin typeface="Arial"/>
+              </a:defRPr>
+              <a:buChar char="•"/>
+            </a:pPr>
+            <a:r>
+              <a:rPr sz="2100" b="0" i="0">
+                <a:solidFill>
+                  <a:srgbClr val="20344A"/>
+                </a:solidFill>
+                <a:latin typeface="Arial"/>
+              </a:rPr>
+              <a:t>Open ignore rules and shareable .env.example; verify local .env, </a:t>
+            </a:r>
+            <a:br/>
+            <a:r>
+              <a:rPr sz="2100" b="0" i="0">
+                <a:solidFill>
+                  <a:srgbClr val="20344A"/>
+                </a:solidFill>
+                <a:latin typeface="Arial"/>
+              </a:rPr>
+              <a:t>credentials, and .venv stay out of tracked files/history.</a:t>
+            </a:r>
+          </a:p>
+        </p:txBody>
+      </p:sp>
+      <p:sp>
+        <p:nvSpPr>
+          <p:cNvPr id="9" name="content:line-70:0"/>
+          <p:cNvSpPr txBox="1"/>
+          <p:nvPr/>
+        </p:nvSpPr>
+        <p:spPr>
+          <a:xfrm>
+            <a:off x="594360" y="4270248"/>
             <a:ext cx="11003279" cy="1132332"/>
           </a:xfrm>
           <a:prstGeom prst="rect">
@@ -11616,25 +12970,7 @@
                 </a:solidFill>
                 <a:latin typeface="Arial"/>
               </a:rPr>
-              <a:t>Run </a:t>
-            </a:r>
-            <a:r>
-              <a:rPr sz="2100" b="0" i="0">
-                <a:solidFill>
-                  <a:srgbClr val="20344A"/>
-                </a:solidFill>
-                <a:latin typeface="Courier New"/>
-              </a:rPr>
-              <a:t>docker compose up --build</a:t>
-            </a:r>
-            <a:r>
-              <a:rPr sz="2100" b="0" i="0">
-                <a:solidFill>
-                  <a:srgbClr val="20344A"/>
-                </a:solidFill>
-                <a:latin typeface="Arial"/>
-              </a:rPr>
-              <a:t> live; show frontend/backend </a:t>
+              <a:t>Explain local versus container settings without showing </a:t>
             </a:r>
             <a:br/>
             <a:r>
@@ -11644,269 +12980,27 @@
                 </a:solidFill>
                 <a:latin typeface="Arial"/>
               </a:rPr>
-              <a:t>running, backend readiness, and relevant logs or health </a:t>
+              <a:t>secrets. Instructor inspects files and execution, alongside the </a:t>
             </a:r>
             <a:br/>
             <a:r>
               <a:rPr sz="2100" b="0" i="0">
                 <a:solidFill>
-                  <a:srgbClr val="20344A"/>
-                </a:solidFill>
-                <a:latin typeface="Arial"/>
-              </a:rPr>
-              <a:t>responses.</a:t>
-            </a:r>
-          </a:p>
-        </p:txBody>
-      </p:sp>
-      <p:sp>
-        <p:nvSpPr>
-          <p:cNvPr id="7" name="content:line-79:0"/>
-          <p:cNvSpPr txBox="1"/>
-          <p:nvPr/>
-        </p:nvSpPr>
-        <p:spPr>
-          <a:xfrm>
-            <a:off x="594360" y="2933700"/>
-            <a:ext cx="11003279" cy="1132332"/>
-          </a:xfrm>
-          <a:prstGeom prst="rect">
-            <a:avLst/>
-          </a:prstGeom>
-          <a:noFill/>
-        </p:spPr>
-        <p:txBody>
-          <a:bodyPr wrap="none" anchor="t" lIns="88900" rIns="88900" tIns="38100" bIns="38100">
-            <a:noAutofit/>
-          </a:bodyPr>
-          <a:lstStyle/>
-          <a:p>
-            <a:pPr marL="279400" indent="-215900">
-              <a:lnSpc>
-                <a:spcPts val="2772"/>
-              </a:lnSpc>
-              <a:spcBef>
-                <a:spcPts val="0"/>
-              </a:spcBef>
-              <a:spcAft>
-                <a:spcPts val="0"/>
-              </a:spcAft>
-              <a:defRPr sz="2100">
-                <a:solidFill>
-                  <a:srgbClr val="20344A"/>
-                </a:solidFill>
-                <a:latin typeface="Arial"/>
-              </a:defRPr>
-              <a:buChar char="•"/>
-            </a:pPr>
-            <a:r>
-              <a:rPr sz="2100" b="0" i="0">
-                <a:solidFill>
-                  <a:srgbClr val="20344A"/>
-                </a:solidFill>
-                <a:latin typeface="Arial"/>
-              </a:rPr>
-              <a:t>Browser opens </a:t>
-            </a:r>
-            <a:r>
-              <a:rPr sz="2100" b="0" i="0">
-                <a:solidFill>
-                  <a:srgbClr val="20344A"/>
-                </a:solidFill>
-                <a:latin typeface="Courier New"/>
-              </a:rPr>
-              <a:t>http://127.0.0.1:8501</a:t>
-            </a:r>
-            <a:r>
-              <a:rPr sz="2100" b="0" i="0">
-                <a:solidFill>
-                  <a:srgbClr val="20344A"/>
-                </a:solidFill>
-                <a:latin typeface="Arial"/>
-              </a:rPr>
-              <a:t>; frontend calls </a:t>
-            </a:r>
-            <a:br/>
-            <a:r>
-              <a:rPr sz="2100" b="0" i="0">
-                <a:solidFill>
-                  <a:srgbClr val="20344A"/>
-                </a:solidFill>
-                <a:latin typeface="Courier New"/>
-              </a:rPr>
-              <a:t>http://backend:8000</a:t>
-            </a:r>
-            <a:r>
-              <a:rPr sz="2100" b="0" i="0">
-                <a:solidFill>
-                  <a:srgbClr val="20344A"/>
-                </a:solidFill>
-                <a:latin typeface="Arial"/>
-              </a:rPr>
-              <a:t> inside Compose. There, localhost means </a:t>
-            </a:r>
-            <a:br/>
-            <a:r>
-              <a:rPr sz="2100" b="0" i="0">
-                <a:solidFill>
-                  <a:srgbClr val="20344A"/>
-                </a:solidFill>
-                <a:latin typeface="Arial"/>
-              </a:rPr>
-              <a:t>the frontend itself.</a:t>
-            </a:r>
-          </a:p>
-        </p:txBody>
-      </p:sp>
-      <p:sp>
-        <p:nvSpPr>
-          <p:cNvPr id="8" name="content:line-80:0"/>
-          <p:cNvSpPr txBox="1"/>
-          <p:nvPr/>
-        </p:nvSpPr>
-        <p:spPr>
-          <a:xfrm>
-            <a:off x="594360" y="4130040"/>
-            <a:ext cx="11003279" cy="1132332"/>
-          </a:xfrm>
-          <a:prstGeom prst="rect">
-            <a:avLst/>
-          </a:prstGeom>
-          <a:noFill/>
-        </p:spPr>
-        <p:txBody>
-          <a:bodyPr wrap="none" anchor="t" lIns="88900" rIns="88900" tIns="38100" bIns="38100">
-            <a:noAutofit/>
-          </a:bodyPr>
-          <a:lstStyle/>
-          <a:p>
-            <a:pPr marL="279400" indent="-215900">
-              <a:lnSpc>
-                <a:spcPts val="2772"/>
-              </a:lnSpc>
-              <a:spcBef>
-                <a:spcPts val="0"/>
-              </a:spcBef>
-              <a:spcAft>
-                <a:spcPts val="0"/>
-              </a:spcAft>
-              <a:defRPr sz="2100">
-                <a:solidFill>
-                  <a:srgbClr val="20344A"/>
-                </a:solidFill>
-                <a:latin typeface="Arial"/>
-              </a:defRPr>
-              <a:buChar char="•"/>
-            </a:pPr>
-            <a:r>
-              <a:rPr sz="2100" b="0" i="0">
-                <a:solidFill>
-                  <a:srgbClr val="20344A"/>
-                </a:solidFill>
-                <a:latin typeface="Arial"/>
-              </a:rPr>
-              <a:t>Upload and process CSVs; show results or a chart. In the </a:t>
-            </a:r>
-            <a:br/>
-            <a:r>
-              <a:rPr sz="2100" b="0" i="0">
-                <a:solidFill>
-                  <a:srgbClr val="20344A"/>
-                </a:solidFill>
-                <a:latin typeface="Arial"/>
-              </a:rPr>
-              <a:t>supplied example, upload DM and LB: 24 participants, 96 </a:t>
-            </a:r>
-            <a:br/>
-            <a:r>
-              <a:rPr sz="2100" b="0" i="0">
-                <a:solidFill>
-                  <a:srgbClr val="20344A"/>
-                </a:solidFill>
-                <a:latin typeface="Arial"/>
-              </a:rPr>
-              <a:t>records, 95 observed, 1 missing.</a:t>
-            </a:r>
-          </a:p>
-        </p:txBody>
-      </p:sp>
-      <p:sp>
-        <p:nvSpPr>
-          <p:cNvPr id="9" name="content:line-81:0"/>
-          <p:cNvSpPr txBox="1"/>
-          <p:nvPr/>
-        </p:nvSpPr>
-        <p:spPr>
-          <a:xfrm>
-            <a:off x="594360" y="5326380"/>
-            <a:ext cx="11003279" cy="780288"/>
-          </a:xfrm>
-          <a:prstGeom prst="rect">
-            <a:avLst/>
-          </a:prstGeom>
-          <a:noFill/>
-        </p:spPr>
-        <p:txBody>
-          <a:bodyPr wrap="none" anchor="t" lIns="88900" rIns="88900" tIns="38100" bIns="38100">
-            <a:noAutofit/>
-          </a:bodyPr>
-          <a:lstStyle/>
-          <a:p>
-            <a:pPr marL="279400" indent="-215900">
-              <a:lnSpc>
-                <a:spcPts val="2772"/>
-              </a:lnSpc>
-              <a:spcBef>
-                <a:spcPts val="0"/>
-              </a:spcBef>
-              <a:spcAft>
-                <a:spcPts val="0"/>
-              </a:spcAft>
-              <a:defRPr sz="2100">
-                <a:solidFill>
-                  <a:srgbClr val="20344A"/>
-                </a:solidFill>
-                <a:latin typeface="Arial"/>
-              </a:defRPr>
-              <a:buChar char="•"/>
-            </a:pPr>
-            <a:r>
-              <a:rPr sz="2100" b="0" i="0">
-                <a:solidFill>
-                  <a:srgbClr val="20344A"/>
-                </a:solidFill>
-                <a:latin typeface="Arial"/>
-              </a:rPr>
-              <a:t>Instructor inspects actual service communication and output, </a:t>
-            </a:r>
-            <a:br/>
-            <a:r>
-              <a:rPr sz="2100" b="0" i="0">
-                <a:solidFill>
-                  <a:srgbClr val="20344A"/>
-                </a:solidFill>
-                <a:latin typeface="Arial"/>
-              </a:rPr>
-              <a:t>not only configuration. Follow the </a:t>
-            </a:r>
-            <a:r>
-              <a:rPr sz="2100" b="0" i="0">
-                <a:solidFill>
                   <a:srgbClr val="007F82"/>
                 </a:solidFill>
                 <a:latin typeface="Arial"/>
-                <a:hlinkClick r:id="rId2"/>
-              </a:rPr>
-              <a:t>Compose guide</a:t>
-            </a:r>
-            <a:r>
-              <a:rPr sz="2100" b="0" i="0">
-                <a:solidFill>
-                  <a:srgbClr val="20344A"/>
-                </a:solidFill>
-                <a:latin typeface="Arial"/>
-              </a:rPr>
-              <a:t>; stop </a:t>
+                <a:hlinkClick r:id="rId3"/>
+              </a:rPr>
+              <a:t>setup guide</a:t>
+            </a:r>
+            <a:r>
+              <a:rPr sz="2100" b="0" i="0">
+                <a:solidFill>
+                  <a:srgbClr val="20344A"/>
+                </a:solidFill>
+                <a:latin typeface="Arial"/>
+              </a:rPr>
+              <a:t>.</a:t>
             </a:r>
           </a:p>
         </p:txBody>

--- a/materials/slides/session-5.pptx
+++ b/materials/slides/session-5.pptx
@@ -25,7 +25,6 @@
     <p:sldId id="273" r:id="rId24"/>
     <p:sldId id="274" r:id="rId25"/>
     <p:sldId id="275" r:id="rId26"/>
-    <p:sldId id="276" r:id="rId27"/>
   </p:sldIdLst>
   <p:sldSz cx="12191999" cy="6858000" type="screen4x3"/>
   <p:notesSz cx="6858000" cy="9144000"/>
@@ -3481,7 +3480,7 @@
                 </a:solidFill>
                 <a:latin typeface="Arial"/>
               </a:rPr>
-              <a:t>Use your own repository, dataset, and question in groups of </a:t>
+              <a:t>Use your own Backend repo, dataset, and question in groups of </a:t>
             </a:r>
             <a:br/>
             <a:r>
@@ -3825,7 +3824,7 @@
                 </a:solidFill>
                 <a:latin typeface="Courier New"/>
               </a:rPr>
-              <a:t>CSV upload -&gt; Streamlit -&gt; HTTP request -&gt; FastAPI</a:t>
+              <a:t>CSV upload -&gt; Frontend page -&gt; HTTP request -&gt; FastAPI</a:t>
             </a:r>
           </a:p>
         </p:txBody>
@@ -3878,7 +3877,7 @@
                 </a:solidFill>
                 <a:latin typeface="Courier New"/>
               </a:rPr>
-              <a:t>FastAPI -&gt; reusable stat_core processing -&gt; result</a:t>
+              <a:t>FastAPI -&gt; package processing function -&gt; result</a:t>
             </a:r>
           </a:p>
         </p:txBody>
@@ -3931,7 +3930,7 @@
                 </a:solidFill>
                 <a:latin typeface="Courier New"/>
               </a:rPr>
-              <a:t>result -&gt; Streamlit -&gt; visible records/summary/chart</a:t>
+              <a:t>result -&gt; page -&gt; visible table or chart</a:t>
             </a:r>
           </a:p>
         </p:txBody>
@@ -3983,7 +3982,7 @@
                 </a:solidFill>
                 <a:latin typeface="Arial"/>
               </a:rPr>
-              <a:t>HTTP carries requests and responses between programs; </a:t>
+              <a:t>HTTP carries requests and responses between programs; the </a:t>
             </a:r>
             <a:br/>
             <a:r>
@@ -3993,7 +3992,7 @@
                 </a:solidFill>
                 <a:latin typeface="Arial"/>
               </a:rPr>
-              <a:t>reusable processing functions work without the API or UI.</a:t>
+              <a:t>processing function works without the API or the page.</a:t>
             </a:r>
           </a:p>
         </p:txBody>
@@ -4007,7 +4006,7 @@
         <p:spPr>
           <a:xfrm>
             <a:off x="594360" y="3715511"/>
-            <a:ext cx="11003279" cy="780288"/>
+            <a:ext cx="11003279" cy="1132332"/>
           </a:xfrm>
           <a:prstGeom prst="rect">
             <a:avLst/>
@@ -4045,65 +4044,27 @@
                 </a:solidFill>
                 <a:latin typeface="Arial"/>
               </a:rPr>
-              <a:t>Instructor follows one request through </a:t>
-            </a:r>
-            <a:r>
-              <a:rPr sz="2100" b="0" i="0">
-                <a:solidFill>
-                  <a:srgbClr val="007F82"/>
-                </a:solidFill>
-                <a:latin typeface="Arial"/>
-                <a:hlinkClick r:id="rId2"/>
-              </a:rPr>
-              <a:t>frontend</a:t>
-            </a:r>
-            <a:r>
-              <a:rPr sz="2100" b="0" i="0">
-                <a:solidFill>
-                  <a:srgbClr val="20344A"/>
-                </a:solidFill>
-                <a:latin typeface="Arial"/>
-              </a:rPr>
-              <a:t>, </a:t>
-            </a:r>
-            <a:r>
-              <a:rPr sz="2100" b="0" i="0">
-                <a:solidFill>
-                  <a:srgbClr val="007F82"/>
-                </a:solidFill>
-                <a:latin typeface="Arial"/>
-                <a:hlinkClick r:id="rId3"/>
-              </a:rPr>
-              <a:t>API</a:t>
-            </a:r>
-            <a:r>
-              <a:rPr sz="2100" b="0" i="0">
-                <a:solidFill>
-                  <a:srgbClr val="20344A"/>
-                </a:solidFill>
-                <a:latin typeface="Arial"/>
-              </a:rPr>
-              <a:t>, and </a:t>
+              <a:t>Instructor follows one request through the Frontend repo's </a:t>
             </a:r>
             <a:br/>
             <a:r>
               <a:rPr sz="2100" b="0" i="0">
                 <a:solidFill>
-                  <a:srgbClr val="007F82"/>
-                </a:solidFill>
-                <a:latin typeface="Arial"/>
-                <a:hlinkClick r:id="rId4"/>
-              </a:rPr>
-              <a:t>package</a:t>
-            </a:r>
-            <a:r>
-              <a:rPr sz="2100" b="0" i="0">
-                <a:solidFill>
-                  <a:srgbClr val="20344A"/>
-                </a:solidFill>
-                <a:latin typeface="Arial"/>
-              </a:rPr>
-              <a:t>, checking inputs and returned results.</a:t>
+                  <a:srgbClr val="20344A"/>
+                </a:solidFill>
+                <a:latin typeface="Arial"/>
+              </a:rPr>
+              <a:t>client, your API module, and your package, checking inputs and </a:t>
+            </a:r>
+            <a:br/>
+            <a:r>
+              <a:rPr sz="2100" b="0" i="0">
+                <a:solidFill>
+                  <a:srgbClr val="20344A"/>
+                </a:solidFill>
+                <a:latin typeface="Arial"/>
+              </a:rPr>
+              <a:t>returned results.</a:t>
             </a:r>
           </a:p>
         </p:txBody>
@@ -4116,7 +4077,7 @@
         </p:nvSpPr>
         <p:spPr>
           <a:xfrm>
-            <a:off x="594360" y="4559808"/>
+            <a:off x="594360" y="4911851"/>
             <a:ext cx="11003279" cy="780288"/>
           </a:xfrm>
           <a:prstGeom prst="rect">
@@ -4445,7 +4406,7 @@
                 </a:solidFill>
                 <a:latin typeface="Arial"/>
               </a:rPr>
-              <a:t> live; show frontend/backend </a:t>
+              <a:t> live; show both services </a:t>
             </a:r>
             <a:br/>
             <a:r>
@@ -4535,7 +4496,7 @@
                 </a:solidFill>
                 <a:latin typeface="Arial"/>
               </a:rPr>
-              <a:t>; frontend calls </a:t>
+              <a:t>; the page calls </a:t>
             </a:r>
             <a:br/>
             <a:r>
@@ -4564,7 +4525,7 @@
                 </a:solidFill>
                 <a:latin typeface="Arial"/>
               </a:rPr>
-              <a:t>the frontend itself.</a:t>
+              <a:t>the page itself.</a:t>
             </a:r>
           </a:p>
         </p:txBody>
@@ -4578,6 +4539,58 @@
         <p:spPr>
           <a:xfrm>
             <a:off x="594360" y="4130040"/>
+            <a:ext cx="11003279" cy="428244"/>
+          </a:xfrm>
+          <a:prstGeom prst="rect">
+            <a:avLst/>
+          </a:prstGeom>
+          <a:noFill/>
+        </p:spPr>
+        <p:txBody>
+          <a:bodyPr wrap="none" anchor="t" lIns="88900" rIns="88900" tIns="38100" bIns="38100">
+            <a:noAutofit/>
+          </a:bodyPr>
+          <a:lstStyle/>
+          <a:p>
+            <a:pPr marL="279400" indent="-215900">
+              <a:lnSpc>
+                <a:spcPts val="2772"/>
+              </a:lnSpc>
+              <a:spcBef>
+                <a:spcPts val="0"/>
+              </a:spcBef>
+              <a:spcAft>
+                <a:spcPts val="0"/>
+              </a:spcAft>
+              <a:defRPr sz="2100">
+                <a:solidFill>
+                  <a:srgbClr val="20344A"/>
+                </a:solidFill>
+                <a:latin typeface="Arial"/>
+              </a:defRPr>
+              <a:buChar char="•"/>
+            </a:pPr>
+            <a:r>
+              <a:rPr sz="2100" b="0" i="0">
+                <a:solidFill>
+                  <a:srgbClr val="20344A"/>
+                </a:solidFill>
+                <a:latin typeface="Arial"/>
+              </a:rPr>
+              <a:t>Upload your group's CSV and show the results or a chart.</a:t>
+            </a:r>
+          </a:p>
+        </p:txBody>
+      </p:sp>
+      <p:sp>
+        <p:nvSpPr>
+          <p:cNvPr id="9" name="content:line-93:0"/>
+          <p:cNvSpPr txBox="1"/>
+          <p:nvPr/>
+        </p:nvSpPr>
+        <p:spPr>
+          <a:xfrm>
+            <a:off x="594360" y="4622292"/>
             <a:ext cx="11003279" cy="1132332"/>
           </a:xfrm>
           <a:prstGeom prst="rect">
@@ -4616,7 +4629,7 @@
                 </a:solidFill>
                 <a:latin typeface="Arial"/>
               </a:rPr>
-              <a:t>Upload and process CSVs; show results or a chart. In the </a:t>
+              <a:t>Instructor inspects actual service communication and output, </a:t>
             </a:r>
             <a:br/>
             <a:r>
@@ -4626,7 +4639,7 @@
                 </a:solidFill>
                 <a:latin typeface="Arial"/>
               </a:rPr>
-              <a:t>supplied example, upload DM and LB: 24 participants, 96 </a:t>
+              <a:t>not only configuration. Stop standalone servers using the same </a:t>
             </a:r>
             <a:br/>
             <a:r>
@@ -4636,88 +4649,7 @@
                 </a:solidFill>
                 <a:latin typeface="Arial"/>
               </a:rPr>
-              <a:t>records, 95 observed, 1 missing.</a:t>
-            </a:r>
-          </a:p>
-        </p:txBody>
-      </p:sp>
-      <p:sp>
-        <p:nvSpPr>
-          <p:cNvPr id="9" name="content:line-93:0"/>
-          <p:cNvSpPr txBox="1"/>
-          <p:nvPr/>
-        </p:nvSpPr>
-        <p:spPr>
-          <a:xfrm>
-            <a:off x="594360" y="5326380"/>
-            <a:ext cx="11003279" cy="780288"/>
-          </a:xfrm>
-          <a:prstGeom prst="rect">
-            <a:avLst/>
-          </a:prstGeom>
-          <a:noFill/>
-        </p:spPr>
-        <p:txBody>
-          <a:bodyPr wrap="none" anchor="t" lIns="88900" rIns="88900" tIns="38100" bIns="38100">
-            <a:noAutofit/>
-          </a:bodyPr>
-          <a:lstStyle/>
-          <a:p>
-            <a:pPr marL="279400" indent="-215900">
-              <a:lnSpc>
-                <a:spcPts val="2772"/>
-              </a:lnSpc>
-              <a:spcBef>
-                <a:spcPts val="0"/>
-              </a:spcBef>
-              <a:spcAft>
-                <a:spcPts val="0"/>
-              </a:spcAft>
-              <a:defRPr sz="2100">
-                <a:solidFill>
-                  <a:srgbClr val="20344A"/>
-                </a:solidFill>
-                <a:latin typeface="Arial"/>
-              </a:defRPr>
-              <a:buChar char="•"/>
-            </a:pPr>
-            <a:r>
-              <a:rPr sz="2100" b="0" i="0">
-                <a:solidFill>
-                  <a:srgbClr val="20344A"/>
-                </a:solidFill>
-                <a:latin typeface="Arial"/>
-              </a:rPr>
-              <a:t>Instructor inspects actual service communication and output, </a:t>
-            </a:r>
-            <a:br/>
-            <a:r>
-              <a:rPr sz="2100" b="0" i="0">
-                <a:solidFill>
-                  <a:srgbClr val="20344A"/>
-                </a:solidFill>
-                <a:latin typeface="Arial"/>
-              </a:rPr>
-              <a:t>not only configuration. Follow the </a:t>
-            </a:r>
-            <a:r>
-              <a:rPr sz="2100" b="0" i="0">
-                <a:solidFill>
-                  <a:srgbClr val="007F82"/>
-                </a:solidFill>
-                <a:latin typeface="Arial"/>
-                <a:hlinkClick r:id="rId2"/>
-              </a:rPr>
-              <a:t>Compose guide</a:t>
-            </a:r>
-            <a:r>
-              <a:rPr sz="2100" b="0" i="0">
-                <a:solidFill>
-                  <a:srgbClr val="20344A"/>
-                </a:solidFill>
-                <a:latin typeface="Arial"/>
-              </a:rPr>
-              <a:t>; stop </a:t>
+              <a:t>ports first.</a:t>
             </a:r>
           </a:p>
         </p:txBody>
@@ -4831,14 +4763,14 @@
               </a:defRPr>
             </a:pPr>
             <a:r>
-              <a:t>SOURCE 10 / 18  ·  CONTINUED 2</a:t>
-            </a:r>
-          </a:p>
-        </p:txBody>
-      </p:sp>
-      <p:sp>
-        <p:nvSpPr>
-          <p:cNvPr id="4" name="title:line-88"/>
+              <a:t>SOURCE 11 / 18</a:t>
+            </a:r>
+          </a:p>
+        </p:txBody>
+      </p:sp>
+      <p:sp>
+        <p:nvSpPr>
+          <p:cNvPr id="4" name="title:line-97"/>
           <p:cNvSpPr txBox="1"/>
           <p:nvPr/>
         </p:nvSpPr>
@@ -4882,7 +4814,7 @@
                 </a:solidFill>
                 <a:latin typeface="Arial"/>
               </a:rPr>
-              <a:t>Show real startup and CSV results</a:t>
+              <a:t>Show validation and its test</a:t>
             </a:r>
           </a:p>
         </p:txBody>
@@ -4934,14 +4866,14 @@
       </p:sp>
       <p:sp>
         <p:nvSpPr>
-          <p:cNvPr id="6" name="content:line-93:2"/>
+          <p:cNvPr id="6" name="content:line-99:0"/>
           <p:cNvSpPr txBox="1"/>
           <p:nvPr/>
         </p:nvSpPr>
         <p:spPr>
           <a:xfrm>
             <a:off x="594360" y="1737360"/>
-            <a:ext cx="11003279" cy="428244"/>
+            <a:ext cx="11003279" cy="780288"/>
           </a:xfrm>
           <a:prstGeom prst="rect">
             <a:avLst/>
@@ -4970,16 +4902,212 @@
                 </a:solidFill>
                 <a:latin typeface="Arial"/>
               </a:defRPr>
-              <a:buChar char=" "/>
-            </a:pPr>
-            <a:r>
-              <a:rPr sz="2100" b="0" i="0">
-                <a:solidFill>
-                  <a:srgbClr val="20344A"/>
-                </a:solidFill>
-                <a:latin typeface="Arial"/>
-              </a:rPr>
-              <a:t>standalone servers using the same ports first.</a:t>
+              <a:buChar char="•"/>
+            </a:pPr>
+            <a:r>
+              <a:rPr sz="2100" b="0" i="0">
+                <a:solidFill>
+                  <a:srgbClr val="20344A"/>
+                </a:solidFill>
+                <a:latin typeface="Arial"/>
+              </a:rPr>
+              <a:t>Demonstrate one invalid input rejected clearly; it must not </a:t>
+            </a:r>
+            <a:br/>
+            <a:r>
+              <a:rPr sz="2100" b="0" i="0">
+                <a:solidFill>
+                  <a:srgbClr val="20344A"/>
+                </a:solidFill>
+                <a:latin typeface="Arial"/>
+              </a:rPr>
+              <a:t>appear as a successful result.</a:t>
+            </a:r>
+          </a:p>
+        </p:txBody>
+      </p:sp>
+      <p:sp>
+        <p:nvSpPr>
+          <p:cNvPr id="7" name="content:line-100:0"/>
+          <p:cNvSpPr txBox="1"/>
+          <p:nvPr/>
+        </p:nvSpPr>
+        <p:spPr>
+          <a:xfrm>
+            <a:off x="594360" y="2581656"/>
+            <a:ext cx="11003279" cy="780288"/>
+          </a:xfrm>
+          <a:prstGeom prst="rect">
+            <a:avLst/>
+          </a:prstGeom>
+          <a:noFill/>
+        </p:spPr>
+        <p:txBody>
+          <a:bodyPr wrap="none" anchor="t" lIns="88900" rIns="88900" tIns="38100" bIns="38100">
+            <a:noAutofit/>
+          </a:bodyPr>
+          <a:lstStyle/>
+          <a:p>
+            <a:pPr marL="279400" indent="-215900">
+              <a:lnSpc>
+                <a:spcPts val="2772"/>
+              </a:lnSpc>
+              <a:spcBef>
+                <a:spcPts val="0"/>
+              </a:spcBef>
+              <a:spcAft>
+                <a:spcPts val="0"/>
+              </a:spcAft>
+              <a:defRPr sz="2100">
+                <a:solidFill>
+                  <a:srgbClr val="20344A"/>
+                </a:solidFill>
+                <a:latin typeface="Arial"/>
+              </a:defRPr>
+              <a:buChar char="•"/>
+            </a:pPr>
+            <a:r>
+              <a:rPr sz="2100" b="0" i="0">
+                <a:solidFill>
+                  <a:srgbClr val="20344A"/>
+                </a:solidFill>
+                <a:latin typeface="Arial"/>
+              </a:rPr>
+              <a:t>Explain the rule: expected types, allowed bounds, or </a:t>
+            </a:r>
+            <a:br/>
+            <a:r>
+              <a:rPr sz="2100" b="0" i="0">
+                <a:solidFill>
+                  <a:srgbClr val="20344A"/>
+                </a:solidFill>
+                <a:latin typeface="Arial"/>
+              </a:rPr>
+              <a:t>missing-value handling. Missing does not mean zero.</a:t>
+            </a:r>
+          </a:p>
+        </p:txBody>
+      </p:sp>
+      <p:sp>
+        <p:nvSpPr>
+          <p:cNvPr id="8" name="content:line-101:0"/>
+          <p:cNvSpPr txBox="1"/>
+          <p:nvPr/>
+        </p:nvSpPr>
+        <p:spPr>
+          <a:xfrm>
+            <a:off x="594360" y="3425952"/>
+            <a:ext cx="11003279" cy="780288"/>
+          </a:xfrm>
+          <a:prstGeom prst="rect">
+            <a:avLst/>
+          </a:prstGeom>
+          <a:noFill/>
+        </p:spPr>
+        <p:txBody>
+          <a:bodyPr wrap="none" anchor="t" lIns="88900" rIns="88900" tIns="38100" bIns="38100">
+            <a:noAutofit/>
+          </a:bodyPr>
+          <a:lstStyle/>
+          <a:p>
+            <a:pPr marL="279400" indent="-215900">
+              <a:lnSpc>
+                <a:spcPts val="2772"/>
+              </a:lnSpc>
+              <a:spcBef>
+                <a:spcPts val="0"/>
+              </a:spcBef>
+              <a:spcAft>
+                <a:spcPts val="0"/>
+              </a:spcAft>
+              <a:defRPr sz="2100">
+                <a:solidFill>
+                  <a:srgbClr val="20344A"/>
+                </a:solidFill>
+                <a:latin typeface="Arial"/>
+              </a:defRPr>
+              <a:buChar char="•"/>
+            </a:pPr>
+            <a:r>
+              <a:rPr sz="2100" b="0" i="0">
+                <a:solidFill>
+                  <a:srgbClr val="20344A"/>
+                </a:solidFill>
+                <a:latin typeface="Arial"/>
+              </a:rPr>
+              <a:t>Show the API error for the rejected input and open its </a:t>
+            </a:r>
+            <a:br/>
+            <a:r>
+              <a:rPr sz="2100" b="0" i="0">
+                <a:solidFill>
+                  <a:srgbClr val="20344A"/>
+                </a:solidFill>
+                <a:latin typeface="Arial"/>
+              </a:rPr>
+              <a:t>corresponding passing validation test.</a:t>
+            </a:r>
+          </a:p>
+        </p:txBody>
+      </p:sp>
+      <p:sp>
+        <p:nvSpPr>
+          <p:cNvPr id="9" name="content:line-102:0"/>
+          <p:cNvSpPr txBox="1"/>
+          <p:nvPr/>
+        </p:nvSpPr>
+        <p:spPr>
+          <a:xfrm>
+            <a:off x="594360" y="4270248"/>
+            <a:ext cx="11003279" cy="780288"/>
+          </a:xfrm>
+          <a:prstGeom prst="rect">
+            <a:avLst/>
+          </a:prstGeom>
+          <a:noFill/>
+        </p:spPr>
+        <p:txBody>
+          <a:bodyPr wrap="none" anchor="t" lIns="88900" rIns="88900" tIns="38100" bIns="38100">
+            <a:noAutofit/>
+          </a:bodyPr>
+          <a:lstStyle/>
+          <a:p>
+            <a:pPr marL="279400" indent="-215900">
+              <a:lnSpc>
+                <a:spcPts val="2772"/>
+              </a:lnSpc>
+              <a:spcBef>
+                <a:spcPts val="0"/>
+              </a:spcBef>
+              <a:spcAft>
+                <a:spcPts val="0"/>
+              </a:spcAft>
+              <a:defRPr sz="2100">
+                <a:solidFill>
+                  <a:srgbClr val="20344A"/>
+                </a:solidFill>
+                <a:latin typeface="Arial"/>
+              </a:defRPr>
+              <a:buChar char="•"/>
+            </a:pPr>
+            <a:r>
+              <a:rPr sz="2100" b="0" i="0">
+                <a:solidFill>
+                  <a:srgbClr val="20344A"/>
+                </a:solidFill>
+                <a:latin typeface="Arial"/>
+              </a:rPr>
+              <a:t>Instructor checks the observed rejection against the group's </a:t>
+            </a:r>
+            <a:br/>
+            <a:r>
+              <a:rPr sz="2100" b="0" i="0">
+                <a:solidFill>
+                  <a:srgbClr val="20344A"/>
+                </a:solidFill>
+                <a:latin typeface="Arial"/>
+              </a:rPr>
+              <a:t>declared rule.</a:t>
             </a:r>
           </a:p>
         </p:txBody>
@@ -5093,14 +5221,14 @@
               </a:defRPr>
             </a:pPr>
             <a:r>
-              <a:t>SOURCE 11 / 18</a:t>
-            </a:r>
-          </a:p>
-        </p:txBody>
-      </p:sp>
-      <p:sp>
-        <p:nvSpPr>
-          <p:cNvPr id="4" name="title:line-97"/>
+              <a:t>SOURCE 12 / 18</a:t>
+            </a:r>
+          </a:p>
+        </p:txBody>
+      </p:sp>
+      <p:sp>
+        <p:nvSpPr>
+          <p:cNvPr id="4" name="title:line-106"/>
           <p:cNvSpPr txBox="1"/>
           <p:nvPr/>
         </p:nvSpPr>
@@ -5144,7 +5272,7 @@
                 </a:solidFill>
                 <a:latin typeface="Arial"/>
               </a:rPr>
-              <a:t>Show validation and its test</a:t>
+              <a:t>Inspect local tests and hosted CI</a:t>
             </a:r>
           </a:p>
         </p:txBody>
@@ -5196,7 +5324,7 @@
       </p:sp>
       <p:sp>
         <p:nvSpPr>
-          <p:cNvPr id="6" name="content:line-99:0"/>
+          <p:cNvPr id="6" name="content:line-108:0"/>
           <p:cNvSpPr txBox="1"/>
           <p:nvPr/>
         </p:nvSpPr>
@@ -5241,7 +5369,25 @@
                 </a:solidFill>
                 <a:latin typeface="Arial"/>
               </a:rPr>
-              <a:t>Demonstrate one invalid input rejected clearly; it must not </a:t>
+              <a:t>In the active local environment, run </a:t>
+            </a:r>
+            <a:r>
+              <a:rPr sz="2100" b="0" i="0">
+                <a:solidFill>
+                  <a:srgbClr val="20344A"/>
+                </a:solidFill>
+                <a:latin typeface="Courier New"/>
+              </a:rPr>
+              <a:t>pytest</a:t>
+            </a:r>
+            <a:r>
+              <a:rPr sz="2100" b="0" i="0">
+                <a:solidFill>
+                  <a:srgbClr val="20344A"/>
+                </a:solidFill>
+                <a:latin typeface="Arial"/>
+              </a:rPr>
+              <a:t>; show passing </a:t>
             </a:r>
             <a:br/>
             <a:r>
@@ -5251,20 +5397,92 @@
                 </a:solidFill>
                 <a:latin typeface="Arial"/>
               </a:rPr>
-              <a:t>appear as a successful result.</a:t>
-            </a:r>
-          </a:p>
-        </p:txBody>
-      </p:sp>
-      <p:sp>
-        <p:nvSpPr>
-          <p:cNvPr id="7" name="content:line-100:0"/>
+              <a:t>output.</a:t>
+            </a:r>
+          </a:p>
+        </p:txBody>
+      </p:sp>
+      <p:sp>
+        <p:nvSpPr>
+          <p:cNvPr id="7" name="content:line-109:0"/>
           <p:cNvSpPr txBox="1"/>
           <p:nvPr/>
         </p:nvSpPr>
         <p:spPr>
           <a:xfrm>
             <a:off x="594360" y="2581656"/>
+            <a:ext cx="11003279" cy="1132332"/>
+          </a:xfrm>
+          <a:prstGeom prst="rect">
+            <a:avLst/>
+          </a:prstGeom>
+          <a:noFill/>
+        </p:spPr>
+        <p:txBody>
+          <a:bodyPr wrap="none" anchor="t" lIns="88900" rIns="88900" tIns="38100" bIns="38100">
+            <a:noAutofit/>
+          </a:bodyPr>
+          <a:lstStyle/>
+          <a:p>
+            <a:pPr marL="279400" indent="-215900">
+              <a:lnSpc>
+                <a:spcPts val="2772"/>
+              </a:lnSpc>
+              <a:spcBef>
+                <a:spcPts val="0"/>
+              </a:spcBef>
+              <a:spcAft>
+                <a:spcPts val="0"/>
+              </a:spcAft>
+              <a:defRPr sz="2100">
+                <a:solidFill>
+                  <a:srgbClr val="20344A"/>
+                </a:solidFill>
+                <a:latin typeface="Arial"/>
+              </a:defRPr>
+              <a:buChar char="•"/>
+            </a:pPr>
+            <a:r>
+              <a:rPr sz="2100" b="0" i="0">
+                <a:solidFill>
+                  <a:srgbClr val="20344A"/>
+                </a:solidFill>
+                <a:latin typeface="Arial"/>
+              </a:rPr>
+              <a:t>Open a successful GitHub Actions run for the demonstrated </a:t>
+            </a:r>
+            <a:br/>
+            <a:r>
+              <a:rPr sz="2100" b="0" i="0">
+                <a:solidFill>
+                  <a:srgbClr val="20344A"/>
+                </a:solidFill>
+                <a:latin typeface="Arial"/>
+              </a:rPr>
+              <a:t>commit with the test job switched on. CI means automated </a:t>
+            </a:r>
+            <a:br/>
+            <a:r>
+              <a:rPr sz="2100" b="0" i="0">
+                <a:solidFill>
+                  <a:srgbClr val="20344A"/>
+                </a:solidFill>
+                <a:latin typeface="Arial"/>
+              </a:rPr>
+              <a:t>checks on GitHub; a local pass alone is insufficient.</a:t>
+            </a:r>
+          </a:p>
+        </p:txBody>
+      </p:sp>
+      <p:sp>
+        <p:nvSpPr>
+          <p:cNvPr id="8" name="content:line-110:0"/>
+          <p:cNvSpPr txBox="1"/>
+          <p:nvPr/>
+        </p:nvSpPr>
+        <p:spPr>
+          <a:xfrm>
+            <a:off x="594360" y="3777996"/>
             <a:ext cx="11003279" cy="780288"/>
           </a:xfrm>
           <a:prstGeom prst="rect">
@@ -5303,7 +5521,7 @@
                 </a:solidFill>
                 <a:latin typeface="Arial"/>
               </a:rPr>
-              <a:t>Explain the rule: expected types, allowed bounds, or </a:t>
+              <a:t>Instructor opens tests for processing, invalid inputs, and </a:t>
             </a:r>
             <a:br/>
             <a:r>
@@ -5313,21 +5531,21 @@
                 </a:solidFill>
                 <a:latin typeface="Arial"/>
               </a:rPr>
-              <a:t>missing-value handling. Missing does not mean zero.</a:t>
-            </a:r>
-          </a:p>
-        </p:txBody>
-      </p:sp>
-      <p:sp>
-        <p:nvSpPr>
-          <p:cNvPr id="8" name="content:line-101:0"/>
-          <p:cNvSpPr txBox="1"/>
-          <p:nvPr/>
-        </p:nvSpPr>
-        <p:spPr>
-          <a:xfrm>
-            <a:off x="594360" y="3425952"/>
-            <a:ext cx="11003279" cy="780288"/>
+              <a:t>agreement rules.</a:t>
+            </a:r>
+          </a:p>
+        </p:txBody>
+      </p:sp>
+      <p:sp>
+        <p:nvSpPr>
+          <p:cNvPr id="9" name="content:line-111:0"/>
+          <p:cNvSpPr txBox="1"/>
+          <p:nvPr/>
+        </p:nvSpPr>
+        <p:spPr>
+          <a:xfrm>
+            <a:off x="594360" y="4622292"/>
+            <a:ext cx="11003279" cy="1132332"/>
           </a:xfrm>
           <a:prstGeom prst="rect">
             <a:avLst/>
@@ -5365,7 +5583,7 @@
                 </a:solidFill>
                 <a:latin typeface="Arial"/>
               </a:rPr>
-              <a:t>In the supplied example, show the API error and open its </a:t>
+              <a:t>Tests check declared behavior, not scientific validity. A </a:t>
             </a:r>
             <a:br/>
             <a:r>
@@ -5375,89 +5593,17 @@
                 </a:solidFill>
                 <a:latin typeface="Arial"/>
               </a:rPr>
-              <a:t>corresponding passing validation test.</a:t>
-            </a:r>
-          </a:p>
-        </p:txBody>
-      </p:sp>
-      <p:sp>
-        <p:nvSpPr>
-          <p:cNvPr id="9" name="content:line-102:0"/>
-          <p:cNvSpPr txBox="1"/>
-          <p:nvPr/>
-        </p:nvSpPr>
-        <p:spPr>
-          <a:xfrm>
-            <a:off x="594360" y="4270248"/>
-            <a:ext cx="11003279" cy="780288"/>
-          </a:xfrm>
-          <a:prstGeom prst="rect">
-            <a:avLst/>
-          </a:prstGeom>
-          <a:noFill/>
-        </p:spPr>
-        <p:txBody>
-          <a:bodyPr wrap="none" anchor="t" lIns="88900" rIns="88900" tIns="38100" bIns="38100">
-            <a:noAutofit/>
-          </a:bodyPr>
-          <a:lstStyle/>
-          <a:p>
-            <a:pPr marL="279400" indent="-215900">
-              <a:lnSpc>
-                <a:spcPts val="2772"/>
-              </a:lnSpc>
-              <a:spcBef>
-                <a:spcPts val="0"/>
-              </a:spcBef>
-              <a:spcAft>
-                <a:spcPts val="0"/>
-              </a:spcAft>
-              <a:defRPr sz="2100">
-                <a:solidFill>
-                  <a:srgbClr val="20344A"/>
-                </a:solidFill>
-                <a:latin typeface="Arial"/>
-              </a:defRPr>
-              <a:buChar char="•"/>
-            </a:pPr>
-            <a:r>
-              <a:rPr sz="2100" b="0" i="0">
-                <a:solidFill>
-                  <a:srgbClr val="20344A"/>
-                </a:solidFill>
-                <a:latin typeface="Arial"/>
-              </a:rPr>
-              <a:t>Instructor checks the observed rejection against the </a:t>
-            </a:r>
-            <a:r>
-              <a:rPr sz="2100" b="0" i="0">
-                <a:solidFill>
-                  <a:srgbClr val="007F82"/>
-                </a:solidFill>
-                <a:latin typeface="Arial"/>
-                <a:hlinkClick r:id="rId2"/>
-              </a:rPr>
-              <a:t>API </a:t>
+              <a:t>workflow reporting success does not itself configure required </a:t>
             </a:r>
             <a:br/>
             <a:r>
               <a:rPr sz="2100" b="0" i="0">
                 <a:solidFill>
-                  <a:srgbClr val="007F82"/>
-                </a:solidFill>
-                <a:latin typeface="Arial"/>
-                <a:hlinkClick r:id="rId2"/>
-              </a:rPr>
-              <a:t>contract</a:t>
-            </a:r>
-            <a:r>
-              <a:rPr sz="2100" b="0" i="0">
-                <a:solidFill>
-                  <a:srgbClr val="20344A"/>
-                </a:solidFill>
-                <a:latin typeface="Arial"/>
-              </a:rPr>
-              <a:t> and the group's declared rule.</a:t>
+                  <a:srgbClr val="20344A"/>
+                </a:solidFill>
+                <a:latin typeface="Arial"/>
+              </a:rPr>
+              <a:t>checks.</a:t>
             </a:r>
           </a:p>
         </p:txBody>
@@ -5571,14 +5717,14 @@
               </a:defRPr>
             </a:pPr>
             <a:r>
-              <a:t>SOURCE 12 / 18</a:t>
-            </a:r>
-          </a:p>
-        </p:txBody>
-      </p:sp>
-      <p:sp>
-        <p:nvSpPr>
-          <p:cNvPr id="4" name="title:line-106"/>
+              <a:t>SOURCE 13 / 18</a:t>
+            </a:r>
+          </a:p>
+        </p:txBody>
+      </p:sp>
+      <p:sp>
+        <p:nvSpPr>
+          <p:cNvPr id="4" name="title:line-115"/>
           <p:cNvSpPr txBox="1"/>
           <p:nvPr/>
         </p:nvSpPr>
@@ -5622,7 +5768,7 @@
                 </a:solidFill>
                 <a:latin typeface="Arial"/>
               </a:rPr>
-              <a:t>Inspect local tests and hosted CI</a:t>
+              <a:t>Demonstrate the two practical Rs</a:t>
             </a:r>
           </a:p>
         </p:txBody>
@@ -5674,7 +5820,7 @@
       </p:sp>
       <p:sp>
         <p:nvSpPr>
-          <p:cNvPr id="6" name="content:line-108:0"/>
+          <p:cNvPr id="6" name="content:line-117:0"/>
           <p:cNvSpPr txBox="1"/>
           <p:nvPr/>
         </p:nvSpPr>
@@ -5719,16 +5865,7 @@
                 </a:solidFill>
                 <a:latin typeface="Arial"/>
               </a:rPr>
-              <a:t>In the active local environment, run </a:t>
-            </a:r>
-            <a:r>
-              <a:rPr sz="2100" b="0" i="0">
-                <a:solidFill>
-                  <a:srgbClr val="20344A"/>
-                </a:solidFill>
-                <a:latin typeface="Courier New"/>
-              </a:rPr>
-              <a:t>python -m pytest </a:t>
+              <a:t>Repeatability: agreement under the same conditions. Compare </a:t>
             </a:r>
             <a:br/>
             <a:r>
@@ -5736,25 +5873,16 @@
                 <a:solidFill>
                   <a:srgbClr val="20344A"/>
                 </a:solidFill>
-                <a:latin typeface="Courier New"/>
-              </a:rPr>
-              <a:t>backend/tests</a:t>
-            </a:r>
-            <a:r>
-              <a:rPr sz="2100" b="0" i="0">
-                <a:solidFill>
-                  <a:srgbClr val="20344A"/>
-                </a:solidFill>
-                <a:latin typeface="Arial"/>
-              </a:rPr>
-              <a:t>; show passing output.</a:t>
-            </a:r>
-          </a:p>
-        </p:txBody>
-      </p:sp>
-      <p:sp>
-        <p:nvSpPr>
-          <p:cNvPr id="7" name="content:line-109:0"/>
+                <a:latin typeface="Arial"/>
+              </a:rPr>
+              <a:t>local run 1 with local run 2.</a:t>
+            </a:r>
+          </a:p>
+        </p:txBody>
+      </p:sp>
+      <p:sp>
+        <p:nvSpPr>
+          <p:cNvPr id="7" name="content:line-118:0"/>
           <p:cNvSpPr txBox="1"/>
           <p:nvPr/>
         </p:nvSpPr>
@@ -5799,7 +5927,7 @@
                 </a:solidFill>
                 <a:latin typeface="Arial"/>
               </a:rPr>
-              <a:t>Open a successful GitHub Actions run for the demonstrated </a:t>
+              <a:t>Replicability: agreement under slightly different conditions. </a:t>
             </a:r>
             <a:br/>
             <a:r>
@@ -5809,7 +5937,7 @@
                 </a:solidFill>
                 <a:latin typeface="Arial"/>
               </a:rPr>
-              <a:t>commit. CI means automated checks on GitHub; a local pass </a:t>
+              <a:t>Compare a Release installed in a fresh environment, and a real </a:t>
             </a:r>
             <a:br/>
             <a:r>
@@ -5819,20 +5947,82 @@
                 </a:solidFill>
                 <a:latin typeface="Arial"/>
               </a:rPr>
-              <a:t>alone is insufficient.</a:t>
-            </a:r>
-          </a:p>
-        </p:txBody>
-      </p:sp>
-      <p:sp>
-        <p:nvSpPr>
-          <p:cNvPr id="8" name="content:line-110:0"/>
+              <a:t>Docker run, with the local run.</a:t>
+            </a:r>
+          </a:p>
+        </p:txBody>
+      </p:sp>
+      <p:sp>
+        <p:nvSpPr>
+          <p:cNvPr id="8" name="content:line-119:0"/>
           <p:cNvSpPr txBox="1"/>
           <p:nvPr/>
         </p:nvSpPr>
         <p:spPr>
           <a:xfrm>
             <a:off x="594360" y="3777996"/>
+            <a:ext cx="11003279" cy="780288"/>
+          </a:xfrm>
+          <a:prstGeom prst="rect">
+            <a:avLst/>
+          </a:prstGeom>
+          <a:noFill/>
+        </p:spPr>
+        <p:txBody>
+          <a:bodyPr wrap="none" anchor="t" lIns="88900" rIns="88900" tIns="38100" bIns="38100">
+            <a:noAutofit/>
+          </a:bodyPr>
+          <a:lstStyle/>
+          <a:p>
+            <a:pPr marL="279400" indent="-215900">
+              <a:lnSpc>
+                <a:spcPts val="2772"/>
+              </a:lnSpc>
+              <a:spcBef>
+                <a:spcPts val="0"/>
+              </a:spcBef>
+              <a:spcAft>
+                <a:spcPts val="0"/>
+              </a:spcAft>
+              <a:defRPr sz="2100">
+                <a:solidFill>
+                  <a:srgbClr val="20344A"/>
+                </a:solidFill>
+                <a:latin typeface="Arial"/>
+              </a:defRPr>
+              <a:buChar char="•"/>
+            </a:pPr>
+            <a:r>
+              <a:rPr sz="2100" b="0" i="0">
+                <a:solidFill>
+                  <a:srgbClr val="20344A"/>
+                </a:solidFill>
+                <a:latin typeface="Arial"/>
+              </a:rPr>
+              <a:t>Keep code and CSV unchanged; show successful comparisons, </a:t>
+            </a:r>
+            <a:br/>
+            <a:r>
+              <a:rPr sz="2100" b="0" i="0">
+                <a:solidFill>
+                  <a:srgbClr val="20344A"/>
+                </a:solidFill>
+                <a:latin typeface="Arial"/>
+              </a:rPr>
+              <a:t>underlying captures, commands, logs, and environment details.</a:t>
+            </a:r>
+          </a:p>
+        </p:txBody>
+      </p:sp>
+      <p:sp>
+        <p:nvSpPr>
+          <p:cNvPr id="9" name="content:line-120:0"/>
+          <p:cNvSpPr txBox="1"/>
+          <p:nvPr/>
+        </p:nvSpPr>
+        <p:spPr>
+          <a:xfrm>
+            <a:off x="594360" y="4622292"/>
             <a:ext cx="11003279" cy="1132332"/>
           </a:xfrm>
           <a:prstGeom prst="rect">
@@ -5871,7 +6061,7 @@
                 </a:solidFill>
                 <a:latin typeface="Arial"/>
               </a:rPr>
-              <a:t>Instructor opens tests at public processing, API, and </a:t>
+              <a:t>Reproducibility means agreement under very different </a:t>
             </a:r>
             <a:br/>
             <a:r>
@@ -5881,7 +6071,7 @@
                 </a:solidFill>
                 <a:latin typeface="Arial"/>
               </a:rPr>
-              <a:t>comparison boundaries: expected outputs, invalid inputs, and </a:t>
+              <a:t>conditions in this course; independent simulation, cross-group </a:t>
             </a:r>
             <a:br/>
             <a:r>
@@ -5891,21 +6081,21 @@
                 </a:solidFill>
                 <a:latin typeface="Arial"/>
               </a:rPr>
-              <a:t>agreement rules.</a:t>
-            </a:r>
-          </a:p>
-        </p:txBody>
-      </p:sp>
-      <p:sp>
-        <p:nvSpPr>
-          <p:cNvPr id="9" name="content:line-111:0"/>
-          <p:cNvSpPr txBox="1"/>
-          <p:nvPr/>
-        </p:nvSpPr>
-        <p:spPr>
-          <a:xfrm>
-            <a:off x="594360" y="4974336"/>
-            <a:ext cx="11003279" cy="1132332"/>
+              <a:t>reproduction, and new-data experiments are not required.</a:t>
+            </a:r>
+          </a:p>
+        </p:txBody>
+      </p:sp>
+      <p:sp>
+        <p:nvSpPr>
+          <p:cNvPr id="10" name="content:line-121:0"/>
+          <p:cNvSpPr txBox="1"/>
+          <p:nvPr/>
+        </p:nvSpPr>
+        <p:spPr>
+          <a:xfrm>
+            <a:off x="594360" y="5818632"/>
+            <a:ext cx="11003279" cy="428244"/>
           </a:xfrm>
           <a:prstGeom prst="rect">
             <a:avLst/>
@@ -5943,27 +6133,7 @@
                 </a:solidFill>
                 <a:latin typeface="Arial"/>
               </a:rPr>
-              <a:t>Tests check declared behavior, not scientific validity. A </a:t>
-            </a:r>
-            <a:br/>
-            <a:r>
-              <a:rPr sz="2100" b="0" i="0">
-                <a:solidFill>
-                  <a:srgbClr val="20344A"/>
-                </a:solidFill>
-                <a:latin typeface="Arial"/>
-              </a:rPr>
-              <a:t>workflow reporting success does not itself configure required </a:t>
-            </a:r>
-            <a:br/>
-            <a:r>
-              <a:rPr sz="2100" b="0" i="0">
-                <a:solidFill>
-                  <a:srgbClr val="20344A"/>
-                </a:solidFill>
-                <a:latin typeface="Arial"/>
-              </a:rPr>
-              <a:t>checks; see </a:t>
+              <a:t>Use the </a:t>
             </a:r>
             <a:r>
               <a:rPr sz="2100" b="0" i="0">
@@ -5973,26 +6143,7 @@
                 <a:latin typeface="Arial"/>
                 <a:hlinkClick r:id="rId2"/>
               </a:rPr>
-              <a:t>testing</a:t>
-            </a:r>
-            <a:r>
-              <a:rPr sz="2100" b="0" i="0">
-                <a:solidFill>
-                  <a:srgbClr val="20344A"/>
-                </a:solidFill>
-                <a:latin typeface="Arial"/>
-              </a:rPr>
-              <a:t> and </a:t>
-            </a:r>
-            <a:r>
-              <a:rPr sz="2100" b="0" i="0">
-                <a:solidFill>
-                  <a:srgbClr val="007F82"/>
-                </a:solidFill>
-                <a:latin typeface="Arial"/>
-                <a:hlinkClick r:id="rId3"/>
-              </a:rPr>
-              <a:t>CI</a:t>
+              <a:t>glossary</a:t>
             </a:r>
             <a:r>
               <a:rPr sz="2100" b="0" i="0">
@@ -6115,14 +6266,14 @@
               </a:defRPr>
             </a:pPr>
             <a:r>
-              <a:t>SOURCE 13 / 18</a:t>
-            </a:r>
-          </a:p>
-        </p:txBody>
-      </p:sp>
-      <p:sp>
-        <p:nvSpPr>
-          <p:cNvPr id="4" name="title:line-115"/>
+              <a:t>SOURCE 14 / 18</a:t>
+            </a:r>
+          </a:p>
+        </p:txBody>
+      </p:sp>
+      <p:sp>
+        <p:nvSpPr>
+          <p:cNvPr id="4" name="title:line-125"/>
           <p:cNvSpPr txBox="1"/>
           <p:nvPr/>
         </p:nvSpPr>
@@ -6166,7 +6317,7 @@
                 </a:solidFill>
                 <a:latin typeface="Arial"/>
               </a:rPr>
-              <a:t>Demonstrate the two practical Rs</a:t>
+              <a:t>Inspect agreement, field by field</a:t>
             </a:r>
           </a:p>
         </p:txBody>
@@ -6218,13 +6369,85 @@
       </p:sp>
       <p:sp>
         <p:nvSpPr>
-          <p:cNvPr id="6" name="content:line-117:0"/>
+          <p:cNvPr id="6" name="content:line-127:0"/>
           <p:cNvSpPr txBox="1"/>
           <p:nvPr/>
         </p:nvSpPr>
         <p:spPr>
           <a:xfrm>
             <a:off x="594360" y="1737360"/>
+            <a:ext cx="11003279" cy="1132332"/>
+          </a:xfrm>
+          <a:prstGeom prst="rect">
+            <a:avLst/>
+          </a:prstGeom>
+          <a:noFill/>
+        </p:spPr>
+        <p:txBody>
+          <a:bodyPr wrap="none" anchor="t" lIns="88900" rIns="88900" tIns="38100" bIns="38100">
+            <a:noAutofit/>
+          </a:bodyPr>
+          <a:lstStyle/>
+          <a:p>
+            <a:pPr marL="279400" indent="-215900">
+              <a:lnSpc>
+                <a:spcPts val="2772"/>
+              </a:lnSpc>
+              <a:spcBef>
+                <a:spcPts val="0"/>
+              </a:spcBef>
+              <a:spcAft>
+                <a:spcPts val="0"/>
+              </a:spcAft>
+              <a:defRPr sz="2100">
+                <a:solidFill>
+                  <a:srgbClr val="20344A"/>
+                </a:solidFill>
+                <a:latin typeface="Arial"/>
+              </a:defRPr>
+              <a:buChar char="•"/>
+            </a:pPr>
+            <a:r>
+              <a:rPr sz="2100" b="0" i="0">
+                <a:solidFill>
+                  <a:srgbClr val="20344A"/>
+                </a:solidFill>
+                <a:latin typeface="Arial"/>
+              </a:rPr>
+              <a:t>Exact: cleaned records, identifiers, dates, counts, types, </a:t>
+            </a:r>
+            <a:br/>
+            <a:r>
+              <a:rPr sz="2100" b="0" i="0">
+                <a:solidFill>
+                  <a:srgbClr val="20344A"/>
+                </a:solidFill>
+                <a:latin typeface="Arial"/>
+              </a:rPr>
+              <a:t>structure, ordering, and nulls. Missing stays distinct from </a:t>
+            </a:r>
+            <a:br/>
+            <a:r>
+              <a:rPr sz="2100" b="0" i="0">
+                <a:solidFill>
+                  <a:srgbClr val="20344A"/>
+                </a:solidFill>
+                <a:latin typeface="Arial"/>
+              </a:rPr>
+              <a:t>zero.</a:t>
+            </a:r>
+          </a:p>
+        </p:txBody>
+      </p:sp>
+      <p:sp>
+        <p:nvSpPr>
+          <p:cNvPr id="7" name="content:line-128:0"/>
+          <p:cNvSpPr txBox="1"/>
+          <p:nvPr/>
+        </p:nvSpPr>
+        <p:spPr>
+          <a:xfrm>
+            <a:off x="594360" y="2933700"/>
             <a:ext cx="11003279" cy="780288"/>
           </a:xfrm>
           <a:prstGeom prst="rect">
@@ -6263,7 +6486,7 @@
                 </a:solidFill>
                 <a:latin typeface="Arial"/>
               </a:rPr>
-              <a:t>Repeatability: agreement under the same conditions. Compare </a:t>
+              <a:t>Only derived decimals receive declared tolerances documented </a:t>
             </a:r>
             <a:br/>
             <a:r>
@@ -6273,21 +6496,74 @@
                 </a:solidFill>
                 <a:latin typeface="Arial"/>
               </a:rPr>
-              <a:t>local run 1 with local run 2.</a:t>
-            </a:r>
-          </a:p>
-        </p:txBody>
-      </p:sp>
-      <p:sp>
-        <p:nvSpPr>
-          <p:cNvPr id="7" name="content:line-118:0"/>
-          <p:cNvSpPr txBox="1"/>
-          <p:nvPr/>
-        </p:nvSpPr>
-        <p:spPr>
-          <a:xfrm>
-            <a:off x="594360" y="2581656"/>
-            <a:ext cx="11003279" cy="780288"/>
+              <a:t>in tests.</a:t>
+            </a:r>
+          </a:p>
+        </p:txBody>
+      </p:sp>
+      <p:sp>
+        <p:nvSpPr>
+          <p:cNvPr id="8" name="content:line-131:0"/>
+          <p:cNvSpPr txBox="1"/>
+          <p:nvPr/>
+        </p:nvSpPr>
+        <p:spPr>
+          <a:xfrm>
+            <a:off x="594360" y="3777996"/>
+            <a:ext cx="11003279" cy="377952"/>
+          </a:xfrm>
+          <a:prstGeom prst="rect">
+            <a:avLst/>
+          </a:prstGeom>
+          <a:solidFill>
+            <a:srgbClr val="EDF3F6"/>
+          </a:solidFill>
+        </p:spPr>
+        <p:txBody>
+          <a:bodyPr wrap="none" anchor="t" lIns="88900" rIns="88900" tIns="38100" bIns="38100">
+            <a:noAutofit/>
+          </a:bodyPr>
+          <a:lstStyle/>
+          <a:p>
+            <a:pPr>
+              <a:lnSpc>
+                <a:spcPts val="2376"/>
+              </a:lnSpc>
+              <a:spcBef>
+                <a:spcPts val="0"/>
+              </a:spcBef>
+              <a:spcAft>
+                <a:spcPts val="0"/>
+              </a:spcAft>
+              <a:defRPr sz="1800">
+                <a:solidFill>
+                  <a:srgbClr val="20344A"/>
+                </a:solidFill>
+                <a:latin typeface="Arial"/>
+              </a:defRPr>
+            </a:pPr>
+            <a:r>
+              <a:rPr sz="1800" b="0" i="0">
+                <a:solidFill>
+                  <a:srgbClr val="20344A"/>
+                </a:solidFill>
+                <a:latin typeface="Courier New"/>
+              </a:rPr>
+              <a:t>abs(actual - expected) &lt;= max(1e-9, 1e-9 * abs(expected))</a:t>
+            </a:r>
+          </a:p>
+        </p:txBody>
+      </p:sp>
+      <p:sp>
+        <p:nvSpPr>
+          <p:cNvPr id="9" name="content:line-134:0"/>
+          <p:cNvSpPr txBox="1"/>
+          <p:nvPr/>
+        </p:nvSpPr>
+        <p:spPr>
+          <a:xfrm>
+            <a:off x="594360" y="4155948"/>
+            <a:ext cx="11003279" cy="1484376"/>
           </a:xfrm>
           <a:prstGeom prst="rect">
             <a:avLst/>
@@ -6325,7 +6601,7 @@
                 </a:solidFill>
                 <a:latin typeface="Arial"/>
               </a:rPr>
-              <a:t>Replicability: agreement under slightly different conditions. </a:t>
+              <a:t>The first output is the reference. Instructor opens outputs </a:t>
             </a:r>
             <a:br/>
             <a:r>
@@ -6335,59 +6611,7 @@
                 </a:solidFill>
                 <a:latin typeface="Arial"/>
               </a:rPr>
-              <a:t>Compare local with real Docker execution of the same process.</a:t>
-            </a:r>
-          </a:p>
-        </p:txBody>
-      </p:sp>
-      <p:sp>
-        <p:nvSpPr>
-          <p:cNvPr id="8" name="content:line-119:0"/>
-          <p:cNvSpPr txBox="1"/>
-          <p:nvPr/>
-        </p:nvSpPr>
-        <p:spPr>
-          <a:xfrm>
-            <a:off x="594360" y="3425952"/>
-            <a:ext cx="11003279" cy="1132332"/>
-          </a:xfrm>
-          <a:prstGeom prst="rect">
-            <a:avLst/>
-          </a:prstGeom>
-          <a:noFill/>
-        </p:spPr>
-        <p:txBody>
-          <a:bodyPr wrap="none" anchor="t" lIns="88900" rIns="88900" tIns="38100" bIns="38100">
-            <a:noAutofit/>
-          </a:bodyPr>
-          <a:lstStyle/>
-          <a:p>
-            <a:pPr marL="279400" indent="-215900">
-              <a:lnSpc>
-                <a:spcPts val="2772"/>
-              </a:lnSpc>
-              <a:spcBef>
-                <a:spcPts val="0"/>
-              </a:spcBef>
-              <a:spcAft>
-                <a:spcPts val="0"/>
-              </a:spcAft>
-              <a:defRPr sz="2100">
-                <a:solidFill>
-                  <a:srgbClr val="20344A"/>
-                </a:solidFill>
-                <a:latin typeface="Arial"/>
-              </a:defRPr>
-              <a:buChar char="•"/>
-            </a:pPr>
-            <a:r>
-              <a:rPr sz="2100" b="0" i="0">
-                <a:solidFill>
-                  <a:srgbClr val="20344A"/>
-                </a:solidFill>
-                <a:latin typeface="Arial"/>
-              </a:rPr>
-              <a:t>Keep code and CSV bytes unchanged; show successful </a:t>
+              <a:t>and diagnostics; matching charts alone are insufficient. Do not </a:t>
             </a:r>
             <a:br/>
             <a:r>
@@ -6397,7 +6621,7 @@
                 </a:solidFill>
                 <a:latin typeface="Arial"/>
               </a:rPr>
-              <a:t>comparisons, underlying captures, commands, logs, </a:t>
+              <a:t>drop fields, round away differences, or widen tolerance to </a:t>
             </a:r>
             <a:br/>
             <a:r>
@@ -6407,169 +6631,7 @@
                 </a:solidFill>
                 <a:latin typeface="Arial"/>
               </a:rPr>
-              <a:t>environment details, and code/input identity.</a:t>
-            </a:r>
-          </a:p>
-        </p:txBody>
-      </p:sp>
-      <p:sp>
-        <p:nvSpPr>
-          <p:cNvPr id="9" name="content:line-120:0"/>
-          <p:cNvSpPr txBox="1"/>
-          <p:nvPr/>
-        </p:nvSpPr>
-        <p:spPr>
-          <a:xfrm>
-            <a:off x="594360" y="4622292"/>
-            <a:ext cx="11003279" cy="1132332"/>
-          </a:xfrm>
-          <a:prstGeom prst="rect">
-            <a:avLst/>
-          </a:prstGeom>
-          <a:noFill/>
-        </p:spPr>
-        <p:txBody>
-          <a:bodyPr wrap="none" anchor="t" lIns="88900" rIns="88900" tIns="38100" bIns="38100">
-            <a:noAutofit/>
-          </a:bodyPr>
-          <a:lstStyle/>
-          <a:p>
-            <a:pPr marL="279400" indent="-215900">
-              <a:lnSpc>
-                <a:spcPts val="2772"/>
-              </a:lnSpc>
-              <a:spcBef>
-                <a:spcPts val="0"/>
-              </a:spcBef>
-              <a:spcAft>
-                <a:spcPts val="0"/>
-              </a:spcAft>
-              <a:defRPr sz="2100">
-                <a:solidFill>
-                  <a:srgbClr val="20344A"/>
-                </a:solidFill>
-                <a:latin typeface="Arial"/>
-              </a:defRPr>
-              <a:buChar char="•"/>
-            </a:pPr>
-            <a:r>
-              <a:rPr sz="2100" b="0" i="0">
-                <a:solidFill>
-                  <a:srgbClr val="20344A"/>
-                </a:solidFill>
-                <a:latin typeface="Arial"/>
-              </a:rPr>
-              <a:t>Reproducibility means agreement under very different </a:t>
-            </a:r>
-            <a:br/>
-            <a:r>
-              <a:rPr sz="2100" b="0" i="0">
-                <a:solidFill>
-                  <a:srgbClr val="20344A"/>
-                </a:solidFill>
-                <a:latin typeface="Arial"/>
-              </a:rPr>
-              <a:t>conditions in this course; independent simulation, cross-group </a:t>
-            </a:r>
-            <a:br/>
-            <a:r>
-              <a:rPr sz="2100" b="0" i="0">
-                <a:solidFill>
-                  <a:srgbClr val="20344A"/>
-                </a:solidFill>
-                <a:latin typeface="Arial"/>
-              </a:rPr>
-              <a:t>reproduction, and new-data experiments are not required.</a:t>
-            </a:r>
-          </a:p>
-        </p:txBody>
-      </p:sp>
-      <p:sp>
-        <p:nvSpPr>
-          <p:cNvPr id="10" name="content:line-121:0"/>
-          <p:cNvSpPr txBox="1"/>
-          <p:nvPr/>
-        </p:nvSpPr>
-        <p:spPr>
-          <a:xfrm>
-            <a:off x="594360" y="5818632"/>
-            <a:ext cx="11003279" cy="428244"/>
-          </a:xfrm>
-          <a:prstGeom prst="rect">
-            <a:avLst/>
-          </a:prstGeom>
-          <a:noFill/>
-        </p:spPr>
-        <p:txBody>
-          <a:bodyPr wrap="none" anchor="t" lIns="88900" rIns="88900" tIns="38100" bIns="38100">
-            <a:noAutofit/>
-          </a:bodyPr>
-          <a:lstStyle/>
-          <a:p>
-            <a:pPr marL="279400" indent="-215900">
-              <a:lnSpc>
-                <a:spcPts val="2772"/>
-              </a:lnSpc>
-              <a:spcBef>
-                <a:spcPts val="0"/>
-              </a:spcBef>
-              <a:spcAft>
-                <a:spcPts val="0"/>
-              </a:spcAft>
-              <a:defRPr sz="2100">
-                <a:solidFill>
-                  <a:srgbClr val="20344A"/>
-                </a:solidFill>
-                <a:latin typeface="Arial"/>
-              </a:defRPr>
-              <a:buChar char="•"/>
-            </a:pPr>
-            <a:r>
-              <a:rPr sz="2100" b="0" i="0">
-                <a:solidFill>
-                  <a:srgbClr val="20344A"/>
-                </a:solidFill>
-                <a:latin typeface="Arial"/>
-              </a:rPr>
-              <a:t>Use the </a:t>
-            </a:r>
-            <a:r>
-              <a:rPr sz="2100" b="0" i="0">
-                <a:solidFill>
-                  <a:srgbClr val="007F82"/>
-                </a:solidFill>
-                <a:latin typeface="Arial"/>
-                <a:hlinkClick r:id="rId2"/>
-              </a:rPr>
-              <a:t>glossary</a:t>
-            </a:r>
-            <a:r>
-              <a:rPr sz="2100" b="0" i="0">
-                <a:solidFill>
-                  <a:srgbClr val="20344A"/>
-                </a:solidFill>
-                <a:latin typeface="Arial"/>
-              </a:rPr>
-              <a:t> and </a:t>
-            </a:r>
-            <a:r>
-              <a:rPr sz="2100" b="0" i="0">
-                <a:solidFill>
-                  <a:srgbClr val="007F82"/>
-                </a:solidFill>
-                <a:latin typeface="Arial"/>
-                <a:hlinkClick r:id="rId3"/>
-              </a:rPr>
-              <a:t>capture/comparison commands</a:t>
-            </a:r>
-            <a:r>
-              <a:rPr sz="2100" b="0" i="0">
-                <a:solidFill>
-                  <a:srgbClr val="20344A"/>
-                </a:solidFill>
-                <a:latin typeface="Arial"/>
-              </a:rPr>
-              <a:t>.</a:t>
+              <a:t>pass.</a:t>
             </a:r>
           </a:p>
         </p:txBody>
@@ -6683,14 +6745,14 @@
               </a:defRPr>
             </a:pPr>
             <a:r>
-              <a:t>SOURCE 14 / 18</a:t>
-            </a:r>
-          </a:p>
-        </p:txBody>
-      </p:sp>
-      <p:sp>
-        <p:nvSpPr>
-          <p:cNvPr id="4" name="title:line-125"/>
+              <a:t>SOURCE 15 / 18</a:t>
+            </a:r>
+          </a:p>
+        </p:txBody>
+      </p:sp>
+      <p:sp>
+        <p:nvSpPr>
+          <p:cNvPr id="4" name="title:line-138"/>
           <p:cNvSpPr txBox="1"/>
           <p:nvPr/>
         </p:nvSpPr>
@@ -6734,7 +6796,7 @@
                 </a:solidFill>
                 <a:latin typeface="Arial"/>
               </a:rPr>
-              <a:t>Inspect agreement, field by field</a:t>
+              <a:t>Inspect collaboration and every member</a:t>
             </a:r>
           </a:p>
         </p:txBody>
@@ -6786,13 +6848,95 @@
       </p:sp>
       <p:sp>
         <p:nvSpPr>
-          <p:cNvPr id="6" name="content:line-127:0"/>
+          <p:cNvPr id="6" name="content:line-140:0"/>
           <p:cNvSpPr txBox="1"/>
           <p:nvPr/>
         </p:nvSpPr>
         <p:spPr>
           <a:xfrm>
             <a:off x="594360" y="1737360"/>
+            <a:ext cx="11003279" cy="1484376"/>
+          </a:xfrm>
+          <a:prstGeom prst="rect">
+            <a:avLst/>
+          </a:prstGeom>
+          <a:noFill/>
+        </p:spPr>
+        <p:txBody>
+          <a:bodyPr wrap="none" anchor="t" lIns="88900" rIns="88900" tIns="38100" bIns="38100">
+            <a:noAutofit/>
+          </a:bodyPr>
+          <a:lstStyle/>
+          <a:p>
+            <a:pPr marL="279400" indent="-215900">
+              <a:lnSpc>
+                <a:spcPts val="2772"/>
+              </a:lnSpc>
+              <a:spcBef>
+                <a:spcPts val="0"/>
+              </a:spcBef>
+              <a:spcAft>
+                <a:spcPts val="0"/>
+              </a:spcAft>
+              <a:defRPr sz="2100">
+                <a:solidFill>
+                  <a:srgbClr val="20344A"/>
+                </a:solidFill>
+                <a:latin typeface="Arial"/>
+              </a:defRPr>
+              <a:buChar char="•"/>
+            </a:pPr>
+            <a:r>
+              <a:rPr sz="2100" b="0" i="0">
+                <a:solidFill>
+                  <a:srgbClr val="20344A"/>
+                </a:solidFill>
+                <a:latin typeface="Arial"/>
+              </a:rPr>
+              <a:t>Open feature branches, descriptive commits, PRs, and </a:t>
+            </a:r>
+            <a:br/>
+            <a:r>
+              <a:rPr sz="2100" b="0" i="0">
+                <a:solidFill>
+                  <a:srgbClr val="20344A"/>
+                </a:solidFill>
+                <a:latin typeface="Arial"/>
+              </a:rPr>
+              <a:t>meaningful teammate reviews in the Backend repo about </a:t>
+            </a:r>
+            <a:br/>
+            <a:r>
+              <a:rPr sz="2100" b="0" i="0">
+                <a:solidFill>
+                  <a:srgbClr val="20344A"/>
+                </a:solidFill>
+                <a:latin typeface="Arial"/>
+              </a:rPr>
+              <a:t>behavior, tests, or clarity; show responses/follow-up to </a:t>
+            </a:r>
+            <a:br/>
+            <a:r>
+              <a:rPr sz="2100" b="0" i="0">
+                <a:solidFill>
+                  <a:srgbClr val="20344A"/>
+                </a:solidFill>
+                <a:latin typeface="Arial"/>
+              </a:rPr>
+              <a:t>concerns.</a:t>
+            </a:r>
+          </a:p>
+        </p:txBody>
+      </p:sp>
+      <p:sp>
+        <p:nvSpPr>
+          <p:cNvPr id="7" name="content:line-141:0"/>
+          <p:cNvSpPr txBox="1"/>
+          <p:nvPr/>
+        </p:nvSpPr>
+        <p:spPr>
+          <a:xfrm>
+            <a:off x="594360" y="3285744"/>
             <a:ext cx="11003279" cy="1132332"/>
           </a:xfrm>
           <a:prstGeom prst="rect">
@@ -6831,7 +6975,7 @@
                 </a:solidFill>
                 <a:latin typeface="Arial"/>
               </a:rPr>
-              <a:t>Exact: cleaned records, identifiers, raw values, copied </a:t>
+              <a:t>For EACH student: open at least one personally authored PR </a:t>
             </a:r>
             <a:br/>
             <a:r>
@@ -6841,7 +6985,7 @@
                 </a:solidFill>
                 <a:latin typeface="Arial"/>
               </a:rPr>
-              <a:t>baselines, counts, types, structure, ordering, and nulls. </a:t>
+              <a:t>and at least one substantive review of a teammate's PR, with </a:t>
             </a:r>
             <a:br/>
             <a:r>
@@ -6851,20 +6995,20 @@
                 </a:solidFill>
                 <a:latin typeface="Arial"/>
               </a:rPr>
-              <a:t>Missing stays distinct from zero.</a:t>
-            </a:r>
-          </a:p>
-        </p:txBody>
-      </p:sp>
-      <p:sp>
-        <p:nvSpPr>
-          <p:cNvPr id="7" name="content:line-128:0"/>
-          <p:cNvSpPr txBox="1"/>
-          <p:nvPr/>
-        </p:nvSpPr>
-        <p:spPr>
-          <a:xfrm>
-            <a:off x="594360" y="2933700"/>
+              <a:t>authorship and review permalinks.</a:t>
+            </a:r>
+          </a:p>
+        </p:txBody>
+      </p:sp>
+      <p:sp>
+        <p:nvSpPr>
+          <p:cNvPr id="8" name="content:line-142:0"/>
+          <p:cNvSpPr txBox="1"/>
+          <p:nvPr/>
+        </p:nvSpPr>
+        <p:spPr>
+          <a:xfrm>
+            <a:off x="594360" y="4482084"/>
             <a:ext cx="11003279" cy="1132332"/>
           </a:xfrm>
           <a:prstGeom prst="rect">
@@ -6903,7 +7047,7 @@
                 </a:solidFill>
                 <a:latin typeface="Arial"/>
               </a:rPr>
-              <a:t>Only derived decimals receive declared tolerances documented </a:t>
+              <a:t>Each member explains their contribution, authored change, </a:t>
             </a:r>
             <a:br/>
             <a:r>
@@ -6913,7 +7057,7 @@
                 </a:solidFill>
                 <a:latin typeface="Arial"/>
               </a:rPr>
-              <a:t>in tests. In the example: change, percent_change, and </a:t>
+              <a:t>review reasoning, and any follow-up. Approval alone or “looks </a:t>
             </a:r>
             <a:br/>
             <a:r>
@@ -6923,74 +7067,21 @@
                 </a:solidFill>
                 <a:latin typeface="Arial"/>
               </a:rPr>
-              <a:t>visit-summary mean.</a:t>
-            </a:r>
-          </a:p>
-        </p:txBody>
-      </p:sp>
-      <p:sp>
-        <p:nvSpPr>
-          <p:cNvPr id="8" name="content:line-131:0"/>
-          <p:cNvSpPr txBox="1"/>
-          <p:nvPr/>
-        </p:nvSpPr>
-        <p:spPr>
-          <a:xfrm>
-            <a:off x="594360" y="4130040"/>
-            <a:ext cx="11003279" cy="377952"/>
-          </a:xfrm>
-          <a:prstGeom prst="rect">
-            <a:avLst/>
-          </a:prstGeom>
-          <a:solidFill>
-            <a:srgbClr val="EDF3F6"/>
-          </a:solidFill>
-        </p:spPr>
-        <p:txBody>
-          <a:bodyPr wrap="none" anchor="t" lIns="88900" rIns="88900" tIns="38100" bIns="38100">
-            <a:noAutofit/>
-          </a:bodyPr>
-          <a:lstStyle/>
-          <a:p>
-            <a:pPr>
-              <a:lnSpc>
-                <a:spcPts val="2376"/>
-              </a:lnSpc>
-              <a:spcBef>
-                <a:spcPts val="0"/>
-              </a:spcBef>
-              <a:spcAft>
-                <a:spcPts val="0"/>
-              </a:spcAft>
-              <a:defRPr sz="1800">
-                <a:solidFill>
-                  <a:srgbClr val="20344A"/>
-                </a:solidFill>
-                <a:latin typeface="Arial"/>
-              </a:defRPr>
-            </a:pPr>
-            <a:r>
-              <a:rPr sz="1800" b="0" i="0">
-                <a:solidFill>
-                  <a:srgbClr val="20344A"/>
-                </a:solidFill>
-                <a:latin typeface="Courier New"/>
-              </a:rPr>
-              <a:t>abs(actual - expected) &lt;= max(1e-9, 1e-9 * abs(expected))</a:t>
-            </a:r>
-          </a:p>
-        </p:txBody>
-      </p:sp>
-      <p:sp>
-        <p:nvSpPr>
-          <p:cNvPr id="9" name="content:line-134:0"/>
-          <p:cNvSpPr txBox="1"/>
-          <p:nvPr/>
-        </p:nvSpPr>
-        <p:spPr>
-          <a:xfrm>
-            <a:off x="594360" y="4507992"/>
-            <a:ext cx="11003279" cy="1484376"/>
+              <a:t>good” is insufficient.</a:t>
+            </a:r>
+          </a:p>
+        </p:txBody>
+      </p:sp>
+      <p:sp>
+        <p:nvSpPr>
+          <p:cNvPr id="9" name="content:line-143:0"/>
+          <p:cNvSpPr txBox="1"/>
+          <p:nvPr/>
+        </p:nvSpPr>
+        <p:spPr>
+          <a:xfrm>
+            <a:off x="594360" y="5678424"/>
+            <a:ext cx="11003279" cy="428244"/>
           </a:xfrm>
           <a:prstGeom prst="rect">
             <a:avLst/>
@@ -7028,37 +7119,7 @@
                 </a:solidFill>
                 <a:latin typeface="Arial"/>
               </a:rPr>
-              <a:t>The first output is the reference. Instructor opens outputs </a:t>
-            </a:r>
-            <a:br/>
-            <a:r>
-              <a:rPr sz="2100" b="0" i="0">
-                <a:solidFill>
-                  <a:srgbClr val="20344A"/>
-                </a:solidFill>
-                <a:latin typeface="Arial"/>
-              </a:rPr>
-              <a:t>and diagnostics; matching charts alone are insufficient. Do not </a:t>
-            </a:r>
-            <a:br/>
-            <a:r>
-              <a:rPr sz="2100" b="0" i="0">
-                <a:solidFill>
-                  <a:srgbClr val="20344A"/>
-                </a:solidFill>
-                <a:latin typeface="Arial"/>
-              </a:rPr>
-              <a:t>drop fields, round away differences, or widen tolerance to </a:t>
-            </a:r>
-            <a:br/>
-            <a:r>
-              <a:rPr sz="2100" b="0" i="0">
-                <a:solidFill>
-                  <a:srgbClr val="20344A"/>
-                </a:solidFill>
-                <a:latin typeface="Arial"/>
-              </a:rPr>
-              <a:t>pass.</a:t>
+              <a:t>Instructor completes an individual evidence row for every </a:t>
             </a:r>
           </a:p>
         </p:txBody>
@@ -7172,7 +7233,7 @@
               </a:defRPr>
             </a:pPr>
             <a:r>
-              <a:t>SOURCE 15 / 18</a:t>
+              <a:t>SOURCE 15 / 18  ·  CONTINUED 2</a:t>
             </a:r>
           </a:p>
         </p:txBody>
@@ -7275,14 +7336,14 @@
       </p:sp>
       <p:sp>
         <p:nvSpPr>
-          <p:cNvPr id="6" name="content:line-140:0"/>
+          <p:cNvPr id="6" name="content:line-143:1"/>
           <p:cNvSpPr txBox="1"/>
           <p:nvPr/>
         </p:nvSpPr>
         <p:spPr>
           <a:xfrm>
             <a:off x="594360" y="1737360"/>
-            <a:ext cx="11003279" cy="1132332"/>
+            <a:ext cx="11003279" cy="780288"/>
           </a:xfrm>
           <a:prstGeom prst="rect">
             <a:avLst/>
@@ -7311,16 +7372,16 @@
                 </a:solidFill>
                 <a:latin typeface="Arial"/>
               </a:defRPr>
-              <a:buChar char="•"/>
-            </a:pPr>
-            <a:r>
-              <a:rPr sz="2100" b="0" i="0">
-                <a:solidFill>
-                  <a:srgbClr val="20344A"/>
-                </a:solidFill>
-                <a:latin typeface="Arial"/>
-              </a:rPr>
-              <a:t>Open feature branches, descriptive commits, PRs, and </a:t>
+              <a:buChar char=" "/>
+            </a:pPr>
+            <a:r>
+              <a:rPr sz="2100" b="0" i="0">
+                <a:solidFill>
+                  <a:srgbClr val="20344A"/>
+                </a:solidFill>
+                <a:latin typeface="Arial"/>
+              </a:rPr>
+              <a:t>member. Sandbox practice, generated template history, and </a:t>
             </a:r>
             <a:br/>
             <a:r>
@@ -7330,223 +7391,7 @@
                 </a:solidFill>
                 <a:latin typeface="Arial"/>
               </a:rPr>
-              <a:t>meaningful teammate reviews about behavior, tests, or </a:t>
-            </a:r>
-            <a:br/>
-            <a:r>
-              <a:rPr sz="2100" b="0" i="0">
-                <a:solidFill>
-                  <a:srgbClr val="20344A"/>
-                </a:solidFill>
-                <a:latin typeface="Arial"/>
-              </a:rPr>
-              <a:t>clarity; show responses/follow-up to concerns.</a:t>
-            </a:r>
-          </a:p>
-        </p:txBody>
-      </p:sp>
-      <p:sp>
-        <p:nvSpPr>
-          <p:cNvPr id="7" name="content:line-141:0"/>
-          <p:cNvSpPr txBox="1"/>
-          <p:nvPr/>
-        </p:nvSpPr>
-        <p:spPr>
-          <a:xfrm>
-            <a:off x="594360" y="2933700"/>
-            <a:ext cx="11003279" cy="1132332"/>
-          </a:xfrm>
-          <a:prstGeom prst="rect">
-            <a:avLst/>
-          </a:prstGeom>
-          <a:noFill/>
-        </p:spPr>
-        <p:txBody>
-          <a:bodyPr wrap="none" anchor="t" lIns="88900" rIns="88900" tIns="38100" bIns="38100">
-            <a:noAutofit/>
-          </a:bodyPr>
-          <a:lstStyle/>
-          <a:p>
-            <a:pPr marL="279400" indent="-215900">
-              <a:lnSpc>
-                <a:spcPts val="2772"/>
-              </a:lnSpc>
-              <a:spcBef>
-                <a:spcPts val="0"/>
-              </a:spcBef>
-              <a:spcAft>
-                <a:spcPts val="0"/>
-              </a:spcAft>
-              <a:defRPr sz="2100">
-                <a:solidFill>
-                  <a:srgbClr val="20344A"/>
-                </a:solidFill>
-                <a:latin typeface="Arial"/>
-              </a:defRPr>
-              <a:buChar char="•"/>
-            </a:pPr>
-            <a:r>
-              <a:rPr sz="2100" b="0" i="0">
-                <a:solidFill>
-                  <a:srgbClr val="20344A"/>
-                </a:solidFill>
-                <a:latin typeface="Arial"/>
-              </a:rPr>
-              <a:t>For EACH student: open at least one personally authored PR </a:t>
-            </a:r>
-            <a:br/>
-            <a:r>
-              <a:rPr sz="2100" b="0" i="0">
-                <a:solidFill>
-                  <a:srgbClr val="20344A"/>
-                </a:solidFill>
-                <a:latin typeface="Arial"/>
-              </a:rPr>
-              <a:t>and at least one substantive review of a teammate's PR, with </a:t>
-            </a:r>
-            <a:br/>
-            <a:r>
-              <a:rPr sz="2100" b="0" i="0">
-                <a:solidFill>
-                  <a:srgbClr val="20344A"/>
-                </a:solidFill>
-                <a:latin typeface="Arial"/>
-              </a:rPr>
-              <a:t>authorship and review permalinks.</a:t>
-            </a:r>
-          </a:p>
-        </p:txBody>
-      </p:sp>
-      <p:sp>
-        <p:nvSpPr>
-          <p:cNvPr id="8" name="content:line-142:0"/>
-          <p:cNvSpPr txBox="1"/>
-          <p:nvPr/>
-        </p:nvSpPr>
-        <p:spPr>
-          <a:xfrm>
-            <a:off x="594360" y="4130040"/>
-            <a:ext cx="11003279" cy="1132332"/>
-          </a:xfrm>
-          <a:prstGeom prst="rect">
-            <a:avLst/>
-          </a:prstGeom>
-          <a:noFill/>
-        </p:spPr>
-        <p:txBody>
-          <a:bodyPr wrap="none" anchor="t" lIns="88900" rIns="88900" tIns="38100" bIns="38100">
-            <a:noAutofit/>
-          </a:bodyPr>
-          <a:lstStyle/>
-          <a:p>
-            <a:pPr marL="279400" indent="-215900">
-              <a:lnSpc>
-                <a:spcPts val="2772"/>
-              </a:lnSpc>
-              <a:spcBef>
-                <a:spcPts val="0"/>
-              </a:spcBef>
-              <a:spcAft>
-                <a:spcPts val="0"/>
-              </a:spcAft>
-              <a:defRPr sz="2100">
-                <a:solidFill>
-                  <a:srgbClr val="20344A"/>
-                </a:solidFill>
-                <a:latin typeface="Arial"/>
-              </a:defRPr>
-              <a:buChar char="•"/>
-            </a:pPr>
-            <a:r>
-              <a:rPr sz="2100" b="0" i="0">
-                <a:solidFill>
-                  <a:srgbClr val="20344A"/>
-                </a:solidFill>
-                <a:latin typeface="Arial"/>
-              </a:rPr>
-              <a:t>Each member explains their contribution, authored change, </a:t>
-            </a:r>
-            <a:br/>
-            <a:r>
-              <a:rPr sz="2100" b="0" i="0">
-                <a:solidFill>
-                  <a:srgbClr val="20344A"/>
-                </a:solidFill>
-                <a:latin typeface="Arial"/>
-              </a:rPr>
-              <a:t>review reasoning, and any follow-up. Approval alone or “looks </a:t>
-            </a:r>
-            <a:br/>
-            <a:r>
-              <a:rPr sz="2100" b="0" i="0">
-                <a:solidFill>
-                  <a:srgbClr val="20344A"/>
-                </a:solidFill>
-                <a:latin typeface="Arial"/>
-              </a:rPr>
-              <a:t>good” is insufficient.</a:t>
-            </a:r>
-          </a:p>
-        </p:txBody>
-      </p:sp>
-      <p:sp>
-        <p:nvSpPr>
-          <p:cNvPr id="9" name="content:line-143:0"/>
-          <p:cNvSpPr txBox="1"/>
-          <p:nvPr/>
-        </p:nvSpPr>
-        <p:spPr>
-          <a:xfrm>
-            <a:off x="594360" y="5326380"/>
-            <a:ext cx="11003279" cy="780288"/>
-          </a:xfrm>
-          <a:prstGeom prst="rect">
-            <a:avLst/>
-          </a:prstGeom>
-          <a:noFill/>
-        </p:spPr>
-        <p:txBody>
-          <a:bodyPr wrap="none" anchor="t" lIns="88900" rIns="88900" tIns="38100" bIns="38100">
-            <a:noAutofit/>
-          </a:bodyPr>
-          <a:lstStyle/>
-          <a:p>
-            <a:pPr marL="279400" indent="-215900">
-              <a:lnSpc>
-                <a:spcPts val="2772"/>
-              </a:lnSpc>
-              <a:spcBef>
-                <a:spcPts val="0"/>
-              </a:spcBef>
-              <a:spcAft>
-                <a:spcPts val="0"/>
-              </a:spcAft>
-              <a:defRPr sz="2100">
-                <a:solidFill>
-                  <a:srgbClr val="20344A"/>
-                </a:solidFill>
-                <a:latin typeface="Arial"/>
-              </a:defRPr>
-              <a:buChar char="•"/>
-            </a:pPr>
-            <a:r>
-              <a:rPr sz="2100" b="0" i="0">
-                <a:solidFill>
-                  <a:srgbClr val="20344A"/>
-                </a:solidFill>
-                <a:latin typeface="Arial"/>
-              </a:rPr>
-              <a:t>Instructor completes an individual evidence row for every </a:t>
-            </a:r>
-            <a:br/>
-            <a:r>
-              <a:rPr sz="2100" b="0" i="0">
-                <a:solidFill>
-                  <a:srgbClr val="20344A"/>
-                </a:solidFill>
-                <a:latin typeface="Arial"/>
-              </a:rPr>
-              <a:t>member. Template history and instructor/agent work do not </a:t>
+              <a:t>instructor/agent work do not count.</a:t>
             </a:r>
           </a:p>
         </p:txBody>
@@ -7660,14 +7505,14 @@
               </a:defRPr>
             </a:pPr>
             <a:r>
-              <a:t>SOURCE 15 / 18  ·  CONTINUED 2</a:t>
-            </a:r>
-          </a:p>
-        </p:txBody>
-      </p:sp>
-      <p:sp>
-        <p:nvSpPr>
-          <p:cNvPr id="4" name="title:line-138"/>
+              <a:t>SOURCE 16 / 18</a:t>
+            </a:r>
+          </a:p>
+        </p:txBody>
+      </p:sp>
+      <p:sp>
+        <p:nvSpPr>
+          <p:cNvPr id="4" name="title:line-147"/>
           <p:cNvSpPr txBox="1"/>
           <p:nvPr/>
         </p:nvSpPr>
@@ -7711,7 +7556,7 @@
                 </a:solidFill>
                 <a:latin typeface="Arial"/>
               </a:rPr>
-              <a:t>Inspect collaboration and every member</a:t>
+              <a:t>Questions follow the evidence</a:t>
             </a:r>
           </a:p>
         </p:txBody>
@@ -7763,14 +7608,14 @@
       </p:sp>
       <p:sp>
         <p:nvSpPr>
-          <p:cNvPr id="6" name="content:line-143:2"/>
+          <p:cNvPr id="6" name="content:line-149:0"/>
           <p:cNvSpPr txBox="1"/>
           <p:nvPr/>
         </p:nvSpPr>
         <p:spPr>
           <a:xfrm>
             <a:off x="594360" y="1737360"/>
-            <a:ext cx="11003279" cy="428244"/>
+            <a:ext cx="11003279" cy="780288"/>
           </a:xfrm>
           <a:prstGeom prst="rect">
             <a:avLst/>
@@ -7799,35 +7644,222 @@
                 </a:solidFill>
                 <a:latin typeface="Arial"/>
               </a:defRPr>
-              <a:buChar char=" "/>
-            </a:pPr>
-            <a:r>
-              <a:rPr sz="2100" b="0" i="0">
-                <a:solidFill>
-                  <a:srgbClr val="20344A"/>
-                </a:solidFill>
-                <a:latin typeface="Arial"/>
-              </a:rPr>
-              <a:t>count; see the </a:t>
-            </a:r>
-            <a:r>
-              <a:rPr sz="2100" b="0" i="0">
-                <a:solidFill>
-                  <a:srgbClr val="007F82"/>
-                </a:solidFill>
-                <a:latin typeface="Arial"/>
-                <a:hlinkClick r:id="rId2"/>
-              </a:rPr>
-              <a:t>collaboration guide</a:t>
-            </a:r>
-            <a:r>
-              <a:rPr sz="2100" b="0" i="0">
-                <a:solidFill>
-                  <a:srgbClr val="20344A"/>
-                </a:solidFill>
-                <a:latin typeface="Arial"/>
-              </a:rPr>
-              <a:t>.</a:t>
+              <a:buChar char="•"/>
+            </a:pPr>
+            <a:r>
+              <a:rPr sz="2100" b="0" i="0">
+                <a:solidFill>
+                  <a:srgbClr val="20344A"/>
+                </a:solidFill>
+                <a:latin typeface="Arial"/>
+              </a:rPr>
+              <a:t>Why does this input fail? Open the rejection and the test that </a:t>
+            </a:r>
+            <a:br/>
+            <a:r>
+              <a:rPr sz="2100" b="0" i="0">
+                <a:solidFill>
+                  <a:srgbClr val="20344A"/>
+                </a:solidFill>
+                <a:latin typeface="Arial"/>
+              </a:rPr>
+              <a:t>establishes the rule.</a:t>
+            </a:r>
+          </a:p>
+        </p:txBody>
+      </p:sp>
+      <p:sp>
+        <p:nvSpPr>
+          <p:cNvPr id="7" name="content:line-150:0"/>
+          <p:cNvSpPr txBox="1"/>
+          <p:nvPr/>
+        </p:nvSpPr>
+        <p:spPr>
+          <a:xfrm>
+            <a:off x="594360" y="2581656"/>
+            <a:ext cx="11003279" cy="1132332"/>
+          </a:xfrm>
+          <a:prstGeom prst="rect">
+            <a:avLst/>
+          </a:prstGeom>
+          <a:noFill/>
+        </p:spPr>
+        <p:txBody>
+          <a:bodyPr wrap="none" anchor="t" lIns="88900" rIns="88900" tIns="38100" bIns="38100">
+            <a:noAutofit/>
+          </a:bodyPr>
+          <a:lstStyle/>
+          <a:p>
+            <a:pPr marL="279400" indent="-215900">
+              <a:lnSpc>
+                <a:spcPts val="2772"/>
+              </a:lnSpc>
+              <a:spcBef>
+                <a:spcPts val="0"/>
+              </a:spcBef>
+              <a:spcAft>
+                <a:spcPts val="0"/>
+              </a:spcAft>
+              <a:defRPr sz="2100">
+                <a:solidFill>
+                  <a:srgbClr val="20344A"/>
+                </a:solidFill>
+                <a:latin typeface="Arial"/>
+              </a:defRPr>
+              <a:buChar char="•"/>
+            </a:pPr>
+            <a:r>
+              <a:rPr sz="2100" b="0" i="0">
+                <a:solidFill>
+                  <a:srgbClr val="20344A"/>
+                </a:solidFill>
+                <a:latin typeface="Arial"/>
+              </a:rPr>
+              <a:t>Which code and input produced these outputs? Open the </a:t>
+            </a:r>
+            <a:br/>
+            <a:r>
+              <a:rPr sz="2100" b="0" i="0">
+                <a:solidFill>
+                  <a:srgbClr val="20344A"/>
+                </a:solidFill>
+                <a:latin typeface="Arial"/>
+              </a:rPr>
+              <a:t>commit and capture fingerprints, then explain environment </a:t>
+            </a:r>
+            <a:br/>
+            <a:r>
+              <a:rPr sz="2100" b="0" i="0">
+                <a:solidFill>
+                  <a:srgbClr val="20344A"/>
+                </a:solidFill>
+                <a:latin typeface="Arial"/>
+              </a:rPr>
+              <a:t>differences.</a:t>
+            </a:r>
+          </a:p>
+        </p:txBody>
+      </p:sp>
+      <p:sp>
+        <p:nvSpPr>
+          <p:cNvPr id="8" name="content:line-151:0"/>
+          <p:cNvSpPr txBox="1"/>
+          <p:nvPr/>
+        </p:nvSpPr>
+        <p:spPr>
+          <a:xfrm>
+            <a:off x="594360" y="3777996"/>
+            <a:ext cx="11003279" cy="780288"/>
+          </a:xfrm>
+          <a:prstGeom prst="rect">
+            <a:avLst/>
+          </a:prstGeom>
+          <a:noFill/>
+        </p:spPr>
+        <p:txBody>
+          <a:bodyPr wrap="none" anchor="t" lIns="88900" rIns="88900" tIns="38100" bIns="38100">
+            <a:noAutofit/>
+          </a:bodyPr>
+          <a:lstStyle/>
+          <a:p>
+            <a:pPr marL="279400" indent="-215900">
+              <a:lnSpc>
+                <a:spcPts val="2772"/>
+              </a:lnSpc>
+              <a:spcBef>
+                <a:spcPts val="0"/>
+              </a:spcBef>
+              <a:spcAft>
+                <a:spcPts val="0"/>
+              </a:spcAft>
+              <a:defRPr sz="2100">
+                <a:solidFill>
+                  <a:srgbClr val="20344A"/>
+                </a:solidFill>
+                <a:latin typeface="Arial"/>
+              </a:defRPr>
+              <a:buChar char="•"/>
+            </a:pPr>
+            <a:r>
+              <a:rPr sz="2100" b="0" i="0">
+                <a:solidFill>
+                  <a:srgbClr val="20344A"/>
+                </a:solidFill>
+                <a:latin typeface="Arial"/>
+              </a:rPr>
+              <a:t>Which fields compare exactly, and why is a derived value </a:t>
+            </a:r>
+            <a:br/>
+            <a:r>
+              <a:rPr sz="2100" b="0" i="0">
+                <a:solidFill>
+                  <a:srgbClr val="20344A"/>
+                </a:solidFill>
+                <a:latin typeface="Arial"/>
+              </a:rPr>
+              <a:t>allowed tolerance? Open the comparison and its tests.</a:t>
+            </a:r>
+          </a:p>
+        </p:txBody>
+      </p:sp>
+      <p:sp>
+        <p:nvSpPr>
+          <p:cNvPr id="9" name="content:line-152:0"/>
+          <p:cNvSpPr txBox="1"/>
+          <p:nvPr/>
+        </p:nvSpPr>
+        <p:spPr>
+          <a:xfrm>
+            <a:off x="594360" y="4622292"/>
+            <a:ext cx="11003279" cy="780288"/>
+          </a:xfrm>
+          <a:prstGeom prst="rect">
+            <a:avLst/>
+          </a:prstGeom>
+          <a:noFill/>
+        </p:spPr>
+        <p:txBody>
+          <a:bodyPr wrap="none" anchor="t" lIns="88900" rIns="88900" tIns="38100" bIns="38100">
+            <a:noAutofit/>
+          </a:bodyPr>
+          <a:lstStyle/>
+          <a:p>
+            <a:pPr marL="279400" indent="-215900">
+              <a:lnSpc>
+                <a:spcPts val="2772"/>
+              </a:lnSpc>
+              <a:spcBef>
+                <a:spcPts val="0"/>
+              </a:spcBef>
+              <a:spcAft>
+                <a:spcPts val="0"/>
+              </a:spcAft>
+              <a:defRPr sz="2100">
+                <a:solidFill>
+                  <a:srgbClr val="20344A"/>
+                </a:solidFill>
+                <a:latin typeface="Arial"/>
+              </a:defRPr>
+              <a:buChar char="•"/>
+            </a:pPr>
+            <a:r>
+              <a:rPr sz="2100" b="0" i="0">
+                <a:solidFill>
+                  <a:srgbClr val="20344A"/>
+                </a:solidFill>
+                <a:latin typeface="Arial"/>
+              </a:rPr>
+              <a:t>What did you change or ask a teammate to improve? Open your </a:t>
+            </a:r>
+            <a:br/>
+            <a:r>
+              <a:rPr sz="2100" b="0" i="0">
+                <a:solidFill>
+                  <a:srgbClr val="20344A"/>
+                </a:solidFill>
+                <a:latin typeface="Arial"/>
+              </a:rPr>
+              <a:t>PR or review and explain the result.</a:t>
             </a:r>
           </a:p>
         </p:txBody>
@@ -7941,14 +7973,14 @@
               </a:defRPr>
             </a:pPr>
             <a:r>
-              <a:t>SOURCE 16 / 18</a:t>
-            </a:r>
-          </a:p>
-        </p:txBody>
-      </p:sp>
-      <p:sp>
-        <p:nvSpPr>
-          <p:cNvPr id="4" name="title:line-147"/>
+              <a:t>SOURCE 17 / 18</a:t>
+            </a:r>
+          </a:p>
+        </p:txBody>
+      </p:sp>
+      <p:sp>
+        <p:nvSpPr>
+          <p:cNvPr id="4" name="title:line-156"/>
           <p:cNvSpPr txBox="1"/>
           <p:nvPr/>
         </p:nvSpPr>
@@ -7992,7 +8024,7 @@
                 </a:solidFill>
                 <a:latin typeface="Arial"/>
               </a:rPr>
-              <a:t>Questions follow the evidence</a:t>
+              <a:t>Shared break and remaining groups</a:t>
             </a:r>
           </a:p>
         </p:txBody>
@@ -8044,7 +8076,7 @@
       </p:sp>
       <p:sp>
         <p:nvSpPr>
-          <p:cNvPr id="6" name="content:line-149:0"/>
+          <p:cNvPr id="6" name="content:line-158:0"/>
           <p:cNvSpPr txBox="1"/>
           <p:nvPr/>
         </p:nvSpPr>
@@ -8089,7 +8121,7 @@
                 </a:solidFill>
                 <a:latin typeface="Arial"/>
               </a:rPr>
-              <a:t>Why does this input fail? Open the rejection and the test that </a:t>
+              <a:t>Take the reserved 10-minute break at the published slot </a:t>
             </a:r>
             <a:br/>
             <a:r>
@@ -8099,21 +8131,21 @@
                 </a:solidFill>
                 <a:latin typeface="Arial"/>
               </a:rPr>
-              <a:t>establishes the rule.</a:t>
-            </a:r>
-          </a:p>
-        </p:txBody>
-      </p:sp>
-      <p:sp>
-        <p:nvSpPr>
-          <p:cNvPr id="7" name="content:line-150:0"/>
+              <a:t>boundary.</a:t>
+            </a:r>
+          </a:p>
+        </p:txBody>
+      </p:sp>
+      <p:sp>
+        <p:nvSpPr>
+          <p:cNvPr id="7" name="content:line-159:0"/>
           <p:cNvSpPr txBox="1"/>
           <p:nvPr/>
         </p:nvSpPr>
         <p:spPr>
           <a:xfrm>
             <a:off x="594360" y="2581656"/>
-            <a:ext cx="11003279" cy="1132332"/>
+            <a:ext cx="11003279" cy="780288"/>
           </a:xfrm>
           <a:prstGeom prst="rect">
             <a:avLst/>
@@ -8151,7 +8183,7 @@
                 </a:solidFill>
                 <a:latin typeface="Arial"/>
               </a:rPr>
-              <a:t>Which code and input produced these outputs? Open the </a:t>
+              <a:t>Resume with the next group's live demo, evidence inspection, </a:t>
             </a:r>
             <a:br/>
             <a:r>
@@ -8161,7 +8193,59 @@
                 </a:solidFill>
                 <a:latin typeface="Arial"/>
               </a:rPr>
-              <a:t>commit and capture fingerprints, then explain environment </a:t>
+              <a:t>and questions using the same S allocation.</a:t>
+            </a:r>
+          </a:p>
+        </p:txBody>
+      </p:sp>
+      <p:sp>
+        <p:nvSpPr>
+          <p:cNvPr id="8" name="content:line-160:0"/>
+          <p:cNvSpPr txBox="1"/>
+          <p:nvPr/>
+        </p:nvSpPr>
+        <p:spPr>
+          <a:xfrm>
+            <a:off x="594360" y="3425952"/>
+            <a:ext cx="11003279" cy="780288"/>
+          </a:xfrm>
+          <a:prstGeom prst="rect">
+            <a:avLst/>
+          </a:prstGeom>
+          <a:noFill/>
+        </p:spPr>
+        <p:txBody>
+          <a:bodyPr wrap="none" anchor="t" lIns="88900" rIns="88900" tIns="38100" bIns="38100">
+            <a:noAutofit/>
+          </a:bodyPr>
+          <a:lstStyle/>
+          <a:p>
+            <a:pPr marL="279400" indent="-215900">
+              <a:lnSpc>
+                <a:spcPts val="2772"/>
+              </a:lnSpc>
+              <a:spcBef>
+                <a:spcPts val="0"/>
+              </a:spcBef>
+              <a:spcAft>
+                <a:spcPts val="0"/>
+              </a:spcAft>
+              <a:defRPr sz="2100">
+                <a:solidFill>
+                  <a:srgbClr val="20344A"/>
+                </a:solidFill>
+                <a:latin typeface="Arial"/>
+              </a:defRPr>
+              <a:buChar char="•"/>
+            </a:pPr>
+            <a:r>
+              <a:rPr sz="2100" b="0" i="0">
+                <a:solidFill>
+                  <a:srgbClr val="20344A"/>
+                </a:solidFill>
+                <a:latin typeface="Arial"/>
+              </a:rPr>
+              <a:t>Every group uses the same mandatory checklist; keep the </a:t>
             </a:r>
             <a:br/>
             <a:r>
@@ -8171,131 +8255,7 @@
                 </a:solidFill>
                 <a:latin typeface="Arial"/>
               </a:rPr>
-              <a:t>differences.</a:t>
-            </a:r>
-          </a:p>
-        </p:txBody>
-      </p:sp>
-      <p:sp>
-        <p:nvSpPr>
-          <p:cNvPr id="8" name="content:line-151:0"/>
-          <p:cNvSpPr txBox="1"/>
-          <p:nvPr/>
-        </p:nvSpPr>
-        <p:spPr>
-          <a:xfrm>
-            <a:off x="594360" y="3777996"/>
-            <a:ext cx="11003279" cy="780288"/>
-          </a:xfrm>
-          <a:prstGeom prst="rect">
-            <a:avLst/>
-          </a:prstGeom>
-          <a:noFill/>
-        </p:spPr>
-        <p:txBody>
-          <a:bodyPr wrap="none" anchor="t" lIns="88900" rIns="88900" tIns="38100" bIns="38100">
-            <a:noAutofit/>
-          </a:bodyPr>
-          <a:lstStyle/>
-          <a:p>
-            <a:pPr marL="279400" indent="-215900">
-              <a:lnSpc>
-                <a:spcPts val="2772"/>
-              </a:lnSpc>
-              <a:spcBef>
-                <a:spcPts val="0"/>
-              </a:spcBef>
-              <a:spcAft>
-                <a:spcPts val="0"/>
-              </a:spcAft>
-              <a:defRPr sz="2100">
-                <a:solidFill>
-                  <a:srgbClr val="20344A"/>
-                </a:solidFill>
-                <a:latin typeface="Arial"/>
-              </a:defRPr>
-              <a:buChar char="•"/>
-            </a:pPr>
-            <a:r>
-              <a:rPr sz="2100" b="0" i="0">
-                <a:solidFill>
-                  <a:srgbClr val="20344A"/>
-                </a:solidFill>
-                <a:latin typeface="Arial"/>
-              </a:rPr>
-              <a:t>Which fields compare exactly, and why is a derived value </a:t>
-            </a:r>
-            <a:br/>
-            <a:r>
-              <a:rPr sz="2100" b="0" i="0">
-                <a:solidFill>
-                  <a:srgbClr val="20344A"/>
-                </a:solidFill>
-                <a:latin typeface="Arial"/>
-              </a:rPr>
-              <a:t>allowed tolerance? Open the comparison and its tests.</a:t>
-            </a:r>
-          </a:p>
-        </p:txBody>
-      </p:sp>
-      <p:sp>
-        <p:nvSpPr>
-          <p:cNvPr id="9" name="content:line-152:0"/>
-          <p:cNvSpPr txBox="1"/>
-          <p:nvPr/>
-        </p:nvSpPr>
-        <p:spPr>
-          <a:xfrm>
-            <a:off x="594360" y="4622292"/>
-            <a:ext cx="11003279" cy="780288"/>
-          </a:xfrm>
-          <a:prstGeom prst="rect">
-            <a:avLst/>
-          </a:prstGeom>
-          <a:noFill/>
-        </p:spPr>
-        <p:txBody>
-          <a:bodyPr wrap="none" anchor="t" lIns="88900" rIns="88900" tIns="38100" bIns="38100">
-            <a:noAutofit/>
-          </a:bodyPr>
-          <a:lstStyle/>
-          <a:p>
-            <a:pPr marL="279400" indent="-215900">
-              <a:lnSpc>
-                <a:spcPts val="2772"/>
-              </a:lnSpc>
-              <a:spcBef>
-                <a:spcPts val="0"/>
-              </a:spcBef>
-              <a:spcAft>
-                <a:spcPts val="0"/>
-              </a:spcAft>
-              <a:defRPr sz="2100">
-                <a:solidFill>
-                  <a:srgbClr val="20344A"/>
-                </a:solidFill>
-                <a:latin typeface="Arial"/>
-              </a:defRPr>
-              <a:buChar char="•"/>
-            </a:pPr>
-            <a:r>
-              <a:rPr sz="2100" b="0" i="0">
-                <a:solidFill>
-                  <a:srgbClr val="20344A"/>
-                </a:solidFill>
-                <a:latin typeface="Arial"/>
-              </a:rPr>
-              <a:t>What did you change or ask a teammate to improve? Open your </a:t>
-            </a:r>
-            <a:br/>
-            <a:r>
-              <a:rPr sz="2100" b="0" i="0">
-                <a:solidFill>
-                  <a:srgbClr val="20344A"/>
-                </a:solidFill>
-                <a:latin typeface="Arial"/>
-              </a:rPr>
-              <a:t>PR or review and explain the result.</a:t>
+              <a:t>reserved five-minute closing within the 170 minutes.</a:t>
             </a:r>
           </a:p>
         </p:txBody>
@@ -8680,14 +8640,14 @@
               </a:defRPr>
             </a:pPr>
             <a:r>
-              <a:t>SOURCE 17 / 18</a:t>
-            </a:r>
-          </a:p>
-        </p:txBody>
-      </p:sp>
-      <p:sp>
-        <p:nvSpPr>
-          <p:cNvPr id="4" name="title:line-156"/>
+              <a:t>SOURCE 18 / 18</a:t>
+            </a:r>
+          </a:p>
+        </p:txBody>
+      </p:sp>
+      <p:sp>
+        <p:nvSpPr>
+          <p:cNvPr id="4" name="title:line-164"/>
           <p:cNvSpPr txBox="1"/>
           <p:nvPr/>
         </p:nvSpPr>
@@ -8731,7 +8691,7 @@
                 </a:solidFill>
                 <a:latin typeface="Arial"/>
               </a:rPr>
-              <a:t>Shared break and remaining groups</a:t>
+              <a:t>Closing: connect the engineering evidence</a:t>
             </a:r>
           </a:p>
         </p:txBody>
@@ -8783,13 +8743,85 @@
       </p:sp>
       <p:sp>
         <p:nvSpPr>
-          <p:cNvPr id="6" name="content:line-158:0"/>
+          <p:cNvPr id="6" name="content:line-166:0"/>
           <p:cNvSpPr txBox="1"/>
           <p:nvPr/>
         </p:nvSpPr>
         <p:spPr>
           <a:xfrm>
             <a:off x="594360" y="1737360"/>
+            <a:ext cx="11003279" cy="1132332"/>
+          </a:xfrm>
+          <a:prstGeom prst="rect">
+            <a:avLst/>
+          </a:prstGeom>
+          <a:noFill/>
+        </p:spPr>
+        <p:txBody>
+          <a:bodyPr wrap="none" anchor="t" lIns="88900" rIns="88900" tIns="38100" bIns="38100">
+            <a:noAutofit/>
+          </a:bodyPr>
+          <a:lstStyle/>
+          <a:p>
+            <a:pPr marL="279400" indent="-215900">
+              <a:lnSpc>
+                <a:spcPts val="2772"/>
+              </a:lnSpc>
+              <a:spcBef>
+                <a:spcPts val="0"/>
+              </a:spcBef>
+              <a:spcAft>
+                <a:spcPts val="0"/>
+              </a:spcAft>
+              <a:defRPr sz="2100">
+                <a:solidFill>
+                  <a:srgbClr val="20344A"/>
+                </a:solidFill>
+                <a:latin typeface="Arial"/>
+              </a:defRPr>
+              <a:buChar char="•"/>
+            </a:pPr>
+            <a:r>
+              <a:rPr sz="2100" b="0" i="0">
+                <a:solidFill>
+                  <a:srgbClr val="20344A"/>
+                </a:solidFill>
+                <a:latin typeface="Arial"/>
+              </a:rPr>
+              <a:t>Use the final five minutes to connect environment, package </a:t>
+            </a:r>
+            <a:br/>
+            <a:r>
+              <a:rPr sz="2100" b="0" i="0">
+                <a:solidFill>
+                  <a:srgbClr val="20344A"/>
+                </a:solidFill>
+                <a:latin typeface="Arial"/>
+              </a:rPr>
+              <a:t>and Release, API/UI, containers, tests, comparisons, and peer </a:t>
+            </a:r>
+            <a:br/>
+            <a:r>
+              <a:rPr sz="2100" b="0" i="0">
+                <a:solidFill>
+                  <a:srgbClr val="20344A"/>
+                </a:solidFill>
+                <a:latin typeface="Arial"/>
+              </a:rPr>
+              <a:t>review.</a:t>
+            </a:r>
+          </a:p>
+        </p:txBody>
+      </p:sp>
+      <p:sp>
+        <p:nvSpPr>
+          <p:cNvPr id="7" name="content:line-167:0"/>
+          <p:cNvSpPr txBox="1"/>
+          <p:nvPr/>
+        </p:nvSpPr>
+        <p:spPr>
+          <a:xfrm>
+            <a:off x="594360" y="2933700"/>
             <a:ext cx="11003279" cy="780288"/>
           </a:xfrm>
           <a:prstGeom prst="rect">
@@ -8828,7 +8860,7 @@
                 </a:solidFill>
                 <a:latin typeface="Arial"/>
               </a:rPr>
-              <a:t>Take the reserved 15-minute break at the published slot </a:t>
+              <a:t>Pass requires every mandatory group row and every student's </a:t>
             </a:r>
             <a:br/>
             <a:r>
@@ -8838,21 +8870,21 @@
                 </a:solidFill>
                 <a:latin typeface="Arial"/>
               </a:rPr>
-              <a:t>boundary.</a:t>
-            </a:r>
-          </a:p>
-        </p:txBody>
-      </p:sp>
-      <p:sp>
-        <p:nvSpPr>
-          <p:cNvPr id="7" name="content:line-159:0"/>
-          <p:cNvSpPr txBox="1"/>
-          <p:nvPr/>
-        </p:nvSpPr>
-        <p:spPr>
-          <a:xfrm>
-            <a:off x="594360" y="2581656"/>
-            <a:ext cx="11003279" cy="780288"/>
+              <a:t>individual participation requirement to pass.</a:t>
+            </a:r>
+          </a:p>
+        </p:txBody>
+      </p:sp>
+      <p:sp>
+        <p:nvSpPr>
+          <p:cNvPr id="8" name="content:line-168:0"/>
+          <p:cNvSpPr txBox="1"/>
+          <p:nvPr/>
+        </p:nvSpPr>
+        <p:spPr>
+          <a:xfrm>
+            <a:off x="594360" y="3777996"/>
+            <a:ext cx="11003279" cy="1132332"/>
           </a:xfrm>
           <a:prstGeom prst="rect">
             <a:avLst/>
@@ -8890,7 +8922,7 @@
                 </a:solidFill>
                 <a:latin typeface="Arial"/>
               </a:rPr>
-              <a:t>Resume with the next group's live demo, evidence inspection, </a:t>
+              <a:t>Instructor records failed rows and reasons at the </a:t>
             </a:r>
             <a:br/>
             <a:r>
@@ -8900,59 +8932,7 @@
                 </a:solidFill>
                 <a:latin typeface="Arial"/>
               </a:rPr>
-              <a:t>and questions using the same S allocation.</a:t>
-            </a:r>
-          </a:p>
-        </p:txBody>
-      </p:sp>
-      <p:sp>
-        <p:nvSpPr>
-          <p:cNvPr id="8" name="content:line-160:0"/>
-          <p:cNvSpPr txBox="1"/>
-          <p:nvPr/>
-        </p:nvSpPr>
-        <p:spPr>
-          <a:xfrm>
-            <a:off x="594360" y="3425952"/>
-            <a:ext cx="11003279" cy="780288"/>
-          </a:xfrm>
-          <a:prstGeom prst="rect">
-            <a:avLst/>
-          </a:prstGeom>
-          <a:noFill/>
-        </p:spPr>
-        <p:txBody>
-          <a:bodyPr wrap="none" anchor="t" lIns="88900" rIns="88900" tIns="38100" bIns="38100">
-            <a:noAutofit/>
-          </a:bodyPr>
-          <a:lstStyle/>
-          <a:p>
-            <a:pPr marL="279400" indent="-215900">
-              <a:lnSpc>
-                <a:spcPts val="2772"/>
-              </a:lnSpc>
-              <a:spcBef>
-                <a:spcPts val="0"/>
-              </a:spcBef>
-              <a:spcAft>
-                <a:spcPts val="0"/>
-              </a:spcAft>
-              <a:defRPr sz="2100">
-                <a:solidFill>
-                  <a:srgbClr val="20344A"/>
-                </a:solidFill>
-                <a:latin typeface="Arial"/>
-              </a:defRPr>
-              <a:buChar char="•"/>
-            </a:pPr>
-            <a:r>
-              <a:rPr sz="2100" b="0" i="0">
-                <a:solidFill>
-                  <a:srgbClr val="20344A"/>
-                </a:solidFill>
-                <a:latin typeface="Arial"/>
-              </a:rPr>
-              <a:t>Every group uses the same mandatory checklist; keep the </a:t>
+              <a:t>presentation; no averaging or complexity bonuses, and no later </a:t>
             </a:r>
             <a:br/>
             <a:r>
@@ -8962,412 +8942,6 @@
                 </a:solidFill>
                 <a:latin typeface="Arial"/>
               </a:rPr>
-              <a:t>reserved five-minute closing within the three hours.</a:t>
-            </a:r>
-          </a:p>
-        </p:txBody>
-      </p:sp>
-    </p:spTree>
-  </p:cSld>
-  <p:clrMapOvr>
-    <a:masterClrMapping/>
-  </p:clrMapOvr>
-</p:sld>
-</file>
-
-<file path=ppt/slides/slide21.xml><?xml version="1.0" encoding="utf-8"?>
-<p:sld xmlns:a="http://schemas.openxmlformats.org/drawingml/2006/main" xmlns:p="http://schemas.openxmlformats.org/presentationml/2006/main" xmlns:r="http://schemas.openxmlformats.org/officeDocument/2006/relationships">
-  <p:cSld>
-    <p:bg>
-      <p:bgPr>
-        <a:solidFill>
-          <a:srgbClr val="FAFCFD"/>
-        </a:solidFill>
-        <a:effectLst/>
-      </p:bgPr>
-    </p:bg>
-    <p:spTree>
-      <p:nvGrpSpPr>
-        <p:cNvPr id="1" name=""/>
-        <p:cNvGrpSpPr/>
-        <p:nvPr/>
-      </p:nvGrpSpPr>
-      <p:grpSpPr/>
-      <p:sp>
-        <p:nvSpPr>
-          <p:cNvPr id="2" name="accent"/>
-          <p:cNvSpPr/>
-          <p:nvPr/>
-        </p:nvSpPr>
-        <p:spPr>
-          <a:xfrm>
-            <a:off x="0" y="0"/>
-            <a:ext cx="12191999" cy="64008"/>
-          </a:xfrm>
-          <a:prstGeom prst="rect">
-            <a:avLst/>
-          </a:prstGeom>
-          <a:solidFill>
-            <a:srgbClr val="007F82"/>
-          </a:solidFill>
-          <a:ln>
-            <a:noFill/>
-          </a:ln>
-        </p:spPr>
-        <p:style>
-          <a:lnRef idx="1">
-            <a:schemeClr val="accent1"/>
-          </a:lnRef>
-          <a:fillRef idx="3">
-            <a:schemeClr val="accent1"/>
-          </a:fillRef>
-          <a:effectRef idx="2">
-            <a:schemeClr val="accent1"/>
-          </a:effectRef>
-          <a:fontRef idx="minor">
-            <a:schemeClr val="lt1"/>
-          </a:fontRef>
-        </p:style>
-        <p:txBody>
-          <a:bodyPr rtlCol="0" anchor="ctr"/>
-          <a:lstStyle/>
-          <a:p>
-            <a:pPr algn="ctr"/>
-          </a:p>
-        </p:txBody>
-      </p:sp>
-      <p:sp>
-        <p:nvSpPr>
-          <p:cNvPr id="3" name="section"/>
-          <p:cNvSpPr txBox="1"/>
-          <p:nvPr/>
-        </p:nvSpPr>
-        <p:spPr>
-          <a:xfrm>
-            <a:off x="594360" y="201168"/>
-            <a:ext cx="11003279" cy="256032"/>
-          </a:xfrm>
-          <a:prstGeom prst="rect">
-            <a:avLst/>
-          </a:prstGeom>
-          <a:noFill/>
-        </p:spPr>
-        <p:txBody>
-          <a:bodyPr wrap="none" anchor="t" lIns="88900" rIns="88900" tIns="38100" bIns="38100">
-            <a:noAutofit/>
-          </a:bodyPr>
-          <a:lstStyle/>
-          <a:p>
-            <a:pPr>
-              <a:lnSpc>
-                <a:spcPts val="1452"/>
-              </a:lnSpc>
-              <a:spcBef>
-                <a:spcPts val="0"/>
-              </a:spcBef>
-              <a:spcAft>
-                <a:spcPts val="0"/>
-              </a:spcAft>
-              <a:defRPr sz="1100">
-                <a:solidFill>
-                  <a:srgbClr val="53677A"/>
-                </a:solidFill>
-                <a:latin typeface="Arial"/>
-              </a:defRPr>
-            </a:pPr>
-            <a:r>
-              <a:t>SOURCE 18 / 18</a:t>
-            </a:r>
-          </a:p>
-        </p:txBody>
-      </p:sp>
-      <p:sp>
-        <p:nvSpPr>
-          <p:cNvPr id="4" name="title:line-164"/>
-          <p:cNvSpPr txBox="1"/>
-          <p:nvPr/>
-        </p:nvSpPr>
-        <p:spPr>
-          <a:xfrm>
-            <a:off x="594360" y="530352"/>
-            <a:ext cx="11003279" cy="1161288"/>
-          </a:xfrm>
-          <a:prstGeom prst="rect">
-            <a:avLst/>
-          </a:prstGeom>
-          <a:noFill/>
-        </p:spPr>
-        <p:txBody>
-          <a:bodyPr wrap="none" anchor="t" lIns="88900" rIns="88900" tIns="38100" bIns="38100">
-            <a:noAutofit/>
-          </a:bodyPr>
-          <a:lstStyle/>
-          <a:p>
-            <a:pPr>
-              <a:lnSpc>
-                <a:spcPts val="4000"/>
-              </a:lnSpc>
-              <a:spcBef>
-                <a:spcPts val="0"/>
-              </a:spcBef>
-              <a:spcAft>
-                <a:spcPts val="0"/>
-              </a:spcAft>
-              <a:defRPr sz="3200">
-                <a:solidFill>
-                  <a:srgbClr val="20344A"/>
-                </a:solidFill>
-                <a:latin typeface="Arial"/>
-              </a:defRPr>
-            </a:pPr>
-            <a:r>
-              <a:rPr sz="3200" b="0" i="0">
-                <a:solidFill>
-                  <a:srgbClr val="20344A"/>
-                </a:solidFill>
-                <a:latin typeface="Arial"/>
-              </a:rPr>
-              <a:t>Closing: connect the engineering evidence</a:t>
-            </a:r>
-          </a:p>
-        </p:txBody>
-      </p:sp>
-      <p:sp>
-        <p:nvSpPr>
-          <p:cNvPr id="5" name="footer"/>
-          <p:cNvSpPr txBox="1"/>
-          <p:nvPr/>
-        </p:nvSpPr>
-        <p:spPr>
-          <a:xfrm>
-            <a:off x="594360" y="6510528"/>
-            <a:ext cx="11003279" cy="219456"/>
-          </a:xfrm>
-          <a:prstGeom prst="rect">
-            <a:avLst/>
-          </a:prstGeom>
-          <a:noFill/>
-        </p:spPr>
-        <p:txBody>
-          <a:bodyPr wrap="none" anchor="t" lIns="88900" rIns="88900" tIns="38100" bIns="38100">
-            <a:noAutofit/>
-          </a:bodyPr>
-          <a:lstStyle/>
-          <a:p>
-            <a:pPr>
-              <a:lnSpc>
-                <a:spcPts val="1320"/>
-              </a:lnSpc>
-              <a:spcBef>
-                <a:spcPts val="0"/>
-              </a:spcBef>
-              <a:spcAft>
-                <a:spcPts val="0"/>
-              </a:spcAft>
-              <a:defRPr sz="1000">
-                <a:solidFill>
-                  <a:srgbClr val="53677A"/>
-                </a:solidFill>
-                <a:latin typeface="Arial"/>
-              </a:defRPr>
-            </a:pPr>
-            <a:r>
-              <a:t>session-5.md   ·   21</a:t>
-            </a:r>
-          </a:p>
-        </p:txBody>
-      </p:sp>
-      <p:sp>
-        <p:nvSpPr>
-          <p:cNvPr id="6" name="content:line-166:0"/>
-          <p:cNvSpPr txBox="1"/>
-          <p:nvPr/>
-        </p:nvSpPr>
-        <p:spPr>
-          <a:xfrm>
-            <a:off x="594360" y="1737360"/>
-            <a:ext cx="11003279" cy="780288"/>
-          </a:xfrm>
-          <a:prstGeom prst="rect">
-            <a:avLst/>
-          </a:prstGeom>
-          <a:noFill/>
-        </p:spPr>
-        <p:txBody>
-          <a:bodyPr wrap="none" anchor="t" lIns="88900" rIns="88900" tIns="38100" bIns="38100">
-            <a:noAutofit/>
-          </a:bodyPr>
-          <a:lstStyle/>
-          <a:p>
-            <a:pPr marL="279400" indent="-215900">
-              <a:lnSpc>
-                <a:spcPts val="2772"/>
-              </a:lnSpc>
-              <a:spcBef>
-                <a:spcPts val="0"/>
-              </a:spcBef>
-              <a:spcAft>
-                <a:spcPts val="0"/>
-              </a:spcAft>
-              <a:defRPr sz="2100">
-                <a:solidFill>
-                  <a:srgbClr val="20344A"/>
-                </a:solidFill>
-                <a:latin typeface="Arial"/>
-              </a:defRPr>
-              <a:buChar char="•"/>
-            </a:pPr>
-            <a:r>
-              <a:rPr sz="2100" b="0" i="0">
-                <a:solidFill>
-                  <a:srgbClr val="20344A"/>
-                </a:solidFill>
-                <a:latin typeface="Arial"/>
-              </a:rPr>
-              <a:t>Use the final five minutes to connect environment, package, </a:t>
-            </a:r>
-            <a:br/>
-            <a:r>
-              <a:rPr sz="2100" b="0" i="0">
-                <a:solidFill>
-                  <a:srgbClr val="20344A"/>
-                </a:solidFill>
-                <a:latin typeface="Arial"/>
-              </a:rPr>
-              <a:t>API/UI, containers, tests, comparisons, and peer review.</a:t>
-            </a:r>
-          </a:p>
-        </p:txBody>
-      </p:sp>
-      <p:sp>
-        <p:nvSpPr>
-          <p:cNvPr id="7" name="content:line-167:0"/>
-          <p:cNvSpPr txBox="1"/>
-          <p:nvPr/>
-        </p:nvSpPr>
-        <p:spPr>
-          <a:xfrm>
-            <a:off x="594360" y="2581656"/>
-            <a:ext cx="11003279" cy="780288"/>
-          </a:xfrm>
-          <a:prstGeom prst="rect">
-            <a:avLst/>
-          </a:prstGeom>
-          <a:noFill/>
-        </p:spPr>
-        <p:txBody>
-          <a:bodyPr wrap="none" anchor="t" lIns="88900" rIns="88900" tIns="38100" bIns="38100">
-            <a:noAutofit/>
-          </a:bodyPr>
-          <a:lstStyle/>
-          <a:p>
-            <a:pPr marL="279400" indent="-215900">
-              <a:lnSpc>
-                <a:spcPts val="2772"/>
-              </a:lnSpc>
-              <a:spcBef>
-                <a:spcPts val="0"/>
-              </a:spcBef>
-              <a:spcAft>
-                <a:spcPts val="0"/>
-              </a:spcAft>
-              <a:defRPr sz="2100">
-                <a:solidFill>
-                  <a:srgbClr val="20344A"/>
-                </a:solidFill>
-                <a:latin typeface="Arial"/>
-              </a:defRPr>
-              <a:buChar char="•"/>
-            </a:pPr>
-            <a:r>
-              <a:rPr sz="2100" b="0" i="0">
-                <a:solidFill>
-                  <a:srgbClr val="20344A"/>
-                </a:solidFill>
-                <a:latin typeface="Arial"/>
-              </a:rPr>
-              <a:t>Pass requires every mandatory group row and every student's </a:t>
-            </a:r>
-            <a:br/>
-            <a:r>
-              <a:rPr sz="2100" b="0" i="0">
-                <a:solidFill>
-                  <a:srgbClr val="20344A"/>
-                </a:solidFill>
-                <a:latin typeface="Arial"/>
-              </a:rPr>
-              <a:t>individual participation requirement to pass.</a:t>
-            </a:r>
-          </a:p>
-        </p:txBody>
-      </p:sp>
-      <p:sp>
-        <p:nvSpPr>
-          <p:cNvPr id="8" name="content:line-168:0"/>
-          <p:cNvSpPr txBox="1"/>
-          <p:nvPr/>
-        </p:nvSpPr>
-        <p:spPr>
-          <a:xfrm>
-            <a:off x="594360" y="3425952"/>
-            <a:ext cx="11003279" cy="1132332"/>
-          </a:xfrm>
-          <a:prstGeom prst="rect">
-            <a:avLst/>
-          </a:prstGeom>
-          <a:noFill/>
-        </p:spPr>
-        <p:txBody>
-          <a:bodyPr wrap="none" anchor="t" lIns="88900" rIns="88900" tIns="38100" bIns="38100">
-            <a:noAutofit/>
-          </a:bodyPr>
-          <a:lstStyle/>
-          <a:p>
-            <a:pPr marL="279400" indent="-215900">
-              <a:lnSpc>
-                <a:spcPts val="2772"/>
-              </a:lnSpc>
-              <a:spcBef>
-                <a:spcPts val="0"/>
-              </a:spcBef>
-              <a:spcAft>
-                <a:spcPts val="0"/>
-              </a:spcAft>
-              <a:defRPr sz="2100">
-                <a:solidFill>
-                  <a:srgbClr val="20344A"/>
-                </a:solidFill>
-                <a:latin typeface="Arial"/>
-              </a:defRPr>
-              <a:buChar char="•"/>
-            </a:pPr>
-            <a:r>
-              <a:rPr sz="2100" b="0" i="0">
-                <a:solidFill>
-                  <a:srgbClr val="20344A"/>
-                </a:solidFill>
-                <a:latin typeface="Arial"/>
-              </a:rPr>
-              <a:t>Instructor records failed rows and reasons at the </a:t>
-            </a:r>
-            <a:br/>
-            <a:r>
-              <a:rPr sz="2100" b="0" i="0">
-                <a:solidFill>
-                  <a:srgbClr val="20344A"/>
-                </a:solidFill>
-                <a:latin typeface="Arial"/>
-              </a:rPr>
-              <a:t>presentation; no averaging or complexity bonuses, and no later </a:t>
-            </a:r>
-            <a:br/>
-            <a:r>
-              <a:rPr sz="2100" b="0" i="0">
-                <a:solidFill>
-                  <a:srgbClr val="20344A"/>
-                </a:solidFill>
-                <a:latin typeface="Arial"/>
-              </a:rPr>
               <a:t>retry.</a:t>
             </a:r>
           </a:p>
@@ -9381,7 +8955,7 @@
         </p:nvSpPr>
         <p:spPr>
           <a:xfrm>
-            <a:off x="594360" y="4622292"/>
+            <a:off x="594360" y="4974336"/>
             <a:ext cx="11003279" cy="780288"/>
           </a:xfrm>
           <a:prstGeom prst="rect">
@@ -9997,7 +9571,7 @@
         <p:spPr>
           <a:xfrm>
             <a:off x="594360" y="4622292"/>
-            <a:ext cx="11003279" cy="780288"/>
+            <a:ext cx="11003279" cy="1132332"/>
           </a:xfrm>
           <a:prstGeom prst="rect">
             <a:avLst/>
@@ -10054,7 +9628,17 @@
                 </a:solidFill>
                 <a:latin typeface="Arial"/>
               </a:rPr>
-              <a:t>Fix: tests.</a:t>
+              <a:t>Fix: tests, and a Release </a:t>
+            </a:r>
+            <a:br/>
+            <a:r>
+              <a:rPr sz="2100" b="1" i="0">
+                <a:solidFill>
+                  <a:srgbClr val="20344A"/>
+                </a:solidFill>
+                <a:latin typeface="Arial"/>
+              </a:rPr>
+              <a:t>others can install.</a:t>
             </a:r>
           </a:p>
         </p:txBody>
@@ -10067,8 +9651,8 @@
         </p:nvSpPr>
         <p:spPr>
           <a:xfrm>
-            <a:off x="594360" y="5466588"/>
-            <a:ext cx="11003279" cy="780288"/>
+            <a:off x="594360" y="5818632"/>
+            <a:ext cx="11003279" cy="428244"/>
           </a:xfrm>
           <a:prstGeom prst="rect">
             <a:avLst/>
@@ -10107,25 +9691,6 @@
                 <a:latin typeface="Arial"/>
               </a:rPr>
               <a:t>Stage 5 (Session 3): tests and CI; CI turns red on that </a:t>
-            </a:r>
-            <a:br/>
-            <a:r>
-              <a:rPr sz="2100" b="0" i="0">
-                <a:solidFill>
-                  <a:srgbClr val="20344A"/>
-                </a:solidFill>
-                <a:latin typeface="Arial"/>
-              </a:rPr>
-              <a:t>cleanup, but only programmers get a prediction. </a:t>
-            </a:r>
-            <a:r>
-              <a:rPr sz="2100" b="1" i="0">
-                <a:solidFill>
-                  <a:srgbClr val="20344A"/>
-                </a:solidFill>
-                <a:latin typeface="Arial"/>
-              </a:rPr>
-              <a:t>Fix: API and </a:t>
             </a:r>
           </a:p>
         </p:txBody>
@@ -10352,14 +9917,14 @@
       </p:sp>
       <p:sp>
         <p:nvSpPr>
-          <p:cNvPr id="6" name="content:line-22:2"/>
+          <p:cNvPr id="6" name="content:line-22:1"/>
           <p:cNvSpPr txBox="1"/>
           <p:nvPr/>
         </p:nvSpPr>
         <p:spPr>
           <a:xfrm>
             <a:off x="594360" y="1737360"/>
-            <a:ext cx="11003279" cy="428244"/>
+            <a:ext cx="11003279" cy="780288"/>
           </a:xfrm>
           <a:prstGeom prst="rect">
             <a:avLst/>
@@ -10391,12 +9956,31 @@
               <a:buChar char=" "/>
             </a:pPr>
             <a:r>
+              <a:rPr sz="2100" b="0" i="0">
+                <a:solidFill>
+                  <a:srgbClr val="20344A"/>
+                </a:solidFill>
+                <a:latin typeface="Arial"/>
+              </a:rPr>
+              <a:t>cleanup, but only programmers get a prediction. </a:t>
+            </a:r>
+            <a:r>
               <a:rPr sz="2100" b="1" i="0">
                 <a:solidFill>
                   <a:srgbClr val="20344A"/>
                 </a:solidFill>
                 <a:latin typeface="Arial"/>
               </a:rPr>
+              <a:t>Fix: API and </a:t>
+            </a:r>
+            <a:br/>
+            <a:r>
+              <a:rPr sz="2100" b="1" i="0">
+                <a:solidFill>
+                  <a:srgbClr val="20344A"/>
+                </a:solidFill>
+                <a:latin typeface="Arial"/>
+              </a:rPr>
               <a:t>UI.</a:t>
             </a:r>
           </a:p>
@@ -10410,7 +9994,7 @@
         </p:nvSpPr>
         <p:spPr>
           <a:xfrm>
-            <a:off x="594360" y="2229612"/>
+            <a:off x="594360" y="2581656"/>
             <a:ext cx="11003279" cy="780288"/>
           </a:xfrm>
           <a:prstGeom prst="rect">
@@ -10449,7 +10033,7 @@
                 </a:solidFill>
                 <a:latin typeface="Arial"/>
               </a:rPr>
-              <a:t>Stage 6 (Sessions 3–4): FastAPI and Streamlit; works only on </a:t>
+              <a:t>Stage 6 (Session 4): FastAPI and Streamlit; works only on a </a:t>
             </a:r>
             <a:br/>
             <a:r>
@@ -10459,7 +10043,7 @@
                 </a:solidFill>
                 <a:latin typeface="Arial"/>
               </a:rPr>
-              <a:t>a correctly set-up machine. </a:t>
+              <a:t>correctly set-up machine. </a:t>
             </a:r>
             <a:r>
               <a:rPr sz="2100" b="1" i="0">
@@ -10481,7 +10065,7 @@
         </p:nvSpPr>
         <p:spPr>
           <a:xfrm>
-            <a:off x="594360" y="3073908"/>
+            <a:off x="594360" y="3425952"/>
             <a:ext cx="11003279" cy="1132332"/>
           </a:xfrm>
           <a:prstGeom prst="rect">
@@ -10725,7 +10309,7 @@
                 </a:solidFill>
                 <a:latin typeface="Arial"/>
               </a:rPr>
-              <a:t>Our 180-minute showcase</a:t>
+              <a:t>Our 170-minute showcase</a:t>
             </a:r>
           </a:p>
         </p:txBody>
@@ -10822,7 +10406,7 @@
                 </a:solidFill>
                 <a:latin typeface="Arial"/>
               </a:rPr>
-              <a:t>Opening brief: 10 minutes. Group slots: 150 minutes in total.</a:t>
+              <a:t>Opening brief: 10 minutes. Group slots: 145 minutes in total.</a:t>
             </a:r>
           </a:p>
         </p:txBody>
@@ -10874,7 +10458,7 @@
                 </a:solidFill>
                 <a:latin typeface="Arial"/>
               </a:rPr>
-              <a:t>Shared break: 15 minutes between group slots. Closing: 5 </a:t>
+              <a:t>Shared break: 10 minutes between group slots. Closing: 5 </a:t>
             </a:r>
             <a:br/>
             <a:r>
@@ -10936,7 +10520,7 @@
                 </a:solidFill>
                 <a:latin typeface="Arial"/>
               </a:rPr>
-              <a:t>Let G be the actual number of groups; each slot is S = 150 / G </a:t>
+              <a:t>Let G be the actual number of groups; each slot is S = 145 / G </a:t>
             </a:r>
             <a:br/>
             <a:r>
@@ -10998,7 +10582,7 @@
                 </a:solidFill>
                 <a:latin typeface="Arial"/>
               </a:rPr>
-              <a:t>Total: 10 + G * S + 15 + 5 = 180 minutes.</a:t>
+              <a:t>Total: 10 + G * S + 10 + 5 = 170 minutes.</a:t>
             </a:r>
           </a:p>
         </p:txBody>
@@ -12287,7 +11871,7 @@
                 </a:solidFill>
                 <a:latin typeface="Arial"/>
               </a:rPr>
-              <a:t>Instructor demonstrates navigation using the completed </a:t>
+              <a:t>Instructor demonstrates navigation using a completed </a:t>
             </a:r>
             <a:br/>
             <a:r>
@@ -12297,7 +11881,7 @@
                 </a:solidFill>
                 <a:latin typeface="Arial"/>
               </a:rPr>
-              <a:t>synthetic example; groups then show their own work.</a:t>
+              <a:t>example Backend repo; groups then show their own work.</a:t>
             </a:r>
           </a:p>
         </p:txBody>
@@ -12359,7 +11943,7 @@
                 </a:solidFill>
                 <a:latin typeface="Arial"/>
               </a:rPr>
-              <a:t>captures/logs, authored PRs, and review permalinks. A SHA </a:t>
+              <a:t>captures/logs, authored PRs, review permalinks, and the </a:t>
             </a:r>
             <a:br/>
             <a:r>
@@ -12369,7 +11953,7 @@
                 </a:solidFill>
                 <a:latin typeface="Arial"/>
               </a:rPr>
-              <a:t>identifies a code version.</a:t>
+              <a:t>Release tag. A SHA identifies a code version.</a:t>
             </a:r>
           </a:p>
         </p:txBody>
@@ -12668,7 +12252,17 @@
                 </a:solidFill>
                 <a:latin typeface="Arial"/>
               </a:rPr>
-              <a:t>Inspect environment and configuration</a:t>
+              <a:t>Inspect environment, configuration, and </a:t>
+            </a:r>
+            <a:br/>
+            <a:r>
+              <a:rPr sz="3200" b="0" i="0">
+                <a:solidFill>
+                  <a:srgbClr val="20344A"/>
+                </a:solidFill>
+                <a:latin typeface="Arial"/>
+              </a:rPr>
+              <a:t>Releases</a:t>
             </a:r>
           </a:p>
         </p:txBody>
@@ -12765,7 +12359,7 @@
                 </a:solidFill>
                 <a:latin typeface="Arial"/>
               </a:rPr>
-              <a:t>Show Python 3.12 in an active venv, its interpreter path, and </a:t>
+              <a:t>Show Python 3.12 in an active venv and the installed package </a:t>
             </a:r>
             <a:br/>
             <a:r>
@@ -12775,7 +12369,7 @@
                 </a:solidFill>
                 <a:latin typeface="Arial"/>
               </a:rPr>
-              <a:t>the installed reusable package working locally.</a:t>
+              <a:t>working locally.</a:t>
             </a:r>
           </a:p>
         </p:txBody>
@@ -12827,26 +12421,25 @@
                 </a:solidFill>
                 <a:latin typeface="Arial"/>
               </a:rPr>
-              <a:t>Open dependency declarations in </a:t>
-            </a:r>
-            <a:r>
-              <a:rPr sz="2100" b="0" i="0">
-                <a:solidFill>
-                  <a:srgbClr val="007F82"/>
-                </a:solidFill>
-                <a:latin typeface="Arial"/>
-                <a:hlinkClick r:id="rId2"/>
-              </a:rPr>
-              <a:t>backend/pyproject.toml</a:t>
-            </a:r>
-            <a:r>
-              <a:rPr sz="2100" b="0" i="0">
-                <a:solidFill>
-                  <a:srgbClr val="20344A"/>
-                </a:solidFill>
-                <a:latin typeface="Arial"/>
-              </a:rPr>
-              <a:t>; </a:t>
+              <a:t>Open the dependency declarations in </a:t>
+            </a:r>
+            <a:r>
+              <a:rPr sz="2100" b="0" i="0">
+                <a:solidFill>
+                  <a:srgbClr val="20344A"/>
+                </a:solidFill>
+                <a:latin typeface="Courier New"/>
+              </a:rPr>
+              <a:t>setup.cfg</a:t>
+            </a:r>
+            <a:r>
+              <a:rPr sz="2100" b="0" i="0">
+                <a:solidFill>
+                  <a:srgbClr val="20344A"/>
+                </a:solidFill>
+                <a:latin typeface="Arial"/>
+              </a:rPr>
+              <a:t>; explain how the </a:t>
             </a:r>
             <a:br/>
             <a:r>
@@ -12856,7 +12449,7 @@
                 </a:solidFill>
                 <a:latin typeface="Arial"/>
               </a:rPr>
-              <a:t>explain how the environment supplies these packages.</a:t>
+              <a:t>environment supplies these packages.</a:t>
             </a:r>
           </a:p>
         </p:txBody>
@@ -12908,7 +12501,25 @@
                 </a:solidFill>
                 <a:latin typeface="Arial"/>
               </a:rPr>
-              <a:t>Open ignore rules and shareable .env.example; verify local .env, </a:t>
+              <a:t>Open ignore rules and the shareable </a:t>
+            </a:r>
+            <a:r>
+              <a:rPr sz="2100" b="0" i="0">
+                <a:solidFill>
+                  <a:srgbClr val="20344A"/>
+                </a:solidFill>
+                <a:latin typeface="Courier New"/>
+              </a:rPr>
+              <a:t>.env.example</a:t>
+            </a:r>
+            <a:r>
+              <a:rPr sz="2100" b="0" i="0">
+                <a:solidFill>
+                  <a:srgbClr val="20344A"/>
+                </a:solidFill>
+                <a:latin typeface="Arial"/>
+              </a:rPr>
+              <a:t>; verify local </a:t>
             </a:r>
             <a:br/>
             <a:r>
@@ -12916,9 +12527,36 @@
                 <a:solidFill>
                   <a:srgbClr val="20344A"/>
                 </a:solidFill>
-                <a:latin typeface="Arial"/>
-              </a:rPr>
-              <a:t>credentials, and .venv stay out of tracked files/history.</a:t>
+                <a:latin typeface="Courier New"/>
+              </a:rPr>
+              <a:t>.env</a:t>
+            </a:r>
+            <a:r>
+              <a:rPr sz="2100" b="0" i="0">
+                <a:solidFill>
+                  <a:srgbClr val="20344A"/>
+                </a:solidFill>
+                <a:latin typeface="Arial"/>
+              </a:rPr>
+              <a:t>, credentials, and </a:t>
+            </a:r>
+            <a:r>
+              <a:rPr sz="2100" b="0" i="0">
+                <a:solidFill>
+                  <a:srgbClr val="20344A"/>
+                </a:solidFill>
+                <a:latin typeface="Courier New"/>
+              </a:rPr>
+              <a:t>.venv</a:t>
+            </a:r>
+            <a:r>
+              <a:rPr sz="2100" b="0" i="0">
+                <a:solidFill>
+                  <a:srgbClr val="20344A"/>
+                </a:solidFill>
+                <a:latin typeface="Arial"/>
+              </a:rPr>
+              <a:t> stay out of tracked files/history.</a:t>
             </a:r>
           </a:p>
         </p:txBody>
@@ -12932,7 +12570,7 @@
         <p:spPr>
           <a:xfrm>
             <a:off x="594360" y="4270248"/>
-            <a:ext cx="11003279" cy="1132332"/>
+            <a:ext cx="11003279" cy="780288"/>
           </a:xfrm>
           <a:prstGeom prst="rect">
             <a:avLst/>
@@ -12970,7 +12608,7 @@
                 </a:solidFill>
                 <a:latin typeface="Arial"/>
               </a:rPr>
-              <a:t>Explain local versus container settings without showing </a:t>
+              <a:t>Show a tagged Release and install it from its git URL into a </a:t>
             </a:r>
             <a:br/>
             <a:r>
@@ -12980,27 +12618,7 @@
                 </a:solidFill>
                 <a:latin typeface="Arial"/>
               </a:rPr>
-              <a:t>secrets. Instructor inspects files and execution, alongside the </a:t>
-            </a:r>
-            <a:br/>
-            <a:r>
-              <a:rPr sz="2100" b="0" i="0">
-                <a:solidFill>
-                  <a:srgbClr val="007F82"/>
-                </a:solidFill>
-                <a:latin typeface="Arial"/>
-                <a:hlinkClick r:id="rId3"/>
-              </a:rPr>
-              <a:t>setup guide</a:t>
-            </a:r>
-            <a:r>
-              <a:rPr sz="2100" b="0" i="0">
-                <a:solidFill>
-                  <a:srgbClr val="20344A"/>
-                </a:solidFill>
-                <a:latin typeface="Arial"/>
-              </a:rPr>
-              <a:t>.</a:t>
+              <a:t>fresh virtual environment; run the command-line tool.</a:t>
             </a:r>
           </a:p>
         </p:txBody>
